--- a/Unit 2 - Tools and Technologies.pptx
+++ b/Unit 2 - Tools and Technologies.pptx
@@ -4375,7 +4375,7 @@
         </p:nvSpPr>
         <p:spPr>
           <a:xfrm>
-            <a:off x="932688" y="5159197"/>
+            <a:off x="932688" y="4992624"/>
             <a:ext cx="1410639" cy="329184"/>
           </a:xfrm>
           <a:prstGeom prst="roundRect">
@@ -4442,7 +4442,7 @@
         </p:nvSpPr>
         <p:spPr>
           <a:xfrm>
-            <a:off x="2471343" y="5159197"/>
+            <a:off x="2471343" y="4992624"/>
             <a:ext cx="1525336" cy="329184"/>
           </a:xfrm>
           <a:prstGeom prst="roundRect">
@@ -4509,7 +4509,7 @@
         </p:nvSpPr>
         <p:spPr>
           <a:xfrm>
-            <a:off x="4124696" y="5159197"/>
+            <a:off x="4124696" y="4992624"/>
             <a:ext cx="634302" cy="329184"/>
           </a:xfrm>
           <a:prstGeom prst="roundRect">
@@ -4576,7 +4576,7 @@
         </p:nvSpPr>
         <p:spPr>
           <a:xfrm>
-            <a:off x="4887014" y="5159197"/>
+            <a:off x="4887014" y="4992624"/>
             <a:ext cx="890981" cy="329184"/>
           </a:xfrm>
           <a:prstGeom prst="roundRect">
@@ -4643,7 +4643,7 @@
         </p:nvSpPr>
         <p:spPr>
           <a:xfrm>
-            <a:off x="932688" y="5742432"/>
+            <a:off x="932688" y="5614416"/>
             <a:ext cx="3840480" cy="12700"/>
           </a:xfrm>
           <a:prstGeom prst="rect">
@@ -4687,8 +4687,8 @@
         </p:nvSpPr>
         <p:spPr>
           <a:xfrm>
-            <a:off x="932688" y="5925312"/>
-            <a:ext cx="5486400" cy="640080"/>
+            <a:off x="932688" y="5797296"/>
+            <a:ext cx="4937760" cy="640080"/>
           </a:xfrm>
           <a:prstGeom prst="rect">
             <a:avLst/>
@@ -4703,7 +4703,7 @@
           <a:p>
             <a:pPr algn="l">
               <a:lnSpc>
-                <a:spcPct val="130000"/>
+                <a:spcPct val="122000"/>
               </a:lnSpc>
               <a:spcBef>
                 <a:spcPts val="0"/>
@@ -4713,33 +4713,102 @@
               </a:spcAft>
             </a:pPr>
             <a:r>
-              <a:rPr sz="1050" b="1" i="0">
-                <a:solidFill>
-                  <a:srgbClr val="FFFFFF"/>
-                </a:solidFill>
-                <a:latin typeface="Segoe UI"/>
-                <a:ea typeface="Segoe UI"/>
-                <a:cs typeface="Segoe UI"/>
-              </a:rPr>
-              <a:t>PGPM · Systems Specialisation</a:t>
+              <a:rPr sz="850" b="1" i="0" spc="160">
+                <a:solidFill>
+                  <a:srgbClr val="00B3A4"/>
+                </a:solidFill>
+                <a:latin typeface="Segoe UI"/>
+                <a:ea typeface="Segoe UI"/>
+                <a:cs typeface="Segoe UI"/>
+              </a:rPr>
+              <a:t>PRESENTED BY</a:t>
             </a:r>
           </a:p>
           <a:p>
             <a:pPr algn="l">
               <a:lnSpc>
-                <a:spcPct val="130000"/>
+                <a:spcPct val="122000"/>
               </a:lnSpc>
               <a:spcBef>
-                <a:spcPts val="0"/>
+                <a:spcPts val="400"/>
               </a:spcBef>
               <a:spcAft>
                 <a:spcPts val="0"/>
               </a:spcAft>
             </a:pPr>
             <a:r>
+              <a:rPr sz="1300" b="1" i="0">
+                <a:solidFill>
+                  <a:srgbClr val="FFFFFF"/>
+                </a:solidFill>
+                <a:latin typeface="Segoe UI"/>
+                <a:ea typeface="Segoe UI"/>
+                <a:cs typeface="Segoe UI"/>
+              </a:rPr>
+              <a:t>Lingesh K</a:t>
+            </a:r>
+            <a:r>
               <a:rPr sz="1050" b="0" i="0">
                 <a:solidFill>
-                  <a:srgbClr val="8B9DBE"/>
+                  <a:srgbClr val="7E91B4"/>
+                </a:solidFill>
+                <a:latin typeface="Segoe UI"/>
+                <a:ea typeface="Segoe UI"/>
+                <a:cs typeface="Segoe UI"/>
+              </a:rPr>
+              <a:t>      Register No. </a:t>
+            </a:r>
+            <a:r>
+              <a:rPr sz="1050" b="1" i="0">
+                <a:solidFill>
+                  <a:srgbClr val="C5D2E8"/>
+                </a:solidFill>
+                <a:latin typeface="Segoe UI"/>
+                <a:ea typeface="Segoe UI"/>
+                <a:cs typeface="Segoe UI"/>
+              </a:rPr>
+              <a:t>OSI2509030</a:t>
+            </a:r>
+          </a:p>
+        </p:txBody>
+      </p:sp>
+      <p:sp>
+        <p:nvSpPr>
+          <p:cNvPr id="18" name="TextBox 17"/>
+          <p:cNvSpPr txBox="1"/>
+          <p:nvPr/>
+        </p:nvSpPr>
+        <p:spPr>
+          <a:xfrm>
+            <a:off x="7180783" y="5870448"/>
+            <a:ext cx="4206240" cy="640080"/>
+          </a:xfrm>
+          <a:prstGeom prst="rect">
+            <a:avLst/>
+          </a:prstGeom>
+          <a:noFill/>
+        </p:spPr>
+        <p:txBody>
+          <a:bodyPr wrap="square" lIns="0" rIns="0" tIns="0" bIns="0" anchor="t">
+            <a:spAutoFit/>
+          </a:bodyPr>
+          <a:lstStyle/>
+          <a:p>
+            <a:pPr algn="r">
+              <a:lnSpc>
+                <a:spcPct val="134000"/>
+              </a:lnSpc>
+              <a:spcBef>
+                <a:spcPts val="0"/>
+              </a:spcBef>
+              <a:spcAft>
+                <a:spcPts val="0"/>
+              </a:spcAft>
+            </a:pPr>
+            <a:r>
+              <a:rPr sz="1000" b="1" i="0">
+                <a:solidFill>
+                  <a:srgbClr val="C5D2E8"/>
                 </a:solidFill>
                 <a:latin typeface="Segoe UI"/>
                 <a:ea typeface="Segoe UI"/>
@@ -5150,7 +5219,7 @@
         <p:spPr>
           <a:xfrm>
             <a:off x="987552" y="5943600"/>
-            <a:ext cx="5486400" cy="274320"/>
+            <a:ext cx="6400800" cy="274320"/>
           </a:xfrm>
           <a:prstGeom prst="rect">
             <a:avLst/>
@@ -5259,7 +5328,7 @@
         <p:spPr>
           <a:xfrm>
             <a:off x="713232" y="6272784"/>
-            <a:ext cx="8073923" cy="219456"/>
+            <a:ext cx="5597920" cy="219456"/>
           </a:xfrm>
           <a:prstGeom prst="rect">
             <a:avLst/>
@@ -5327,8 +5396,8 @@
         </p:nvSpPr>
         <p:spPr>
           <a:xfrm>
-            <a:off x="10381183" y="6272784"/>
-            <a:ext cx="1097280" cy="219456"/>
+            <a:off x="8826703" y="6272784"/>
+            <a:ext cx="2651760" cy="219456"/>
           </a:xfrm>
           <a:prstGeom prst="rect">
             <a:avLst/>
@@ -5353,9 +5422,31 @@
               </a:spcAft>
             </a:pPr>
             <a:r>
+              <a:rPr sz="900" b="0" i="0">
+                <a:solidFill>
+                  <a:srgbClr val="636E85"/>
+                </a:solidFill>
+                <a:latin typeface="Segoe UI"/>
+                <a:ea typeface="Segoe UI"/>
+                <a:cs typeface="Segoe UI"/>
+              </a:rPr>
+              <a:t>Lingesh K  ·  OSI2509030</a:t>
+            </a:r>
+            <a:r>
+              <a:rPr sz="900" b="0" i="0">
+                <a:solidFill>
+                  <a:srgbClr val="141C2E"/>
+                </a:solidFill>
+                <a:latin typeface="Segoe UI"/>
+                <a:ea typeface="Segoe UI"/>
+                <a:cs typeface="Segoe UI"/>
+              </a:rPr>
+              <a:t>     </a:t>
+            </a:r>
+            <a:r>
               <a:rPr sz="900" b="1" i="0">
                 <a:solidFill>
-                  <a:srgbClr val="636E85"/>
+                  <a:srgbClr val="0E1E3C"/>
                 </a:solidFill>
                 <a:latin typeface="Segoe UI"/>
                 <a:ea typeface="Segoe UI"/>
@@ -6707,7 +6798,7 @@
         <p:spPr>
           <a:xfrm>
             <a:off x="713232" y="6272784"/>
-            <a:ext cx="8073923" cy="219456"/>
+            <a:ext cx="5597920" cy="219456"/>
           </a:xfrm>
           <a:prstGeom prst="rect">
             <a:avLst/>
@@ -6775,8 +6866,8 @@
         </p:nvSpPr>
         <p:spPr>
           <a:xfrm>
-            <a:off x="10381183" y="6272784"/>
-            <a:ext cx="1097280" cy="219456"/>
+            <a:off x="8826703" y="6272784"/>
+            <a:ext cx="2651760" cy="219456"/>
           </a:xfrm>
           <a:prstGeom prst="rect">
             <a:avLst/>
@@ -6801,9 +6892,31 @@
               </a:spcAft>
             </a:pPr>
             <a:r>
+              <a:rPr sz="900" b="0" i="0">
+                <a:solidFill>
+                  <a:srgbClr val="636E85"/>
+                </a:solidFill>
+                <a:latin typeface="Segoe UI"/>
+                <a:ea typeface="Segoe UI"/>
+                <a:cs typeface="Segoe UI"/>
+              </a:rPr>
+              <a:t>Lingesh K  ·  OSI2509030</a:t>
+            </a:r>
+            <a:r>
+              <a:rPr sz="900" b="0" i="0">
+                <a:solidFill>
+                  <a:srgbClr val="141C2E"/>
+                </a:solidFill>
+                <a:latin typeface="Segoe UI"/>
+                <a:ea typeface="Segoe UI"/>
+                <a:cs typeface="Segoe UI"/>
+              </a:rPr>
+              <a:t>     </a:t>
+            </a:r>
+            <a:r>
               <a:rPr sz="900" b="1" i="0">
                 <a:solidFill>
-                  <a:srgbClr val="636E85"/>
+                  <a:srgbClr val="0E1E3C"/>
                 </a:solidFill>
                 <a:latin typeface="Segoe UI"/>
                 <a:ea typeface="Segoe UI"/>
@@ -8590,7 +8703,7 @@
         <p:spPr>
           <a:xfrm>
             <a:off x="713232" y="6272784"/>
-            <a:ext cx="8073923" cy="219456"/>
+            <a:ext cx="5597920" cy="219456"/>
           </a:xfrm>
           <a:prstGeom prst="rect">
             <a:avLst/>
@@ -8658,8 +8771,8 @@
         </p:nvSpPr>
         <p:spPr>
           <a:xfrm>
-            <a:off x="10381183" y="6272784"/>
-            <a:ext cx="1097280" cy="219456"/>
+            <a:off x="8826703" y="6272784"/>
+            <a:ext cx="2651760" cy="219456"/>
           </a:xfrm>
           <a:prstGeom prst="rect">
             <a:avLst/>
@@ -8684,9 +8797,31 @@
               </a:spcAft>
             </a:pPr>
             <a:r>
+              <a:rPr sz="900" b="0" i="0">
+                <a:solidFill>
+                  <a:srgbClr val="636E85"/>
+                </a:solidFill>
+                <a:latin typeface="Segoe UI"/>
+                <a:ea typeface="Segoe UI"/>
+                <a:cs typeface="Segoe UI"/>
+              </a:rPr>
+              <a:t>Lingesh K  ·  OSI2509030</a:t>
+            </a:r>
+            <a:r>
+              <a:rPr sz="900" b="0" i="0">
+                <a:solidFill>
+                  <a:srgbClr val="141C2E"/>
+                </a:solidFill>
+                <a:latin typeface="Segoe UI"/>
+                <a:ea typeface="Segoe UI"/>
+                <a:cs typeface="Segoe UI"/>
+              </a:rPr>
+              <a:t>     </a:t>
+            </a:r>
+            <a:r>
               <a:rPr sz="900" b="1" i="0">
                 <a:solidFill>
-                  <a:srgbClr val="636E85"/>
+                  <a:srgbClr val="0E1E3C"/>
                 </a:solidFill>
                 <a:latin typeface="Segoe UI"/>
                 <a:ea typeface="Segoe UI"/>
@@ -9933,7 +10068,7 @@
         <p:spPr>
           <a:xfrm>
             <a:off x="713232" y="6272784"/>
-            <a:ext cx="8073923" cy="219456"/>
+            <a:ext cx="5597920" cy="219456"/>
           </a:xfrm>
           <a:prstGeom prst="rect">
             <a:avLst/>
@@ -10001,8 +10136,8 @@
         </p:nvSpPr>
         <p:spPr>
           <a:xfrm>
-            <a:off x="10381183" y="6272784"/>
-            <a:ext cx="1097280" cy="219456"/>
+            <a:off x="8826703" y="6272784"/>
+            <a:ext cx="2651760" cy="219456"/>
           </a:xfrm>
           <a:prstGeom prst="rect">
             <a:avLst/>
@@ -10027,9 +10162,31 @@
               </a:spcAft>
             </a:pPr>
             <a:r>
+              <a:rPr sz="900" b="0" i="0">
+                <a:solidFill>
+                  <a:srgbClr val="636E85"/>
+                </a:solidFill>
+                <a:latin typeface="Segoe UI"/>
+                <a:ea typeface="Segoe UI"/>
+                <a:cs typeface="Segoe UI"/>
+              </a:rPr>
+              <a:t>Lingesh K  ·  OSI2509030</a:t>
+            </a:r>
+            <a:r>
+              <a:rPr sz="900" b="0" i="0">
+                <a:solidFill>
+                  <a:srgbClr val="141C2E"/>
+                </a:solidFill>
+                <a:latin typeface="Segoe UI"/>
+                <a:ea typeface="Segoe UI"/>
+                <a:cs typeface="Segoe UI"/>
+              </a:rPr>
+              <a:t>     </a:t>
+            </a:r>
+            <a:r>
               <a:rPr sz="900" b="1" i="0">
                 <a:solidFill>
-                  <a:srgbClr val="636E85"/>
+                  <a:srgbClr val="0E1E3C"/>
                 </a:solidFill>
                 <a:latin typeface="Segoe UI"/>
                 <a:ea typeface="Segoe UI"/>
@@ -11616,7 +11773,7 @@
         <p:spPr>
           <a:xfrm>
             <a:off x="713232" y="6272784"/>
-            <a:ext cx="8073923" cy="219456"/>
+            <a:ext cx="5597920" cy="219456"/>
           </a:xfrm>
           <a:prstGeom prst="rect">
             <a:avLst/>
@@ -11684,8 +11841,8 @@
         </p:nvSpPr>
         <p:spPr>
           <a:xfrm>
-            <a:off x="10381183" y="6272784"/>
-            <a:ext cx="1097280" cy="219456"/>
+            <a:off x="8826703" y="6272784"/>
+            <a:ext cx="2651760" cy="219456"/>
           </a:xfrm>
           <a:prstGeom prst="rect">
             <a:avLst/>
@@ -11710,9 +11867,31 @@
               </a:spcAft>
             </a:pPr>
             <a:r>
+              <a:rPr sz="900" b="0" i="0">
+                <a:solidFill>
+                  <a:srgbClr val="636E85"/>
+                </a:solidFill>
+                <a:latin typeface="Segoe UI"/>
+                <a:ea typeface="Segoe UI"/>
+                <a:cs typeface="Segoe UI"/>
+              </a:rPr>
+              <a:t>Lingesh K  ·  OSI2509030</a:t>
+            </a:r>
+            <a:r>
+              <a:rPr sz="900" b="0" i="0">
+                <a:solidFill>
+                  <a:srgbClr val="141C2E"/>
+                </a:solidFill>
+                <a:latin typeface="Segoe UI"/>
+                <a:ea typeface="Segoe UI"/>
+                <a:cs typeface="Segoe UI"/>
+              </a:rPr>
+              <a:t>     </a:t>
+            </a:r>
+            <a:r>
               <a:rPr sz="900" b="1" i="0">
                 <a:solidFill>
-                  <a:srgbClr val="636E85"/>
+                  <a:srgbClr val="0E1E3C"/>
                 </a:solidFill>
                 <a:latin typeface="Segoe UI"/>
                 <a:ea typeface="Segoe UI"/>
@@ -13131,7 +13310,7 @@
         <p:spPr>
           <a:xfrm>
             <a:off x="713232" y="6272784"/>
-            <a:ext cx="8073923" cy="219456"/>
+            <a:ext cx="5597920" cy="219456"/>
           </a:xfrm>
           <a:prstGeom prst="rect">
             <a:avLst/>
@@ -13199,8 +13378,8 @@
         </p:nvSpPr>
         <p:spPr>
           <a:xfrm>
-            <a:off x="10381183" y="6272784"/>
-            <a:ext cx="1097280" cy="219456"/>
+            <a:off x="8826703" y="6272784"/>
+            <a:ext cx="2651760" cy="219456"/>
           </a:xfrm>
           <a:prstGeom prst="rect">
             <a:avLst/>
@@ -13225,9 +13404,31 @@
               </a:spcAft>
             </a:pPr>
             <a:r>
+              <a:rPr sz="900" b="0" i="0">
+                <a:solidFill>
+                  <a:srgbClr val="636E85"/>
+                </a:solidFill>
+                <a:latin typeface="Segoe UI"/>
+                <a:ea typeface="Segoe UI"/>
+                <a:cs typeface="Segoe UI"/>
+              </a:rPr>
+              <a:t>Lingesh K  ·  OSI2509030</a:t>
+            </a:r>
+            <a:r>
+              <a:rPr sz="900" b="0" i="0">
+                <a:solidFill>
+                  <a:srgbClr val="141C2E"/>
+                </a:solidFill>
+                <a:latin typeface="Segoe UI"/>
+                <a:ea typeface="Segoe UI"/>
+                <a:cs typeface="Segoe UI"/>
+              </a:rPr>
+              <a:t>     </a:t>
+            </a:r>
+            <a:r>
               <a:rPr sz="900" b="1" i="0">
                 <a:solidFill>
-                  <a:srgbClr val="636E85"/>
+                  <a:srgbClr val="0E1E3C"/>
                 </a:solidFill>
                 <a:latin typeface="Segoe UI"/>
                 <a:ea typeface="Segoe UI"/>
@@ -15190,7 +15391,7 @@
         <p:spPr>
           <a:xfrm>
             <a:off x="713232" y="6272784"/>
-            <a:ext cx="8073923" cy="219456"/>
+            <a:ext cx="5597920" cy="219456"/>
           </a:xfrm>
           <a:prstGeom prst="rect">
             <a:avLst/>
@@ -15258,8 +15459,8 @@
         </p:nvSpPr>
         <p:spPr>
           <a:xfrm>
-            <a:off x="10381183" y="6272784"/>
-            <a:ext cx="1097280" cy="219456"/>
+            <a:off x="8826703" y="6272784"/>
+            <a:ext cx="2651760" cy="219456"/>
           </a:xfrm>
           <a:prstGeom prst="rect">
             <a:avLst/>
@@ -15284,9 +15485,31 @@
               </a:spcAft>
             </a:pPr>
             <a:r>
+              <a:rPr sz="900" b="0" i="0">
+                <a:solidFill>
+                  <a:srgbClr val="636E85"/>
+                </a:solidFill>
+                <a:latin typeface="Segoe UI"/>
+                <a:ea typeface="Segoe UI"/>
+                <a:cs typeface="Segoe UI"/>
+              </a:rPr>
+              <a:t>Lingesh K  ·  OSI2509030</a:t>
+            </a:r>
+            <a:r>
+              <a:rPr sz="900" b="0" i="0">
+                <a:solidFill>
+                  <a:srgbClr val="141C2E"/>
+                </a:solidFill>
+                <a:latin typeface="Segoe UI"/>
+                <a:ea typeface="Segoe UI"/>
+                <a:cs typeface="Segoe UI"/>
+              </a:rPr>
+              <a:t>     </a:t>
+            </a:r>
+            <a:r>
               <a:rPr sz="900" b="1" i="0">
                 <a:solidFill>
-                  <a:srgbClr val="636E85"/>
+                  <a:srgbClr val="0E1E3C"/>
                 </a:solidFill>
                 <a:latin typeface="Segoe UI"/>
                 <a:ea typeface="Segoe UI"/>
@@ -17355,7 +17578,7 @@
         <p:spPr>
           <a:xfrm>
             <a:off x="987552" y="5943600"/>
-            <a:ext cx="5486400" cy="274320"/>
+            <a:ext cx="6400800" cy="274320"/>
           </a:xfrm>
           <a:prstGeom prst="rect">
             <a:avLst/>
@@ -17464,7 +17687,7 @@
         <p:spPr>
           <a:xfrm>
             <a:off x="713232" y="6272784"/>
-            <a:ext cx="8073923" cy="219456"/>
+            <a:ext cx="5597920" cy="219456"/>
           </a:xfrm>
           <a:prstGeom prst="rect">
             <a:avLst/>
@@ -17532,8 +17755,8 @@
         </p:nvSpPr>
         <p:spPr>
           <a:xfrm>
-            <a:off x="10381183" y="6272784"/>
-            <a:ext cx="1097280" cy="219456"/>
+            <a:off x="8826703" y="6272784"/>
+            <a:ext cx="2651760" cy="219456"/>
           </a:xfrm>
           <a:prstGeom prst="rect">
             <a:avLst/>
@@ -17558,9 +17781,31 @@
               </a:spcAft>
             </a:pPr>
             <a:r>
+              <a:rPr sz="900" b="0" i="0">
+                <a:solidFill>
+                  <a:srgbClr val="636E85"/>
+                </a:solidFill>
+                <a:latin typeface="Segoe UI"/>
+                <a:ea typeface="Segoe UI"/>
+                <a:cs typeface="Segoe UI"/>
+              </a:rPr>
+              <a:t>Lingesh K  ·  OSI2509030</a:t>
+            </a:r>
+            <a:r>
+              <a:rPr sz="900" b="0" i="0">
+                <a:solidFill>
+                  <a:srgbClr val="141C2E"/>
+                </a:solidFill>
+                <a:latin typeface="Segoe UI"/>
+                <a:ea typeface="Segoe UI"/>
+                <a:cs typeface="Segoe UI"/>
+              </a:rPr>
+              <a:t>     </a:t>
+            </a:r>
+            <a:r>
               <a:rPr sz="900" b="1" i="0">
                 <a:solidFill>
-                  <a:srgbClr val="636E85"/>
+                  <a:srgbClr val="0E1E3C"/>
                 </a:solidFill>
                 <a:latin typeface="Segoe UI"/>
                 <a:ea typeface="Segoe UI"/>
@@ -18912,7 +19157,7 @@
         <p:spPr>
           <a:xfrm>
             <a:off x="713232" y="6272784"/>
-            <a:ext cx="8073923" cy="219456"/>
+            <a:ext cx="5597920" cy="219456"/>
           </a:xfrm>
           <a:prstGeom prst="rect">
             <a:avLst/>
@@ -18980,8 +19225,8 @@
         </p:nvSpPr>
         <p:spPr>
           <a:xfrm>
-            <a:off x="10381183" y="6272784"/>
-            <a:ext cx="1097280" cy="219456"/>
+            <a:off x="8826703" y="6272784"/>
+            <a:ext cx="2651760" cy="219456"/>
           </a:xfrm>
           <a:prstGeom prst="rect">
             <a:avLst/>
@@ -19006,9 +19251,31 @@
               </a:spcAft>
             </a:pPr>
             <a:r>
+              <a:rPr sz="900" b="0" i="0">
+                <a:solidFill>
+                  <a:srgbClr val="636E85"/>
+                </a:solidFill>
+                <a:latin typeface="Segoe UI"/>
+                <a:ea typeface="Segoe UI"/>
+                <a:cs typeface="Segoe UI"/>
+              </a:rPr>
+              <a:t>Lingesh K  ·  OSI2509030</a:t>
+            </a:r>
+            <a:r>
+              <a:rPr sz="900" b="0" i="0">
+                <a:solidFill>
+                  <a:srgbClr val="141C2E"/>
+                </a:solidFill>
+                <a:latin typeface="Segoe UI"/>
+                <a:ea typeface="Segoe UI"/>
+                <a:cs typeface="Segoe UI"/>
+              </a:rPr>
+              <a:t>     </a:t>
+            </a:r>
+            <a:r>
               <a:rPr sz="900" b="1" i="0">
                 <a:solidFill>
-                  <a:srgbClr val="636E85"/>
+                  <a:srgbClr val="0E1E3C"/>
                 </a:solidFill>
                 <a:latin typeface="Segoe UI"/>
                 <a:ea typeface="Segoe UI"/>
@@ -20571,7 +20838,7 @@
         <p:spPr>
           <a:xfrm>
             <a:off x="713232" y="6272784"/>
-            <a:ext cx="8073923" cy="219456"/>
+            <a:ext cx="5597920" cy="219456"/>
           </a:xfrm>
           <a:prstGeom prst="rect">
             <a:avLst/>
@@ -20639,8 +20906,8 @@
         </p:nvSpPr>
         <p:spPr>
           <a:xfrm>
-            <a:off x="10381183" y="6272784"/>
-            <a:ext cx="1097280" cy="219456"/>
+            <a:off x="8826703" y="6272784"/>
+            <a:ext cx="2651760" cy="219456"/>
           </a:xfrm>
           <a:prstGeom prst="rect">
             <a:avLst/>
@@ -20665,9 +20932,31 @@
               </a:spcAft>
             </a:pPr>
             <a:r>
+              <a:rPr sz="900" b="0" i="0">
+                <a:solidFill>
+                  <a:srgbClr val="636E85"/>
+                </a:solidFill>
+                <a:latin typeface="Segoe UI"/>
+                <a:ea typeface="Segoe UI"/>
+                <a:cs typeface="Segoe UI"/>
+              </a:rPr>
+              <a:t>Lingesh K  ·  OSI2509030</a:t>
+            </a:r>
+            <a:r>
+              <a:rPr sz="900" b="0" i="0">
+                <a:solidFill>
+                  <a:srgbClr val="141C2E"/>
+                </a:solidFill>
+                <a:latin typeface="Segoe UI"/>
+                <a:ea typeface="Segoe UI"/>
+                <a:cs typeface="Segoe UI"/>
+              </a:rPr>
+              <a:t>     </a:t>
+            </a:r>
+            <a:r>
               <a:rPr sz="900" b="1" i="0">
                 <a:solidFill>
-                  <a:srgbClr val="636E85"/>
+                  <a:srgbClr val="0E1E3C"/>
                 </a:solidFill>
                 <a:latin typeface="Segoe UI"/>
                 <a:ea typeface="Segoe UI"/>
@@ -22454,7 +22743,7 @@
         <p:spPr>
           <a:xfrm>
             <a:off x="713232" y="6272784"/>
-            <a:ext cx="8073923" cy="219456"/>
+            <a:ext cx="5597920" cy="219456"/>
           </a:xfrm>
           <a:prstGeom prst="rect">
             <a:avLst/>
@@ -22522,8 +22811,8 @@
         </p:nvSpPr>
         <p:spPr>
           <a:xfrm>
-            <a:off x="10381183" y="6272784"/>
-            <a:ext cx="1097280" cy="219456"/>
+            <a:off x="8826703" y="6272784"/>
+            <a:ext cx="2651760" cy="219456"/>
           </a:xfrm>
           <a:prstGeom prst="rect">
             <a:avLst/>
@@ -22548,9 +22837,31 @@
               </a:spcAft>
             </a:pPr>
             <a:r>
+              <a:rPr sz="900" b="0" i="0">
+                <a:solidFill>
+                  <a:srgbClr val="636E85"/>
+                </a:solidFill>
+                <a:latin typeface="Segoe UI"/>
+                <a:ea typeface="Segoe UI"/>
+                <a:cs typeface="Segoe UI"/>
+              </a:rPr>
+              <a:t>Lingesh K  ·  OSI2509030</a:t>
+            </a:r>
+            <a:r>
+              <a:rPr sz="900" b="0" i="0">
+                <a:solidFill>
+                  <a:srgbClr val="141C2E"/>
+                </a:solidFill>
+                <a:latin typeface="Segoe UI"/>
+                <a:ea typeface="Segoe UI"/>
+                <a:cs typeface="Segoe UI"/>
+              </a:rPr>
+              <a:t>     </a:t>
+            </a:r>
+            <a:r>
               <a:rPr sz="900" b="1" i="0">
                 <a:solidFill>
-                  <a:srgbClr val="636E85"/>
+                  <a:srgbClr val="0E1E3C"/>
                 </a:solidFill>
                 <a:latin typeface="Segoe UI"/>
                 <a:ea typeface="Segoe UI"/>
@@ -23969,7 +24280,7 @@
         <p:spPr>
           <a:xfrm>
             <a:off x="713232" y="6272784"/>
-            <a:ext cx="8073923" cy="219456"/>
+            <a:ext cx="5597920" cy="219456"/>
           </a:xfrm>
           <a:prstGeom prst="rect">
             <a:avLst/>
@@ -24037,8 +24348,8 @@
         </p:nvSpPr>
         <p:spPr>
           <a:xfrm>
-            <a:off x="10381183" y="6272784"/>
-            <a:ext cx="1097280" cy="219456"/>
+            <a:off x="8826703" y="6272784"/>
+            <a:ext cx="2651760" cy="219456"/>
           </a:xfrm>
           <a:prstGeom prst="rect">
             <a:avLst/>
@@ -24063,9 +24374,31 @@
               </a:spcAft>
             </a:pPr>
             <a:r>
+              <a:rPr sz="900" b="0" i="0">
+                <a:solidFill>
+                  <a:srgbClr val="636E85"/>
+                </a:solidFill>
+                <a:latin typeface="Segoe UI"/>
+                <a:ea typeface="Segoe UI"/>
+                <a:cs typeface="Segoe UI"/>
+              </a:rPr>
+              <a:t>Lingesh K  ·  OSI2509030</a:t>
+            </a:r>
+            <a:r>
+              <a:rPr sz="900" b="0" i="0">
+                <a:solidFill>
+                  <a:srgbClr val="141C2E"/>
+                </a:solidFill>
+                <a:latin typeface="Segoe UI"/>
+                <a:ea typeface="Segoe UI"/>
+                <a:cs typeface="Segoe UI"/>
+              </a:rPr>
+              <a:t>     </a:t>
+            </a:r>
+            <a:r>
               <a:rPr sz="900" b="1" i="0">
                 <a:solidFill>
-                  <a:srgbClr val="636E85"/>
+                  <a:srgbClr val="0E1E3C"/>
                 </a:solidFill>
                 <a:latin typeface="Segoe UI"/>
                 <a:ea typeface="Segoe UI"/>
@@ -25419,7 +25752,7 @@
         <p:spPr>
           <a:xfrm>
             <a:off x="713232" y="6272784"/>
-            <a:ext cx="8073923" cy="219456"/>
+            <a:ext cx="5597920" cy="219456"/>
           </a:xfrm>
           <a:prstGeom prst="rect">
             <a:avLst/>
@@ -25487,8 +25820,8 @@
         </p:nvSpPr>
         <p:spPr>
           <a:xfrm>
-            <a:off x="10381183" y="6272784"/>
-            <a:ext cx="1097280" cy="219456"/>
+            <a:off x="8826703" y="6272784"/>
+            <a:ext cx="2651760" cy="219456"/>
           </a:xfrm>
           <a:prstGeom prst="rect">
             <a:avLst/>
@@ -25513,9 +25846,31 @@
               </a:spcAft>
             </a:pPr>
             <a:r>
+              <a:rPr sz="900" b="0" i="0">
+                <a:solidFill>
+                  <a:srgbClr val="636E85"/>
+                </a:solidFill>
+                <a:latin typeface="Segoe UI"/>
+                <a:ea typeface="Segoe UI"/>
+                <a:cs typeface="Segoe UI"/>
+              </a:rPr>
+              <a:t>Lingesh K  ·  OSI2509030</a:t>
+            </a:r>
+            <a:r>
+              <a:rPr sz="900" b="0" i="0">
+                <a:solidFill>
+                  <a:srgbClr val="141C2E"/>
+                </a:solidFill>
+                <a:latin typeface="Segoe UI"/>
+                <a:ea typeface="Segoe UI"/>
+                <a:cs typeface="Segoe UI"/>
+              </a:rPr>
+              <a:t>     </a:t>
+            </a:r>
+            <a:r>
               <a:rPr sz="900" b="1" i="0">
                 <a:solidFill>
-                  <a:srgbClr val="636E85"/>
+                  <a:srgbClr val="0E1E3C"/>
                 </a:solidFill>
                 <a:latin typeface="Segoe UI"/>
                 <a:ea typeface="Segoe UI"/>
@@ -27670,8 +28025,8 @@
         </p:nvSpPr>
         <p:spPr>
           <a:xfrm>
-            <a:off x="987552" y="4882896"/>
-            <a:ext cx="7315200" cy="1572768"/>
+            <a:off x="987552" y="4718304"/>
+            <a:ext cx="7315200" cy="1207008"/>
           </a:xfrm>
           <a:prstGeom prst="rect">
             <a:avLst/>
@@ -27710,10 +28065,10 @@
           <a:p>
             <a:pPr algn="l">
               <a:lnSpc>
-                <a:spcPct val="132000"/>
+                <a:spcPct val="128000"/>
               </a:lnSpc>
               <a:spcBef>
-                <a:spcPts val="500"/>
+                <a:spcPts val="400"/>
               </a:spcBef>
               <a:spcAft>
                 <a:spcPts val="0"/>
@@ -27734,10 +28089,10 @@
           <a:p>
             <a:pPr algn="l">
               <a:lnSpc>
-                <a:spcPct val="132000"/>
+                <a:spcPct val="128000"/>
               </a:lnSpc>
               <a:spcBef>
-                <a:spcPts val="500"/>
+                <a:spcPts val="400"/>
               </a:spcBef>
               <a:spcAft>
                 <a:spcPts val="0"/>
@@ -27758,10 +28113,10 @@
           <a:p>
             <a:pPr algn="l">
               <a:lnSpc>
-                <a:spcPct val="132000"/>
+                <a:spcPct val="128000"/>
               </a:lnSpc>
               <a:spcBef>
-                <a:spcPts val="500"/>
+                <a:spcPts val="400"/>
               </a:spcBef>
               <a:spcAft>
                 <a:spcPts val="0"/>
@@ -27777,6 +28132,141 @@
                 <a:cs typeface="Segoe UI"/>
               </a:rPr>
               <a:t>— What is the one workflow you would automate with no-code?</a:t>
+            </a:r>
+          </a:p>
+        </p:txBody>
+      </p:sp>
+      <p:sp>
+        <p:nvSpPr>
+          <p:cNvPr id="11" name="Rectangle 10"/>
+          <p:cNvSpPr/>
+          <p:nvPr/>
+        </p:nvSpPr>
+        <p:spPr>
+          <a:xfrm>
+            <a:off x="987552" y="6035040"/>
+            <a:ext cx="3291840" cy="12700"/>
+          </a:xfrm>
+          <a:prstGeom prst="rect">
+            <a:avLst/>
+          </a:prstGeom>
+          <a:solidFill>
+            <a:srgbClr val="2A3E66"/>
+          </a:solidFill>
+          <a:ln>
+            <a:noFill/>
+          </a:ln>
+          <a:effectLst/>
+        </p:spPr>
+        <p:style>
+          <a:lnRef idx="1">
+            <a:schemeClr val="accent1"/>
+          </a:lnRef>
+          <a:fillRef idx="3">
+            <a:schemeClr val="accent1"/>
+          </a:fillRef>
+          <a:effectRef idx="2">
+            <a:schemeClr val="accent1"/>
+          </a:effectRef>
+          <a:fontRef idx="minor">
+            <a:schemeClr val="lt1"/>
+          </a:fontRef>
+        </p:style>
+        <p:txBody>
+          <a:bodyPr rtlCol="0" anchor="ctr"/>
+          <a:lstStyle/>
+          <a:p>
+            <a:pPr algn="ctr"/>
+          </a:p>
+        </p:txBody>
+      </p:sp>
+      <p:sp>
+        <p:nvSpPr>
+          <p:cNvPr id="12" name="TextBox 11"/>
+          <p:cNvSpPr txBox="1"/>
+          <p:nvPr/>
+        </p:nvSpPr>
+        <p:spPr>
+          <a:xfrm>
+            <a:off x="987552" y="6163056"/>
+            <a:ext cx="5852160" cy="292608"/>
+          </a:xfrm>
+          <a:prstGeom prst="rect">
+            <a:avLst/>
+          </a:prstGeom>
+          <a:noFill/>
+        </p:spPr>
+        <p:txBody>
+          <a:bodyPr wrap="square" lIns="0" rIns="0" tIns="0" bIns="0" anchor="t">
+            <a:spAutoFit/>
+          </a:bodyPr>
+          <a:lstStyle/>
+          <a:p>
+            <a:pPr algn="l">
+              <a:lnSpc>
+                <a:spcPct val="122000"/>
+              </a:lnSpc>
+              <a:spcBef>
+                <a:spcPts val="0"/>
+              </a:spcBef>
+              <a:spcAft>
+                <a:spcPts val="0"/>
+              </a:spcAft>
+            </a:pPr>
+            <a:r>
+              <a:rPr sz="1150" b="1" i="0">
+                <a:solidFill>
+                  <a:srgbClr val="FFFFFF"/>
+                </a:solidFill>
+                <a:latin typeface="Segoe UI"/>
+                <a:ea typeface="Segoe UI"/>
+                <a:cs typeface="Segoe UI"/>
+              </a:rPr>
+              <a:t>Lingesh K</a:t>
+            </a:r>
+            <a:r>
+              <a:rPr sz="1000" b="0" i="0">
+                <a:solidFill>
+                  <a:srgbClr val="7E91B4"/>
+                </a:solidFill>
+                <a:latin typeface="Segoe UI"/>
+                <a:ea typeface="Segoe UI"/>
+                <a:cs typeface="Segoe UI"/>
+              </a:rPr>
+              <a:t>   ·   Register No. </a:t>
+            </a:r>
+            <a:r>
+              <a:rPr sz="1000" b="1" i="0">
+                <a:solidFill>
+                  <a:srgbClr val="C5D2E8"/>
+                </a:solidFill>
+                <a:latin typeface="Segoe UI"/>
+                <a:ea typeface="Segoe UI"/>
+                <a:cs typeface="Segoe UI"/>
+              </a:rPr>
+              <a:t>OSI2509030</a:t>
+            </a:r>
+            <a:r>
+              <a:rPr sz="1000" b="0" i="0">
+                <a:solidFill>
+                  <a:srgbClr val="4A5E86"/>
+                </a:solidFill>
+                <a:latin typeface="Segoe UI"/>
+                <a:ea typeface="Segoe UI"/>
+                <a:cs typeface="Segoe UI"/>
+              </a:rPr>
+              <a:t>   ·   </a:t>
+            </a:r>
+            <a:r>
+              <a:rPr sz="1000" b="0" i="0">
+                <a:solidFill>
+                  <a:srgbClr val="7E91B4"/>
+                </a:solidFill>
+                <a:latin typeface="Segoe UI"/>
+                <a:ea typeface="Segoe UI"/>
+                <a:cs typeface="Segoe UI"/>
+              </a:rPr>
+              <a:t>PGPM · Systems Specialisation</a:t>
             </a:r>
           </a:p>
         </p:txBody>
@@ -28181,7 +28671,7 @@
         <p:spPr>
           <a:xfrm>
             <a:off x="987552" y="5943600"/>
-            <a:ext cx="5486400" cy="274320"/>
+            <a:ext cx="6400800" cy="274320"/>
           </a:xfrm>
           <a:prstGeom prst="rect">
             <a:avLst/>
@@ -28290,7 +28780,7 @@
         <p:spPr>
           <a:xfrm>
             <a:off x="713232" y="6272784"/>
-            <a:ext cx="8073923" cy="219456"/>
+            <a:ext cx="5597920" cy="219456"/>
           </a:xfrm>
           <a:prstGeom prst="rect">
             <a:avLst/>
@@ -28358,8 +28848,8 @@
         </p:nvSpPr>
         <p:spPr>
           <a:xfrm>
-            <a:off x="10381183" y="6272784"/>
-            <a:ext cx="1097280" cy="219456"/>
+            <a:off x="8826703" y="6272784"/>
+            <a:ext cx="2651760" cy="219456"/>
           </a:xfrm>
           <a:prstGeom prst="rect">
             <a:avLst/>
@@ -28384,9 +28874,31 @@
               </a:spcAft>
             </a:pPr>
             <a:r>
+              <a:rPr sz="900" b="0" i="0">
+                <a:solidFill>
+                  <a:srgbClr val="636E85"/>
+                </a:solidFill>
+                <a:latin typeface="Segoe UI"/>
+                <a:ea typeface="Segoe UI"/>
+                <a:cs typeface="Segoe UI"/>
+              </a:rPr>
+              <a:t>Lingesh K  ·  OSI2509030</a:t>
+            </a:r>
+            <a:r>
+              <a:rPr sz="900" b="0" i="0">
+                <a:solidFill>
+                  <a:srgbClr val="141C2E"/>
+                </a:solidFill>
+                <a:latin typeface="Segoe UI"/>
+                <a:ea typeface="Segoe UI"/>
+                <a:cs typeface="Segoe UI"/>
+              </a:rPr>
+              <a:t>     </a:t>
+            </a:r>
+            <a:r>
               <a:rPr sz="900" b="1" i="0">
                 <a:solidFill>
-                  <a:srgbClr val="636E85"/>
+                  <a:srgbClr val="0E1E3C"/>
                 </a:solidFill>
                 <a:latin typeface="Segoe UI"/>
                 <a:ea typeface="Segoe UI"/>
@@ -29829,7 +30341,7 @@
         <p:spPr>
           <a:xfrm>
             <a:off x="713232" y="6272784"/>
-            <a:ext cx="8073923" cy="219456"/>
+            <a:ext cx="5597920" cy="219456"/>
           </a:xfrm>
           <a:prstGeom prst="rect">
             <a:avLst/>
@@ -29897,8 +30409,8 @@
         </p:nvSpPr>
         <p:spPr>
           <a:xfrm>
-            <a:off x="10381183" y="6272784"/>
-            <a:ext cx="1097280" cy="219456"/>
+            <a:off x="8826703" y="6272784"/>
+            <a:ext cx="2651760" cy="219456"/>
           </a:xfrm>
           <a:prstGeom prst="rect">
             <a:avLst/>
@@ -29923,9 +30435,31 @@
               </a:spcAft>
             </a:pPr>
             <a:r>
+              <a:rPr sz="900" b="0" i="0">
+                <a:solidFill>
+                  <a:srgbClr val="636E85"/>
+                </a:solidFill>
+                <a:latin typeface="Segoe UI"/>
+                <a:ea typeface="Segoe UI"/>
+                <a:cs typeface="Segoe UI"/>
+              </a:rPr>
+              <a:t>Lingesh K  ·  OSI2509030</a:t>
+            </a:r>
+            <a:r>
+              <a:rPr sz="900" b="0" i="0">
+                <a:solidFill>
+                  <a:srgbClr val="141C2E"/>
+                </a:solidFill>
+                <a:latin typeface="Segoe UI"/>
+                <a:ea typeface="Segoe UI"/>
+                <a:cs typeface="Segoe UI"/>
+              </a:rPr>
+              <a:t>     </a:t>
+            </a:r>
+            <a:r>
               <a:rPr sz="900" b="1" i="0">
                 <a:solidFill>
-                  <a:srgbClr val="636E85"/>
+                  <a:srgbClr val="0E1E3C"/>
                 </a:solidFill>
                 <a:latin typeface="Segoe UI"/>
                 <a:ea typeface="Segoe UI"/>
@@ -30793,7 +31327,7 @@
         <p:spPr>
           <a:xfrm>
             <a:off x="713232" y="6272784"/>
-            <a:ext cx="8073923" cy="219456"/>
+            <a:ext cx="5597920" cy="219456"/>
           </a:xfrm>
           <a:prstGeom prst="rect">
             <a:avLst/>
@@ -30861,8 +31395,8 @@
         </p:nvSpPr>
         <p:spPr>
           <a:xfrm>
-            <a:off x="10381183" y="6272784"/>
-            <a:ext cx="1097280" cy="219456"/>
+            <a:off x="8826703" y="6272784"/>
+            <a:ext cx="2651760" cy="219456"/>
           </a:xfrm>
           <a:prstGeom prst="rect">
             <a:avLst/>
@@ -30887,9 +31421,31 @@
               </a:spcAft>
             </a:pPr>
             <a:r>
+              <a:rPr sz="900" b="0" i="0">
+                <a:solidFill>
+                  <a:srgbClr val="636E85"/>
+                </a:solidFill>
+                <a:latin typeface="Segoe UI"/>
+                <a:ea typeface="Segoe UI"/>
+                <a:cs typeface="Segoe UI"/>
+              </a:rPr>
+              <a:t>Lingesh K  ·  OSI2509030</a:t>
+            </a:r>
+            <a:r>
+              <a:rPr sz="900" b="0" i="0">
+                <a:solidFill>
+                  <a:srgbClr val="141C2E"/>
+                </a:solidFill>
+                <a:latin typeface="Segoe UI"/>
+                <a:ea typeface="Segoe UI"/>
+                <a:cs typeface="Segoe UI"/>
+              </a:rPr>
+              <a:t>     </a:t>
+            </a:r>
+            <a:r>
               <a:rPr sz="900" b="1" i="0">
                 <a:solidFill>
-                  <a:srgbClr val="636E85"/>
+                  <a:srgbClr val="0E1E3C"/>
                 </a:solidFill>
                 <a:latin typeface="Segoe UI"/>
                 <a:ea typeface="Segoe UI"/>
@@ -31757,7 +32313,7 @@
         <p:spPr>
           <a:xfrm>
             <a:off x="713232" y="6272784"/>
-            <a:ext cx="8073923" cy="219456"/>
+            <a:ext cx="5597920" cy="219456"/>
           </a:xfrm>
           <a:prstGeom prst="rect">
             <a:avLst/>
@@ -31825,8 +32381,8 @@
         </p:nvSpPr>
         <p:spPr>
           <a:xfrm>
-            <a:off x="10381183" y="6272784"/>
-            <a:ext cx="1097280" cy="219456"/>
+            <a:off x="8826703" y="6272784"/>
+            <a:ext cx="2651760" cy="219456"/>
           </a:xfrm>
           <a:prstGeom prst="rect">
             <a:avLst/>
@@ -31851,9 +32407,31 @@
               </a:spcAft>
             </a:pPr>
             <a:r>
+              <a:rPr sz="900" b="0" i="0">
+                <a:solidFill>
+                  <a:srgbClr val="636E85"/>
+                </a:solidFill>
+                <a:latin typeface="Segoe UI"/>
+                <a:ea typeface="Segoe UI"/>
+                <a:cs typeface="Segoe UI"/>
+              </a:rPr>
+              <a:t>Lingesh K  ·  OSI2509030</a:t>
+            </a:r>
+            <a:r>
+              <a:rPr sz="900" b="0" i="0">
+                <a:solidFill>
+                  <a:srgbClr val="141C2E"/>
+                </a:solidFill>
+                <a:latin typeface="Segoe UI"/>
+                <a:ea typeface="Segoe UI"/>
+                <a:cs typeface="Segoe UI"/>
+              </a:rPr>
+              <a:t>     </a:t>
+            </a:r>
+            <a:r>
               <a:rPr sz="900" b="1" i="0">
                 <a:solidFill>
-                  <a:srgbClr val="636E85"/>
+                  <a:srgbClr val="0E1E3C"/>
                 </a:solidFill>
                 <a:latin typeface="Segoe UI"/>
                 <a:ea typeface="Segoe UI"/>
@@ -33298,7 +33876,7 @@
         <p:spPr>
           <a:xfrm>
             <a:off x="713232" y="6272784"/>
-            <a:ext cx="8073923" cy="219456"/>
+            <a:ext cx="5597920" cy="219456"/>
           </a:xfrm>
           <a:prstGeom prst="rect">
             <a:avLst/>
@@ -33366,8 +33944,8 @@
         </p:nvSpPr>
         <p:spPr>
           <a:xfrm>
-            <a:off x="10381183" y="6272784"/>
-            <a:ext cx="1097280" cy="219456"/>
+            <a:off x="8826703" y="6272784"/>
+            <a:ext cx="2651760" cy="219456"/>
           </a:xfrm>
           <a:prstGeom prst="rect">
             <a:avLst/>
@@ -33392,9 +33970,31 @@
               </a:spcAft>
             </a:pPr>
             <a:r>
+              <a:rPr sz="900" b="0" i="0">
+                <a:solidFill>
+                  <a:srgbClr val="636E85"/>
+                </a:solidFill>
+                <a:latin typeface="Segoe UI"/>
+                <a:ea typeface="Segoe UI"/>
+                <a:cs typeface="Segoe UI"/>
+              </a:rPr>
+              <a:t>Lingesh K  ·  OSI2509030</a:t>
+            </a:r>
+            <a:r>
+              <a:rPr sz="900" b="0" i="0">
+                <a:solidFill>
+                  <a:srgbClr val="141C2E"/>
+                </a:solidFill>
+                <a:latin typeface="Segoe UI"/>
+                <a:ea typeface="Segoe UI"/>
+                <a:cs typeface="Segoe UI"/>
+              </a:rPr>
+              <a:t>     </a:t>
+            </a:r>
+            <a:r>
               <a:rPr sz="900" b="1" i="0">
                 <a:solidFill>
-                  <a:srgbClr val="636E85"/>
+                  <a:srgbClr val="0E1E3C"/>
                 </a:solidFill>
                 <a:latin typeface="Segoe UI"/>
                 <a:ea typeface="Segoe UI"/>
@@ -34747,7 +35347,7 @@
         <p:spPr>
           <a:xfrm>
             <a:off x="713232" y="6272784"/>
-            <a:ext cx="8073923" cy="219456"/>
+            <a:ext cx="5597920" cy="219456"/>
           </a:xfrm>
           <a:prstGeom prst="rect">
             <a:avLst/>
@@ -34815,8 +35415,8 @@
         </p:nvSpPr>
         <p:spPr>
           <a:xfrm>
-            <a:off x="10381183" y="6272784"/>
-            <a:ext cx="1097280" cy="219456"/>
+            <a:off x="8826703" y="6272784"/>
+            <a:ext cx="2651760" cy="219456"/>
           </a:xfrm>
           <a:prstGeom prst="rect">
             <a:avLst/>
@@ -34841,9 +35441,31 @@
               </a:spcAft>
             </a:pPr>
             <a:r>
+              <a:rPr sz="900" b="0" i="0">
+                <a:solidFill>
+                  <a:srgbClr val="636E85"/>
+                </a:solidFill>
+                <a:latin typeface="Segoe UI"/>
+                <a:ea typeface="Segoe UI"/>
+                <a:cs typeface="Segoe UI"/>
+              </a:rPr>
+              <a:t>Lingesh K  ·  OSI2509030</a:t>
+            </a:r>
+            <a:r>
+              <a:rPr sz="900" b="0" i="0">
+                <a:solidFill>
+                  <a:srgbClr val="141C2E"/>
+                </a:solidFill>
+                <a:latin typeface="Segoe UI"/>
+                <a:ea typeface="Segoe UI"/>
+                <a:cs typeface="Segoe UI"/>
+              </a:rPr>
+              <a:t>     </a:t>
+            </a:r>
+            <a:r>
               <a:rPr sz="900" b="1" i="0">
                 <a:solidFill>
-                  <a:srgbClr val="636E85"/>
+                  <a:srgbClr val="0E1E3C"/>
                 </a:solidFill>
                 <a:latin typeface="Segoe UI"/>
                 <a:ea typeface="Segoe UI"/>

--- a/Unit 2 - Tools and Technologies.pptx
+++ b/Unit 2 - Tools and Technologies.pptx
@@ -4117,7 +4117,77 @@
       </p:sp>
       <p:sp>
         <p:nvSpPr>
-          <p:cNvPr id="7" name="TextBox 6"/>
+          <p:cNvPr id="7" name="logo-plate"/>
+          <p:cNvSpPr/>
+          <p:nvPr/>
+        </p:nvSpPr>
+        <p:spPr>
+          <a:xfrm>
+            <a:off x="9126735" y="539496"/>
+            <a:ext cx="2379159" cy="1152144"/>
+          </a:xfrm>
+          <a:prstGeom prst="roundRect">
+            <a:avLst>
+              <a:gd name="adj" fmla="val 14000"/>
+            </a:avLst>
+          </a:prstGeom>
+          <a:solidFill>
+            <a:srgbClr val="FFFFFF"/>
+          </a:solidFill>
+          <a:ln>
+            <a:noFill/>
+          </a:ln>
+          <a:effectLst/>
+        </p:spPr>
+        <p:style>
+          <a:lnRef idx="1">
+            <a:schemeClr val="accent1"/>
+          </a:lnRef>
+          <a:fillRef idx="3">
+            <a:schemeClr val="accent1"/>
+          </a:fillRef>
+          <a:effectRef idx="2">
+            <a:schemeClr val="accent1"/>
+          </a:effectRef>
+          <a:fontRef idx="minor">
+            <a:schemeClr val="lt1"/>
+          </a:fontRef>
+        </p:style>
+        <p:txBody>
+          <a:bodyPr rtlCol="0" anchor="ctr" wrap="square"/>
+          <a:lstStyle/>
+          <a:p>
+            <a:pPr algn="ctr"/>
+          </a:p>
+        </p:txBody>
+      </p:sp>
+      <p:pic>
+        <p:nvPicPr>
+          <p:cNvPr id="8" name="college-logo" descr="logo-full.png"/>
+          <p:cNvPicPr>
+            <a:picLocks noChangeAspect="1"/>
+          </p:cNvPicPr>
+          <p:nvPr/>
+        </p:nvPicPr>
+        <p:blipFill>
+          <a:blip r:embed="rId2"/>
+          <a:stretch>
+            <a:fillRect/>
+          </a:stretch>
+        </p:blipFill>
+        <p:spPr>
+          <a:xfrm>
+            <a:off x="9245607" y="658368"/>
+            <a:ext cx="2141415" cy="914400"/>
+          </a:xfrm>
+          <a:prstGeom prst="rect">
+            <a:avLst/>
+          </a:prstGeom>
+        </p:spPr>
+      </p:pic>
+      <p:sp>
+        <p:nvSpPr>
+          <p:cNvPr id="9" name="TextBox 8"/>
           <p:cNvSpPr txBox="1"/>
           <p:nvPr/>
         </p:nvSpPr>
@@ -4164,7 +4234,7 @@
       </p:sp>
       <p:sp>
         <p:nvSpPr>
-          <p:cNvPr id="8" name="Rounded Rectangle 7"/>
+          <p:cNvPr id="10" name="Rounded Rectangle 9"/>
           <p:cNvSpPr/>
           <p:nvPr/>
         </p:nvSpPr>
@@ -4231,7 +4301,7 @@
       </p:sp>
       <p:sp>
         <p:nvSpPr>
-          <p:cNvPr id="9" name="TextBox 8"/>
+          <p:cNvPr id="11" name="TextBox 10"/>
           <p:cNvSpPr txBox="1"/>
           <p:nvPr/>
         </p:nvSpPr>
@@ -4278,7 +4348,7 @@
       </p:sp>
       <p:sp>
         <p:nvSpPr>
-          <p:cNvPr id="10" name="Rectangle 9"/>
+          <p:cNvPr id="12" name="Rectangle 11"/>
           <p:cNvSpPr/>
           <p:nvPr/>
         </p:nvSpPr>
@@ -4322,7 +4392,7 @@
       </p:sp>
       <p:sp>
         <p:nvSpPr>
-          <p:cNvPr id="11" name="TextBox 10"/>
+          <p:cNvPr id="13" name="TextBox 12"/>
           <p:cNvSpPr txBox="1"/>
           <p:nvPr/>
         </p:nvSpPr>
@@ -4369,7 +4439,7 @@
       </p:sp>
       <p:sp>
         <p:nvSpPr>
-          <p:cNvPr id="12" name="Rounded Rectangle 11"/>
+          <p:cNvPr id="14" name="Rounded Rectangle 13"/>
           <p:cNvSpPr/>
           <p:nvPr/>
         </p:nvSpPr>
@@ -4436,7 +4506,7 @@
       </p:sp>
       <p:sp>
         <p:nvSpPr>
-          <p:cNvPr id="13" name="Rounded Rectangle 12"/>
+          <p:cNvPr id="15" name="Rounded Rectangle 14"/>
           <p:cNvSpPr/>
           <p:nvPr/>
         </p:nvSpPr>
@@ -4503,7 +4573,7 @@
       </p:sp>
       <p:sp>
         <p:nvSpPr>
-          <p:cNvPr id="14" name="Rounded Rectangle 13"/>
+          <p:cNvPr id="16" name="Rounded Rectangle 15"/>
           <p:cNvSpPr/>
           <p:nvPr/>
         </p:nvSpPr>
@@ -4570,7 +4640,7 @@
       </p:sp>
       <p:sp>
         <p:nvSpPr>
-          <p:cNvPr id="15" name="Rounded Rectangle 14"/>
+          <p:cNvPr id="17" name="Rounded Rectangle 16"/>
           <p:cNvSpPr/>
           <p:nvPr/>
         </p:nvSpPr>
@@ -4637,7 +4707,7 @@
       </p:sp>
       <p:sp>
         <p:nvSpPr>
-          <p:cNvPr id="16" name="Rectangle 15"/>
+          <p:cNvPr id="18" name="Rectangle 17"/>
           <p:cNvSpPr/>
           <p:nvPr/>
         </p:nvSpPr>
@@ -4681,7 +4751,7 @@
       </p:sp>
       <p:sp>
         <p:nvSpPr>
-          <p:cNvPr id="17" name="TextBox 16"/>
+          <p:cNvPr id="19" name="TextBox 18"/>
           <p:cNvSpPr txBox="1"/>
           <p:nvPr/>
         </p:nvSpPr>
@@ -4774,7 +4844,7 @@
       </p:sp>
       <p:sp>
         <p:nvSpPr>
-          <p:cNvPr id="18" name="TextBox 17"/>
+          <p:cNvPr id="20" name="TextBox 19"/>
           <p:cNvSpPr txBox="1"/>
           <p:nvPr/>
         </p:nvSpPr>
@@ -5257,6 +5327,76 @@
           </a:p>
         </p:txBody>
       </p:sp>
+      <p:sp>
+        <p:nvSpPr>
+          <p:cNvPr id="11" name="logo-plate"/>
+          <p:cNvSpPr/>
+          <p:nvPr/>
+        </p:nvSpPr>
+        <p:spPr>
+          <a:xfrm>
+            <a:off x="9512190" y="539496"/>
+            <a:ext cx="1993704" cy="987552"/>
+          </a:xfrm>
+          <a:prstGeom prst="roundRect">
+            <a:avLst>
+              <a:gd name="adj" fmla="val 14000"/>
+            </a:avLst>
+          </a:prstGeom>
+          <a:solidFill>
+            <a:srgbClr val="FFFFFF"/>
+          </a:solidFill>
+          <a:ln>
+            <a:noFill/>
+          </a:ln>
+          <a:effectLst/>
+        </p:spPr>
+        <p:style>
+          <a:lnRef idx="1">
+            <a:schemeClr val="accent1"/>
+          </a:lnRef>
+          <a:fillRef idx="3">
+            <a:schemeClr val="accent1"/>
+          </a:fillRef>
+          <a:effectRef idx="2">
+            <a:schemeClr val="accent1"/>
+          </a:effectRef>
+          <a:fontRef idx="minor">
+            <a:schemeClr val="lt1"/>
+          </a:fontRef>
+        </p:style>
+        <p:txBody>
+          <a:bodyPr rtlCol="0" anchor="ctr" wrap="square"/>
+          <a:lstStyle/>
+          <a:p>
+            <a:pPr algn="ctr"/>
+          </a:p>
+        </p:txBody>
+      </p:sp>
+      <p:pic>
+        <p:nvPicPr>
+          <p:cNvPr id="12" name="college-logo" descr="logo-full.png"/>
+          <p:cNvPicPr>
+            <a:picLocks noChangeAspect="1"/>
+          </p:cNvPicPr>
+          <p:nvPr/>
+        </p:nvPicPr>
+        <p:blipFill>
+          <a:blip r:embed="rId2"/>
+          <a:stretch>
+            <a:fillRect/>
+          </a:stretch>
+        </p:blipFill>
+        <p:spPr>
+          <a:xfrm>
+            <a:off x="9631062" y="658368"/>
+            <a:ext cx="1755961" cy="749808"/>
+          </a:xfrm>
+          <a:prstGeom prst="rect">
+            <a:avLst/>
+          </a:prstGeom>
+        </p:spPr>
+      </p:pic>
     </p:spTree>
   </p:cSld>
   <p:clrMapOvr>
@@ -5319,9 +5459,33 @@
           </a:p>
         </p:txBody>
       </p:sp>
-      <p:sp>
-        <p:nvSpPr>
-          <p:cNvPr id="3" name="TextBox 2"/>
+      <p:pic>
+        <p:nvPicPr>
+          <p:cNvPr id="3" name="college-logo" descr="logo-mark.png"/>
+          <p:cNvPicPr>
+            <a:picLocks noChangeAspect="1"/>
+          </p:cNvPicPr>
+          <p:nvPr/>
+        </p:nvPicPr>
+        <p:blipFill>
+          <a:blip r:embed="rId2"/>
+          <a:stretch>
+            <a:fillRect/>
+          </a:stretch>
+        </p:blipFill>
+        <p:spPr>
+          <a:xfrm>
+            <a:off x="11203333" y="6199632"/>
+            <a:ext cx="275129" cy="310896"/>
+          </a:xfrm>
+          <a:prstGeom prst="rect">
+            <a:avLst/>
+          </a:prstGeom>
+        </p:spPr>
+      </p:pic>
+      <p:sp>
+        <p:nvSpPr>
+          <p:cNvPr id="4" name="TextBox 3"/>
           <p:cNvSpPr txBox="1"/>
           <p:nvPr/>
         </p:nvSpPr>
@@ -5390,13 +5554,13 @@
       </p:sp>
       <p:sp>
         <p:nvSpPr>
-          <p:cNvPr id="4" name="TextBox 3"/>
+          <p:cNvPr id="5" name="TextBox 4"/>
           <p:cNvSpPr txBox="1"/>
           <p:nvPr/>
         </p:nvSpPr>
         <p:spPr>
           <a:xfrm>
-            <a:off x="8826703" y="6272784"/>
+            <a:off x="8240677" y="6272784"/>
             <a:ext cx="2651760" cy="219456"/>
           </a:xfrm>
           <a:prstGeom prst="rect">
@@ -5459,7 +5623,7 @@
       </p:sp>
       <p:sp>
         <p:nvSpPr>
-          <p:cNvPr id="5" name="TextBox 4"/>
+          <p:cNvPr id="6" name="TextBox 5"/>
           <p:cNvSpPr txBox="1"/>
           <p:nvPr/>
         </p:nvSpPr>
@@ -5506,7 +5670,7 @@
       </p:sp>
       <p:sp>
         <p:nvSpPr>
-          <p:cNvPr id="6" name="TextBox 5"/>
+          <p:cNvPr id="7" name="TextBox 6"/>
           <p:cNvSpPr txBox="1"/>
           <p:nvPr/>
         </p:nvSpPr>
@@ -5553,7 +5717,7 @@
       </p:sp>
       <p:sp>
         <p:nvSpPr>
-          <p:cNvPr id="7" name="Rectangle 6"/>
+          <p:cNvPr id="8" name="Rectangle 7"/>
           <p:cNvSpPr/>
           <p:nvPr/>
         </p:nvSpPr>
@@ -5597,7 +5761,7 @@
       </p:sp>
       <p:sp>
         <p:nvSpPr>
-          <p:cNvPr id="8" name="TextBox 7"/>
+          <p:cNvPr id="9" name="TextBox 8"/>
           <p:cNvSpPr txBox="1"/>
           <p:nvPr/>
         </p:nvSpPr>
@@ -5644,7 +5808,7 @@
       </p:sp>
       <p:sp>
         <p:nvSpPr>
-          <p:cNvPr id="9" name="Rectangle 8"/>
+          <p:cNvPr id="10" name="Rectangle 9"/>
           <p:cNvSpPr/>
           <p:nvPr/>
         </p:nvSpPr>
@@ -5688,7 +5852,7 @@
       </p:sp>
       <p:sp>
         <p:nvSpPr>
-          <p:cNvPr id="10" name="Rounded Rectangle 9"/>
+          <p:cNvPr id="11" name="Rounded Rectangle 10"/>
           <p:cNvSpPr/>
           <p:nvPr/>
         </p:nvSpPr>
@@ -5734,7 +5898,7 @@
       </p:sp>
       <p:sp>
         <p:nvSpPr>
-          <p:cNvPr id="11" name="TextBox 10"/>
+          <p:cNvPr id="12" name="TextBox 11"/>
           <p:cNvSpPr txBox="1"/>
           <p:nvPr/>
         </p:nvSpPr>
@@ -5781,7 +5945,7 @@
       </p:sp>
       <p:sp>
         <p:nvSpPr>
-          <p:cNvPr id="12" name="Rounded Rectangle 11"/>
+          <p:cNvPr id="13" name="Rounded Rectangle 12"/>
           <p:cNvSpPr/>
           <p:nvPr/>
         </p:nvSpPr>
@@ -5827,7 +5991,7 @@
       </p:sp>
       <p:sp>
         <p:nvSpPr>
-          <p:cNvPr id="13" name="TextBox 12"/>
+          <p:cNvPr id="14" name="TextBox 13"/>
           <p:cNvSpPr txBox="1"/>
           <p:nvPr/>
         </p:nvSpPr>
@@ -5874,7 +6038,7 @@
       </p:sp>
       <p:sp>
         <p:nvSpPr>
-          <p:cNvPr id="14" name="Rounded Rectangle 13"/>
+          <p:cNvPr id="15" name="Rounded Rectangle 14"/>
           <p:cNvSpPr/>
           <p:nvPr/>
         </p:nvSpPr>
@@ -5920,7 +6084,7 @@
       </p:sp>
       <p:sp>
         <p:nvSpPr>
-          <p:cNvPr id="15" name="TextBox 14"/>
+          <p:cNvPr id="16" name="TextBox 15"/>
           <p:cNvSpPr txBox="1"/>
           <p:nvPr/>
         </p:nvSpPr>
@@ -5967,7 +6131,7 @@
       </p:sp>
       <p:sp>
         <p:nvSpPr>
-          <p:cNvPr id="16" name="Rounded Rectangle 15"/>
+          <p:cNvPr id="17" name="Rounded Rectangle 16"/>
           <p:cNvSpPr/>
           <p:nvPr/>
         </p:nvSpPr>
@@ -6013,7 +6177,7 @@
       </p:sp>
       <p:sp>
         <p:nvSpPr>
-          <p:cNvPr id="17" name="TextBox 16"/>
+          <p:cNvPr id="18" name="TextBox 17"/>
           <p:cNvSpPr txBox="1"/>
           <p:nvPr/>
         </p:nvSpPr>
@@ -6060,7 +6224,7 @@
       </p:sp>
       <p:sp>
         <p:nvSpPr>
-          <p:cNvPr id="18" name="Rounded Rectangle 17"/>
+          <p:cNvPr id="19" name="Rounded Rectangle 18"/>
           <p:cNvSpPr/>
           <p:nvPr/>
         </p:nvSpPr>
@@ -6106,7 +6270,7 @@
       </p:sp>
       <p:sp>
         <p:nvSpPr>
-          <p:cNvPr id="19" name="TextBox 18"/>
+          <p:cNvPr id="20" name="TextBox 19"/>
           <p:cNvSpPr txBox="1"/>
           <p:nvPr/>
         </p:nvSpPr>
@@ -6153,7 +6317,7 @@
       </p:sp>
       <p:sp>
         <p:nvSpPr>
-          <p:cNvPr id="20" name="Rounded Rectangle 19"/>
+          <p:cNvPr id="21" name="Rounded Rectangle 20"/>
           <p:cNvSpPr/>
           <p:nvPr/>
         </p:nvSpPr>
@@ -6207,7 +6371,7 @@
       </p:sp>
       <p:sp>
         <p:nvSpPr>
-          <p:cNvPr id="21" name="Rectangle 20"/>
+          <p:cNvPr id="22" name="Rectangle 21"/>
           <p:cNvSpPr/>
           <p:nvPr/>
         </p:nvSpPr>
@@ -6251,7 +6415,7 @@
       </p:sp>
       <p:sp>
         <p:nvSpPr>
-          <p:cNvPr id="22" name="TextBox 21"/>
+          <p:cNvPr id="23" name="TextBox 22"/>
           <p:cNvSpPr txBox="1"/>
           <p:nvPr/>
         </p:nvSpPr>
@@ -6298,7 +6462,7 @@
       </p:sp>
       <p:sp>
         <p:nvSpPr>
-          <p:cNvPr id="23" name="TextBox 22"/>
+          <p:cNvPr id="24" name="TextBox 23"/>
           <p:cNvSpPr txBox="1"/>
           <p:nvPr/>
         </p:nvSpPr>
@@ -6345,7 +6509,7 @@
       </p:sp>
       <p:sp>
         <p:nvSpPr>
-          <p:cNvPr id="24" name="Rounded Rectangle 23"/>
+          <p:cNvPr id="25" name="Rounded Rectangle 24"/>
           <p:cNvSpPr/>
           <p:nvPr/>
         </p:nvSpPr>
@@ -6399,7 +6563,7 @@
       </p:sp>
       <p:sp>
         <p:nvSpPr>
-          <p:cNvPr id="25" name="Rectangle 24"/>
+          <p:cNvPr id="26" name="Rectangle 25"/>
           <p:cNvSpPr/>
           <p:nvPr/>
         </p:nvSpPr>
@@ -6443,7 +6607,7 @@
       </p:sp>
       <p:sp>
         <p:nvSpPr>
-          <p:cNvPr id="26" name="TextBox 25"/>
+          <p:cNvPr id="27" name="TextBox 26"/>
           <p:cNvSpPr txBox="1"/>
           <p:nvPr/>
         </p:nvSpPr>
@@ -6490,7 +6654,7 @@
       </p:sp>
       <p:sp>
         <p:nvSpPr>
-          <p:cNvPr id="27" name="TextBox 26"/>
+          <p:cNvPr id="28" name="TextBox 27"/>
           <p:cNvSpPr txBox="1"/>
           <p:nvPr/>
         </p:nvSpPr>
@@ -6537,7 +6701,7 @@
       </p:sp>
       <p:sp>
         <p:nvSpPr>
-          <p:cNvPr id="28" name="Rounded Rectangle 27"/>
+          <p:cNvPr id="29" name="Rounded Rectangle 28"/>
           <p:cNvSpPr/>
           <p:nvPr/>
         </p:nvSpPr>
@@ -6591,7 +6755,7 @@
       </p:sp>
       <p:sp>
         <p:nvSpPr>
-          <p:cNvPr id="29" name="Rectangle 28"/>
+          <p:cNvPr id="30" name="Rectangle 29"/>
           <p:cNvSpPr/>
           <p:nvPr/>
         </p:nvSpPr>
@@ -6635,7 +6799,7 @@
       </p:sp>
       <p:sp>
         <p:nvSpPr>
-          <p:cNvPr id="30" name="TextBox 29"/>
+          <p:cNvPr id="31" name="TextBox 30"/>
           <p:cNvSpPr txBox="1"/>
           <p:nvPr/>
         </p:nvSpPr>
@@ -6682,7 +6846,7 @@
       </p:sp>
       <p:sp>
         <p:nvSpPr>
-          <p:cNvPr id="31" name="TextBox 30"/>
+          <p:cNvPr id="32" name="TextBox 31"/>
           <p:cNvSpPr txBox="1"/>
           <p:nvPr/>
         </p:nvSpPr>
@@ -6789,9 +6953,33 @@
           </a:p>
         </p:txBody>
       </p:sp>
-      <p:sp>
-        <p:nvSpPr>
-          <p:cNvPr id="3" name="TextBox 2"/>
+      <p:pic>
+        <p:nvPicPr>
+          <p:cNvPr id="3" name="college-logo" descr="logo-mark.png"/>
+          <p:cNvPicPr>
+            <a:picLocks noChangeAspect="1"/>
+          </p:cNvPicPr>
+          <p:nvPr/>
+        </p:nvPicPr>
+        <p:blipFill>
+          <a:blip r:embed="rId2"/>
+          <a:stretch>
+            <a:fillRect/>
+          </a:stretch>
+        </p:blipFill>
+        <p:spPr>
+          <a:xfrm>
+            <a:off x="11203333" y="6199632"/>
+            <a:ext cx="275129" cy="310896"/>
+          </a:xfrm>
+          <a:prstGeom prst="rect">
+            <a:avLst/>
+          </a:prstGeom>
+        </p:spPr>
+      </p:pic>
+      <p:sp>
+        <p:nvSpPr>
+          <p:cNvPr id="4" name="TextBox 3"/>
           <p:cNvSpPr txBox="1"/>
           <p:nvPr/>
         </p:nvSpPr>
@@ -6860,13 +7048,13 @@
       </p:sp>
       <p:sp>
         <p:nvSpPr>
-          <p:cNvPr id="4" name="TextBox 3"/>
+          <p:cNvPr id="5" name="TextBox 4"/>
           <p:cNvSpPr txBox="1"/>
           <p:nvPr/>
         </p:nvSpPr>
         <p:spPr>
           <a:xfrm>
-            <a:off x="8826703" y="6272784"/>
+            <a:off x="8240677" y="6272784"/>
             <a:ext cx="2651760" cy="219456"/>
           </a:xfrm>
           <a:prstGeom prst="rect">
@@ -6929,7 +7117,7 @@
       </p:sp>
       <p:sp>
         <p:nvSpPr>
-          <p:cNvPr id="5" name="TextBox 4"/>
+          <p:cNvPr id="6" name="TextBox 5"/>
           <p:cNvSpPr txBox="1"/>
           <p:nvPr/>
         </p:nvSpPr>
@@ -6976,7 +7164,7 @@
       </p:sp>
       <p:sp>
         <p:nvSpPr>
-          <p:cNvPr id="6" name="TextBox 5"/>
+          <p:cNvPr id="7" name="TextBox 6"/>
           <p:cNvSpPr txBox="1"/>
           <p:nvPr/>
         </p:nvSpPr>
@@ -7023,7 +7211,7 @@
       </p:sp>
       <p:sp>
         <p:nvSpPr>
-          <p:cNvPr id="7" name="Rectangle 6"/>
+          <p:cNvPr id="8" name="Rectangle 7"/>
           <p:cNvSpPr/>
           <p:nvPr/>
         </p:nvSpPr>
@@ -7067,7 +7255,7 @@
       </p:sp>
       <p:sp>
         <p:nvSpPr>
-          <p:cNvPr id="8" name="TextBox 7"/>
+          <p:cNvPr id="9" name="TextBox 8"/>
           <p:cNvSpPr txBox="1"/>
           <p:nvPr/>
         </p:nvSpPr>
@@ -7114,7 +7302,7 @@
       </p:sp>
       <p:sp>
         <p:nvSpPr>
-          <p:cNvPr id="9" name="Rounded Rectangle 8"/>
+          <p:cNvPr id="10" name="Rounded Rectangle 9"/>
           <p:cNvSpPr/>
           <p:nvPr/>
         </p:nvSpPr>
@@ -7168,7 +7356,7 @@
       </p:sp>
       <p:sp>
         <p:nvSpPr>
-          <p:cNvPr id="10" name="Rectangle 9"/>
+          <p:cNvPr id="11" name="Rectangle 10"/>
           <p:cNvSpPr/>
           <p:nvPr/>
         </p:nvSpPr>
@@ -7212,7 +7400,7 @@
       </p:sp>
       <p:sp>
         <p:nvSpPr>
-          <p:cNvPr id="11" name="Rounded Rectangle 10"/>
+          <p:cNvPr id="12" name="Rounded Rectangle 11"/>
           <p:cNvSpPr/>
           <p:nvPr/>
         </p:nvSpPr>
@@ -7279,7 +7467,7 @@
       </p:sp>
       <p:sp>
         <p:nvSpPr>
-          <p:cNvPr id="12" name="TextBox 11"/>
+          <p:cNvPr id="13" name="TextBox 12"/>
           <p:cNvSpPr txBox="1"/>
           <p:nvPr/>
         </p:nvSpPr>
@@ -7326,7 +7514,7 @@
       </p:sp>
       <p:sp>
         <p:nvSpPr>
-          <p:cNvPr id="13" name="Rectangle 12"/>
+          <p:cNvPr id="14" name="Rectangle 13"/>
           <p:cNvSpPr/>
           <p:nvPr/>
         </p:nvSpPr>
@@ -7370,7 +7558,7 @@
       </p:sp>
       <p:sp>
         <p:nvSpPr>
-          <p:cNvPr id="14" name="Rounded Rectangle 13"/>
+          <p:cNvPr id="15" name="Rounded Rectangle 14"/>
           <p:cNvSpPr/>
           <p:nvPr/>
         </p:nvSpPr>
@@ -7416,7 +7604,7 @@
       </p:sp>
       <p:sp>
         <p:nvSpPr>
-          <p:cNvPr id="15" name="TextBox 14"/>
+          <p:cNvPr id="16" name="TextBox 15"/>
           <p:cNvSpPr txBox="1"/>
           <p:nvPr/>
         </p:nvSpPr>
@@ -7463,7 +7651,7 @@
       </p:sp>
       <p:sp>
         <p:nvSpPr>
-          <p:cNvPr id="16" name="Rounded Rectangle 15"/>
+          <p:cNvPr id="17" name="Rounded Rectangle 16"/>
           <p:cNvSpPr/>
           <p:nvPr/>
         </p:nvSpPr>
@@ -7509,7 +7697,7 @@
       </p:sp>
       <p:sp>
         <p:nvSpPr>
-          <p:cNvPr id="17" name="TextBox 16"/>
+          <p:cNvPr id="18" name="TextBox 17"/>
           <p:cNvSpPr txBox="1"/>
           <p:nvPr/>
         </p:nvSpPr>
@@ -7556,7 +7744,7 @@
       </p:sp>
       <p:sp>
         <p:nvSpPr>
-          <p:cNvPr id="18" name="Rounded Rectangle 17"/>
+          <p:cNvPr id="19" name="Rounded Rectangle 18"/>
           <p:cNvSpPr/>
           <p:nvPr/>
         </p:nvSpPr>
@@ -7602,7 +7790,7 @@
       </p:sp>
       <p:sp>
         <p:nvSpPr>
-          <p:cNvPr id="19" name="TextBox 18"/>
+          <p:cNvPr id="20" name="TextBox 19"/>
           <p:cNvSpPr txBox="1"/>
           <p:nvPr/>
         </p:nvSpPr>
@@ -7649,7 +7837,7 @@
       </p:sp>
       <p:sp>
         <p:nvSpPr>
-          <p:cNvPr id="20" name="Rounded Rectangle 19"/>
+          <p:cNvPr id="21" name="Rounded Rectangle 20"/>
           <p:cNvSpPr/>
           <p:nvPr/>
         </p:nvSpPr>
@@ -7695,7 +7883,7 @@
       </p:sp>
       <p:sp>
         <p:nvSpPr>
-          <p:cNvPr id="21" name="TextBox 20"/>
+          <p:cNvPr id="22" name="TextBox 21"/>
           <p:cNvSpPr txBox="1"/>
           <p:nvPr/>
         </p:nvSpPr>
@@ -7742,7 +7930,7 @@
       </p:sp>
       <p:sp>
         <p:nvSpPr>
-          <p:cNvPr id="22" name="Rounded Rectangle 21"/>
+          <p:cNvPr id="23" name="Rounded Rectangle 22"/>
           <p:cNvSpPr/>
           <p:nvPr/>
         </p:nvSpPr>
@@ -7788,7 +7976,7 @@
       </p:sp>
       <p:sp>
         <p:nvSpPr>
-          <p:cNvPr id="23" name="TextBox 22"/>
+          <p:cNvPr id="24" name="TextBox 23"/>
           <p:cNvSpPr txBox="1"/>
           <p:nvPr/>
         </p:nvSpPr>
@@ -7835,7 +8023,7 @@
       </p:sp>
       <p:sp>
         <p:nvSpPr>
-          <p:cNvPr id="24" name="Rounded Rectangle 23"/>
+          <p:cNvPr id="25" name="Rounded Rectangle 24"/>
           <p:cNvSpPr/>
           <p:nvPr/>
         </p:nvSpPr>
@@ -7889,7 +8077,7 @@
       </p:sp>
       <p:sp>
         <p:nvSpPr>
-          <p:cNvPr id="25" name="Rectangle 24"/>
+          <p:cNvPr id="26" name="Rectangle 25"/>
           <p:cNvSpPr/>
           <p:nvPr/>
         </p:nvSpPr>
@@ -7933,7 +8121,7 @@
       </p:sp>
       <p:sp>
         <p:nvSpPr>
-          <p:cNvPr id="26" name="Rounded Rectangle 25"/>
+          <p:cNvPr id="27" name="Rounded Rectangle 26"/>
           <p:cNvSpPr/>
           <p:nvPr/>
         </p:nvSpPr>
@@ -8000,7 +8188,7 @@
       </p:sp>
       <p:sp>
         <p:nvSpPr>
-          <p:cNvPr id="27" name="TextBox 26"/>
+          <p:cNvPr id="28" name="TextBox 27"/>
           <p:cNvSpPr txBox="1"/>
           <p:nvPr/>
         </p:nvSpPr>
@@ -8047,7 +8235,7 @@
       </p:sp>
       <p:sp>
         <p:nvSpPr>
-          <p:cNvPr id="28" name="Rectangle 27"/>
+          <p:cNvPr id="29" name="Rectangle 28"/>
           <p:cNvSpPr/>
           <p:nvPr/>
         </p:nvSpPr>
@@ -8091,7 +8279,7 @@
       </p:sp>
       <p:sp>
         <p:nvSpPr>
-          <p:cNvPr id="29" name="Rounded Rectangle 28"/>
+          <p:cNvPr id="30" name="Rounded Rectangle 29"/>
           <p:cNvSpPr/>
           <p:nvPr/>
         </p:nvSpPr>
@@ -8137,7 +8325,7 @@
       </p:sp>
       <p:sp>
         <p:nvSpPr>
-          <p:cNvPr id="30" name="TextBox 29"/>
+          <p:cNvPr id="31" name="TextBox 30"/>
           <p:cNvSpPr txBox="1"/>
           <p:nvPr/>
         </p:nvSpPr>
@@ -8184,7 +8372,7 @@
       </p:sp>
       <p:sp>
         <p:nvSpPr>
-          <p:cNvPr id="31" name="Rounded Rectangle 30"/>
+          <p:cNvPr id="32" name="Rounded Rectangle 31"/>
           <p:cNvSpPr/>
           <p:nvPr/>
         </p:nvSpPr>
@@ -8230,7 +8418,7 @@
       </p:sp>
       <p:sp>
         <p:nvSpPr>
-          <p:cNvPr id="32" name="TextBox 31"/>
+          <p:cNvPr id="33" name="TextBox 32"/>
           <p:cNvSpPr txBox="1"/>
           <p:nvPr/>
         </p:nvSpPr>
@@ -8277,7 +8465,7 @@
       </p:sp>
       <p:sp>
         <p:nvSpPr>
-          <p:cNvPr id="33" name="Rounded Rectangle 32"/>
+          <p:cNvPr id="34" name="Rounded Rectangle 33"/>
           <p:cNvSpPr/>
           <p:nvPr/>
         </p:nvSpPr>
@@ -8323,7 +8511,7 @@
       </p:sp>
       <p:sp>
         <p:nvSpPr>
-          <p:cNvPr id="34" name="TextBox 33"/>
+          <p:cNvPr id="35" name="TextBox 34"/>
           <p:cNvSpPr txBox="1"/>
           <p:nvPr/>
         </p:nvSpPr>
@@ -8370,7 +8558,7 @@
       </p:sp>
       <p:sp>
         <p:nvSpPr>
-          <p:cNvPr id="35" name="Rounded Rectangle 34"/>
+          <p:cNvPr id="36" name="Rounded Rectangle 35"/>
           <p:cNvSpPr/>
           <p:nvPr/>
         </p:nvSpPr>
@@ -8416,7 +8604,7 @@
       </p:sp>
       <p:sp>
         <p:nvSpPr>
-          <p:cNvPr id="36" name="TextBox 35"/>
+          <p:cNvPr id="37" name="TextBox 36"/>
           <p:cNvSpPr txBox="1"/>
           <p:nvPr/>
         </p:nvSpPr>
@@ -8463,7 +8651,7 @@
       </p:sp>
       <p:sp>
         <p:nvSpPr>
-          <p:cNvPr id="37" name="Rounded Rectangle 36"/>
+          <p:cNvPr id="38" name="Rounded Rectangle 37"/>
           <p:cNvSpPr/>
           <p:nvPr/>
         </p:nvSpPr>
@@ -8509,7 +8697,7 @@
       </p:sp>
       <p:sp>
         <p:nvSpPr>
-          <p:cNvPr id="38" name="TextBox 37"/>
+          <p:cNvPr id="39" name="TextBox 38"/>
           <p:cNvSpPr txBox="1"/>
           <p:nvPr/>
         </p:nvSpPr>
@@ -8556,7 +8744,7 @@
       </p:sp>
       <p:sp>
         <p:nvSpPr>
-          <p:cNvPr id="39" name="Rounded Rectangle 38"/>
+          <p:cNvPr id="40" name="Rounded Rectangle 39"/>
           <p:cNvSpPr/>
           <p:nvPr/>
         </p:nvSpPr>
@@ -8694,9 +8882,33 @@
           </a:p>
         </p:txBody>
       </p:sp>
-      <p:sp>
-        <p:nvSpPr>
-          <p:cNvPr id="3" name="TextBox 2"/>
+      <p:pic>
+        <p:nvPicPr>
+          <p:cNvPr id="3" name="college-logo" descr="logo-mark.png"/>
+          <p:cNvPicPr>
+            <a:picLocks noChangeAspect="1"/>
+          </p:cNvPicPr>
+          <p:nvPr/>
+        </p:nvPicPr>
+        <p:blipFill>
+          <a:blip r:embed="rId2"/>
+          <a:stretch>
+            <a:fillRect/>
+          </a:stretch>
+        </p:blipFill>
+        <p:spPr>
+          <a:xfrm>
+            <a:off x="11203333" y="6199632"/>
+            <a:ext cx="275129" cy="310896"/>
+          </a:xfrm>
+          <a:prstGeom prst="rect">
+            <a:avLst/>
+          </a:prstGeom>
+        </p:spPr>
+      </p:pic>
+      <p:sp>
+        <p:nvSpPr>
+          <p:cNvPr id="4" name="TextBox 3"/>
           <p:cNvSpPr txBox="1"/>
           <p:nvPr/>
         </p:nvSpPr>
@@ -8765,13 +8977,13 @@
       </p:sp>
       <p:sp>
         <p:nvSpPr>
-          <p:cNvPr id="4" name="TextBox 3"/>
+          <p:cNvPr id="5" name="TextBox 4"/>
           <p:cNvSpPr txBox="1"/>
           <p:nvPr/>
         </p:nvSpPr>
         <p:spPr>
           <a:xfrm>
-            <a:off x="8826703" y="6272784"/>
+            <a:off x="8240677" y="6272784"/>
             <a:ext cx="2651760" cy="219456"/>
           </a:xfrm>
           <a:prstGeom prst="rect">
@@ -8834,7 +9046,7 @@
       </p:sp>
       <p:sp>
         <p:nvSpPr>
-          <p:cNvPr id="5" name="TextBox 4"/>
+          <p:cNvPr id="6" name="TextBox 5"/>
           <p:cNvSpPr txBox="1"/>
           <p:nvPr/>
         </p:nvSpPr>
@@ -8881,7 +9093,7 @@
       </p:sp>
       <p:sp>
         <p:nvSpPr>
-          <p:cNvPr id="6" name="TextBox 5"/>
+          <p:cNvPr id="7" name="TextBox 6"/>
           <p:cNvSpPr txBox="1"/>
           <p:nvPr/>
         </p:nvSpPr>
@@ -8928,7 +9140,7 @@
       </p:sp>
       <p:sp>
         <p:nvSpPr>
-          <p:cNvPr id="7" name="Rectangle 6"/>
+          <p:cNvPr id="8" name="Rectangle 7"/>
           <p:cNvSpPr/>
           <p:nvPr/>
         </p:nvSpPr>
@@ -8972,7 +9184,7 @@
       </p:sp>
       <p:sp>
         <p:nvSpPr>
-          <p:cNvPr id="8" name="TextBox 7"/>
+          <p:cNvPr id="9" name="TextBox 8"/>
           <p:cNvSpPr txBox="1"/>
           <p:nvPr/>
         </p:nvSpPr>
@@ -9019,7 +9231,7 @@
       </p:sp>
       <p:sp>
         <p:nvSpPr>
-          <p:cNvPr id="9" name="Rounded Rectangle 8"/>
+          <p:cNvPr id="10" name="Rounded Rectangle 9"/>
           <p:cNvSpPr/>
           <p:nvPr/>
         </p:nvSpPr>
@@ -9065,7 +9277,7 @@
       </p:sp>
       <p:sp>
         <p:nvSpPr>
-          <p:cNvPr id="10" name="Rectangle 9"/>
+          <p:cNvPr id="11" name="Rectangle 10"/>
           <p:cNvSpPr/>
           <p:nvPr/>
         </p:nvSpPr>
@@ -9109,7 +9321,7 @@
       </p:sp>
       <p:sp>
         <p:nvSpPr>
-          <p:cNvPr id="11" name="TextBox 10"/>
+          <p:cNvPr id="12" name="TextBox 11"/>
           <p:cNvSpPr txBox="1"/>
           <p:nvPr/>
         </p:nvSpPr>
@@ -9156,7 +9368,7 @@
       </p:sp>
       <p:sp>
         <p:nvSpPr>
-          <p:cNvPr id="12" name="TextBox 11"/>
+          <p:cNvPr id="13" name="TextBox 12"/>
           <p:cNvSpPr txBox="1"/>
           <p:nvPr/>
         </p:nvSpPr>
@@ -9215,7 +9427,7 @@
       </p:sp>
       <p:sp>
         <p:nvSpPr>
-          <p:cNvPr id="13" name="Rounded Rectangle 12"/>
+          <p:cNvPr id="14" name="Rounded Rectangle 13"/>
           <p:cNvSpPr/>
           <p:nvPr/>
         </p:nvSpPr>
@@ -9261,7 +9473,7 @@
       </p:sp>
       <p:sp>
         <p:nvSpPr>
-          <p:cNvPr id="14" name="Rectangle 13"/>
+          <p:cNvPr id="15" name="Rectangle 14"/>
           <p:cNvSpPr/>
           <p:nvPr/>
         </p:nvSpPr>
@@ -9305,7 +9517,7 @@
       </p:sp>
       <p:sp>
         <p:nvSpPr>
-          <p:cNvPr id="15" name="TextBox 14"/>
+          <p:cNvPr id="16" name="TextBox 15"/>
           <p:cNvSpPr txBox="1"/>
           <p:nvPr/>
         </p:nvSpPr>
@@ -9352,7 +9564,7 @@
       </p:sp>
       <p:sp>
         <p:nvSpPr>
-          <p:cNvPr id="16" name="TextBox 15"/>
+          <p:cNvPr id="17" name="TextBox 16"/>
           <p:cNvSpPr txBox="1"/>
           <p:nvPr/>
         </p:nvSpPr>
@@ -9411,7 +9623,7 @@
       </p:sp>
       <p:sp>
         <p:nvSpPr>
-          <p:cNvPr id="17" name="Rounded Rectangle 16"/>
+          <p:cNvPr id="18" name="Rounded Rectangle 17"/>
           <p:cNvSpPr/>
           <p:nvPr/>
         </p:nvSpPr>
@@ -9457,7 +9669,7 @@
       </p:sp>
       <p:sp>
         <p:nvSpPr>
-          <p:cNvPr id="18" name="Rectangle 17"/>
+          <p:cNvPr id="19" name="Rectangle 18"/>
           <p:cNvSpPr/>
           <p:nvPr/>
         </p:nvSpPr>
@@ -9501,7 +9713,7 @@
       </p:sp>
       <p:sp>
         <p:nvSpPr>
-          <p:cNvPr id="19" name="TextBox 18"/>
+          <p:cNvPr id="20" name="TextBox 19"/>
           <p:cNvSpPr txBox="1"/>
           <p:nvPr/>
         </p:nvSpPr>
@@ -9548,7 +9760,7 @@
       </p:sp>
       <p:sp>
         <p:nvSpPr>
-          <p:cNvPr id="20" name="TextBox 19"/>
+          <p:cNvPr id="21" name="TextBox 20"/>
           <p:cNvSpPr txBox="1"/>
           <p:nvPr/>
         </p:nvSpPr>
@@ -9607,7 +9819,7 @@
       </p:sp>
       <p:sp>
         <p:nvSpPr>
-          <p:cNvPr id="21" name="Rounded Rectangle 20"/>
+          <p:cNvPr id="22" name="Rounded Rectangle 21"/>
           <p:cNvSpPr/>
           <p:nvPr/>
         </p:nvSpPr>
@@ -9653,7 +9865,7 @@
       </p:sp>
       <p:sp>
         <p:nvSpPr>
-          <p:cNvPr id="22" name="Rectangle 21"/>
+          <p:cNvPr id="23" name="Rectangle 22"/>
           <p:cNvSpPr/>
           <p:nvPr/>
         </p:nvSpPr>
@@ -9697,7 +9909,7 @@
       </p:sp>
       <p:sp>
         <p:nvSpPr>
-          <p:cNvPr id="23" name="TextBox 22"/>
+          <p:cNvPr id="24" name="TextBox 23"/>
           <p:cNvSpPr txBox="1"/>
           <p:nvPr/>
         </p:nvSpPr>
@@ -9744,7 +9956,7 @@
       </p:sp>
       <p:sp>
         <p:nvSpPr>
-          <p:cNvPr id="24" name="TextBox 23"/>
+          <p:cNvPr id="25" name="TextBox 24"/>
           <p:cNvSpPr txBox="1"/>
           <p:nvPr/>
         </p:nvSpPr>
@@ -9803,7 +10015,7 @@
       </p:sp>
       <p:sp>
         <p:nvSpPr>
-          <p:cNvPr id="25" name="Rounded Rectangle 24"/>
+          <p:cNvPr id="26" name="Rounded Rectangle 25"/>
           <p:cNvSpPr/>
           <p:nvPr/>
         </p:nvSpPr>
@@ -9849,7 +10061,7 @@
       </p:sp>
       <p:sp>
         <p:nvSpPr>
-          <p:cNvPr id="26" name="Rectangle 25"/>
+          <p:cNvPr id="27" name="Rectangle 26"/>
           <p:cNvSpPr/>
           <p:nvPr/>
         </p:nvSpPr>
@@ -9893,7 +10105,7 @@
       </p:sp>
       <p:sp>
         <p:nvSpPr>
-          <p:cNvPr id="27" name="TextBox 26"/>
+          <p:cNvPr id="28" name="TextBox 27"/>
           <p:cNvSpPr txBox="1"/>
           <p:nvPr/>
         </p:nvSpPr>
@@ -9940,7 +10152,7 @@
       </p:sp>
       <p:sp>
         <p:nvSpPr>
-          <p:cNvPr id="28" name="TextBox 27"/>
+          <p:cNvPr id="29" name="TextBox 28"/>
           <p:cNvSpPr txBox="1"/>
           <p:nvPr/>
         </p:nvSpPr>
@@ -10059,9 +10271,33 @@
           </a:p>
         </p:txBody>
       </p:sp>
-      <p:sp>
-        <p:nvSpPr>
-          <p:cNvPr id="3" name="TextBox 2"/>
+      <p:pic>
+        <p:nvPicPr>
+          <p:cNvPr id="3" name="college-logo" descr="logo-mark.png"/>
+          <p:cNvPicPr>
+            <a:picLocks noChangeAspect="1"/>
+          </p:cNvPicPr>
+          <p:nvPr/>
+        </p:nvPicPr>
+        <p:blipFill>
+          <a:blip r:embed="rId2"/>
+          <a:stretch>
+            <a:fillRect/>
+          </a:stretch>
+        </p:blipFill>
+        <p:spPr>
+          <a:xfrm>
+            <a:off x="11203333" y="6199632"/>
+            <a:ext cx="275129" cy="310896"/>
+          </a:xfrm>
+          <a:prstGeom prst="rect">
+            <a:avLst/>
+          </a:prstGeom>
+        </p:spPr>
+      </p:pic>
+      <p:sp>
+        <p:nvSpPr>
+          <p:cNvPr id="4" name="TextBox 3"/>
           <p:cNvSpPr txBox="1"/>
           <p:nvPr/>
         </p:nvSpPr>
@@ -10130,13 +10366,13 @@
       </p:sp>
       <p:sp>
         <p:nvSpPr>
-          <p:cNvPr id="4" name="TextBox 3"/>
+          <p:cNvPr id="5" name="TextBox 4"/>
           <p:cNvSpPr txBox="1"/>
           <p:nvPr/>
         </p:nvSpPr>
         <p:spPr>
           <a:xfrm>
-            <a:off x="8826703" y="6272784"/>
+            <a:off x="8240677" y="6272784"/>
             <a:ext cx="2651760" cy="219456"/>
           </a:xfrm>
           <a:prstGeom prst="rect">
@@ -10199,7 +10435,7 @@
       </p:sp>
       <p:sp>
         <p:nvSpPr>
-          <p:cNvPr id="5" name="TextBox 4"/>
+          <p:cNvPr id="6" name="TextBox 5"/>
           <p:cNvSpPr txBox="1"/>
           <p:nvPr/>
         </p:nvSpPr>
@@ -10246,7 +10482,7 @@
       </p:sp>
       <p:sp>
         <p:nvSpPr>
-          <p:cNvPr id="6" name="TextBox 5"/>
+          <p:cNvPr id="7" name="TextBox 6"/>
           <p:cNvSpPr txBox="1"/>
           <p:nvPr/>
         </p:nvSpPr>
@@ -10293,7 +10529,7 @@
       </p:sp>
       <p:sp>
         <p:nvSpPr>
-          <p:cNvPr id="7" name="Rectangle 6"/>
+          <p:cNvPr id="8" name="Rectangle 7"/>
           <p:cNvSpPr/>
           <p:nvPr/>
         </p:nvSpPr>
@@ -10337,7 +10573,7 @@
       </p:sp>
       <p:sp>
         <p:nvSpPr>
-          <p:cNvPr id="8" name="TextBox 7"/>
+          <p:cNvPr id="9" name="TextBox 8"/>
           <p:cNvSpPr txBox="1"/>
           <p:nvPr/>
         </p:nvSpPr>
@@ -10384,7 +10620,7 @@
       </p:sp>
       <p:sp>
         <p:nvSpPr>
-          <p:cNvPr id="9" name="Rectangle 8"/>
+          <p:cNvPr id="10" name="Rectangle 9"/>
           <p:cNvSpPr/>
           <p:nvPr/>
         </p:nvSpPr>
@@ -10428,7 +10664,7 @@
       </p:sp>
       <p:sp>
         <p:nvSpPr>
-          <p:cNvPr id="10" name="Oval 9"/>
+          <p:cNvPr id="11" name="Oval 10"/>
           <p:cNvSpPr/>
           <p:nvPr/>
         </p:nvSpPr>
@@ -10472,7 +10708,7 @@
       </p:sp>
       <p:sp>
         <p:nvSpPr>
-          <p:cNvPr id="11" name="TextBox 10"/>
+          <p:cNvPr id="12" name="TextBox 11"/>
           <p:cNvSpPr txBox="1"/>
           <p:nvPr/>
         </p:nvSpPr>
@@ -10519,7 +10755,7 @@
       </p:sp>
       <p:sp>
         <p:nvSpPr>
-          <p:cNvPr id="12" name="Rounded Rectangle 11"/>
+          <p:cNvPr id="13" name="Rounded Rectangle 12"/>
           <p:cNvSpPr/>
           <p:nvPr/>
         </p:nvSpPr>
@@ -10567,7 +10803,7 @@
       </p:sp>
       <p:sp>
         <p:nvSpPr>
-          <p:cNvPr id="13" name="TextBox 12"/>
+          <p:cNvPr id="14" name="TextBox 13"/>
           <p:cNvSpPr txBox="1"/>
           <p:nvPr/>
         </p:nvSpPr>
@@ -10614,7 +10850,7 @@
       </p:sp>
       <p:sp>
         <p:nvSpPr>
-          <p:cNvPr id="14" name="TextBox 13"/>
+          <p:cNvPr id="15" name="TextBox 14"/>
           <p:cNvSpPr txBox="1"/>
           <p:nvPr/>
         </p:nvSpPr>
@@ -10661,7 +10897,7 @@
       </p:sp>
       <p:sp>
         <p:nvSpPr>
-          <p:cNvPr id="15" name="Oval 14"/>
+          <p:cNvPr id="16" name="Oval 15"/>
           <p:cNvSpPr/>
           <p:nvPr/>
         </p:nvSpPr>
@@ -10705,7 +10941,7 @@
       </p:sp>
       <p:sp>
         <p:nvSpPr>
-          <p:cNvPr id="16" name="TextBox 15"/>
+          <p:cNvPr id="17" name="TextBox 16"/>
           <p:cNvSpPr txBox="1"/>
           <p:nvPr/>
         </p:nvSpPr>
@@ -10752,7 +10988,7 @@
       </p:sp>
       <p:sp>
         <p:nvSpPr>
-          <p:cNvPr id="17" name="Rounded Rectangle 16"/>
+          <p:cNvPr id="18" name="Rounded Rectangle 17"/>
           <p:cNvSpPr/>
           <p:nvPr/>
         </p:nvSpPr>
@@ -10800,7 +11036,7 @@
       </p:sp>
       <p:sp>
         <p:nvSpPr>
-          <p:cNvPr id="18" name="TextBox 17"/>
+          <p:cNvPr id="19" name="TextBox 18"/>
           <p:cNvSpPr txBox="1"/>
           <p:nvPr/>
         </p:nvSpPr>
@@ -10847,7 +11083,7 @@
       </p:sp>
       <p:sp>
         <p:nvSpPr>
-          <p:cNvPr id="19" name="TextBox 18"/>
+          <p:cNvPr id="20" name="TextBox 19"/>
           <p:cNvSpPr txBox="1"/>
           <p:nvPr/>
         </p:nvSpPr>
@@ -10894,7 +11130,7 @@
       </p:sp>
       <p:sp>
         <p:nvSpPr>
-          <p:cNvPr id="20" name="Oval 19"/>
+          <p:cNvPr id="21" name="Oval 20"/>
           <p:cNvSpPr/>
           <p:nvPr/>
         </p:nvSpPr>
@@ -10938,7 +11174,7 @@
       </p:sp>
       <p:sp>
         <p:nvSpPr>
-          <p:cNvPr id="21" name="TextBox 20"/>
+          <p:cNvPr id="22" name="TextBox 21"/>
           <p:cNvSpPr txBox="1"/>
           <p:nvPr/>
         </p:nvSpPr>
@@ -10985,7 +11221,7 @@
       </p:sp>
       <p:sp>
         <p:nvSpPr>
-          <p:cNvPr id="22" name="Rounded Rectangle 21"/>
+          <p:cNvPr id="23" name="Rounded Rectangle 22"/>
           <p:cNvSpPr/>
           <p:nvPr/>
         </p:nvSpPr>
@@ -11033,7 +11269,7 @@
       </p:sp>
       <p:sp>
         <p:nvSpPr>
-          <p:cNvPr id="23" name="TextBox 22"/>
+          <p:cNvPr id="24" name="TextBox 23"/>
           <p:cNvSpPr txBox="1"/>
           <p:nvPr/>
         </p:nvSpPr>
@@ -11080,7 +11316,7 @@
       </p:sp>
       <p:sp>
         <p:nvSpPr>
-          <p:cNvPr id="24" name="TextBox 23"/>
+          <p:cNvPr id="25" name="TextBox 24"/>
           <p:cNvSpPr txBox="1"/>
           <p:nvPr/>
         </p:nvSpPr>
@@ -11127,7 +11363,7 @@
       </p:sp>
       <p:sp>
         <p:nvSpPr>
-          <p:cNvPr id="25" name="Oval 24"/>
+          <p:cNvPr id="26" name="Oval 25"/>
           <p:cNvSpPr/>
           <p:nvPr/>
         </p:nvSpPr>
@@ -11171,7 +11407,7 @@
       </p:sp>
       <p:sp>
         <p:nvSpPr>
-          <p:cNvPr id="26" name="TextBox 25"/>
+          <p:cNvPr id="27" name="TextBox 26"/>
           <p:cNvSpPr txBox="1"/>
           <p:nvPr/>
         </p:nvSpPr>
@@ -11218,7 +11454,7 @@
       </p:sp>
       <p:sp>
         <p:nvSpPr>
-          <p:cNvPr id="27" name="Rounded Rectangle 26"/>
+          <p:cNvPr id="28" name="Rounded Rectangle 27"/>
           <p:cNvSpPr/>
           <p:nvPr/>
         </p:nvSpPr>
@@ -11266,7 +11502,7 @@
       </p:sp>
       <p:sp>
         <p:nvSpPr>
-          <p:cNvPr id="28" name="TextBox 27"/>
+          <p:cNvPr id="29" name="TextBox 28"/>
           <p:cNvSpPr txBox="1"/>
           <p:nvPr/>
         </p:nvSpPr>
@@ -11313,7 +11549,7 @@
       </p:sp>
       <p:sp>
         <p:nvSpPr>
-          <p:cNvPr id="29" name="TextBox 28"/>
+          <p:cNvPr id="30" name="TextBox 29"/>
           <p:cNvSpPr txBox="1"/>
           <p:nvPr/>
         </p:nvSpPr>
@@ -11360,7 +11596,7 @@
       </p:sp>
       <p:sp>
         <p:nvSpPr>
-          <p:cNvPr id="30" name="Oval 29"/>
+          <p:cNvPr id="31" name="Oval 30"/>
           <p:cNvSpPr/>
           <p:nvPr/>
         </p:nvSpPr>
@@ -11404,7 +11640,7 @@
       </p:sp>
       <p:sp>
         <p:nvSpPr>
-          <p:cNvPr id="31" name="TextBox 30"/>
+          <p:cNvPr id="32" name="TextBox 31"/>
           <p:cNvSpPr txBox="1"/>
           <p:nvPr/>
         </p:nvSpPr>
@@ -11451,7 +11687,7 @@
       </p:sp>
       <p:sp>
         <p:nvSpPr>
-          <p:cNvPr id="32" name="Rounded Rectangle 31"/>
+          <p:cNvPr id="33" name="Rounded Rectangle 32"/>
           <p:cNvSpPr/>
           <p:nvPr/>
         </p:nvSpPr>
@@ -11499,7 +11735,7 @@
       </p:sp>
       <p:sp>
         <p:nvSpPr>
-          <p:cNvPr id="33" name="TextBox 32"/>
+          <p:cNvPr id="34" name="TextBox 33"/>
           <p:cNvSpPr txBox="1"/>
           <p:nvPr/>
         </p:nvSpPr>
@@ -11546,7 +11782,7 @@
       </p:sp>
       <p:sp>
         <p:nvSpPr>
-          <p:cNvPr id="34" name="TextBox 33"/>
+          <p:cNvPr id="35" name="TextBox 34"/>
           <p:cNvSpPr txBox="1"/>
           <p:nvPr/>
         </p:nvSpPr>
@@ -11593,7 +11829,7 @@
       </p:sp>
       <p:sp>
         <p:nvSpPr>
-          <p:cNvPr id="35" name="Rounded Rectangle 34"/>
+          <p:cNvPr id="36" name="Rounded Rectangle 35"/>
           <p:cNvSpPr/>
           <p:nvPr/>
         </p:nvSpPr>
@@ -11660,7 +11896,7 @@
       </p:sp>
       <p:sp>
         <p:nvSpPr>
-          <p:cNvPr id="36" name="Rectangle 35"/>
+          <p:cNvPr id="37" name="Rectangle 36"/>
           <p:cNvSpPr/>
           <p:nvPr/>
         </p:nvSpPr>
@@ -11764,9 +12000,33 @@
           </a:p>
         </p:txBody>
       </p:sp>
-      <p:sp>
-        <p:nvSpPr>
-          <p:cNvPr id="3" name="TextBox 2"/>
+      <p:pic>
+        <p:nvPicPr>
+          <p:cNvPr id="3" name="college-logo" descr="logo-mark.png"/>
+          <p:cNvPicPr>
+            <a:picLocks noChangeAspect="1"/>
+          </p:cNvPicPr>
+          <p:nvPr/>
+        </p:nvPicPr>
+        <p:blipFill>
+          <a:blip r:embed="rId2"/>
+          <a:stretch>
+            <a:fillRect/>
+          </a:stretch>
+        </p:blipFill>
+        <p:spPr>
+          <a:xfrm>
+            <a:off x="11203333" y="6199632"/>
+            <a:ext cx="275129" cy="310896"/>
+          </a:xfrm>
+          <a:prstGeom prst="rect">
+            <a:avLst/>
+          </a:prstGeom>
+        </p:spPr>
+      </p:pic>
+      <p:sp>
+        <p:nvSpPr>
+          <p:cNvPr id="4" name="TextBox 3"/>
           <p:cNvSpPr txBox="1"/>
           <p:nvPr/>
         </p:nvSpPr>
@@ -11835,13 +12095,13 @@
       </p:sp>
       <p:sp>
         <p:nvSpPr>
-          <p:cNvPr id="4" name="TextBox 3"/>
+          <p:cNvPr id="5" name="TextBox 4"/>
           <p:cNvSpPr txBox="1"/>
           <p:nvPr/>
         </p:nvSpPr>
         <p:spPr>
           <a:xfrm>
-            <a:off x="8826703" y="6272784"/>
+            <a:off x="8240677" y="6272784"/>
             <a:ext cx="2651760" cy="219456"/>
           </a:xfrm>
           <a:prstGeom prst="rect">
@@ -11904,7 +12164,7 @@
       </p:sp>
       <p:sp>
         <p:nvSpPr>
-          <p:cNvPr id="5" name="TextBox 4"/>
+          <p:cNvPr id="6" name="TextBox 5"/>
           <p:cNvSpPr txBox="1"/>
           <p:nvPr/>
         </p:nvSpPr>
@@ -11951,7 +12211,7 @@
       </p:sp>
       <p:sp>
         <p:nvSpPr>
-          <p:cNvPr id="6" name="TextBox 5"/>
+          <p:cNvPr id="7" name="TextBox 6"/>
           <p:cNvSpPr txBox="1"/>
           <p:nvPr/>
         </p:nvSpPr>
@@ -11998,7 +12258,7 @@
       </p:sp>
       <p:sp>
         <p:nvSpPr>
-          <p:cNvPr id="7" name="Rectangle 6"/>
+          <p:cNvPr id="8" name="Rectangle 7"/>
           <p:cNvSpPr/>
           <p:nvPr/>
         </p:nvSpPr>
@@ -12042,7 +12302,7 @@
       </p:sp>
       <p:sp>
         <p:nvSpPr>
-          <p:cNvPr id="8" name="TextBox 7"/>
+          <p:cNvPr id="9" name="TextBox 8"/>
           <p:cNvSpPr txBox="1"/>
           <p:nvPr/>
         </p:nvSpPr>
@@ -12089,7 +12349,7 @@
       </p:sp>
       <p:sp>
         <p:nvSpPr>
-          <p:cNvPr id="9" name="Rounded Rectangle 8"/>
+          <p:cNvPr id="10" name="Rounded Rectangle 9"/>
           <p:cNvSpPr/>
           <p:nvPr/>
         </p:nvSpPr>
@@ -12143,7 +12403,7 @@
       </p:sp>
       <p:sp>
         <p:nvSpPr>
-          <p:cNvPr id="10" name="Rectangle 9"/>
+          <p:cNvPr id="11" name="Rectangle 10"/>
           <p:cNvSpPr/>
           <p:nvPr/>
         </p:nvSpPr>
@@ -12187,7 +12447,7 @@
       </p:sp>
       <p:sp>
         <p:nvSpPr>
-          <p:cNvPr id="11" name="TextBox 10"/>
+          <p:cNvPr id="12" name="TextBox 11"/>
           <p:cNvSpPr txBox="1"/>
           <p:nvPr/>
         </p:nvSpPr>
@@ -12234,7 +12494,7 @@
       </p:sp>
       <p:sp>
         <p:nvSpPr>
-          <p:cNvPr id="12" name="TextBox 11"/>
+          <p:cNvPr id="13" name="TextBox 12"/>
           <p:cNvSpPr txBox="1"/>
           <p:nvPr/>
         </p:nvSpPr>
@@ -12281,7 +12541,7 @@
       </p:sp>
       <p:sp>
         <p:nvSpPr>
-          <p:cNvPr id="13" name="Rounded Rectangle 12"/>
+          <p:cNvPr id="14" name="Rounded Rectangle 13"/>
           <p:cNvSpPr/>
           <p:nvPr/>
         </p:nvSpPr>
@@ -12335,7 +12595,7 @@
       </p:sp>
       <p:sp>
         <p:nvSpPr>
-          <p:cNvPr id="14" name="Rectangle 13"/>
+          <p:cNvPr id="15" name="Rectangle 14"/>
           <p:cNvSpPr/>
           <p:nvPr/>
         </p:nvSpPr>
@@ -12379,7 +12639,7 @@
       </p:sp>
       <p:sp>
         <p:nvSpPr>
-          <p:cNvPr id="15" name="TextBox 14"/>
+          <p:cNvPr id="16" name="TextBox 15"/>
           <p:cNvSpPr txBox="1"/>
           <p:nvPr/>
         </p:nvSpPr>
@@ -12426,7 +12686,7 @@
       </p:sp>
       <p:sp>
         <p:nvSpPr>
-          <p:cNvPr id="16" name="TextBox 15"/>
+          <p:cNvPr id="17" name="TextBox 16"/>
           <p:cNvSpPr txBox="1"/>
           <p:nvPr/>
         </p:nvSpPr>
@@ -12473,7 +12733,7 @@
       </p:sp>
       <p:sp>
         <p:nvSpPr>
-          <p:cNvPr id="17" name="Rounded Rectangle 16"/>
+          <p:cNvPr id="18" name="Rounded Rectangle 17"/>
           <p:cNvSpPr/>
           <p:nvPr/>
         </p:nvSpPr>
@@ -12527,7 +12787,7 @@
       </p:sp>
       <p:sp>
         <p:nvSpPr>
-          <p:cNvPr id="18" name="Rectangle 17"/>
+          <p:cNvPr id="19" name="Rectangle 18"/>
           <p:cNvSpPr/>
           <p:nvPr/>
         </p:nvSpPr>
@@ -12571,7 +12831,7 @@
       </p:sp>
       <p:sp>
         <p:nvSpPr>
-          <p:cNvPr id="19" name="TextBox 18"/>
+          <p:cNvPr id="20" name="TextBox 19"/>
           <p:cNvSpPr txBox="1"/>
           <p:nvPr/>
         </p:nvSpPr>
@@ -12618,7 +12878,7 @@
       </p:sp>
       <p:sp>
         <p:nvSpPr>
-          <p:cNvPr id="20" name="TextBox 19"/>
+          <p:cNvPr id="21" name="TextBox 20"/>
           <p:cNvSpPr txBox="1"/>
           <p:nvPr/>
         </p:nvSpPr>
@@ -12665,7 +12925,7 @@
       </p:sp>
       <p:sp>
         <p:nvSpPr>
-          <p:cNvPr id="21" name="Rounded Rectangle 20"/>
+          <p:cNvPr id="22" name="Rounded Rectangle 21"/>
           <p:cNvSpPr/>
           <p:nvPr/>
         </p:nvSpPr>
@@ -12719,7 +12979,7 @@
       </p:sp>
       <p:sp>
         <p:nvSpPr>
-          <p:cNvPr id="22" name="Rectangle 21"/>
+          <p:cNvPr id="23" name="Rectangle 22"/>
           <p:cNvSpPr/>
           <p:nvPr/>
         </p:nvSpPr>
@@ -12763,7 +13023,7 @@
       </p:sp>
       <p:sp>
         <p:nvSpPr>
-          <p:cNvPr id="23" name="TextBox 22"/>
+          <p:cNvPr id="24" name="TextBox 23"/>
           <p:cNvSpPr txBox="1"/>
           <p:nvPr/>
         </p:nvSpPr>
@@ -12810,7 +13070,7 @@
       </p:sp>
       <p:sp>
         <p:nvSpPr>
-          <p:cNvPr id="24" name="TextBox 23"/>
+          <p:cNvPr id="25" name="TextBox 24"/>
           <p:cNvSpPr txBox="1"/>
           <p:nvPr/>
         </p:nvSpPr>
@@ -12857,7 +13117,7 @@
       </p:sp>
       <p:sp>
         <p:nvSpPr>
-          <p:cNvPr id="25" name="Rounded Rectangle 24"/>
+          <p:cNvPr id="26" name="Rounded Rectangle 25"/>
           <p:cNvSpPr/>
           <p:nvPr/>
         </p:nvSpPr>
@@ -12911,7 +13171,7 @@
       </p:sp>
       <p:sp>
         <p:nvSpPr>
-          <p:cNvPr id="26" name="Rectangle 25"/>
+          <p:cNvPr id="27" name="Rectangle 26"/>
           <p:cNvSpPr/>
           <p:nvPr/>
         </p:nvSpPr>
@@ -12955,7 +13215,7 @@
       </p:sp>
       <p:sp>
         <p:nvSpPr>
-          <p:cNvPr id="27" name="TextBox 26"/>
+          <p:cNvPr id="28" name="TextBox 27"/>
           <p:cNvSpPr txBox="1"/>
           <p:nvPr/>
         </p:nvSpPr>
@@ -13002,7 +13262,7 @@
       </p:sp>
       <p:sp>
         <p:nvSpPr>
-          <p:cNvPr id="28" name="TextBox 27"/>
+          <p:cNvPr id="29" name="TextBox 28"/>
           <p:cNvSpPr txBox="1"/>
           <p:nvPr/>
         </p:nvSpPr>
@@ -13049,7 +13309,7 @@
       </p:sp>
       <p:sp>
         <p:nvSpPr>
-          <p:cNvPr id="29" name="Rounded Rectangle 28"/>
+          <p:cNvPr id="30" name="Rounded Rectangle 29"/>
           <p:cNvSpPr/>
           <p:nvPr/>
         </p:nvSpPr>
@@ -13103,7 +13363,7 @@
       </p:sp>
       <p:sp>
         <p:nvSpPr>
-          <p:cNvPr id="30" name="Rectangle 29"/>
+          <p:cNvPr id="31" name="Rectangle 30"/>
           <p:cNvSpPr/>
           <p:nvPr/>
         </p:nvSpPr>
@@ -13147,7 +13407,7 @@
       </p:sp>
       <p:sp>
         <p:nvSpPr>
-          <p:cNvPr id="31" name="TextBox 30"/>
+          <p:cNvPr id="32" name="TextBox 31"/>
           <p:cNvSpPr txBox="1"/>
           <p:nvPr/>
         </p:nvSpPr>
@@ -13194,7 +13454,7 @@
       </p:sp>
       <p:sp>
         <p:nvSpPr>
-          <p:cNvPr id="32" name="TextBox 31"/>
+          <p:cNvPr id="33" name="TextBox 32"/>
           <p:cNvSpPr txBox="1"/>
           <p:nvPr/>
         </p:nvSpPr>
@@ -13301,9 +13561,33 @@
           </a:p>
         </p:txBody>
       </p:sp>
-      <p:sp>
-        <p:nvSpPr>
-          <p:cNvPr id="3" name="TextBox 2"/>
+      <p:pic>
+        <p:nvPicPr>
+          <p:cNvPr id="3" name="college-logo" descr="logo-mark.png"/>
+          <p:cNvPicPr>
+            <a:picLocks noChangeAspect="1"/>
+          </p:cNvPicPr>
+          <p:nvPr/>
+        </p:nvPicPr>
+        <p:blipFill>
+          <a:blip r:embed="rId2"/>
+          <a:stretch>
+            <a:fillRect/>
+          </a:stretch>
+        </p:blipFill>
+        <p:spPr>
+          <a:xfrm>
+            <a:off x="11203333" y="6199632"/>
+            <a:ext cx="275129" cy="310896"/>
+          </a:xfrm>
+          <a:prstGeom prst="rect">
+            <a:avLst/>
+          </a:prstGeom>
+        </p:spPr>
+      </p:pic>
+      <p:sp>
+        <p:nvSpPr>
+          <p:cNvPr id="4" name="TextBox 3"/>
           <p:cNvSpPr txBox="1"/>
           <p:nvPr/>
         </p:nvSpPr>
@@ -13372,13 +13656,13 @@
       </p:sp>
       <p:sp>
         <p:nvSpPr>
-          <p:cNvPr id="4" name="TextBox 3"/>
+          <p:cNvPr id="5" name="TextBox 4"/>
           <p:cNvSpPr txBox="1"/>
           <p:nvPr/>
         </p:nvSpPr>
         <p:spPr>
           <a:xfrm>
-            <a:off x="8826703" y="6272784"/>
+            <a:off x="8240677" y="6272784"/>
             <a:ext cx="2651760" cy="219456"/>
           </a:xfrm>
           <a:prstGeom prst="rect">
@@ -13441,7 +13725,7 @@
       </p:sp>
       <p:sp>
         <p:nvSpPr>
-          <p:cNvPr id="5" name="TextBox 4"/>
+          <p:cNvPr id="6" name="TextBox 5"/>
           <p:cNvSpPr txBox="1"/>
           <p:nvPr/>
         </p:nvSpPr>
@@ -13488,7 +13772,7 @@
       </p:sp>
       <p:sp>
         <p:nvSpPr>
-          <p:cNvPr id="6" name="TextBox 5"/>
+          <p:cNvPr id="7" name="TextBox 6"/>
           <p:cNvSpPr txBox="1"/>
           <p:nvPr/>
         </p:nvSpPr>
@@ -13535,7 +13819,7 @@
       </p:sp>
       <p:sp>
         <p:nvSpPr>
-          <p:cNvPr id="7" name="Rectangle 6"/>
+          <p:cNvPr id="8" name="Rectangle 7"/>
           <p:cNvSpPr/>
           <p:nvPr/>
         </p:nvSpPr>
@@ -13579,7 +13863,7 @@
       </p:sp>
       <p:sp>
         <p:nvSpPr>
-          <p:cNvPr id="8" name="TextBox 7"/>
+          <p:cNvPr id="9" name="TextBox 8"/>
           <p:cNvSpPr txBox="1"/>
           <p:nvPr/>
         </p:nvSpPr>
@@ -13626,7 +13910,7 @@
       </p:sp>
       <p:sp>
         <p:nvSpPr>
-          <p:cNvPr id="9" name="Rounded Rectangle 8"/>
+          <p:cNvPr id="10" name="Rounded Rectangle 9"/>
           <p:cNvSpPr/>
           <p:nvPr/>
         </p:nvSpPr>
@@ -13680,7 +13964,7 @@
       </p:sp>
       <p:sp>
         <p:nvSpPr>
-          <p:cNvPr id="10" name="Rectangle 9"/>
+          <p:cNvPr id="11" name="Rectangle 10"/>
           <p:cNvSpPr/>
           <p:nvPr/>
         </p:nvSpPr>
@@ -13724,7 +14008,7 @@
       </p:sp>
       <p:sp>
         <p:nvSpPr>
-          <p:cNvPr id="11" name="TextBox 10"/>
+          <p:cNvPr id="12" name="TextBox 11"/>
           <p:cNvSpPr txBox="1"/>
           <p:nvPr/>
         </p:nvSpPr>
@@ -13771,7 +14055,7 @@
       </p:sp>
       <p:sp>
         <p:nvSpPr>
-          <p:cNvPr id="12" name="Rounded Rectangle 11"/>
+          <p:cNvPr id="13" name="Rounded Rectangle 12"/>
           <p:cNvSpPr/>
           <p:nvPr/>
         </p:nvSpPr>
@@ -13817,7 +14101,7 @@
       </p:sp>
       <p:sp>
         <p:nvSpPr>
-          <p:cNvPr id="13" name="TextBox 12"/>
+          <p:cNvPr id="14" name="TextBox 13"/>
           <p:cNvSpPr txBox="1"/>
           <p:nvPr/>
         </p:nvSpPr>
@@ -13864,7 +14148,7 @@
       </p:sp>
       <p:sp>
         <p:nvSpPr>
-          <p:cNvPr id="14" name="Rounded Rectangle 13"/>
+          <p:cNvPr id="15" name="Rounded Rectangle 14"/>
           <p:cNvSpPr/>
           <p:nvPr/>
         </p:nvSpPr>
@@ -13910,7 +14194,7 @@
       </p:sp>
       <p:sp>
         <p:nvSpPr>
-          <p:cNvPr id="15" name="TextBox 14"/>
+          <p:cNvPr id="16" name="TextBox 15"/>
           <p:cNvSpPr txBox="1"/>
           <p:nvPr/>
         </p:nvSpPr>
@@ -13957,7 +14241,7 @@
       </p:sp>
       <p:sp>
         <p:nvSpPr>
-          <p:cNvPr id="16" name="Rounded Rectangle 15"/>
+          <p:cNvPr id="17" name="Rounded Rectangle 16"/>
           <p:cNvSpPr/>
           <p:nvPr/>
         </p:nvSpPr>
@@ -14003,7 +14287,7 @@
       </p:sp>
       <p:sp>
         <p:nvSpPr>
-          <p:cNvPr id="17" name="TextBox 16"/>
+          <p:cNvPr id="18" name="TextBox 17"/>
           <p:cNvSpPr txBox="1"/>
           <p:nvPr/>
         </p:nvSpPr>
@@ -14050,7 +14334,7 @@
       </p:sp>
       <p:sp>
         <p:nvSpPr>
-          <p:cNvPr id="18" name="Rounded Rectangle 17"/>
+          <p:cNvPr id="19" name="Rounded Rectangle 18"/>
           <p:cNvSpPr/>
           <p:nvPr/>
         </p:nvSpPr>
@@ -14104,7 +14388,7 @@
       </p:sp>
       <p:sp>
         <p:nvSpPr>
-          <p:cNvPr id="19" name="Rectangle 18"/>
+          <p:cNvPr id="20" name="Rectangle 19"/>
           <p:cNvSpPr/>
           <p:nvPr/>
         </p:nvSpPr>
@@ -14148,7 +14432,7 @@
       </p:sp>
       <p:sp>
         <p:nvSpPr>
-          <p:cNvPr id="20" name="TextBox 19"/>
+          <p:cNvPr id="21" name="TextBox 20"/>
           <p:cNvSpPr txBox="1"/>
           <p:nvPr/>
         </p:nvSpPr>
@@ -14195,7 +14479,7 @@
       </p:sp>
       <p:sp>
         <p:nvSpPr>
-          <p:cNvPr id="21" name="Rounded Rectangle 20"/>
+          <p:cNvPr id="22" name="Rounded Rectangle 21"/>
           <p:cNvSpPr/>
           <p:nvPr/>
         </p:nvSpPr>
@@ -14241,7 +14525,7 @@
       </p:sp>
       <p:sp>
         <p:nvSpPr>
-          <p:cNvPr id="22" name="TextBox 21"/>
+          <p:cNvPr id="23" name="TextBox 22"/>
           <p:cNvSpPr txBox="1"/>
           <p:nvPr/>
         </p:nvSpPr>
@@ -14288,7 +14572,7 @@
       </p:sp>
       <p:sp>
         <p:nvSpPr>
-          <p:cNvPr id="23" name="Rounded Rectangle 22"/>
+          <p:cNvPr id="24" name="Rounded Rectangle 23"/>
           <p:cNvSpPr/>
           <p:nvPr/>
         </p:nvSpPr>
@@ -14334,7 +14618,7 @@
       </p:sp>
       <p:sp>
         <p:nvSpPr>
-          <p:cNvPr id="24" name="TextBox 23"/>
+          <p:cNvPr id="25" name="TextBox 24"/>
           <p:cNvSpPr txBox="1"/>
           <p:nvPr/>
         </p:nvSpPr>
@@ -14381,7 +14665,7 @@
       </p:sp>
       <p:sp>
         <p:nvSpPr>
-          <p:cNvPr id="25" name="Rounded Rectangle 24"/>
+          <p:cNvPr id="26" name="Rounded Rectangle 25"/>
           <p:cNvSpPr/>
           <p:nvPr/>
         </p:nvSpPr>
@@ -14427,7 +14711,7 @@
       </p:sp>
       <p:sp>
         <p:nvSpPr>
-          <p:cNvPr id="26" name="TextBox 25"/>
+          <p:cNvPr id="27" name="TextBox 26"/>
           <p:cNvSpPr txBox="1"/>
           <p:nvPr/>
         </p:nvSpPr>
@@ -14474,7 +14758,7 @@
       </p:sp>
       <p:sp>
         <p:nvSpPr>
-          <p:cNvPr id="27" name="Rounded Rectangle 26"/>
+          <p:cNvPr id="28" name="Rounded Rectangle 27"/>
           <p:cNvSpPr/>
           <p:nvPr/>
         </p:nvSpPr>
@@ -14528,7 +14812,7 @@
       </p:sp>
       <p:sp>
         <p:nvSpPr>
-          <p:cNvPr id="28" name="Rectangle 27"/>
+          <p:cNvPr id="29" name="Rectangle 28"/>
           <p:cNvSpPr/>
           <p:nvPr/>
         </p:nvSpPr>
@@ -14572,7 +14856,7 @@
       </p:sp>
       <p:sp>
         <p:nvSpPr>
-          <p:cNvPr id="29" name="TextBox 28"/>
+          <p:cNvPr id="30" name="TextBox 29"/>
           <p:cNvSpPr txBox="1"/>
           <p:nvPr/>
         </p:nvSpPr>
@@ -14619,7 +14903,7 @@
       </p:sp>
       <p:sp>
         <p:nvSpPr>
-          <p:cNvPr id="30" name="Rounded Rectangle 29"/>
+          <p:cNvPr id="31" name="Rounded Rectangle 30"/>
           <p:cNvSpPr/>
           <p:nvPr/>
         </p:nvSpPr>
@@ -14665,7 +14949,7 @@
       </p:sp>
       <p:sp>
         <p:nvSpPr>
-          <p:cNvPr id="31" name="TextBox 30"/>
+          <p:cNvPr id="32" name="TextBox 31"/>
           <p:cNvSpPr txBox="1"/>
           <p:nvPr/>
         </p:nvSpPr>
@@ -14712,7 +14996,7 @@
       </p:sp>
       <p:sp>
         <p:nvSpPr>
-          <p:cNvPr id="32" name="Rounded Rectangle 31"/>
+          <p:cNvPr id="33" name="Rounded Rectangle 32"/>
           <p:cNvSpPr/>
           <p:nvPr/>
         </p:nvSpPr>
@@ -14758,7 +15042,7 @@
       </p:sp>
       <p:sp>
         <p:nvSpPr>
-          <p:cNvPr id="33" name="TextBox 32"/>
+          <p:cNvPr id="34" name="TextBox 33"/>
           <p:cNvSpPr txBox="1"/>
           <p:nvPr/>
         </p:nvSpPr>
@@ -14805,7 +15089,7 @@
       </p:sp>
       <p:sp>
         <p:nvSpPr>
-          <p:cNvPr id="34" name="Rounded Rectangle 33"/>
+          <p:cNvPr id="35" name="Rounded Rectangle 34"/>
           <p:cNvSpPr/>
           <p:nvPr/>
         </p:nvSpPr>
@@ -14851,7 +15135,7 @@
       </p:sp>
       <p:sp>
         <p:nvSpPr>
-          <p:cNvPr id="35" name="TextBox 34"/>
+          <p:cNvPr id="36" name="TextBox 35"/>
           <p:cNvSpPr txBox="1"/>
           <p:nvPr/>
         </p:nvSpPr>
@@ -14898,7 +15182,7 @@
       </p:sp>
       <p:sp>
         <p:nvSpPr>
-          <p:cNvPr id="36" name="Rounded Rectangle 35"/>
+          <p:cNvPr id="37" name="Rounded Rectangle 36"/>
           <p:cNvSpPr/>
           <p:nvPr/>
         </p:nvSpPr>
@@ -14952,7 +15236,7 @@
       </p:sp>
       <p:sp>
         <p:nvSpPr>
-          <p:cNvPr id="37" name="Rectangle 36"/>
+          <p:cNvPr id="38" name="Rectangle 37"/>
           <p:cNvSpPr/>
           <p:nvPr/>
         </p:nvSpPr>
@@ -14996,7 +15280,7 @@
       </p:sp>
       <p:sp>
         <p:nvSpPr>
-          <p:cNvPr id="38" name="TextBox 37"/>
+          <p:cNvPr id="39" name="TextBox 38"/>
           <p:cNvSpPr txBox="1"/>
           <p:nvPr/>
         </p:nvSpPr>
@@ -15043,7 +15327,7 @@
       </p:sp>
       <p:sp>
         <p:nvSpPr>
-          <p:cNvPr id="39" name="Rounded Rectangle 38"/>
+          <p:cNvPr id="40" name="Rounded Rectangle 39"/>
           <p:cNvSpPr/>
           <p:nvPr/>
         </p:nvSpPr>
@@ -15089,7 +15373,7 @@
       </p:sp>
       <p:sp>
         <p:nvSpPr>
-          <p:cNvPr id="40" name="TextBox 39"/>
+          <p:cNvPr id="41" name="TextBox 40"/>
           <p:cNvSpPr txBox="1"/>
           <p:nvPr/>
         </p:nvSpPr>
@@ -15136,7 +15420,7 @@
       </p:sp>
       <p:sp>
         <p:nvSpPr>
-          <p:cNvPr id="41" name="Rounded Rectangle 40"/>
+          <p:cNvPr id="42" name="Rounded Rectangle 41"/>
           <p:cNvSpPr/>
           <p:nvPr/>
         </p:nvSpPr>
@@ -15182,7 +15466,7 @@
       </p:sp>
       <p:sp>
         <p:nvSpPr>
-          <p:cNvPr id="42" name="TextBox 41"/>
+          <p:cNvPr id="43" name="TextBox 42"/>
           <p:cNvSpPr txBox="1"/>
           <p:nvPr/>
         </p:nvSpPr>
@@ -15229,7 +15513,7 @@
       </p:sp>
       <p:sp>
         <p:nvSpPr>
-          <p:cNvPr id="43" name="Rounded Rectangle 42"/>
+          <p:cNvPr id="44" name="Rounded Rectangle 43"/>
           <p:cNvSpPr/>
           <p:nvPr/>
         </p:nvSpPr>
@@ -15275,7 +15559,7 @@
       </p:sp>
       <p:sp>
         <p:nvSpPr>
-          <p:cNvPr id="44" name="TextBox 43"/>
+          <p:cNvPr id="45" name="TextBox 44"/>
           <p:cNvSpPr txBox="1"/>
           <p:nvPr/>
         </p:nvSpPr>
@@ -15382,9 +15666,33 @@
           </a:p>
         </p:txBody>
       </p:sp>
-      <p:sp>
-        <p:nvSpPr>
-          <p:cNvPr id="3" name="TextBox 2"/>
+      <p:pic>
+        <p:nvPicPr>
+          <p:cNvPr id="3" name="college-logo" descr="logo-mark.png"/>
+          <p:cNvPicPr>
+            <a:picLocks noChangeAspect="1"/>
+          </p:cNvPicPr>
+          <p:nvPr/>
+        </p:nvPicPr>
+        <p:blipFill>
+          <a:blip r:embed="rId2"/>
+          <a:stretch>
+            <a:fillRect/>
+          </a:stretch>
+        </p:blipFill>
+        <p:spPr>
+          <a:xfrm>
+            <a:off x="11203333" y="6199632"/>
+            <a:ext cx="275129" cy="310896"/>
+          </a:xfrm>
+          <a:prstGeom prst="rect">
+            <a:avLst/>
+          </a:prstGeom>
+        </p:spPr>
+      </p:pic>
+      <p:sp>
+        <p:nvSpPr>
+          <p:cNvPr id="4" name="TextBox 3"/>
           <p:cNvSpPr txBox="1"/>
           <p:nvPr/>
         </p:nvSpPr>
@@ -15453,13 +15761,13 @@
       </p:sp>
       <p:sp>
         <p:nvSpPr>
-          <p:cNvPr id="4" name="TextBox 3"/>
+          <p:cNvPr id="5" name="TextBox 4"/>
           <p:cNvSpPr txBox="1"/>
           <p:nvPr/>
         </p:nvSpPr>
         <p:spPr>
           <a:xfrm>
-            <a:off x="8826703" y="6272784"/>
+            <a:off x="8240677" y="6272784"/>
             <a:ext cx="2651760" cy="219456"/>
           </a:xfrm>
           <a:prstGeom prst="rect">
@@ -15522,7 +15830,7 @@
       </p:sp>
       <p:sp>
         <p:nvSpPr>
-          <p:cNvPr id="5" name="TextBox 4"/>
+          <p:cNvPr id="6" name="TextBox 5"/>
           <p:cNvSpPr txBox="1"/>
           <p:nvPr/>
         </p:nvSpPr>
@@ -15569,7 +15877,7 @@
       </p:sp>
       <p:sp>
         <p:nvSpPr>
-          <p:cNvPr id="6" name="TextBox 5"/>
+          <p:cNvPr id="7" name="TextBox 6"/>
           <p:cNvSpPr txBox="1"/>
           <p:nvPr/>
         </p:nvSpPr>
@@ -15616,7 +15924,7 @@
       </p:sp>
       <p:sp>
         <p:nvSpPr>
-          <p:cNvPr id="7" name="Rectangle 6"/>
+          <p:cNvPr id="8" name="Rectangle 7"/>
           <p:cNvSpPr/>
           <p:nvPr/>
         </p:nvSpPr>
@@ -15660,7 +15968,7 @@
       </p:sp>
       <p:sp>
         <p:nvSpPr>
-          <p:cNvPr id="8" name="Rounded Rectangle 7"/>
+          <p:cNvPr id="9" name="Rounded Rectangle 8"/>
           <p:cNvSpPr/>
           <p:nvPr/>
         </p:nvSpPr>
@@ -15714,7 +16022,7 @@
       </p:sp>
       <p:sp>
         <p:nvSpPr>
-          <p:cNvPr id="9" name="Rectangle 8"/>
+          <p:cNvPr id="10" name="Rectangle 9"/>
           <p:cNvSpPr/>
           <p:nvPr/>
         </p:nvSpPr>
@@ -15758,7 +16066,7 @@
       </p:sp>
       <p:sp>
         <p:nvSpPr>
-          <p:cNvPr id="10" name="Rounded Rectangle 9"/>
+          <p:cNvPr id="11" name="Rounded Rectangle 10"/>
           <p:cNvSpPr/>
           <p:nvPr/>
         </p:nvSpPr>
@@ -15825,7 +16133,7 @@
       </p:sp>
       <p:sp>
         <p:nvSpPr>
-          <p:cNvPr id="11" name="TextBox 10"/>
+          <p:cNvPr id="12" name="TextBox 11"/>
           <p:cNvSpPr txBox="1"/>
           <p:nvPr/>
         </p:nvSpPr>
@@ -15872,7 +16180,7 @@
       </p:sp>
       <p:sp>
         <p:nvSpPr>
-          <p:cNvPr id="12" name="Rectangle 11"/>
+          <p:cNvPr id="13" name="Rectangle 12"/>
           <p:cNvSpPr/>
           <p:nvPr/>
         </p:nvSpPr>
@@ -15916,7 +16224,7 @@
       </p:sp>
       <p:sp>
         <p:nvSpPr>
-          <p:cNvPr id="13" name="Rounded Rectangle 12"/>
+          <p:cNvPr id="14" name="Rounded Rectangle 13"/>
           <p:cNvSpPr/>
           <p:nvPr/>
         </p:nvSpPr>
@@ -15962,7 +16270,7 @@
       </p:sp>
       <p:sp>
         <p:nvSpPr>
-          <p:cNvPr id="14" name="TextBox 13"/>
+          <p:cNvPr id="15" name="TextBox 14"/>
           <p:cNvSpPr txBox="1"/>
           <p:nvPr/>
         </p:nvSpPr>
@@ -16009,7 +16317,7 @@
       </p:sp>
       <p:sp>
         <p:nvSpPr>
-          <p:cNvPr id="15" name="Rounded Rectangle 14"/>
+          <p:cNvPr id="16" name="Rounded Rectangle 15"/>
           <p:cNvSpPr/>
           <p:nvPr/>
         </p:nvSpPr>
@@ -16055,7 +16363,7 @@
       </p:sp>
       <p:sp>
         <p:nvSpPr>
-          <p:cNvPr id="16" name="TextBox 15"/>
+          <p:cNvPr id="17" name="TextBox 16"/>
           <p:cNvSpPr txBox="1"/>
           <p:nvPr/>
         </p:nvSpPr>
@@ -16102,7 +16410,7 @@
       </p:sp>
       <p:sp>
         <p:nvSpPr>
-          <p:cNvPr id="17" name="Rounded Rectangle 16"/>
+          <p:cNvPr id="18" name="Rounded Rectangle 17"/>
           <p:cNvSpPr/>
           <p:nvPr/>
         </p:nvSpPr>
@@ -16148,7 +16456,7 @@
       </p:sp>
       <p:sp>
         <p:nvSpPr>
-          <p:cNvPr id="18" name="TextBox 17"/>
+          <p:cNvPr id="19" name="TextBox 18"/>
           <p:cNvSpPr txBox="1"/>
           <p:nvPr/>
         </p:nvSpPr>
@@ -16195,7 +16503,7 @@
       </p:sp>
       <p:sp>
         <p:nvSpPr>
-          <p:cNvPr id="19" name="Rounded Rectangle 18"/>
+          <p:cNvPr id="20" name="Rounded Rectangle 19"/>
           <p:cNvSpPr/>
           <p:nvPr/>
         </p:nvSpPr>
@@ -16241,7 +16549,7 @@
       </p:sp>
       <p:sp>
         <p:nvSpPr>
-          <p:cNvPr id="20" name="TextBox 19"/>
+          <p:cNvPr id="21" name="TextBox 20"/>
           <p:cNvSpPr txBox="1"/>
           <p:nvPr/>
         </p:nvSpPr>
@@ -16288,7 +16596,7 @@
       </p:sp>
       <p:sp>
         <p:nvSpPr>
-          <p:cNvPr id="21" name="Rounded Rectangle 20"/>
+          <p:cNvPr id="22" name="Rounded Rectangle 21"/>
           <p:cNvSpPr/>
           <p:nvPr/>
         </p:nvSpPr>
@@ -16334,7 +16642,7 @@
       </p:sp>
       <p:sp>
         <p:nvSpPr>
-          <p:cNvPr id="22" name="TextBox 21"/>
+          <p:cNvPr id="23" name="TextBox 22"/>
           <p:cNvSpPr txBox="1"/>
           <p:nvPr/>
         </p:nvSpPr>
@@ -16381,7 +16689,7 @@
       </p:sp>
       <p:sp>
         <p:nvSpPr>
-          <p:cNvPr id="23" name="Rounded Rectangle 22"/>
+          <p:cNvPr id="24" name="Rounded Rectangle 23"/>
           <p:cNvSpPr/>
           <p:nvPr/>
         </p:nvSpPr>
@@ -16435,7 +16743,7 @@
       </p:sp>
       <p:sp>
         <p:nvSpPr>
-          <p:cNvPr id="24" name="Rectangle 23"/>
+          <p:cNvPr id="25" name="Rectangle 24"/>
           <p:cNvSpPr/>
           <p:nvPr/>
         </p:nvSpPr>
@@ -16479,7 +16787,7 @@
       </p:sp>
       <p:sp>
         <p:nvSpPr>
-          <p:cNvPr id="25" name="Rounded Rectangle 24"/>
+          <p:cNvPr id="26" name="Rounded Rectangle 25"/>
           <p:cNvSpPr/>
           <p:nvPr/>
         </p:nvSpPr>
@@ -16546,7 +16854,7 @@
       </p:sp>
       <p:sp>
         <p:nvSpPr>
-          <p:cNvPr id="26" name="TextBox 25"/>
+          <p:cNvPr id="27" name="TextBox 26"/>
           <p:cNvSpPr txBox="1"/>
           <p:nvPr/>
         </p:nvSpPr>
@@ -16593,7 +16901,7 @@
       </p:sp>
       <p:sp>
         <p:nvSpPr>
-          <p:cNvPr id="27" name="Rectangle 26"/>
+          <p:cNvPr id="28" name="Rectangle 27"/>
           <p:cNvSpPr/>
           <p:nvPr/>
         </p:nvSpPr>
@@ -16637,7 +16945,7 @@
       </p:sp>
       <p:sp>
         <p:nvSpPr>
-          <p:cNvPr id="28" name="Rounded Rectangle 27"/>
+          <p:cNvPr id="29" name="Rounded Rectangle 28"/>
           <p:cNvSpPr/>
           <p:nvPr/>
         </p:nvSpPr>
@@ -16683,7 +16991,7 @@
       </p:sp>
       <p:sp>
         <p:nvSpPr>
-          <p:cNvPr id="29" name="TextBox 28"/>
+          <p:cNvPr id="30" name="TextBox 29"/>
           <p:cNvSpPr txBox="1"/>
           <p:nvPr/>
         </p:nvSpPr>
@@ -16730,7 +17038,7 @@
       </p:sp>
       <p:sp>
         <p:nvSpPr>
-          <p:cNvPr id="30" name="Rounded Rectangle 29"/>
+          <p:cNvPr id="31" name="Rounded Rectangle 30"/>
           <p:cNvSpPr/>
           <p:nvPr/>
         </p:nvSpPr>
@@ -16776,7 +17084,7 @@
       </p:sp>
       <p:sp>
         <p:nvSpPr>
-          <p:cNvPr id="31" name="TextBox 30"/>
+          <p:cNvPr id="32" name="TextBox 31"/>
           <p:cNvSpPr txBox="1"/>
           <p:nvPr/>
         </p:nvSpPr>
@@ -16823,7 +17131,7 @@
       </p:sp>
       <p:sp>
         <p:nvSpPr>
-          <p:cNvPr id="32" name="Rounded Rectangle 31"/>
+          <p:cNvPr id="33" name="Rounded Rectangle 32"/>
           <p:cNvSpPr/>
           <p:nvPr/>
         </p:nvSpPr>
@@ -16869,7 +17177,7 @@
       </p:sp>
       <p:sp>
         <p:nvSpPr>
-          <p:cNvPr id="33" name="TextBox 32"/>
+          <p:cNvPr id="34" name="TextBox 33"/>
           <p:cNvSpPr txBox="1"/>
           <p:nvPr/>
         </p:nvSpPr>
@@ -16916,7 +17224,7 @@
       </p:sp>
       <p:sp>
         <p:nvSpPr>
-          <p:cNvPr id="34" name="Rounded Rectangle 33"/>
+          <p:cNvPr id="35" name="Rounded Rectangle 34"/>
           <p:cNvSpPr/>
           <p:nvPr/>
         </p:nvSpPr>
@@ -16962,7 +17270,7 @@
       </p:sp>
       <p:sp>
         <p:nvSpPr>
-          <p:cNvPr id="35" name="TextBox 34"/>
+          <p:cNvPr id="36" name="TextBox 35"/>
           <p:cNvSpPr txBox="1"/>
           <p:nvPr/>
         </p:nvSpPr>
@@ -17009,7 +17317,7 @@
       </p:sp>
       <p:sp>
         <p:nvSpPr>
-          <p:cNvPr id="36" name="Rounded Rectangle 35"/>
+          <p:cNvPr id="37" name="Rounded Rectangle 36"/>
           <p:cNvSpPr/>
           <p:nvPr/>
         </p:nvSpPr>
@@ -17055,7 +17363,7 @@
       </p:sp>
       <p:sp>
         <p:nvSpPr>
-          <p:cNvPr id="37" name="TextBox 36"/>
+          <p:cNvPr id="38" name="TextBox 37"/>
           <p:cNvSpPr txBox="1"/>
           <p:nvPr/>
         </p:nvSpPr>
@@ -17102,7 +17410,7 @@
       </p:sp>
       <p:sp>
         <p:nvSpPr>
-          <p:cNvPr id="38" name="Rounded Rectangle 37"/>
+          <p:cNvPr id="39" name="Rounded Rectangle 38"/>
           <p:cNvSpPr/>
           <p:nvPr/>
         </p:nvSpPr>
@@ -17616,6 +17924,76 @@
           </a:p>
         </p:txBody>
       </p:sp>
+      <p:sp>
+        <p:nvSpPr>
+          <p:cNvPr id="11" name="logo-plate"/>
+          <p:cNvSpPr/>
+          <p:nvPr/>
+        </p:nvSpPr>
+        <p:spPr>
+          <a:xfrm>
+            <a:off x="9512190" y="539496"/>
+            <a:ext cx="1993704" cy="987552"/>
+          </a:xfrm>
+          <a:prstGeom prst="roundRect">
+            <a:avLst>
+              <a:gd name="adj" fmla="val 14000"/>
+            </a:avLst>
+          </a:prstGeom>
+          <a:solidFill>
+            <a:srgbClr val="FFFFFF"/>
+          </a:solidFill>
+          <a:ln>
+            <a:noFill/>
+          </a:ln>
+          <a:effectLst/>
+        </p:spPr>
+        <p:style>
+          <a:lnRef idx="1">
+            <a:schemeClr val="accent1"/>
+          </a:lnRef>
+          <a:fillRef idx="3">
+            <a:schemeClr val="accent1"/>
+          </a:fillRef>
+          <a:effectRef idx="2">
+            <a:schemeClr val="accent1"/>
+          </a:effectRef>
+          <a:fontRef idx="minor">
+            <a:schemeClr val="lt1"/>
+          </a:fontRef>
+        </p:style>
+        <p:txBody>
+          <a:bodyPr rtlCol="0" anchor="ctr" wrap="square"/>
+          <a:lstStyle/>
+          <a:p>
+            <a:pPr algn="ctr"/>
+          </a:p>
+        </p:txBody>
+      </p:sp>
+      <p:pic>
+        <p:nvPicPr>
+          <p:cNvPr id="12" name="college-logo" descr="logo-full.png"/>
+          <p:cNvPicPr>
+            <a:picLocks noChangeAspect="1"/>
+          </p:cNvPicPr>
+          <p:nvPr/>
+        </p:nvPicPr>
+        <p:blipFill>
+          <a:blip r:embed="rId2"/>
+          <a:stretch>
+            <a:fillRect/>
+          </a:stretch>
+        </p:blipFill>
+        <p:spPr>
+          <a:xfrm>
+            <a:off x="9631062" y="658368"/>
+            <a:ext cx="1755961" cy="749808"/>
+          </a:xfrm>
+          <a:prstGeom prst="rect">
+            <a:avLst/>
+          </a:prstGeom>
+        </p:spPr>
+      </p:pic>
     </p:spTree>
   </p:cSld>
   <p:clrMapOvr>
@@ -17678,9 +18056,33 @@
           </a:p>
         </p:txBody>
       </p:sp>
-      <p:sp>
-        <p:nvSpPr>
-          <p:cNvPr id="3" name="TextBox 2"/>
+      <p:pic>
+        <p:nvPicPr>
+          <p:cNvPr id="3" name="college-logo" descr="logo-mark.png"/>
+          <p:cNvPicPr>
+            <a:picLocks noChangeAspect="1"/>
+          </p:cNvPicPr>
+          <p:nvPr/>
+        </p:nvPicPr>
+        <p:blipFill>
+          <a:blip r:embed="rId2"/>
+          <a:stretch>
+            <a:fillRect/>
+          </a:stretch>
+        </p:blipFill>
+        <p:spPr>
+          <a:xfrm>
+            <a:off x="11203333" y="6199632"/>
+            <a:ext cx="275129" cy="310896"/>
+          </a:xfrm>
+          <a:prstGeom prst="rect">
+            <a:avLst/>
+          </a:prstGeom>
+        </p:spPr>
+      </p:pic>
+      <p:sp>
+        <p:nvSpPr>
+          <p:cNvPr id="4" name="TextBox 3"/>
           <p:cNvSpPr txBox="1"/>
           <p:nvPr/>
         </p:nvSpPr>
@@ -17749,13 +18151,13 @@
       </p:sp>
       <p:sp>
         <p:nvSpPr>
-          <p:cNvPr id="4" name="TextBox 3"/>
+          <p:cNvPr id="5" name="TextBox 4"/>
           <p:cNvSpPr txBox="1"/>
           <p:nvPr/>
         </p:nvSpPr>
         <p:spPr>
           <a:xfrm>
-            <a:off x="8826703" y="6272784"/>
+            <a:off x="8240677" y="6272784"/>
             <a:ext cx="2651760" cy="219456"/>
           </a:xfrm>
           <a:prstGeom prst="rect">
@@ -17818,7 +18220,7 @@
       </p:sp>
       <p:sp>
         <p:nvSpPr>
-          <p:cNvPr id="5" name="TextBox 4"/>
+          <p:cNvPr id="6" name="TextBox 5"/>
           <p:cNvSpPr txBox="1"/>
           <p:nvPr/>
         </p:nvSpPr>
@@ -17865,7 +18267,7 @@
       </p:sp>
       <p:sp>
         <p:nvSpPr>
-          <p:cNvPr id="6" name="TextBox 5"/>
+          <p:cNvPr id="7" name="TextBox 6"/>
           <p:cNvSpPr txBox="1"/>
           <p:nvPr/>
         </p:nvSpPr>
@@ -17912,7 +18314,7 @@
       </p:sp>
       <p:sp>
         <p:nvSpPr>
-          <p:cNvPr id="7" name="Rectangle 6"/>
+          <p:cNvPr id="8" name="Rectangle 7"/>
           <p:cNvSpPr/>
           <p:nvPr/>
         </p:nvSpPr>
@@ -17956,7 +18358,7 @@
       </p:sp>
       <p:sp>
         <p:nvSpPr>
-          <p:cNvPr id="8" name="TextBox 7"/>
+          <p:cNvPr id="9" name="TextBox 8"/>
           <p:cNvSpPr txBox="1"/>
           <p:nvPr/>
         </p:nvSpPr>
@@ -18003,7 +18405,7 @@
       </p:sp>
       <p:sp>
         <p:nvSpPr>
-          <p:cNvPr id="9" name="Rectangle 8"/>
+          <p:cNvPr id="10" name="Rectangle 9"/>
           <p:cNvSpPr/>
           <p:nvPr/>
         </p:nvSpPr>
@@ -18047,7 +18449,7 @@
       </p:sp>
       <p:sp>
         <p:nvSpPr>
-          <p:cNvPr id="10" name="Rounded Rectangle 9"/>
+          <p:cNvPr id="11" name="Rounded Rectangle 10"/>
           <p:cNvSpPr/>
           <p:nvPr/>
         </p:nvSpPr>
@@ -18093,7 +18495,7 @@
       </p:sp>
       <p:sp>
         <p:nvSpPr>
-          <p:cNvPr id="11" name="TextBox 10"/>
+          <p:cNvPr id="12" name="TextBox 11"/>
           <p:cNvSpPr txBox="1"/>
           <p:nvPr/>
         </p:nvSpPr>
@@ -18140,7 +18542,7 @@
       </p:sp>
       <p:sp>
         <p:nvSpPr>
-          <p:cNvPr id="12" name="Rounded Rectangle 11"/>
+          <p:cNvPr id="13" name="Rounded Rectangle 12"/>
           <p:cNvSpPr/>
           <p:nvPr/>
         </p:nvSpPr>
@@ -18186,7 +18588,7 @@
       </p:sp>
       <p:sp>
         <p:nvSpPr>
-          <p:cNvPr id="13" name="TextBox 12"/>
+          <p:cNvPr id="14" name="TextBox 13"/>
           <p:cNvSpPr txBox="1"/>
           <p:nvPr/>
         </p:nvSpPr>
@@ -18233,7 +18635,7 @@
       </p:sp>
       <p:sp>
         <p:nvSpPr>
-          <p:cNvPr id="14" name="Rounded Rectangle 13"/>
+          <p:cNvPr id="15" name="Rounded Rectangle 14"/>
           <p:cNvSpPr/>
           <p:nvPr/>
         </p:nvSpPr>
@@ -18279,7 +18681,7 @@
       </p:sp>
       <p:sp>
         <p:nvSpPr>
-          <p:cNvPr id="15" name="TextBox 14"/>
+          <p:cNvPr id="16" name="TextBox 15"/>
           <p:cNvSpPr txBox="1"/>
           <p:nvPr/>
         </p:nvSpPr>
@@ -18326,7 +18728,7 @@
       </p:sp>
       <p:sp>
         <p:nvSpPr>
-          <p:cNvPr id="16" name="Rounded Rectangle 15"/>
+          <p:cNvPr id="17" name="Rounded Rectangle 16"/>
           <p:cNvSpPr/>
           <p:nvPr/>
         </p:nvSpPr>
@@ -18372,7 +18774,7 @@
       </p:sp>
       <p:sp>
         <p:nvSpPr>
-          <p:cNvPr id="17" name="TextBox 16"/>
+          <p:cNvPr id="18" name="TextBox 17"/>
           <p:cNvSpPr txBox="1"/>
           <p:nvPr/>
         </p:nvSpPr>
@@ -18419,7 +18821,7 @@
       </p:sp>
       <p:sp>
         <p:nvSpPr>
-          <p:cNvPr id="18" name="Rounded Rectangle 17"/>
+          <p:cNvPr id="19" name="Rounded Rectangle 18"/>
           <p:cNvSpPr/>
           <p:nvPr/>
         </p:nvSpPr>
@@ -18465,7 +18867,7 @@
       </p:sp>
       <p:sp>
         <p:nvSpPr>
-          <p:cNvPr id="19" name="TextBox 18"/>
+          <p:cNvPr id="20" name="TextBox 19"/>
           <p:cNvSpPr txBox="1"/>
           <p:nvPr/>
         </p:nvSpPr>
@@ -18512,7 +18914,7 @@
       </p:sp>
       <p:sp>
         <p:nvSpPr>
-          <p:cNvPr id="20" name="Rounded Rectangle 19"/>
+          <p:cNvPr id="21" name="Rounded Rectangle 20"/>
           <p:cNvSpPr/>
           <p:nvPr/>
         </p:nvSpPr>
@@ -18566,7 +18968,7 @@
       </p:sp>
       <p:sp>
         <p:nvSpPr>
-          <p:cNvPr id="21" name="Rectangle 20"/>
+          <p:cNvPr id="22" name="Rectangle 21"/>
           <p:cNvSpPr/>
           <p:nvPr/>
         </p:nvSpPr>
@@ -18610,7 +19012,7 @@
       </p:sp>
       <p:sp>
         <p:nvSpPr>
-          <p:cNvPr id="22" name="TextBox 21"/>
+          <p:cNvPr id="23" name="TextBox 22"/>
           <p:cNvSpPr txBox="1"/>
           <p:nvPr/>
         </p:nvSpPr>
@@ -18657,7 +19059,7 @@
       </p:sp>
       <p:sp>
         <p:nvSpPr>
-          <p:cNvPr id="23" name="TextBox 22"/>
+          <p:cNvPr id="24" name="TextBox 23"/>
           <p:cNvSpPr txBox="1"/>
           <p:nvPr/>
         </p:nvSpPr>
@@ -18704,7 +19106,7 @@
       </p:sp>
       <p:sp>
         <p:nvSpPr>
-          <p:cNvPr id="24" name="Rounded Rectangle 23"/>
+          <p:cNvPr id="25" name="Rounded Rectangle 24"/>
           <p:cNvSpPr/>
           <p:nvPr/>
         </p:nvSpPr>
@@ -18758,7 +19160,7 @@
       </p:sp>
       <p:sp>
         <p:nvSpPr>
-          <p:cNvPr id="25" name="Rectangle 24"/>
+          <p:cNvPr id="26" name="Rectangle 25"/>
           <p:cNvSpPr/>
           <p:nvPr/>
         </p:nvSpPr>
@@ -18802,7 +19204,7 @@
       </p:sp>
       <p:sp>
         <p:nvSpPr>
-          <p:cNvPr id="26" name="TextBox 25"/>
+          <p:cNvPr id="27" name="TextBox 26"/>
           <p:cNvSpPr txBox="1"/>
           <p:nvPr/>
         </p:nvSpPr>
@@ -18849,7 +19251,7 @@
       </p:sp>
       <p:sp>
         <p:nvSpPr>
-          <p:cNvPr id="27" name="TextBox 26"/>
+          <p:cNvPr id="28" name="TextBox 27"/>
           <p:cNvSpPr txBox="1"/>
           <p:nvPr/>
         </p:nvSpPr>
@@ -18896,7 +19298,7 @@
       </p:sp>
       <p:sp>
         <p:nvSpPr>
-          <p:cNvPr id="28" name="Rounded Rectangle 27"/>
+          <p:cNvPr id="29" name="Rounded Rectangle 28"/>
           <p:cNvSpPr/>
           <p:nvPr/>
         </p:nvSpPr>
@@ -18950,7 +19352,7 @@
       </p:sp>
       <p:sp>
         <p:nvSpPr>
-          <p:cNvPr id="29" name="Rectangle 28"/>
+          <p:cNvPr id="30" name="Rectangle 29"/>
           <p:cNvSpPr/>
           <p:nvPr/>
         </p:nvSpPr>
@@ -18994,7 +19396,7 @@
       </p:sp>
       <p:sp>
         <p:nvSpPr>
-          <p:cNvPr id="30" name="TextBox 29"/>
+          <p:cNvPr id="31" name="TextBox 30"/>
           <p:cNvSpPr txBox="1"/>
           <p:nvPr/>
         </p:nvSpPr>
@@ -19041,7 +19443,7 @@
       </p:sp>
       <p:sp>
         <p:nvSpPr>
-          <p:cNvPr id="31" name="TextBox 30"/>
+          <p:cNvPr id="32" name="TextBox 31"/>
           <p:cNvSpPr txBox="1"/>
           <p:nvPr/>
         </p:nvSpPr>
@@ -19148,9 +19550,33 @@
           </a:p>
         </p:txBody>
       </p:sp>
-      <p:sp>
-        <p:nvSpPr>
-          <p:cNvPr id="3" name="TextBox 2"/>
+      <p:pic>
+        <p:nvPicPr>
+          <p:cNvPr id="3" name="college-logo" descr="logo-mark.png"/>
+          <p:cNvPicPr>
+            <a:picLocks noChangeAspect="1"/>
+          </p:cNvPicPr>
+          <p:nvPr/>
+        </p:nvPicPr>
+        <p:blipFill>
+          <a:blip r:embed="rId2"/>
+          <a:stretch>
+            <a:fillRect/>
+          </a:stretch>
+        </p:blipFill>
+        <p:spPr>
+          <a:xfrm>
+            <a:off x="11203333" y="6199632"/>
+            <a:ext cx="275129" cy="310896"/>
+          </a:xfrm>
+          <a:prstGeom prst="rect">
+            <a:avLst/>
+          </a:prstGeom>
+        </p:spPr>
+      </p:pic>
+      <p:sp>
+        <p:nvSpPr>
+          <p:cNvPr id="4" name="TextBox 3"/>
           <p:cNvSpPr txBox="1"/>
           <p:nvPr/>
         </p:nvSpPr>
@@ -19219,13 +19645,13 @@
       </p:sp>
       <p:sp>
         <p:nvSpPr>
-          <p:cNvPr id="4" name="TextBox 3"/>
+          <p:cNvPr id="5" name="TextBox 4"/>
           <p:cNvSpPr txBox="1"/>
           <p:nvPr/>
         </p:nvSpPr>
         <p:spPr>
           <a:xfrm>
-            <a:off x="8826703" y="6272784"/>
+            <a:off x="8240677" y="6272784"/>
             <a:ext cx="2651760" cy="219456"/>
           </a:xfrm>
           <a:prstGeom prst="rect">
@@ -19288,7 +19714,7 @@
       </p:sp>
       <p:sp>
         <p:nvSpPr>
-          <p:cNvPr id="5" name="TextBox 4"/>
+          <p:cNvPr id="6" name="TextBox 5"/>
           <p:cNvSpPr txBox="1"/>
           <p:nvPr/>
         </p:nvSpPr>
@@ -19335,7 +19761,7 @@
       </p:sp>
       <p:sp>
         <p:nvSpPr>
-          <p:cNvPr id="6" name="TextBox 5"/>
+          <p:cNvPr id="7" name="TextBox 6"/>
           <p:cNvSpPr txBox="1"/>
           <p:nvPr/>
         </p:nvSpPr>
@@ -19382,7 +19808,7 @@
       </p:sp>
       <p:sp>
         <p:nvSpPr>
-          <p:cNvPr id="7" name="Rectangle 6"/>
+          <p:cNvPr id="8" name="Rectangle 7"/>
           <p:cNvSpPr/>
           <p:nvPr/>
         </p:nvSpPr>
@@ -19426,7 +19852,7 @@
       </p:sp>
       <p:sp>
         <p:nvSpPr>
-          <p:cNvPr id="8" name="TextBox 7"/>
+          <p:cNvPr id="9" name="TextBox 8"/>
           <p:cNvSpPr txBox="1"/>
           <p:nvPr/>
         </p:nvSpPr>
@@ -19473,7 +19899,7 @@
       </p:sp>
       <p:sp>
         <p:nvSpPr>
-          <p:cNvPr id="9" name="Rectangle 8"/>
+          <p:cNvPr id="10" name="Rectangle 9"/>
           <p:cNvSpPr/>
           <p:nvPr/>
         </p:nvSpPr>
@@ -19517,7 +19943,7 @@
       </p:sp>
       <p:sp>
         <p:nvSpPr>
-          <p:cNvPr id="10" name="TextBox 9"/>
+          <p:cNvPr id="11" name="TextBox 10"/>
           <p:cNvSpPr txBox="1"/>
           <p:nvPr/>
         </p:nvSpPr>
@@ -19564,7 +19990,7 @@
       </p:sp>
       <p:sp>
         <p:nvSpPr>
-          <p:cNvPr id="11" name="TextBox 10"/>
+          <p:cNvPr id="12" name="TextBox 11"/>
           <p:cNvSpPr txBox="1"/>
           <p:nvPr/>
         </p:nvSpPr>
@@ -19635,7 +20061,7 @@
       </p:sp>
       <p:sp>
         <p:nvSpPr>
-          <p:cNvPr id="12" name="Rectangle 11"/>
+          <p:cNvPr id="13" name="Rectangle 12"/>
           <p:cNvSpPr/>
           <p:nvPr/>
         </p:nvSpPr>
@@ -19679,7 +20105,7 @@
       </p:sp>
       <p:sp>
         <p:nvSpPr>
-          <p:cNvPr id="13" name="TextBox 12"/>
+          <p:cNvPr id="14" name="TextBox 13"/>
           <p:cNvSpPr txBox="1"/>
           <p:nvPr/>
         </p:nvSpPr>
@@ -19726,7 +20152,7 @@
       </p:sp>
       <p:sp>
         <p:nvSpPr>
-          <p:cNvPr id="14" name="TextBox 13"/>
+          <p:cNvPr id="15" name="TextBox 14"/>
           <p:cNvSpPr txBox="1"/>
           <p:nvPr/>
         </p:nvSpPr>
@@ -19797,7 +20223,7 @@
       </p:sp>
       <p:sp>
         <p:nvSpPr>
-          <p:cNvPr id="15" name="Rectangle 14"/>
+          <p:cNvPr id="16" name="Rectangle 15"/>
           <p:cNvSpPr/>
           <p:nvPr/>
         </p:nvSpPr>
@@ -19841,7 +20267,7 @@
       </p:sp>
       <p:sp>
         <p:nvSpPr>
-          <p:cNvPr id="16" name="TextBox 15"/>
+          <p:cNvPr id="17" name="TextBox 16"/>
           <p:cNvSpPr txBox="1"/>
           <p:nvPr/>
         </p:nvSpPr>
@@ -19888,7 +20314,7 @@
       </p:sp>
       <p:sp>
         <p:nvSpPr>
-          <p:cNvPr id="17" name="TextBox 16"/>
+          <p:cNvPr id="18" name="TextBox 17"/>
           <p:cNvSpPr txBox="1"/>
           <p:nvPr/>
         </p:nvSpPr>
@@ -19959,7 +20385,7 @@
       </p:sp>
       <p:sp>
         <p:nvSpPr>
-          <p:cNvPr id="18" name="Rectangle 17"/>
+          <p:cNvPr id="19" name="Rectangle 18"/>
           <p:cNvSpPr/>
           <p:nvPr/>
         </p:nvSpPr>
@@ -20003,7 +20429,7 @@
       </p:sp>
       <p:sp>
         <p:nvSpPr>
-          <p:cNvPr id="19" name="TextBox 18"/>
+          <p:cNvPr id="20" name="TextBox 19"/>
           <p:cNvSpPr txBox="1"/>
           <p:nvPr/>
         </p:nvSpPr>
@@ -20050,7 +20476,7 @@
       </p:sp>
       <p:sp>
         <p:nvSpPr>
-          <p:cNvPr id="20" name="TextBox 19"/>
+          <p:cNvPr id="21" name="TextBox 20"/>
           <p:cNvSpPr txBox="1"/>
           <p:nvPr/>
         </p:nvSpPr>
@@ -20121,7 +20547,7 @@
       </p:sp>
       <p:sp>
         <p:nvSpPr>
-          <p:cNvPr id="21" name="Rectangle 20"/>
+          <p:cNvPr id="22" name="Rectangle 21"/>
           <p:cNvSpPr/>
           <p:nvPr/>
         </p:nvSpPr>
@@ -20165,7 +20591,7 @@
       </p:sp>
       <p:sp>
         <p:nvSpPr>
-          <p:cNvPr id="22" name="TextBox 21"/>
+          <p:cNvPr id="23" name="TextBox 22"/>
           <p:cNvSpPr txBox="1"/>
           <p:nvPr/>
         </p:nvSpPr>
@@ -20212,7 +20638,7 @@
       </p:sp>
       <p:sp>
         <p:nvSpPr>
-          <p:cNvPr id="23" name="TextBox 22"/>
+          <p:cNvPr id="24" name="TextBox 23"/>
           <p:cNvSpPr txBox="1"/>
           <p:nvPr/>
         </p:nvSpPr>
@@ -20283,7 +20709,7 @@
       </p:sp>
       <p:sp>
         <p:nvSpPr>
-          <p:cNvPr id="24" name="Rectangle 23"/>
+          <p:cNvPr id="25" name="Rectangle 24"/>
           <p:cNvSpPr/>
           <p:nvPr/>
         </p:nvSpPr>
@@ -20327,7 +20753,7 @@
       </p:sp>
       <p:sp>
         <p:nvSpPr>
-          <p:cNvPr id="25" name="TextBox 24"/>
+          <p:cNvPr id="26" name="TextBox 25"/>
           <p:cNvSpPr txBox="1"/>
           <p:nvPr/>
         </p:nvSpPr>
@@ -20374,7 +20800,7 @@
       </p:sp>
       <p:sp>
         <p:nvSpPr>
-          <p:cNvPr id="26" name="TextBox 25"/>
+          <p:cNvPr id="27" name="TextBox 26"/>
           <p:cNvSpPr txBox="1"/>
           <p:nvPr/>
         </p:nvSpPr>
@@ -20445,7 +20871,7 @@
       </p:sp>
       <p:sp>
         <p:nvSpPr>
-          <p:cNvPr id="27" name="Rectangle 26"/>
+          <p:cNvPr id="28" name="Rectangle 27"/>
           <p:cNvSpPr/>
           <p:nvPr/>
         </p:nvSpPr>
@@ -20489,7 +20915,7 @@
       </p:sp>
       <p:sp>
         <p:nvSpPr>
-          <p:cNvPr id="28" name="TextBox 27"/>
+          <p:cNvPr id="29" name="TextBox 28"/>
           <p:cNvSpPr txBox="1"/>
           <p:nvPr/>
         </p:nvSpPr>
@@ -20536,7 +20962,7 @@
       </p:sp>
       <p:sp>
         <p:nvSpPr>
-          <p:cNvPr id="29" name="TextBox 28"/>
+          <p:cNvPr id="30" name="TextBox 29"/>
           <p:cNvSpPr txBox="1"/>
           <p:nvPr/>
         </p:nvSpPr>
@@ -20607,7 +21033,7 @@
       </p:sp>
       <p:sp>
         <p:nvSpPr>
-          <p:cNvPr id="30" name="Rectangle 29"/>
+          <p:cNvPr id="31" name="Rectangle 30"/>
           <p:cNvSpPr/>
           <p:nvPr/>
         </p:nvSpPr>
@@ -20651,7 +21077,7 @@
       </p:sp>
       <p:sp>
         <p:nvSpPr>
-          <p:cNvPr id="31" name="TextBox 30"/>
+          <p:cNvPr id="32" name="TextBox 31"/>
           <p:cNvSpPr txBox="1"/>
           <p:nvPr/>
         </p:nvSpPr>
@@ -20698,7 +21124,7 @@
       </p:sp>
       <p:sp>
         <p:nvSpPr>
-          <p:cNvPr id="32" name="TextBox 31"/>
+          <p:cNvPr id="33" name="TextBox 32"/>
           <p:cNvSpPr txBox="1"/>
           <p:nvPr/>
         </p:nvSpPr>
@@ -20829,9 +21255,33 @@
           </a:p>
         </p:txBody>
       </p:sp>
-      <p:sp>
-        <p:nvSpPr>
-          <p:cNvPr id="3" name="TextBox 2"/>
+      <p:pic>
+        <p:nvPicPr>
+          <p:cNvPr id="3" name="college-logo" descr="logo-mark.png"/>
+          <p:cNvPicPr>
+            <a:picLocks noChangeAspect="1"/>
+          </p:cNvPicPr>
+          <p:nvPr/>
+        </p:nvPicPr>
+        <p:blipFill>
+          <a:blip r:embed="rId2"/>
+          <a:stretch>
+            <a:fillRect/>
+          </a:stretch>
+        </p:blipFill>
+        <p:spPr>
+          <a:xfrm>
+            <a:off x="11203333" y="6199632"/>
+            <a:ext cx="275129" cy="310896"/>
+          </a:xfrm>
+          <a:prstGeom prst="rect">
+            <a:avLst/>
+          </a:prstGeom>
+        </p:spPr>
+      </p:pic>
+      <p:sp>
+        <p:nvSpPr>
+          <p:cNvPr id="4" name="TextBox 3"/>
           <p:cNvSpPr txBox="1"/>
           <p:nvPr/>
         </p:nvSpPr>
@@ -20900,13 +21350,13 @@
       </p:sp>
       <p:sp>
         <p:nvSpPr>
-          <p:cNvPr id="4" name="TextBox 3"/>
+          <p:cNvPr id="5" name="TextBox 4"/>
           <p:cNvSpPr txBox="1"/>
           <p:nvPr/>
         </p:nvSpPr>
         <p:spPr>
           <a:xfrm>
-            <a:off x="8826703" y="6272784"/>
+            <a:off x="8240677" y="6272784"/>
             <a:ext cx="2651760" cy="219456"/>
           </a:xfrm>
           <a:prstGeom prst="rect">
@@ -20969,7 +21419,7 @@
       </p:sp>
       <p:sp>
         <p:nvSpPr>
-          <p:cNvPr id="5" name="TextBox 4"/>
+          <p:cNvPr id="6" name="TextBox 5"/>
           <p:cNvSpPr txBox="1"/>
           <p:nvPr/>
         </p:nvSpPr>
@@ -21016,7 +21466,7 @@
       </p:sp>
       <p:sp>
         <p:nvSpPr>
-          <p:cNvPr id="6" name="TextBox 5"/>
+          <p:cNvPr id="7" name="TextBox 6"/>
           <p:cNvSpPr txBox="1"/>
           <p:nvPr/>
         </p:nvSpPr>
@@ -21063,7 +21513,7 @@
       </p:sp>
       <p:sp>
         <p:nvSpPr>
-          <p:cNvPr id="7" name="Rectangle 6"/>
+          <p:cNvPr id="8" name="Rectangle 7"/>
           <p:cNvSpPr/>
           <p:nvPr/>
         </p:nvSpPr>
@@ -21107,7 +21557,7 @@
       </p:sp>
       <p:sp>
         <p:nvSpPr>
-          <p:cNvPr id="8" name="TextBox 7"/>
+          <p:cNvPr id="9" name="TextBox 8"/>
           <p:cNvSpPr txBox="1"/>
           <p:nvPr/>
         </p:nvSpPr>
@@ -21154,7 +21604,7 @@
       </p:sp>
       <p:sp>
         <p:nvSpPr>
-          <p:cNvPr id="9" name="Rounded Rectangle 8"/>
+          <p:cNvPr id="10" name="Rounded Rectangle 9"/>
           <p:cNvSpPr/>
           <p:nvPr/>
         </p:nvSpPr>
@@ -21208,7 +21658,7 @@
       </p:sp>
       <p:sp>
         <p:nvSpPr>
-          <p:cNvPr id="10" name="Rectangle 9"/>
+          <p:cNvPr id="11" name="Rectangle 10"/>
           <p:cNvSpPr/>
           <p:nvPr/>
         </p:nvSpPr>
@@ -21252,7 +21702,7 @@
       </p:sp>
       <p:sp>
         <p:nvSpPr>
-          <p:cNvPr id="11" name="Rounded Rectangle 10"/>
+          <p:cNvPr id="12" name="Rounded Rectangle 11"/>
           <p:cNvSpPr/>
           <p:nvPr/>
         </p:nvSpPr>
@@ -21319,7 +21769,7 @@
       </p:sp>
       <p:sp>
         <p:nvSpPr>
-          <p:cNvPr id="12" name="TextBox 11"/>
+          <p:cNvPr id="13" name="TextBox 12"/>
           <p:cNvSpPr txBox="1"/>
           <p:nvPr/>
         </p:nvSpPr>
@@ -21366,7 +21816,7 @@
       </p:sp>
       <p:sp>
         <p:nvSpPr>
-          <p:cNvPr id="13" name="Rectangle 12"/>
+          <p:cNvPr id="14" name="Rectangle 13"/>
           <p:cNvSpPr/>
           <p:nvPr/>
         </p:nvSpPr>
@@ -21410,7 +21860,7 @@
       </p:sp>
       <p:sp>
         <p:nvSpPr>
-          <p:cNvPr id="14" name="Rounded Rectangle 13"/>
+          <p:cNvPr id="15" name="Rounded Rectangle 14"/>
           <p:cNvSpPr/>
           <p:nvPr/>
         </p:nvSpPr>
@@ -21456,7 +21906,7 @@
       </p:sp>
       <p:sp>
         <p:nvSpPr>
-          <p:cNvPr id="15" name="TextBox 14"/>
+          <p:cNvPr id="16" name="TextBox 15"/>
           <p:cNvSpPr txBox="1"/>
           <p:nvPr/>
         </p:nvSpPr>
@@ -21503,7 +21953,7 @@
       </p:sp>
       <p:sp>
         <p:nvSpPr>
-          <p:cNvPr id="16" name="Rounded Rectangle 15"/>
+          <p:cNvPr id="17" name="Rounded Rectangle 16"/>
           <p:cNvSpPr/>
           <p:nvPr/>
         </p:nvSpPr>
@@ -21549,7 +21999,7 @@
       </p:sp>
       <p:sp>
         <p:nvSpPr>
-          <p:cNvPr id="17" name="TextBox 16"/>
+          <p:cNvPr id="18" name="TextBox 17"/>
           <p:cNvSpPr txBox="1"/>
           <p:nvPr/>
         </p:nvSpPr>
@@ -21596,7 +22046,7 @@
       </p:sp>
       <p:sp>
         <p:nvSpPr>
-          <p:cNvPr id="18" name="Rounded Rectangle 17"/>
+          <p:cNvPr id="19" name="Rounded Rectangle 18"/>
           <p:cNvSpPr/>
           <p:nvPr/>
         </p:nvSpPr>
@@ -21642,7 +22092,7 @@
       </p:sp>
       <p:sp>
         <p:nvSpPr>
-          <p:cNvPr id="19" name="TextBox 18"/>
+          <p:cNvPr id="20" name="TextBox 19"/>
           <p:cNvSpPr txBox="1"/>
           <p:nvPr/>
         </p:nvSpPr>
@@ -21689,7 +22139,7 @@
       </p:sp>
       <p:sp>
         <p:nvSpPr>
-          <p:cNvPr id="20" name="Rounded Rectangle 19"/>
+          <p:cNvPr id="21" name="Rounded Rectangle 20"/>
           <p:cNvSpPr/>
           <p:nvPr/>
         </p:nvSpPr>
@@ -21735,7 +22185,7 @@
       </p:sp>
       <p:sp>
         <p:nvSpPr>
-          <p:cNvPr id="21" name="TextBox 20"/>
+          <p:cNvPr id="22" name="TextBox 21"/>
           <p:cNvSpPr txBox="1"/>
           <p:nvPr/>
         </p:nvSpPr>
@@ -21782,7 +22232,7 @@
       </p:sp>
       <p:sp>
         <p:nvSpPr>
-          <p:cNvPr id="22" name="Rounded Rectangle 21"/>
+          <p:cNvPr id="23" name="Rounded Rectangle 22"/>
           <p:cNvSpPr/>
           <p:nvPr/>
         </p:nvSpPr>
@@ -21828,7 +22278,7 @@
       </p:sp>
       <p:sp>
         <p:nvSpPr>
-          <p:cNvPr id="23" name="TextBox 22"/>
+          <p:cNvPr id="24" name="TextBox 23"/>
           <p:cNvSpPr txBox="1"/>
           <p:nvPr/>
         </p:nvSpPr>
@@ -21875,7 +22325,7 @@
       </p:sp>
       <p:sp>
         <p:nvSpPr>
-          <p:cNvPr id="24" name="Rounded Rectangle 23"/>
+          <p:cNvPr id="25" name="Rounded Rectangle 24"/>
           <p:cNvSpPr/>
           <p:nvPr/>
         </p:nvSpPr>
@@ -21929,7 +22379,7 @@
       </p:sp>
       <p:sp>
         <p:nvSpPr>
-          <p:cNvPr id="25" name="Rectangle 24"/>
+          <p:cNvPr id="26" name="Rectangle 25"/>
           <p:cNvSpPr/>
           <p:nvPr/>
         </p:nvSpPr>
@@ -21973,7 +22423,7 @@
       </p:sp>
       <p:sp>
         <p:nvSpPr>
-          <p:cNvPr id="26" name="Rounded Rectangle 25"/>
+          <p:cNvPr id="27" name="Rounded Rectangle 26"/>
           <p:cNvSpPr/>
           <p:nvPr/>
         </p:nvSpPr>
@@ -22040,7 +22490,7 @@
       </p:sp>
       <p:sp>
         <p:nvSpPr>
-          <p:cNvPr id="27" name="TextBox 26"/>
+          <p:cNvPr id="28" name="TextBox 27"/>
           <p:cNvSpPr txBox="1"/>
           <p:nvPr/>
         </p:nvSpPr>
@@ -22087,7 +22537,7 @@
       </p:sp>
       <p:sp>
         <p:nvSpPr>
-          <p:cNvPr id="28" name="Rectangle 27"/>
+          <p:cNvPr id="29" name="Rectangle 28"/>
           <p:cNvSpPr/>
           <p:nvPr/>
         </p:nvSpPr>
@@ -22131,7 +22581,7 @@
       </p:sp>
       <p:sp>
         <p:nvSpPr>
-          <p:cNvPr id="29" name="Rounded Rectangle 28"/>
+          <p:cNvPr id="30" name="Rounded Rectangle 29"/>
           <p:cNvSpPr/>
           <p:nvPr/>
         </p:nvSpPr>
@@ -22177,7 +22627,7 @@
       </p:sp>
       <p:sp>
         <p:nvSpPr>
-          <p:cNvPr id="30" name="TextBox 29"/>
+          <p:cNvPr id="31" name="TextBox 30"/>
           <p:cNvSpPr txBox="1"/>
           <p:nvPr/>
         </p:nvSpPr>
@@ -22224,7 +22674,7 @@
       </p:sp>
       <p:sp>
         <p:nvSpPr>
-          <p:cNvPr id="31" name="Rounded Rectangle 30"/>
+          <p:cNvPr id="32" name="Rounded Rectangle 31"/>
           <p:cNvSpPr/>
           <p:nvPr/>
         </p:nvSpPr>
@@ -22270,7 +22720,7 @@
       </p:sp>
       <p:sp>
         <p:nvSpPr>
-          <p:cNvPr id="32" name="TextBox 31"/>
+          <p:cNvPr id="33" name="TextBox 32"/>
           <p:cNvSpPr txBox="1"/>
           <p:nvPr/>
         </p:nvSpPr>
@@ -22317,7 +22767,7 @@
       </p:sp>
       <p:sp>
         <p:nvSpPr>
-          <p:cNvPr id="33" name="Rounded Rectangle 32"/>
+          <p:cNvPr id="34" name="Rounded Rectangle 33"/>
           <p:cNvSpPr/>
           <p:nvPr/>
         </p:nvSpPr>
@@ -22363,7 +22813,7 @@
       </p:sp>
       <p:sp>
         <p:nvSpPr>
-          <p:cNvPr id="34" name="TextBox 33"/>
+          <p:cNvPr id="35" name="TextBox 34"/>
           <p:cNvSpPr txBox="1"/>
           <p:nvPr/>
         </p:nvSpPr>
@@ -22410,7 +22860,7 @@
       </p:sp>
       <p:sp>
         <p:nvSpPr>
-          <p:cNvPr id="35" name="Rounded Rectangle 34"/>
+          <p:cNvPr id="36" name="Rounded Rectangle 35"/>
           <p:cNvSpPr/>
           <p:nvPr/>
         </p:nvSpPr>
@@ -22456,7 +22906,7 @@
       </p:sp>
       <p:sp>
         <p:nvSpPr>
-          <p:cNvPr id="36" name="TextBox 35"/>
+          <p:cNvPr id="37" name="TextBox 36"/>
           <p:cNvSpPr txBox="1"/>
           <p:nvPr/>
         </p:nvSpPr>
@@ -22503,7 +22953,7 @@
       </p:sp>
       <p:sp>
         <p:nvSpPr>
-          <p:cNvPr id="37" name="Rounded Rectangle 36"/>
+          <p:cNvPr id="38" name="Rounded Rectangle 37"/>
           <p:cNvSpPr/>
           <p:nvPr/>
         </p:nvSpPr>
@@ -22549,7 +22999,7 @@
       </p:sp>
       <p:sp>
         <p:nvSpPr>
-          <p:cNvPr id="38" name="TextBox 37"/>
+          <p:cNvPr id="39" name="TextBox 38"/>
           <p:cNvSpPr txBox="1"/>
           <p:nvPr/>
         </p:nvSpPr>
@@ -22596,7 +23046,7 @@
       </p:sp>
       <p:sp>
         <p:nvSpPr>
-          <p:cNvPr id="39" name="Rounded Rectangle 38"/>
+          <p:cNvPr id="40" name="Rounded Rectangle 39"/>
           <p:cNvSpPr/>
           <p:nvPr/>
         </p:nvSpPr>
@@ -22734,9 +23184,33 @@
           </a:p>
         </p:txBody>
       </p:sp>
-      <p:sp>
-        <p:nvSpPr>
-          <p:cNvPr id="3" name="TextBox 2"/>
+      <p:pic>
+        <p:nvPicPr>
+          <p:cNvPr id="3" name="college-logo" descr="logo-mark.png"/>
+          <p:cNvPicPr>
+            <a:picLocks noChangeAspect="1"/>
+          </p:cNvPicPr>
+          <p:nvPr/>
+        </p:nvPicPr>
+        <p:blipFill>
+          <a:blip r:embed="rId2"/>
+          <a:stretch>
+            <a:fillRect/>
+          </a:stretch>
+        </p:blipFill>
+        <p:spPr>
+          <a:xfrm>
+            <a:off x="11203333" y="6199632"/>
+            <a:ext cx="275129" cy="310896"/>
+          </a:xfrm>
+          <a:prstGeom prst="rect">
+            <a:avLst/>
+          </a:prstGeom>
+        </p:spPr>
+      </p:pic>
+      <p:sp>
+        <p:nvSpPr>
+          <p:cNvPr id="4" name="TextBox 3"/>
           <p:cNvSpPr txBox="1"/>
           <p:nvPr/>
         </p:nvSpPr>
@@ -22805,13 +23279,13 @@
       </p:sp>
       <p:sp>
         <p:nvSpPr>
-          <p:cNvPr id="4" name="TextBox 3"/>
+          <p:cNvPr id="5" name="TextBox 4"/>
           <p:cNvSpPr txBox="1"/>
           <p:nvPr/>
         </p:nvSpPr>
         <p:spPr>
           <a:xfrm>
-            <a:off x="8826703" y="6272784"/>
+            <a:off x="8240677" y="6272784"/>
             <a:ext cx="2651760" cy="219456"/>
           </a:xfrm>
           <a:prstGeom prst="rect">
@@ -22874,7 +23348,7 @@
       </p:sp>
       <p:sp>
         <p:nvSpPr>
-          <p:cNvPr id="5" name="TextBox 4"/>
+          <p:cNvPr id="6" name="TextBox 5"/>
           <p:cNvSpPr txBox="1"/>
           <p:nvPr/>
         </p:nvSpPr>
@@ -22921,7 +23395,7 @@
       </p:sp>
       <p:sp>
         <p:nvSpPr>
-          <p:cNvPr id="6" name="TextBox 5"/>
+          <p:cNvPr id="7" name="TextBox 6"/>
           <p:cNvSpPr txBox="1"/>
           <p:nvPr/>
         </p:nvSpPr>
@@ -22968,7 +23442,7 @@
       </p:sp>
       <p:sp>
         <p:nvSpPr>
-          <p:cNvPr id="7" name="Rectangle 6"/>
+          <p:cNvPr id="8" name="Rectangle 7"/>
           <p:cNvSpPr/>
           <p:nvPr/>
         </p:nvSpPr>
@@ -23012,7 +23486,7 @@
       </p:sp>
       <p:sp>
         <p:nvSpPr>
-          <p:cNvPr id="8" name="TextBox 7"/>
+          <p:cNvPr id="9" name="TextBox 8"/>
           <p:cNvSpPr txBox="1"/>
           <p:nvPr/>
         </p:nvSpPr>
@@ -23059,7 +23533,7 @@
       </p:sp>
       <p:sp>
         <p:nvSpPr>
-          <p:cNvPr id="9" name="Rounded Rectangle 8"/>
+          <p:cNvPr id="10" name="Rounded Rectangle 9"/>
           <p:cNvSpPr/>
           <p:nvPr/>
         </p:nvSpPr>
@@ -23113,7 +23587,7 @@
       </p:sp>
       <p:sp>
         <p:nvSpPr>
-          <p:cNvPr id="10" name="Rectangle 9"/>
+          <p:cNvPr id="11" name="Rectangle 10"/>
           <p:cNvSpPr/>
           <p:nvPr/>
         </p:nvSpPr>
@@ -23157,7 +23631,7 @@
       </p:sp>
       <p:sp>
         <p:nvSpPr>
-          <p:cNvPr id="11" name="TextBox 10"/>
+          <p:cNvPr id="12" name="TextBox 11"/>
           <p:cNvSpPr txBox="1"/>
           <p:nvPr/>
         </p:nvSpPr>
@@ -23204,7 +23678,7 @@
       </p:sp>
       <p:sp>
         <p:nvSpPr>
-          <p:cNvPr id="12" name="TextBox 11"/>
+          <p:cNvPr id="13" name="TextBox 12"/>
           <p:cNvSpPr txBox="1"/>
           <p:nvPr/>
         </p:nvSpPr>
@@ -23251,7 +23725,7 @@
       </p:sp>
       <p:sp>
         <p:nvSpPr>
-          <p:cNvPr id="13" name="Rounded Rectangle 12"/>
+          <p:cNvPr id="14" name="Rounded Rectangle 13"/>
           <p:cNvSpPr/>
           <p:nvPr/>
         </p:nvSpPr>
@@ -23305,7 +23779,7 @@
       </p:sp>
       <p:sp>
         <p:nvSpPr>
-          <p:cNvPr id="14" name="Rectangle 13"/>
+          <p:cNvPr id="15" name="Rectangle 14"/>
           <p:cNvSpPr/>
           <p:nvPr/>
         </p:nvSpPr>
@@ -23349,7 +23823,7 @@
       </p:sp>
       <p:sp>
         <p:nvSpPr>
-          <p:cNvPr id="15" name="TextBox 14"/>
+          <p:cNvPr id="16" name="TextBox 15"/>
           <p:cNvSpPr txBox="1"/>
           <p:nvPr/>
         </p:nvSpPr>
@@ -23396,7 +23870,7 @@
       </p:sp>
       <p:sp>
         <p:nvSpPr>
-          <p:cNvPr id="16" name="TextBox 15"/>
+          <p:cNvPr id="17" name="TextBox 16"/>
           <p:cNvSpPr txBox="1"/>
           <p:nvPr/>
         </p:nvSpPr>
@@ -23443,7 +23917,7 @@
       </p:sp>
       <p:sp>
         <p:nvSpPr>
-          <p:cNvPr id="17" name="Rounded Rectangle 16"/>
+          <p:cNvPr id="18" name="Rounded Rectangle 17"/>
           <p:cNvSpPr/>
           <p:nvPr/>
         </p:nvSpPr>
@@ -23497,7 +23971,7 @@
       </p:sp>
       <p:sp>
         <p:nvSpPr>
-          <p:cNvPr id="18" name="Rectangle 17"/>
+          <p:cNvPr id="19" name="Rectangle 18"/>
           <p:cNvSpPr/>
           <p:nvPr/>
         </p:nvSpPr>
@@ -23541,7 +24015,7 @@
       </p:sp>
       <p:sp>
         <p:nvSpPr>
-          <p:cNvPr id="19" name="TextBox 18"/>
+          <p:cNvPr id="20" name="TextBox 19"/>
           <p:cNvSpPr txBox="1"/>
           <p:nvPr/>
         </p:nvSpPr>
@@ -23588,7 +24062,7 @@
       </p:sp>
       <p:sp>
         <p:nvSpPr>
-          <p:cNvPr id="20" name="TextBox 19"/>
+          <p:cNvPr id="21" name="TextBox 20"/>
           <p:cNvSpPr txBox="1"/>
           <p:nvPr/>
         </p:nvSpPr>
@@ -23635,7 +24109,7 @@
       </p:sp>
       <p:sp>
         <p:nvSpPr>
-          <p:cNvPr id="21" name="Rounded Rectangle 20"/>
+          <p:cNvPr id="22" name="Rounded Rectangle 21"/>
           <p:cNvSpPr/>
           <p:nvPr/>
         </p:nvSpPr>
@@ -23689,7 +24163,7 @@
       </p:sp>
       <p:sp>
         <p:nvSpPr>
-          <p:cNvPr id="22" name="Rectangle 21"/>
+          <p:cNvPr id="23" name="Rectangle 22"/>
           <p:cNvSpPr/>
           <p:nvPr/>
         </p:nvSpPr>
@@ -23733,7 +24207,7 @@
       </p:sp>
       <p:sp>
         <p:nvSpPr>
-          <p:cNvPr id="23" name="TextBox 22"/>
+          <p:cNvPr id="24" name="TextBox 23"/>
           <p:cNvSpPr txBox="1"/>
           <p:nvPr/>
         </p:nvSpPr>
@@ -23780,7 +24254,7 @@
       </p:sp>
       <p:sp>
         <p:nvSpPr>
-          <p:cNvPr id="24" name="TextBox 23"/>
+          <p:cNvPr id="25" name="TextBox 24"/>
           <p:cNvSpPr txBox="1"/>
           <p:nvPr/>
         </p:nvSpPr>
@@ -23827,7 +24301,7 @@
       </p:sp>
       <p:sp>
         <p:nvSpPr>
-          <p:cNvPr id="25" name="Rounded Rectangle 24"/>
+          <p:cNvPr id="26" name="Rounded Rectangle 25"/>
           <p:cNvSpPr/>
           <p:nvPr/>
         </p:nvSpPr>
@@ -23881,7 +24355,7 @@
       </p:sp>
       <p:sp>
         <p:nvSpPr>
-          <p:cNvPr id="26" name="Rectangle 25"/>
+          <p:cNvPr id="27" name="Rectangle 26"/>
           <p:cNvSpPr/>
           <p:nvPr/>
         </p:nvSpPr>
@@ -23925,7 +24399,7 @@
       </p:sp>
       <p:sp>
         <p:nvSpPr>
-          <p:cNvPr id="27" name="TextBox 26"/>
+          <p:cNvPr id="28" name="TextBox 27"/>
           <p:cNvSpPr txBox="1"/>
           <p:nvPr/>
         </p:nvSpPr>
@@ -23972,7 +24446,7 @@
       </p:sp>
       <p:sp>
         <p:nvSpPr>
-          <p:cNvPr id="28" name="TextBox 27"/>
+          <p:cNvPr id="29" name="TextBox 28"/>
           <p:cNvSpPr txBox="1"/>
           <p:nvPr/>
         </p:nvSpPr>
@@ -24019,7 +24493,7 @@
       </p:sp>
       <p:sp>
         <p:nvSpPr>
-          <p:cNvPr id="29" name="Rounded Rectangle 28"/>
+          <p:cNvPr id="30" name="Rounded Rectangle 29"/>
           <p:cNvSpPr/>
           <p:nvPr/>
         </p:nvSpPr>
@@ -24073,7 +24547,7 @@
       </p:sp>
       <p:sp>
         <p:nvSpPr>
-          <p:cNvPr id="30" name="Rectangle 29"/>
+          <p:cNvPr id="31" name="Rectangle 30"/>
           <p:cNvSpPr/>
           <p:nvPr/>
         </p:nvSpPr>
@@ -24117,7 +24591,7 @@
       </p:sp>
       <p:sp>
         <p:nvSpPr>
-          <p:cNvPr id="31" name="TextBox 30"/>
+          <p:cNvPr id="32" name="TextBox 31"/>
           <p:cNvSpPr txBox="1"/>
           <p:nvPr/>
         </p:nvSpPr>
@@ -24164,7 +24638,7 @@
       </p:sp>
       <p:sp>
         <p:nvSpPr>
-          <p:cNvPr id="32" name="TextBox 31"/>
+          <p:cNvPr id="33" name="TextBox 32"/>
           <p:cNvSpPr txBox="1"/>
           <p:nvPr/>
         </p:nvSpPr>
@@ -24271,9 +24745,33 @@
           </a:p>
         </p:txBody>
       </p:sp>
-      <p:sp>
-        <p:nvSpPr>
-          <p:cNvPr id="3" name="TextBox 2"/>
+      <p:pic>
+        <p:nvPicPr>
+          <p:cNvPr id="3" name="college-logo" descr="logo-mark.png"/>
+          <p:cNvPicPr>
+            <a:picLocks noChangeAspect="1"/>
+          </p:cNvPicPr>
+          <p:nvPr/>
+        </p:nvPicPr>
+        <p:blipFill>
+          <a:blip r:embed="rId2"/>
+          <a:stretch>
+            <a:fillRect/>
+          </a:stretch>
+        </p:blipFill>
+        <p:spPr>
+          <a:xfrm>
+            <a:off x="11203333" y="6199632"/>
+            <a:ext cx="275129" cy="310896"/>
+          </a:xfrm>
+          <a:prstGeom prst="rect">
+            <a:avLst/>
+          </a:prstGeom>
+        </p:spPr>
+      </p:pic>
+      <p:sp>
+        <p:nvSpPr>
+          <p:cNvPr id="4" name="TextBox 3"/>
           <p:cNvSpPr txBox="1"/>
           <p:nvPr/>
         </p:nvSpPr>
@@ -24342,13 +24840,13 @@
       </p:sp>
       <p:sp>
         <p:nvSpPr>
-          <p:cNvPr id="4" name="TextBox 3"/>
+          <p:cNvPr id="5" name="TextBox 4"/>
           <p:cNvSpPr txBox="1"/>
           <p:nvPr/>
         </p:nvSpPr>
         <p:spPr>
           <a:xfrm>
-            <a:off x="8826703" y="6272784"/>
+            <a:off x="8240677" y="6272784"/>
             <a:ext cx="2651760" cy="219456"/>
           </a:xfrm>
           <a:prstGeom prst="rect">
@@ -24411,7 +24909,7 @@
       </p:sp>
       <p:sp>
         <p:nvSpPr>
-          <p:cNvPr id="5" name="TextBox 4"/>
+          <p:cNvPr id="6" name="TextBox 5"/>
           <p:cNvSpPr txBox="1"/>
           <p:nvPr/>
         </p:nvSpPr>
@@ -24458,7 +24956,7 @@
       </p:sp>
       <p:sp>
         <p:nvSpPr>
-          <p:cNvPr id="6" name="TextBox 5"/>
+          <p:cNvPr id="7" name="TextBox 6"/>
           <p:cNvSpPr txBox="1"/>
           <p:nvPr/>
         </p:nvSpPr>
@@ -24505,7 +25003,7 @@
       </p:sp>
       <p:sp>
         <p:nvSpPr>
-          <p:cNvPr id="7" name="Rectangle 6"/>
+          <p:cNvPr id="8" name="Rectangle 7"/>
           <p:cNvSpPr/>
           <p:nvPr/>
         </p:nvSpPr>
@@ -24549,7 +25047,7 @@
       </p:sp>
       <p:sp>
         <p:nvSpPr>
-          <p:cNvPr id="8" name="TextBox 7"/>
+          <p:cNvPr id="9" name="TextBox 8"/>
           <p:cNvSpPr txBox="1"/>
           <p:nvPr/>
         </p:nvSpPr>
@@ -24596,7 +25094,7 @@
       </p:sp>
       <p:sp>
         <p:nvSpPr>
-          <p:cNvPr id="9" name="Rectangle 8"/>
+          <p:cNvPr id="10" name="Rectangle 9"/>
           <p:cNvSpPr/>
           <p:nvPr/>
         </p:nvSpPr>
@@ -24640,7 +25138,7 @@
       </p:sp>
       <p:sp>
         <p:nvSpPr>
-          <p:cNvPr id="10" name="Oval 9"/>
+          <p:cNvPr id="11" name="Oval 10"/>
           <p:cNvSpPr/>
           <p:nvPr/>
         </p:nvSpPr>
@@ -24684,7 +25182,7 @@
       </p:sp>
       <p:sp>
         <p:nvSpPr>
-          <p:cNvPr id="11" name="TextBox 10"/>
+          <p:cNvPr id="12" name="TextBox 11"/>
           <p:cNvSpPr txBox="1"/>
           <p:nvPr/>
         </p:nvSpPr>
@@ -24731,7 +25229,7 @@
       </p:sp>
       <p:sp>
         <p:nvSpPr>
-          <p:cNvPr id="12" name="Rounded Rectangle 11"/>
+          <p:cNvPr id="13" name="Rounded Rectangle 12"/>
           <p:cNvSpPr/>
           <p:nvPr/>
         </p:nvSpPr>
@@ -24779,7 +25277,7 @@
       </p:sp>
       <p:sp>
         <p:nvSpPr>
-          <p:cNvPr id="13" name="TextBox 12"/>
+          <p:cNvPr id="14" name="TextBox 13"/>
           <p:cNvSpPr txBox="1"/>
           <p:nvPr/>
         </p:nvSpPr>
@@ -24826,7 +25324,7 @@
       </p:sp>
       <p:sp>
         <p:nvSpPr>
-          <p:cNvPr id="14" name="TextBox 13"/>
+          <p:cNvPr id="15" name="TextBox 14"/>
           <p:cNvSpPr txBox="1"/>
           <p:nvPr/>
         </p:nvSpPr>
@@ -24873,7 +25371,7 @@
       </p:sp>
       <p:sp>
         <p:nvSpPr>
-          <p:cNvPr id="15" name="Oval 14"/>
+          <p:cNvPr id="16" name="Oval 15"/>
           <p:cNvSpPr/>
           <p:nvPr/>
         </p:nvSpPr>
@@ -24917,7 +25415,7 @@
       </p:sp>
       <p:sp>
         <p:nvSpPr>
-          <p:cNvPr id="16" name="TextBox 15"/>
+          <p:cNvPr id="17" name="TextBox 16"/>
           <p:cNvSpPr txBox="1"/>
           <p:nvPr/>
         </p:nvSpPr>
@@ -24964,7 +25462,7 @@
       </p:sp>
       <p:sp>
         <p:nvSpPr>
-          <p:cNvPr id="17" name="Rounded Rectangle 16"/>
+          <p:cNvPr id="18" name="Rounded Rectangle 17"/>
           <p:cNvSpPr/>
           <p:nvPr/>
         </p:nvSpPr>
@@ -25012,7 +25510,7 @@
       </p:sp>
       <p:sp>
         <p:nvSpPr>
-          <p:cNvPr id="18" name="TextBox 17"/>
+          <p:cNvPr id="19" name="TextBox 18"/>
           <p:cNvSpPr txBox="1"/>
           <p:nvPr/>
         </p:nvSpPr>
@@ -25059,7 +25557,7 @@
       </p:sp>
       <p:sp>
         <p:nvSpPr>
-          <p:cNvPr id="19" name="TextBox 18"/>
+          <p:cNvPr id="20" name="TextBox 19"/>
           <p:cNvSpPr txBox="1"/>
           <p:nvPr/>
         </p:nvSpPr>
@@ -25106,7 +25604,7 @@
       </p:sp>
       <p:sp>
         <p:nvSpPr>
-          <p:cNvPr id="20" name="Oval 19"/>
+          <p:cNvPr id="21" name="Oval 20"/>
           <p:cNvSpPr/>
           <p:nvPr/>
         </p:nvSpPr>
@@ -25150,7 +25648,7 @@
       </p:sp>
       <p:sp>
         <p:nvSpPr>
-          <p:cNvPr id="21" name="TextBox 20"/>
+          <p:cNvPr id="22" name="TextBox 21"/>
           <p:cNvSpPr txBox="1"/>
           <p:nvPr/>
         </p:nvSpPr>
@@ -25197,7 +25695,7 @@
       </p:sp>
       <p:sp>
         <p:nvSpPr>
-          <p:cNvPr id="22" name="Rounded Rectangle 21"/>
+          <p:cNvPr id="23" name="Rounded Rectangle 22"/>
           <p:cNvSpPr/>
           <p:nvPr/>
         </p:nvSpPr>
@@ -25245,7 +25743,7 @@
       </p:sp>
       <p:sp>
         <p:nvSpPr>
-          <p:cNvPr id="23" name="TextBox 22"/>
+          <p:cNvPr id="24" name="TextBox 23"/>
           <p:cNvSpPr txBox="1"/>
           <p:nvPr/>
         </p:nvSpPr>
@@ -25292,7 +25790,7 @@
       </p:sp>
       <p:sp>
         <p:nvSpPr>
-          <p:cNvPr id="24" name="TextBox 23"/>
+          <p:cNvPr id="25" name="TextBox 24"/>
           <p:cNvSpPr txBox="1"/>
           <p:nvPr/>
         </p:nvSpPr>
@@ -25339,7 +25837,7 @@
       </p:sp>
       <p:sp>
         <p:nvSpPr>
-          <p:cNvPr id="25" name="Oval 24"/>
+          <p:cNvPr id="26" name="Oval 25"/>
           <p:cNvSpPr/>
           <p:nvPr/>
         </p:nvSpPr>
@@ -25383,7 +25881,7 @@
       </p:sp>
       <p:sp>
         <p:nvSpPr>
-          <p:cNvPr id="26" name="TextBox 25"/>
+          <p:cNvPr id="27" name="TextBox 26"/>
           <p:cNvSpPr txBox="1"/>
           <p:nvPr/>
         </p:nvSpPr>
@@ -25430,7 +25928,7 @@
       </p:sp>
       <p:sp>
         <p:nvSpPr>
-          <p:cNvPr id="27" name="Rounded Rectangle 26"/>
+          <p:cNvPr id="28" name="Rounded Rectangle 27"/>
           <p:cNvSpPr/>
           <p:nvPr/>
         </p:nvSpPr>
@@ -25478,7 +25976,7 @@
       </p:sp>
       <p:sp>
         <p:nvSpPr>
-          <p:cNvPr id="28" name="TextBox 27"/>
+          <p:cNvPr id="29" name="TextBox 28"/>
           <p:cNvSpPr txBox="1"/>
           <p:nvPr/>
         </p:nvSpPr>
@@ -25525,7 +26023,7 @@
       </p:sp>
       <p:sp>
         <p:nvSpPr>
-          <p:cNvPr id="29" name="TextBox 28"/>
+          <p:cNvPr id="30" name="TextBox 29"/>
           <p:cNvSpPr txBox="1"/>
           <p:nvPr/>
         </p:nvSpPr>
@@ -25572,7 +26070,7 @@
       </p:sp>
       <p:sp>
         <p:nvSpPr>
-          <p:cNvPr id="30" name="Rounded Rectangle 29"/>
+          <p:cNvPr id="31" name="Rounded Rectangle 30"/>
           <p:cNvSpPr/>
           <p:nvPr/>
         </p:nvSpPr>
@@ -25639,7 +26137,7 @@
       </p:sp>
       <p:sp>
         <p:nvSpPr>
-          <p:cNvPr id="31" name="Rectangle 30"/>
+          <p:cNvPr id="32" name="Rectangle 31"/>
           <p:cNvSpPr/>
           <p:nvPr/>
         </p:nvSpPr>
@@ -25743,9 +26241,33 @@
           </a:p>
         </p:txBody>
       </p:sp>
-      <p:sp>
-        <p:nvSpPr>
-          <p:cNvPr id="3" name="TextBox 2"/>
+      <p:pic>
+        <p:nvPicPr>
+          <p:cNvPr id="3" name="college-logo" descr="logo-mark.png"/>
+          <p:cNvPicPr>
+            <a:picLocks noChangeAspect="1"/>
+          </p:cNvPicPr>
+          <p:nvPr/>
+        </p:nvPicPr>
+        <p:blipFill>
+          <a:blip r:embed="rId2"/>
+          <a:stretch>
+            <a:fillRect/>
+          </a:stretch>
+        </p:blipFill>
+        <p:spPr>
+          <a:xfrm>
+            <a:off x="11203333" y="6199632"/>
+            <a:ext cx="275129" cy="310896"/>
+          </a:xfrm>
+          <a:prstGeom prst="rect">
+            <a:avLst/>
+          </a:prstGeom>
+        </p:spPr>
+      </p:pic>
+      <p:sp>
+        <p:nvSpPr>
+          <p:cNvPr id="4" name="TextBox 3"/>
           <p:cNvSpPr txBox="1"/>
           <p:nvPr/>
         </p:nvSpPr>
@@ -25814,13 +26336,13 @@
       </p:sp>
       <p:sp>
         <p:nvSpPr>
-          <p:cNvPr id="4" name="TextBox 3"/>
+          <p:cNvPr id="5" name="TextBox 4"/>
           <p:cNvSpPr txBox="1"/>
           <p:nvPr/>
         </p:nvSpPr>
         <p:spPr>
           <a:xfrm>
-            <a:off x="8826703" y="6272784"/>
+            <a:off x="8240677" y="6272784"/>
             <a:ext cx="2651760" cy="219456"/>
           </a:xfrm>
           <a:prstGeom prst="rect">
@@ -25883,7 +26405,7 @@
       </p:sp>
       <p:sp>
         <p:nvSpPr>
-          <p:cNvPr id="5" name="TextBox 4"/>
+          <p:cNvPr id="6" name="TextBox 5"/>
           <p:cNvSpPr txBox="1"/>
           <p:nvPr/>
         </p:nvSpPr>
@@ -25930,7 +26452,7 @@
       </p:sp>
       <p:sp>
         <p:nvSpPr>
-          <p:cNvPr id="6" name="TextBox 5"/>
+          <p:cNvPr id="7" name="TextBox 6"/>
           <p:cNvSpPr txBox="1"/>
           <p:nvPr/>
         </p:nvSpPr>
@@ -25977,7 +26499,7 @@
       </p:sp>
       <p:sp>
         <p:nvSpPr>
-          <p:cNvPr id="7" name="Rectangle 6"/>
+          <p:cNvPr id="8" name="Rectangle 7"/>
           <p:cNvSpPr/>
           <p:nvPr/>
         </p:nvSpPr>
@@ -26021,7 +26543,7 @@
       </p:sp>
       <p:sp>
         <p:nvSpPr>
-          <p:cNvPr id="8" name="TextBox 7"/>
+          <p:cNvPr id="9" name="TextBox 8"/>
           <p:cNvSpPr txBox="1"/>
           <p:nvPr/>
         </p:nvSpPr>
@@ -26068,7 +26590,7 @@
       </p:sp>
       <p:sp>
         <p:nvSpPr>
-          <p:cNvPr id="9" name="Rounded Rectangle 8"/>
+          <p:cNvPr id="10" name="Rounded Rectangle 9"/>
           <p:cNvSpPr/>
           <p:nvPr/>
         </p:nvSpPr>
@@ -26122,7 +26644,7 @@
       </p:sp>
       <p:sp>
         <p:nvSpPr>
-          <p:cNvPr id="10" name="Rectangle 9"/>
+          <p:cNvPr id="11" name="Rectangle 10"/>
           <p:cNvSpPr/>
           <p:nvPr/>
         </p:nvSpPr>
@@ -26166,7 +26688,7 @@
       </p:sp>
       <p:sp>
         <p:nvSpPr>
-          <p:cNvPr id="11" name="Oval 10"/>
+          <p:cNvPr id="12" name="Oval 11"/>
           <p:cNvSpPr/>
           <p:nvPr/>
         </p:nvSpPr>
@@ -26210,7 +26732,7 @@
       </p:sp>
       <p:sp>
         <p:nvSpPr>
-          <p:cNvPr id="12" name="TextBox 11"/>
+          <p:cNvPr id="13" name="TextBox 12"/>
           <p:cNvSpPr txBox="1"/>
           <p:nvPr/>
         </p:nvSpPr>
@@ -26257,7 +26779,7 @@
       </p:sp>
       <p:sp>
         <p:nvSpPr>
-          <p:cNvPr id="13" name="TextBox 12"/>
+          <p:cNvPr id="14" name="TextBox 13"/>
           <p:cNvSpPr txBox="1"/>
           <p:nvPr/>
         </p:nvSpPr>
@@ -26328,7 +26850,7 @@
       </p:sp>
       <p:sp>
         <p:nvSpPr>
-          <p:cNvPr id="14" name="Rounded Rectangle 13"/>
+          <p:cNvPr id="15" name="Rounded Rectangle 14"/>
           <p:cNvSpPr/>
           <p:nvPr/>
         </p:nvSpPr>
@@ -26382,7 +26904,7 @@
       </p:sp>
       <p:sp>
         <p:nvSpPr>
-          <p:cNvPr id="15" name="Rectangle 14"/>
+          <p:cNvPr id="16" name="Rectangle 15"/>
           <p:cNvSpPr/>
           <p:nvPr/>
         </p:nvSpPr>
@@ -26426,7 +26948,7 @@
       </p:sp>
       <p:sp>
         <p:nvSpPr>
-          <p:cNvPr id="16" name="Oval 15"/>
+          <p:cNvPr id="17" name="Oval 16"/>
           <p:cNvSpPr/>
           <p:nvPr/>
         </p:nvSpPr>
@@ -26470,7 +26992,7 @@
       </p:sp>
       <p:sp>
         <p:nvSpPr>
-          <p:cNvPr id="17" name="TextBox 16"/>
+          <p:cNvPr id="18" name="TextBox 17"/>
           <p:cNvSpPr txBox="1"/>
           <p:nvPr/>
         </p:nvSpPr>
@@ -26517,7 +27039,7 @@
       </p:sp>
       <p:sp>
         <p:nvSpPr>
-          <p:cNvPr id="18" name="TextBox 17"/>
+          <p:cNvPr id="19" name="TextBox 18"/>
           <p:cNvSpPr txBox="1"/>
           <p:nvPr/>
         </p:nvSpPr>
@@ -26588,7 +27110,7 @@
       </p:sp>
       <p:sp>
         <p:nvSpPr>
-          <p:cNvPr id="19" name="Rounded Rectangle 18"/>
+          <p:cNvPr id="20" name="Rounded Rectangle 19"/>
           <p:cNvSpPr/>
           <p:nvPr/>
         </p:nvSpPr>
@@ -26642,7 +27164,7 @@
       </p:sp>
       <p:sp>
         <p:nvSpPr>
-          <p:cNvPr id="20" name="Rectangle 19"/>
+          <p:cNvPr id="21" name="Rectangle 20"/>
           <p:cNvSpPr/>
           <p:nvPr/>
         </p:nvSpPr>
@@ -26686,7 +27208,7 @@
       </p:sp>
       <p:sp>
         <p:nvSpPr>
-          <p:cNvPr id="21" name="Oval 20"/>
+          <p:cNvPr id="22" name="Oval 21"/>
           <p:cNvSpPr/>
           <p:nvPr/>
         </p:nvSpPr>
@@ -26730,7 +27252,7 @@
       </p:sp>
       <p:sp>
         <p:nvSpPr>
-          <p:cNvPr id="22" name="TextBox 21"/>
+          <p:cNvPr id="23" name="TextBox 22"/>
           <p:cNvSpPr txBox="1"/>
           <p:nvPr/>
         </p:nvSpPr>
@@ -26777,7 +27299,7 @@
       </p:sp>
       <p:sp>
         <p:nvSpPr>
-          <p:cNvPr id="23" name="TextBox 22"/>
+          <p:cNvPr id="24" name="TextBox 23"/>
           <p:cNvSpPr txBox="1"/>
           <p:nvPr/>
         </p:nvSpPr>
@@ -26848,7 +27370,7 @@
       </p:sp>
       <p:sp>
         <p:nvSpPr>
-          <p:cNvPr id="24" name="Rounded Rectangle 23"/>
+          <p:cNvPr id="25" name="Rounded Rectangle 24"/>
           <p:cNvSpPr/>
           <p:nvPr/>
         </p:nvSpPr>
@@ -26902,7 +27424,7 @@
       </p:sp>
       <p:sp>
         <p:nvSpPr>
-          <p:cNvPr id="25" name="Rectangle 24"/>
+          <p:cNvPr id="26" name="Rectangle 25"/>
           <p:cNvSpPr/>
           <p:nvPr/>
         </p:nvSpPr>
@@ -26946,7 +27468,7 @@
       </p:sp>
       <p:sp>
         <p:nvSpPr>
-          <p:cNvPr id="26" name="Oval 25"/>
+          <p:cNvPr id="27" name="Oval 26"/>
           <p:cNvSpPr/>
           <p:nvPr/>
         </p:nvSpPr>
@@ -26990,7 +27512,7 @@
       </p:sp>
       <p:sp>
         <p:nvSpPr>
-          <p:cNvPr id="27" name="TextBox 26"/>
+          <p:cNvPr id="28" name="TextBox 27"/>
           <p:cNvSpPr txBox="1"/>
           <p:nvPr/>
         </p:nvSpPr>
@@ -27037,7 +27559,7 @@
       </p:sp>
       <p:sp>
         <p:nvSpPr>
-          <p:cNvPr id="28" name="TextBox 27"/>
+          <p:cNvPr id="29" name="TextBox 28"/>
           <p:cNvSpPr txBox="1"/>
           <p:nvPr/>
         </p:nvSpPr>
@@ -27108,7 +27630,7 @@
       </p:sp>
       <p:sp>
         <p:nvSpPr>
-          <p:cNvPr id="29" name="Rounded Rectangle 28"/>
+          <p:cNvPr id="30" name="Rounded Rectangle 29"/>
           <p:cNvSpPr/>
           <p:nvPr/>
         </p:nvSpPr>
@@ -27162,7 +27684,7 @@
       </p:sp>
       <p:sp>
         <p:nvSpPr>
-          <p:cNvPr id="30" name="Rectangle 29"/>
+          <p:cNvPr id="31" name="Rectangle 30"/>
           <p:cNvSpPr/>
           <p:nvPr/>
         </p:nvSpPr>
@@ -27206,7 +27728,7 @@
       </p:sp>
       <p:sp>
         <p:nvSpPr>
-          <p:cNvPr id="31" name="Oval 30"/>
+          <p:cNvPr id="32" name="Oval 31"/>
           <p:cNvSpPr/>
           <p:nvPr/>
         </p:nvSpPr>
@@ -27250,7 +27772,7 @@
       </p:sp>
       <p:sp>
         <p:nvSpPr>
-          <p:cNvPr id="32" name="TextBox 31"/>
+          <p:cNvPr id="33" name="TextBox 32"/>
           <p:cNvSpPr txBox="1"/>
           <p:nvPr/>
         </p:nvSpPr>
@@ -27297,7 +27819,7 @@
       </p:sp>
       <p:sp>
         <p:nvSpPr>
-          <p:cNvPr id="33" name="TextBox 32"/>
+          <p:cNvPr id="34" name="TextBox 33"/>
           <p:cNvSpPr txBox="1"/>
           <p:nvPr/>
         </p:nvSpPr>
@@ -27368,7 +27890,7 @@
       </p:sp>
       <p:sp>
         <p:nvSpPr>
-          <p:cNvPr id="34" name="Rounded Rectangle 33"/>
+          <p:cNvPr id="35" name="Rounded Rectangle 34"/>
           <p:cNvSpPr/>
           <p:nvPr/>
         </p:nvSpPr>
@@ -27422,7 +27944,7 @@
       </p:sp>
       <p:sp>
         <p:nvSpPr>
-          <p:cNvPr id="35" name="Rectangle 34"/>
+          <p:cNvPr id="36" name="Rectangle 35"/>
           <p:cNvSpPr/>
           <p:nvPr/>
         </p:nvSpPr>
@@ -27466,7 +27988,7 @@
       </p:sp>
       <p:sp>
         <p:nvSpPr>
-          <p:cNvPr id="36" name="Oval 35"/>
+          <p:cNvPr id="37" name="Oval 36"/>
           <p:cNvSpPr/>
           <p:nvPr/>
         </p:nvSpPr>
@@ -27510,7 +28032,7 @@
       </p:sp>
       <p:sp>
         <p:nvSpPr>
-          <p:cNvPr id="37" name="TextBox 36"/>
+          <p:cNvPr id="38" name="TextBox 37"/>
           <p:cNvSpPr txBox="1"/>
           <p:nvPr/>
         </p:nvSpPr>
@@ -27557,7 +28079,7 @@
       </p:sp>
       <p:sp>
         <p:nvSpPr>
-          <p:cNvPr id="38" name="TextBox 37"/>
+          <p:cNvPr id="39" name="TextBox 38"/>
           <p:cNvSpPr txBox="1"/>
           <p:nvPr/>
         </p:nvSpPr>
@@ -28138,7 +28660,77 @@
       </p:sp>
       <p:sp>
         <p:nvSpPr>
-          <p:cNvPr id="11" name="Rectangle 10"/>
+          <p:cNvPr id="11" name="logo-plate"/>
+          <p:cNvSpPr/>
+          <p:nvPr/>
+        </p:nvSpPr>
+        <p:spPr>
+          <a:xfrm>
+            <a:off x="9233806" y="539496"/>
+            <a:ext cx="2272088" cy="1106424"/>
+          </a:xfrm>
+          <a:prstGeom prst="roundRect">
+            <a:avLst>
+              <a:gd name="adj" fmla="val 14000"/>
+            </a:avLst>
+          </a:prstGeom>
+          <a:solidFill>
+            <a:srgbClr val="FFFFFF"/>
+          </a:solidFill>
+          <a:ln>
+            <a:noFill/>
+          </a:ln>
+          <a:effectLst/>
+        </p:spPr>
+        <p:style>
+          <a:lnRef idx="1">
+            <a:schemeClr val="accent1"/>
+          </a:lnRef>
+          <a:fillRef idx="3">
+            <a:schemeClr val="accent1"/>
+          </a:fillRef>
+          <a:effectRef idx="2">
+            <a:schemeClr val="accent1"/>
+          </a:effectRef>
+          <a:fontRef idx="minor">
+            <a:schemeClr val="lt1"/>
+          </a:fontRef>
+        </p:style>
+        <p:txBody>
+          <a:bodyPr rtlCol="0" anchor="ctr" wrap="square"/>
+          <a:lstStyle/>
+          <a:p>
+            <a:pPr algn="ctr"/>
+          </a:p>
+        </p:txBody>
+      </p:sp>
+      <p:pic>
+        <p:nvPicPr>
+          <p:cNvPr id="12" name="college-logo" descr="logo-full.png"/>
+          <p:cNvPicPr>
+            <a:picLocks noChangeAspect="1"/>
+          </p:cNvPicPr>
+          <p:nvPr/>
+        </p:nvPicPr>
+        <p:blipFill>
+          <a:blip r:embed="rId2"/>
+          <a:stretch>
+            <a:fillRect/>
+          </a:stretch>
+        </p:blipFill>
+        <p:spPr>
+          <a:xfrm>
+            <a:off x="9352678" y="658368"/>
+            <a:ext cx="2034345" cy="868680"/>
+          </a:xfrm>
+          <a:prstGeom prst="rect">
+            <a:avLst/>
+          </a:prstGeom>
+        </p:spPr>
+      </p:pic>
+      <p:sp>
+        <p:nvSpPr>
+          <p:cNvPr id="13" name="Rectangle 12"/>
           <p:cNvSpPr/>
           <p:nvPr/>
         </p:nvSpPr>
@@ -28182,7 +28774,7 @@
       </p:sp>
       <p:sp>
         <p:nvSpPr>
-          <p:cNvPr id="12" name="TextBox 11"/>
+          <p:cNvPr id="14" name="TextBox 13"/>
           <p:cNvSpPr txBox="1"/>
           <p:nvPr/>
         </p:nvSpPr>
@@ -28709,6 +29301,76 @@
           </a:p>
         </p:txBody>
       </p:sp>
+      <p:sp>
+        <p:nvSpPr>
+          <p:cNvPr id="11" name="logo-plate"/>
+          <p:cNvSpPr/>
+          <p:nvPr/>
+        </p:nvSpPr>
+        <p:spPr>
+          <a:xfrm>
+            <a:off x="9512190" y="539496"/>
+            <a:ext cx="1993704" cy="987552"/>
+          </a:xfrm>
+          <a:prstGeom prst="roundRect">
+            <a:avLst>
+              <a:gd name="adj" fmla="val 14000"/>
+            </a:avLst>
+          </a:prstGeom>
+          <a:solidFill>
+            <a:srgbClr val="FFFFFF"/>
+          </a:solidFill>
+          <a:ln>
+            <a:noFill/>
+          </a:ln>
+          <a:effectLst/>
+        </p:spPr>
+        <p:style>
+          <a:lnRef idx="1">
+            <a:schemeClr val="accent1"/>
+          </a:lnRef>
+          <a:fillRef idx="3">
+            <a:schemeClr val="accent1"/>
+          </a:fillRef>
+          <a:effectRef idx="2">
+            <a:schemeClr val="accent1"/>
+          </a:effectRef>
+          <a:fontRef idx="minor">
+            <a:schemeClr val="lt1"/>
+          </a:fontRef>
+        </p:style>
+        <p:txBody>
+          <a:bodyPr rtlCol="0" anchor="ctr" wrap="square"/>
+          <a:lstStyle/>
+          <a:p>
+            <a:pPr algn="ctr"/>
+          </a:p>
+        </p:txBody>
+      </p:sp>
+      <p:pic>
+        <p:nvPicPr>
+          <p:cNvPr id="12" name="college-logo" descr="logo-full.png"/>
+          <p:cNvPicPr>
+            <a:picLocks noChangeAspect="1"/>
+          </p:cNvPicPr>
+          <p:nvPr/>
+        </p:nvPicPr>
+        <p:blipFill>
+          <a:blip r:embed="rId2"/>
+          <a:stretch>
+            <a:fillRect/>
+          </a:stretch>
+        </p:blipFill>
+        <p:spPr>
+          <a:xfrm>
+            <a:off x="9631062" y="658368"/>
+            <a:ext cx="1755961" cy="749808"/>
+          </a:xfrm>
+          <a:prstGeom prst="rect">
+            <a:avLst/>
+          </a:prstGeom>
+        </p:spPr>
+      </p:pic>
     </p:spTree>
   </p:cSld>
   <p:clrMapOvr>
@@ -28771,9 +29433,33 @@
           </a:p>
         </p:txBody>
       </p:sp>
-      <p:sp>
-        <p:nvSpPr>
-          <p:cNvPr id="3" name="TextBox 2"/>
+      <p:pic>
+        <p:nvPicPr>
+          <p:cNvPr id="3" name="college-logo" descr="logo-mark.png"/>
+          <p:cNvPicPr>
+            <a:picLocks noChangeAspect="1"/>
+          </p:cNvPicPr>
+          <p:nvPr/>
+        </p:nvPicPr>
+        <p:blipFill>
+          <a:blip r:embed="rId2"/>
+          <a:stretch>
+            <a:fillRect/>
+          </a:stretch>
+        </p:blipFill>
+        <p:spPr>
+          <a:xfrm>
+            <a:off x="11203333" y="6199632"/>
+            <a:ext cx="275129" cy="310896"/>
+          </a:xfrm>
+          <a:prstGeom prst="rect">
+            <a:avLst/>
+          </a:prstGeom>
+        </p:spPr>
+      </p:pic>
+      <p:sp>
+        <p:nvSpPr>
+          <p:cNvPr id="4" name="TextBox 3"/>
           <p:cNvSpPr txBox="1"/>
           <p:nvPr/>
         </p:nvSpPr>
@@ -28842,13 +29528,13 @@
       </p:sp>
       <p:sp>
         <p:nvSpPr>
-          <p:cNvPr id="4" name="TextBox 3"/>
+          <p:cNvPr id="5" name="TextBox 4"/>
           <p:cNvSpPr txBox="1"/>
           <p:nvPr/>
         </p:nvSpPr>
         <p:spPr>
           <a:xfrm>
-            <a:off x="8826703" y="6272784"/>
+            <a:off x="8240677" y="6272784"/>
             <a:ext cx="2651760" cy="219456"/>
           </a:xfrm>
           <a:prstGeom prst="rect">
@@ -28911,7 +29597,7 @@
       </p:sp>
       <p:sp>
         <p:nvSpPr>
-          <p:cNvPr id="5" name="TextBox 4"/>
+          <p:cNvPr id="6" name="TextBox 5"/>
           <p:cNvSpPr txBox="1"/>
           <p:nvPr/>
         </p:nvSpPr>
@@ -28958,7 +29644,7 @@
       </p:sp>
       <p:sp>
         <p:nvSpPr>
-          <p:cNvPr id="6" name="TextBox 5"/>
+          <p:cNvPr id="7" name="TextBox 6"/>
           <p:cNvSpPr txBox="1"/>
           <p:nvPr/>
         </p:nvSpPr>
@@ -29005,7 +29691,7 @@
       </p:sp>
       <p:sp>
         <p:nvSpPr>
-          <p:cNvPr id="7" name="Rectangle 6"/>
+          <p:cNvPr id="8" name="Rectangle 7"/>
           <p:cNvSpPr/>
           <p:nvPr/>
         </p:nvSpPr>
@@ -29049,7 +29735,7 @@
       </p:sp>
       <p:sp>
         <p:nvSpPr>
-          <p:cNvPr id="8" name="TextBox 7"/>
+          <p:cNvPr id="9" name="TextBox 8"/>
           <p:cNvSpPr txBox="1"/>
           <p:nvPr/>
         </p:nvSpPr>
@@ -29096,7 +29782,7 @@
       </p:sp>
       <p:sp>
         <p:nvSpPr>
-          <p:cNvPr id="9" name="Rounded Rectangle 8"/>
+          <p:cNvPr id="10" name="Rounded Rectangle 9"/>
           <p:cNvSpPr/>
           <p:nvPr/>
         </p:nvSpPr>
@@ -29142,7 +29828,7 @@
       </p:sp>
       <p:sp>
         <p:nvSpPr>
-          <p:cNvPr id="10" name="Rectangle 9"/>
+          <p:cNvPr id="11" name="Rectangle 10"/>
           <p:cNvSpPr/>
           <p:nvPr/>
         </p:nvSpPr>
@@ -29186,7 +29872,7 @@
       </p:sp>
       <p:sp>
         <p:nvSpPr>
-          <p:cNvPr id="11" name="TextBox 10"/>
+          <p:cNvPr id="12" name="TextBox 11"/>
           <p:cNvSpPr txBox="1"/>
           <p:nvPr/>
         </p:nvSpPr>
@@ -29233,7 +29919,7 @@
       </p:sp>
       <p:sp>
         <p:nvSpPr>
-          <p:cNvPr id="12" name="TextBox 11"/>
+          <p:cNvPr id="13" name="TextBox 12"/>
           <p:cNvSpPr txBox="1"/>
           <p:nvPr/>
         </p:nvSpPr>
@@ -29292,7 +29978,7 @@
       </p:sp>
       <p:sp>
         <p:nvSpPr>
-          <p:cNvPr id="13" name="Rounded Rectangle 12"/>
+          <p:cNvPr id="14" name="Rounded Rectangle 13"/>
           <p:cNvSpPr/>
           <p:nvPr/>
         </p:nvSpPr>
@@ -29338,7 +30024,7 @@
       </p:sp>
       <p:sp>
         <p:nvSpPr>
-          <p:cNvPr id="14" name="Rectangle 13"/>
+          <p:cNvPr id="15" name="Rectangle 14"/>
           <p:cNvSpPr/>
           <p:nvPr/>
         </p:nvSpPr>
@@ -29382,7 +30068,7 @@
       </p:sp>
       <p:sp>
         <p:nvSpPr>
-          <p:cNvPr id="15" name="TextBox 14"/>
+          <p:cNvPr id="16" name="TextBox 15"/>
           <p:cNvSpPr txBox="1"/>
           <p:nvPr/>
         </p:nvSpPr>
@@ -29429,7 +30115,7 @@
       </p:sp>
       <p:sp>
         <p:nvSpPr>
-          <p:cNvPr id="16" name="TextBox 15"/>
+          <p:cNvPr id="17" name="TextBox 16"/>
           <p:cNvSpPr txBox="1"/>
           <p:nvPr/>
         </p:nvSpPr>
@@ -29488,7 +30174,7 @@
       </p:sp>
       <p:sp>
         <p:nvSpPr>
-          <p:cNvPr id="17" name="Rounded Rectangle 16"/>
+          <p:cNvPr id="18" name="Rounded Rectangle 17"/>
           <p:cNvSpPr/>
           <p:nvPr/>
         </p:nvSpPr>
@@ -29534,7 +30220,7 @@
       </p:sp>
       <p:sp>
         <p:nvSpPr>
-          <p:cNvPr id="18" name="Rectangle 17"/>
+          <p:cNvPr id="19" name="Rectangle 18"/>
           <p:cNvSpPr/>
           <p:nvPr/>
         </p:nvSpPr>
@@ -29578,7 +30264,7 @@
       </p:sp>
       <p:sp>
         <p:nvSpPr>
-          <p:cNvPr id="19" name="TextBox 18"/>
+          <p:cNvPr id="20" name="TextBox 19"/>
           <p:cNvSpPr txBox="1"/>
           <p:nvPr/>
         </p:nvSpPr>
@@ -29625,7 +30311,7 @@
       </p:sp>
       <p:sp>
         <p:nvSpPr>
-          <p:cNvPr id="20" name="TextBox 19"/>
+          <p:cNvPr id="21" name="TextBox 20"/>
           <p:cNvSpPr txBox="1"/>
           <p:nvPr/>
         </p:nvSpPr>
@@ -29684,7 +30370,7 @@
       </p:sp>
       <p:sp>
         <p:nvSpPr>
-          <p:cNvPr id="21" name="Rounded Rectangle 20"/>
+          <p:cNvPr id="22" name="Rounded Rectangle 21"/>
           <p:cNvSpPr/>
           <p:nvPr/>
         </p:nvSpPr>
@@ -29730,7 +30416,7 @@
       </p:sp>
       <p:sp>
         <p:nvSpPr>
-          <p:cNvPr id="22" name="Rectangle 21"/>
+          <p:cNvPr id="23" name="Rectangle 22"/>
           <p:cNvSpPr/>
           <p:nvPr/>
         </p:nvSpPr>
@@ -29774,7 +30460,7 @@
       </p:sp>
       <p:sp>
         <p:nvSpPr>
-          <p:cNvPr id="23" name="TextBox 22"/>
+          <p:cNvPr id="24" name="TextBox 23"/>
           <p:cNvSpPr txBox="1"/>
           <p:nvPr/>
         </p:nvSpPr>
@@ -29821,7 +30507,7 @@
       </p:sp>
       <p:sp>
         <p:nvSpPr>
-          <p:cNvPr id="24" name="TextBox 23"/>
+          <p:cNvPr id="25" name="TextBox 24"/>
           <p:cNvSpPr txBox="1"/>
           <p:nvPr/>
         </p:nvSpPr>
@@ -29880,7 +30566,7 @@
       </p:sp>
       <p:sp>
         <p:nvSpPr>
-          <p:cNvPr id="25" name="Rounded Rectangle 24"/>
+          <p:cNvPr id="26" name="Rounded Rectangle 25"/>
           <p:cNvSpPr/>
           <p:nvPr/>
         </p:nvSpPr>
@@ -29926,7 +30612,7 @@
       </p:sp>
       <p:sp>
         <p:nvSpPr>
-          <p:cNvPr id="26" name="Rectangle 25"/>
+          <p:cNvPr id="27" name="Rectangle 26"/>
           <p:cNvSpPr/>
           <p:nvPr/>
         </p:nvSpPr>
@@ -29970,7 +30656,7 @@
       </p:sp>
       <p:sp>
         <p:nvSpPr>
-          <p:cNvPr id="27" name="TextBox 26"/>
+          <p:cNvPr id="28" name="TextBox 27"/>
           <p:cNvSpPr txBox="1"/>
           <p:nvPr/>
         </p:nvSpPr>
@@ -30017,7 +30703,7 @@
       </p:sp>
       <p:sp>
         <p:nvSpPr>
-          <p:cNvPr id="28" name="TextBox 27"/>
+          <p:cNvPr id="29" name="TextBox 28"/>
           <p:cNvSpPr txBox="1"/>
           <p:nvPr/>
         </p:nvSpPr>
@@ -30076,7 +30762,7 @@
       </p:sp>
       <p:sp>
         <p:nvSpPr>
-          <p:cNvPr id="29" name="Rounded Rectangle 28"/>
+          <p:cNvPr id="30" name="Rounded Rectangle 29"/>
           <p:cNvSpPr/>
           <p:nvPr/>
         </p:nvSpPr>
@@ -30122,7 +30808,7 @@
       </p:sp>
       <p:sp>
         <p:nvSpPr>
-          <p:cNvPr id="30" name="Rectangle 29"/>
+          <p:cNvPr id="31" name="Rectangle 30"/>
           <p:cNvSpPr/>
           <p:nvPr/>
         </p:nvSpPr>
@@ -30166,7 +30852,7 @@
       </p:sp>
       <p:sp>
         <p:nvSpPr>
-          <p:cNvPr id="31" name="TextBox 30"/>
+          <p:cNvPr id="32" name="TextBox 31"/>
           <p:cNvSpPr txBox="1"/>
           <p:nvPr/>
         </p:nvSpPr>
@@ -30213,7 +30899,7 @@
       </p:sp>
       <p:sp>
         <p:nvSpPr>
-          <p:cNvPr id="32" name="TextBox 31"/>
+          <p:cNvPr id="33" name="TextBox 32"/>
           <p:cNvSpPr txBox="1"/>
           <p:nvPr/>
         </p:nvSpPr>
@@ -30332,9 +31018,33 @@
           </a:p>
         </p:txBody>
       </p:sp>
-      <p:sp>
-        <p:nvSpPr>
-          <p:cNvPr id="3" name="TextBox 2"/>
+      <p:pic>
+        <p:nvPicPr>
+          <p:cNvPr id="3" name="college-logo" descr="logo-mark.png"/>
+          <p:cNvPicPr>
+            <a:picLocks noChangeAspect="1"/>
+          </p:cNvPicPr>
+          <p:nvPr/>
+        </p:nvPicPr>
+        <p:blipFill>
+          <a:blip r:embed="rId2"/>
+          <a:stretch>
+            <a:fillRect/>
+          </a:stretch>
+        </p:blipFill>
+        <p:spPr>
+          <a:xfrm>
+            <a:off x="11203333" y="6199632"/>
+            <a:ext cx="275129" cy="310896"/>
+          </a:xfrm>
+          <a:prstGeom prst="rect">
+            <a:avLst/>
+          </a:prstGeom>
+        </p:spPr>
+      </p:pic>
+      <p:sp>
+        <p:nvSpPr>
+          <p:cNvPr id="4" name="TextBox 3"/>
           <p:cNvSpPr txBox="1"/>
           <p:nvPr/>
         </p:nvSpPr>
@@ -30403,13 +31113,13 @@
       </p:sp>
       <p:sp>
         <p:nvSpPr>
-          <p:cNvPr id="4" name="TextBox 3"/>
+          <p:cNvPr id="5" name="TextBox 4"/>
           <p:cNvSpPr txBox="1"/>
           <p:nvPr/>
         </p:nvSpPr>
         <p:spPr>
           <a:xfrm>
-            <a:off x="8826703" y="6272784"/>
+            <a:off x="8240677" y="6272784"/>
             <a:ext cx="2651760" cy="219456"/>
           </a:xfrm>
           <a:prstGeom prst="rect">
@@ -30472,7 +31182,7 @@
       </p:sp>
       <p:sp>
         <p:nvSpPr>
-          <p:cNvPr id="5" name="TextBox 4"/>
+          <p:cNvPr id="6" name="TextBox 5"/>
           <p:cNvSpPr txBox="1"/>
           <p:nvPr/>
         </p:nvSpPr>
@@ -30519,7 +31229,7 @@
       </p:sp>
       <p:sp>
         <p:nvSpPr>
-          <p:cNvPr id="6" name="TextBox 5"/>
+          <p:cNvPr id="7" name="TextBox 6"/>
           <p:cNvSpPr txBox="1"/>
           <p:nvPr/>
         </p:nvSpPr>
@@ -30566,7 +31276,7 @@
       </p:sp>
       <p:sp>
         <p:nvSpPr>
-          <p:cNvPr id="7" name="Rectangle 6"/>
+          <p:cNvPr id="8" name="Rectangle 7"/>
           <p:cNvSpPr/>
           <p:nvPr/>
         </p:nvSpPr>
@@ -30610,7 +31320,7 @@
       </p:sp>
       <p:sp>
         <p:nvSpPr>
-          <p:cNvPr id="8" name="Rounded Rectangle 7"/>
+          <p:cNvPr id="9" name="Rounded Rectangle 8"/>
           <p:cNvSpPr/>
           <p:nvPr/>
         </p:nvSpPr>
@@ -30664,7 +31374,7 @@
       </p:sp>
       <p:sp>
         <p:nvSpPr>
-          <p:cNvPr id="9" name="Rectangle 8"/>
+          <p:cNvPr id="10" name="Rectangle 9"/>
           <p:cNvSpPr/>
           <p:nvPr/>
         </p:nvSpPr>
@@ -30708,7 +31418,7 @@
       </p:sp>
       <p:sp>
         <p:nvSpPr>
-          <p:cNvPr id="10" name="TextBox 9"/>
+          <p:cNvPr id="11" name="TextBox 10"/>
           <p:cNvSpPr txBox="1"/>
           <p:nvPr/>
         </p:nvSpPr>
@@ -30755,7 +31465,7 @@
       </p:sp>
       <p:sp>
         <p:nvSpPr>
-          <p:cNvPr id="11" name="TextBox 10"/>
+          <p:cNvPr id="12" name="TextBox 11"/>
           <p:cNvSpPr txBox="1"/>
           <p:nvPr/>
         </p:nvSpPr>
@@ -30826,7 +31536,7 @@
       </p:sp>
       <p:sp>
         <p:nvSpPr>
-          <p:cNvPr id="12" name="Rounded Rectangle 11"/>
+          <p:cNvPr id="13" name="Rounded Rectangle 12"/>
           <p:cNvSpPr/>
           <p:nvPr/>
         </p:nvSpPr>
@@ -30880,7 +31590,7 @@
       </p:sp>
       <p:sp>
         <p:nvSpPr>
-          <p:cNvPr id="13" name="Rectangle 12"/>
+          <p:cNvPr id="14" name="Rectangle 13"/>
           <p:cNvSpPr/>
           <p:nvPr/>
         </p:nvSpPr>
@@ -30924,7 +31634,7 @@
       </p:sp>
       <p:sp>
         <p:nvSpPr>
-          <p:cNvPr id="14" name="TextBox 13"/>
+          <p:cNvPr id="15" name="TextBox 14"/>
           <p:cNvSpPr txBox="1"/>
           <p:nvPr/>
         </p:nvSpPr>
@@ -30971,7 +31681,7 @@
       </p:sp>
       <p:sp>
         <p:nvSpPr>
-          <p:cNvPr id="15" name="TextBox 14"/>
+          <p:cNvPr id="16" name="TextBox 15"/>
           <p:cNvSpPr txBox="1"/>
           <p:nvPr/>
         </p:nvSpPr>
@@ -31042,7 +31752,7 @@
       </p:sp>
       <p:sp>
         <p:nvSpPr>
-          <p:cNvPr id="16" name="Rounded Rectangle 15"/>
+          <p:cNvPr id="17" name="Rounded Rectangle 16"/>
           <p:cNvSpPr/>
           <p:nvPr/>
         </p:nvSpPr>
@@ -31096,7 +31806,7 @@
       </p:sp>
       <p:sp>
         <p:nvSpPr>
-          <p:cNvPr id="17" name="Rectangle 16"/>
+          <p:cNvPr id="18" name="Rectangle 17"/>
           <p:cNvSpPr/>
           <p:nvPr/>
         </p:nvSpPr>
@@ -31140,7 +31850,7 @@
       </p:sp>
       <p:sp>
         <p:nvSpPr>
-          <p:cNvPr id="18" name="TextBox 17"/>
+          <p:cNvPr id="19" name="TextBox 18"/>
           <p:cNvSpPr txBox="1"/>
           <p:nvPr/>
         </p:nvSpPr>
@@ -31187,7 +31897,7 @@
       </p:sp>
       <p:sp>
         <p:nvSpPr>
-          <p:cNvPr id="19" name="TextBox 18"/>
+          <p:cNvPr id="20" name="TextBox 19"/>
           <p:cNvSpPr txBox="1"/>
           <p:nvPr/>
         </p:nvSpPr>
@@ -31318,9 +32028,33 @@
           </a:p>
         </p:txBody>
       </p:sp>
-      <p:sp>
-        <p:nvSpPr>
-          <p:cNvPr id="3" name="TextBox 2"/>
+      <p:pic>
+        <p:nvPicPr>
+          <p:cNvPr id="3" name="college-logo" descr="logo-mark.png"/>
+          <p:cNvPicPr>
+            <a:picLocks noChangeAspect="1"/>
+          </p:cNvPicPr>
+          <p:nvPr/>
+        </p:nvPicPr>
+        <p:blipFill>
+          <a:blip r:embed="rId2"/>
+          <a:stretch>
+            <a:fillRect/>
+          </a:stretch>
+        </p:blipFill>
+        <p:spPr>
+          <a:xfrm>
+            <a:off x="11203333" y="6199632"/>
+            <a:ext cx="275129" cy="310896"/>
+          </a:xfrm>
+          <a:prstGeom prst="rect">
+            <a:avLst/>
+          </a:prstGeom>
+        </p:spPr>
+      </p:pic>
+      <p:sp>
+        <p:nvSpPr>
+          <p:cNvPr id="4" name="TextBox 3"/>
           <p:cNvSpPr txBox="1"/>
           <p:nvPr/>
         </p:nvSpPr>
@@ -31389,13 +32123,13 @@
       </p:sp>
       <p:sp>
         <p:nvSpPr>
-          <p:cNvPr id="4" name="TextBox 3"/>
+          <p:cNvPr id="5" name="TextBox 4"/>
           <p:cNvSpPr txBox="1"/>
           <p:nvPr/>
         </p:nvSpPr>
         <p:spPr>
           <a:xfrm>
-            <a:off x="8826703" y="6272784"/>
+            <a:off x="8240677" y="6272784"/>
             <a:ext cx="2651760" cy="219456"/>
           </a:xfrm>
           <a:prstGeom prst="rect">
@@ -31458,7 +32192,7 @@
       </p:sp>
       <p:sp>
         <p:nvSpPr>
-          <p:cNvPr id="5" name="TextBox 4"/>
+          <p:cNvPr id="6" name="TextBox 5"/>
           <p:cNvSpPr txBox="1"/>
           <p:nvPr/>
         </p:nvSpPr>
@@ -31505,7 +32239,7 @@
       </p:sp>
       <p:sp>
         <p:nvSpPr>
-          <p:cNvPr id="6" name="TextBox 5"/>
+          <p:cNvPr id="7" name="TextBox 6"/>
           <p:cNvSpPr txBox="1"/>
           <p:nvPr/>
         </p:nvSpPr>
@@ -31552,7 +32286,7 @@
       </p:sp>
       <p:sp>
         <p:nvSpPr>
-          <p:cNvPr id="7" name="Rectangle 6"/>
+          <p:cNvPr id="8" name="Rectangle 7"/>
           <p:cNvSpPr/>
           <p:nvPr/>
         </p:nvSpPr>
@@ -31596,7 +32330,7 @@
       </p:sp>
       <p:sp>
         <p:nvSpPr>
-          <p:cNvPr id="8" name="Rounded Rectangle 7"/>
+          <p:cNvPr id="9" name="Rounded Rectangle 8"/>
           <p:cNvSpPr/>
           <p:nvPr/>
         </p:nvSpPr>
@@ -31650,7 +32384,7 @@
       </p:sp>
       <p:sp>
         <p:nvSpPr>
-          <p:cNvPr id="9" name="Rectangle 8"/>
+          <p:cNvPr id="10" name="Rectangle 9"/>
           <p:cNvSpPr/>
           <p:nvPr/>
         </p:nvSpPr>
@@ -31694,7 +32428,7 @@
       </p:sp>
       <p:sp>
         <p:nvSpPr>
-          <p:cNvPr id="10" name="TextBox 9"/>
+          <p:cNvPr id="11" name="TextBox 10"/>
           <p:cNvSpPr txBox="1"/>
           <p:nvPr/>
         </p:nvSpPr>
@@ -31741,7 +32475,7 @@
       </p:sp>
       <p:sp>
         <p:nvSpPr>
-          <p:cNvPr id="11" name="TextBox 10"/>
+          <p:cNvPr id="12" name="TextBox 11"/>
           <p:cNvSpPr txBox="1"/>
           <p:nvPr/>
         </p:nvSpPr>
@@ -31812,7 +32546,7 @@
       </p:sp>
       <p:sp>
         <p:nvSpPr>
-          <p:cNvPr id="12" name="Rounded Rectangle 11"/>
+          <p:cNvPr id="13" name="Rounded Rectangle 12"/>
           <p:cNvSpPr/>
           <p:nvPr/>
         </p:nvSpPr>
@@ -31866,7 +32600,7 @@
       </p:sp>
       <p:sp>
         <p:nvSpPr>
-          <p:cNvPr id="13" name="Rectangle 12"/>
+          <p:cNvPr id="14" name="Rectangle 13"/>
           <p:cNvSpPr/>
           <p:nvPr/>
         </p:nvSpPr>
@@ -31910,7 +32644,7 @@
       </p:sp>
       <p:sp>
         <p:nvSpPr>
-          <p:cNvPr id="14" name="TextBox 13"/>
+          <p:cNvPr id="15" name="TextBox 14"/>
           <p:cNvSpPr txBox="1"/>
           <p:nvPr/>
         </p:nvSpPr>
@@ -31957,7 +32691,7 @@
       </p:sp>
       <p:sp>
         <p:nvSpPr>
-          <p:cNvPr id="15" name="TextBox 14"/>
+          <p:cNvPr id="16" name="TextBox 15"/>
           <p:cNvSpPr txBox="1"/>
           <p:nvPr/>
         </p:nvSpPr>
@@ -32028,7 +32762,7 @@
       </p:sp>
       <p:sp>
         <p:nvSpPr>
-          <p:cNvPr id="16" name="Rounded Rectangle 15"/>
+          <p:cNvPr id="17" name="Rounded Rectangle 16"/>
           <p:cNvSpPr/>
           <p:nvPr/>
         </p:nvSpPr>
@@ -32082,7 +32816,7 @@
       </p:sp>
       <p:sp>
         <p:nvSpPr>
-          <p:cNvPr id="17" name="Rectangle 16"/>
+          <p:cNvPr id="18" name="Rectangle 17"/>
           <p:cNvSpPr/>
           <p:nvPr/>
         </p:nvSpPr>
@@ -32126,7 +32860,7 @@
       </p:sp>
       <p:sp>
         <p:nvSpPr>
-          <p:cNvPr id="18" name="TextBox 17"/>
+          <p:cNvPr id="19" name="TextBox 18"/>
           <p:cNvSpPr txBox="1"/>
           <p:nvPr/>
         </p:nvSpPr>
@@ -32173,7 +32907,7 @@
       </p:sp>
       <p:sp>
         <p:nvSpPr>
-          <p:cNvPr id="19" name="TextBox 18"/>
+          <p:cNvPr id="20" name="TextBox 19"/>
           <p:cNvSpPr txBox="1"/>
           <p:nvPr/>
         </p:nvSpPr>
@@ -32304,9 +33038,33 @@
           </a:p>
         </p:txBody>
       </p:sp>
-      <p:sp>
-        <p:nvSpPr>
-          <p:cNvPr id="3" name="TextBox 2"/>
+      <p:pic>
+        <p:nvPicPr>
+          <p:cNvPr id="3" name="college-logo" descr="logo-mark.png"/>
+          <p:cNvPicPr>
+            <a:picLocks noChangeAspect="1"/>
+          </p:cNvPicPr>
+          <p:nvPr/>
+        </p:nvPicPr>
+        <p:blipFill>
+          <a:blip r:embed="rId2"/>
+          <a:stretch>
+            <a:fillRect/>
+          </a:stretch>
+        </p:blipFill>
+        <p:spPr>
+          <a:xfrm>
+            <a:off x="11203333" y="6199632"/>
+            <a:ext cx="275129" cy="310896"/>
+          </a:xfrm>
+          <a:prstGeom prst="rect">
+            <a:avLst/>
+          </a:prstGeom>
+        </p:spPr>
+      </p:pic>
+      <p:sp>
+        <p:nvSpPr>
+          <p:cNvPr id="4" name="TextBox 3"/>
           <p:cNvSpPr txBox="1"/>
           <p:nvPr/>
         </p:nvSpPr>
@@ -32375,13 +33133,13 @@
       </p:sp>
       <p:sp>
         <p:nvSpPr>
-          <p:cNvPr id="4" name="TextBox 3"/>
+          <p:cNvPr id="5" name="TextBox 4"/>
           <p:cNvSpPr txBox="1"/>
           <p:nvPr/>
         </p:nvSpPr>
         <p:spPr>
           <a:xfrm>
-            <a:off x="8826703" y="6272784"/>
+            <a:off x="8240677" y="6272784"/>
             <a:ext cx="2651760" cy="219456"/>
           </a:xfrm>
           <a:prstGeom prst="rect">
@@ -32444,7 +33202,7 @@
       </p:sp>
       <p:sp>
         <p:nvSpPr>
-          <p:cNvPr id="5" name="TextBox 4"/>
+          <p:cNvPr id="6" name="TextBox 5"/>
           <p:cNvSpPr txBox="1"/>
           <p:nvPr/>
         </p:nvSpPr>
@@ -32491,7 +33249,7 @@
       </p:sp>
       <p:sp>
         <p:nvSpPr>
-          <p:cNvPr id="6" name="TextBox 5"/>
+          <p:cNvPr id="7" name="TextBox 6"/>
           <p:cNvSpPr txBox="1"/>
           <p:nvPr/>
         </p:nvSpPr>
@@ -32538,7 +33296,7 @@
       </p:sp>
       <p:sp>
         <p:nvSpPr>
-          <p:cNvPr id="7" name="Rectangle 6"/>
+          <p:cNvPr id="8" name="Rectangle 7"/>
           <p:cNvSpPr/>
           <p:nvPr/>
         </p:nvSpPr>
@@ -32582,7 +33340,7 @@
       </p:sp>
       <p:sp>
         <p:nvSpPr>
-          <p:cNvPr id="8" name="TextBox 7"/>
+          <p:cNvPr id="9" name="TextBox 8"/>
           <p:cNvSpPr txBox="1"/>
           <p:nvPr/>
         </p:nvSpPr>
@@ -32629,7 +33387,7 @@
       </p:sp>
       <p:sp>
         <p:nvSpPr>
-          <p:cNvPr id="9" name="Rectangle 8"/>
+          <p:cNvPr id="10" name="Rectangle 9"/>
           <p:cNvSpPr/>
           <p:nvPr/>
         </p:nvSpPr>
@@ -32673,7 +33431,7 @@
       </p:sp>
       <p:sp>
         <p:nvSpPr>
-          <p:cNvPr id="10" name="Rounded Rectangle 9"/>
+          <p:cNvPr id="11" name="Rounded Rectangle 10"/>
           <p:cNvSpPr/>
           <p:nvPr/>
         </p:nvSpPr>
@@ -32719,7 +33477,7 @@
       </p:sp>
       <p:sp>
         <p:nvSpPr>
-          <p:cNvPr id="11" name="TextBox 10"/>
+          <p:cNvPr id="12" name="TextBox 11"/>
           <p:cNvSpPr txBox="1"/>
           <p:nvPr/>
         </p:nvSpPr>
@@ -32766,7 +33524,7 @@
       </p:sp>
       <p:sp>
         <p:nvSpPr>
-          <p:cNvPr id="12" name="Rounded Rectangle 11"/>
+          <p:cNvPr id="13" name="Rounded Rectangle 12"/>
           <p:cNvSpPr/>
           <p:nvPr/>
         </p:nvSpPr>
@@ -32812,7 +33570,7 @@
       </p:sp>
       <p:sp>
         <p:nvSpPr>
-          <p:cNvPr id="13" name="TextBox 12"/>
+          <p:cNvPr id="14" name="TextBox 13"/>
           <p:cNvSpPr txBox="1"/>
           <p:nvPr/>
         </p:nvSpPr>
@@ -32859,7 +33617,7 @@
       </p:sp>
       <p:sp>
         <p:nvSpPr>
-          <p:cNvPr id="14" name="Rounded Rectangle 13"/>
+          <p:cNvPr id="15" name="Rounded Rectangle 14"/>
           <p:cNvSpPr/>
           <p:nvPr/>
         </p:nvSpPr>
@@ -32905,7 +33663,7 @@
       </p:sp>
       <p:sp>
         <p:nvSpPr>
-          <p:cNvPr id="15" name="TextBox 14"/>
+          <p:cNvPr id="16" name="TextBox 15"/>
           <p:cNvSpPr txBox="1"/>
           <p:nvPr/>
         </p:nvSpPr>
@@ -32952,7 +33710,7 @@
       </p:sp>
       <p:sp>
         <p:nvSpPr>
-          <p:cNvPr id="16" name="Rounded Rectangle 15"/>
+          <p:cNvPr id="17" name="Rounded Rectangle 16"/>
           <p:cNvSpPr/>
           <p:nvPr/>
         </p:nvSpPr>
@@ -32998,7 +33756,7 @@
       </p:sp>
       <p:sp>
         <p:nvSpPr>
-          <p:cNvPr id="17" name="TextBox 16"/>
+          <p:cNvPr id="18" name="TextBox 17"/>
           <p:cNvSpPr txBox="1"/>
           <p:nvPr/>
         </p:nvSpPr>
@@ -33045,7 +33803,7 @@
       </p:sp>
       <p:sp>
         <p:nvSpPr>
-          <p:cNvPr id="18" name="Rounded Rectangle 17"/>
+          <p:cNvPr id="19" name="Rounded Rectangle 18"/>
           <p:cNvSpPr/>
           <p:nvPr/>
         </p:nvSpPr>
@@ -33091,7 +33849,7 @@
       </p:sp>
       <p:sp>
         <p:nvSpPr>
-          <p:cNvPr id="19" name="TextBox 18"/>
+          <p:cNvPr id="20" name="TextBox 19"/>
           <p:cNvSpPr txBox="1"/>
           <p:nvPr/>
         </p:nvSpPr>
@@ -33138,7 +33896,7 @@
       </p:sp>
       <p:sp>
         <p:nvSpPr>
-          <p:cNvPr id="20" name="Rounded Rectangle 19"/>
+          <p:cNvPr id="21" name="Rounded Rectangle 20"/>
           <p:cNvSpPr/>
           <p:nvPr/>
         </p:nvSpPr>
@@ -33184,7 +33942,7 @@
       </p:sp>
       <p:sp>
         <p:nvSpPr>
-          <p:cNvPr id="21" name="TextBox 20"/>
+          <p:cNvPr id="22" name="TextBox 21"/>
           <p:cNvSpPr txBox="1"/>
           <p:nvPr/>
         </p:nvSpPr>
@@ -33231,7 +33989,7 @@
       </p:sp>
       <p:sp>
         <p:nvSpPr>
-          <p:cNvPr id="22" name="Rounded Rectangle 21"/>
+          <p:cNvPr id="23" name="Rounded Rectangle 22"/>
           <p:cNvSpPr/>
           <p:nvPr/>
         </p:nvSpPr>
@@ -33285,7 +34043,7 @@
       </p:sp>
       <p:sp>
         <p:nvSpPr>
-          <p:cNvPr id="23" name="Rectangle 22"/>
+          <p:cNvPr id="24" name="Rectangle 23"/>
           <p:cNvSpPr/>
           <p:nvPr/>
         </p:nvSpPr>
@@ -33329,7 +34087,7 @@
       </p:sp>
       <p:sp>
         <p:nvSpPr>
-          <p:cNvPr id="24" name="TextBox 23"/>
+          <p:cNvPr id="25" name="TextBox 24"/>
           <p:cNvSpPr txBox="1"/>
           <p:nvPr/>
         </p:nvSpPr>
@@ -33376,7 +34134,7 @@
       </p:sp>
       <p:sp>
         <p:nvSpPr>
-          <p:cNvPr id="25" name="TextBox 24"/>
+          <p:cNvPr id="26" name="TextBox 25"/>
           <p:cNvSpPr txBox="1"/>
           <p:nvPr/>
         </p:nvSpPr>
@@ -33423,7 +34181,7 @@
       </p:sp>
       <p:sp>
         <p:nvSpPr>
-          <p:cNvPr id="26" name="Rounded Rectangle 25"/>
+          <p:cNvPr id="27" name="Rounded Rectangle 26"/>
           <p:cNvSpPr/>
           <p:nvPr/>
         </p:nvSpPr>
@@ -33477,7 +34235,7 @@
       </p:sp>
       <p:sp>
         <p:nvSpPr>
-          <p:cNvPr id="27" name="Rectangle 26"/>
+          <p:cNvPr id="28" name="Rectangle 27"/>
           <p:cNvSpPr/>
           <p:nvPr/>
         </p:nvSpPr>
@@ -33521,7 +34279,7 @@
       </p:sp>
       <p:sp>
         <p:nvSpPr>
-          <p:cNvPr id="28" name="TextBox 27"/>
+          <p:cNvPr id="29" name="TextBox 28"/>
           <p:cNvSpPr txBox="1"/>
           <p:nvPr/>
         </p:nvSpPr>
@@ -33568,7 +34326,7 @@
       </p:sp>
       <p:sp>
         <p:nvSpPr>
-          <p:cNvPr id="29" name="TextBox 28"/>
+          <p:cNvPr id="30" name="TextBox 29"/>
           <p:cNvSpPr txBox="1"/>
           <p:nvPr/>
         </p:nvSpPr>
@@ -33615,7 +34373,7 @@
       </p:sp>
       <p:sp>
         <p:nvSpPr>
-          <p:cNvPr id="30" name="Rounded Rectangle 29"/>
+          <p:cNvPr id="31" name="Rounded Rectangle 30"/>
           <p:cNvSpPr/>
           <p:nvPr/>
         </p:nvSpPr>
@@ -33669,7 +34427,7 @@
       </p:sp>
       <p:sp>
         <p:nvSpPr>
-          <p:cNvPr id="31" name="Rectangle 30"/>
+          <p:cNvPr id="32" name="Rectangle 31"/>
           <p:cNvSpPr/>
           <p:nvPr/>
         </p:nvSpPr>
@@ -33713,7 +34471,7 @@
       </p:sp>
       <p:sp>
         <p:nvSpPr>
-          <p:cNvPr id="32" name="TextBox 31"/>
+          <p:cNvPr id="33" name="TextBox 32"/>
           <p:cNvSpPr txBox="1"/>
           <p:nvPr/>
         </p:nvSpPr>
@@ -33760,7 +34518,7 @@
       </p:sp>
       <p:sp>
         <p:nvSpPr>
-          <p:cNvPr id="33" name="TextBox 32"/>
+          <p:cNvPr id="34" name="TextBox 33"/>
           <p:cNvSpPr txBox="1"/>
           <p:nvPr/>
         </p:nvSpPr>
@@ -33867,9 +34625,33 @@
           </a:p>
         </p:txBody>
       </p:sp>
-      <p:sp>
-        <p:nvSpPr>
-          <p:cNvPr id="3" name="TextBox 2"/>
+      <p:pic>
+        <p:nvPicPr>
+          <p:cNvPr id="3" name="college-logo" descr="logo-mark.png"/>
+          <p:cNvPicPr>
+            <a:picLocks noChangeAspect="1"/>
+          </p:cNvPicPr>
+          <p:nvPr/>
+        </p:nvPicPr>
+        <p:blipFill>
+          <a:blip r:embed="rId2"/>
+          <a:stretch>
+            <a:fillRect/>
+          </a:stretch>
+        </p:blipFill>
+        <p:spPr>
+          <a:xfrm>
+            <a:off x="11203333" y="6199632"/>
+            <a:ext cx="275129" cy="310896"/>
+          </a:xfrm>
+          <a:prstGeom prst="rect">
+            <a:avLst/>
+          </a:prstGeom>
+        </p:spPr>
+      </p:pic>
+      <p:sp>
+        <p:nvSpPr>
+          <p:cNvPr id="4" name="TextBox 3"/>
           <p:cNvSpPr txBox="1"/>
           <p:nvPr/>
         </p:nvSpPr>
@@ -33938,13 +34720,13 @@
       </p:sp>
       <p:sp>
         <p:nvSpPr>
-          <p:cNvPr id="4" name="TextBox 3"/>
+          <p:cNvPr id="5" name="TextBox 4"/>
           <p:cNvSpPr txBox="1"/>
           <p:nvPr/>
         </p:nvSpPr>
         <p:spPr>
           <a:xfrm>
-            <a:off x="8826703" y="6272784"/>
+            <a:off x="8240677" y="6272784"/>
             <a:ext cx="2651760" cy="219456"/>
           </a:xfrm>
           <a:prstGeom prst="rect">
@@ -34007,7 +34789,7 @@
       </p:sp>
       <p:sp>
         <p:nvSpPr>
-          <p:cNvPr id="5" name="TextBox 4"/>
+          <p:cNvPr id="6" name="TextBox 5"/>
           <p:cNvSpPr txBox="1"/>
           <p:nvPr/>
         </p:nvSpPr>
@@ -34054,7 +34836,7 @@
       </p:sp>
       <p:sp>
         <p:nvSpPr>
-          <p:cNvPr id="6" name="TextBox 5"/>
+          <p:cNvPr id="7" name="TextBox 6"/>
           <p:cNvSpPr txBox="1"/>
           <p:nvPr/>
         </p:nvSpPr>
@@ -34101,7 +34883,7 @@
       </p:sp>
       <p:sp>
         <p:nvSpPr>
-          <p:cNvPr id="7" name="Rectangle 6"/>
+          <p:cNvPr id="8" name="Rectangle 7"/>
           <p:cNvSpPr/>
           <p:nvPr/>
         </p:nvSpPr>
@@ -34145,7 +34927,7 @@
       </p:sp>
       <p:graphicFrame>
         <p:nvGraphicFramePr>
-          <p:cNvPr id="8" name="Table 7"/>
+          <p:cNvPr id="9" name="Table 8"/>
           <p:cNvGraphicFramePr>
             <a:graphicFrameLocks noGrp="1"/>
           </p:cNvGraphicFramePr>
@@ -35167,7 +35949,7 @@
       </p:graphicFrame>
       <p:sp>
         <p:nvSpPr>
-          <p:cNvPr id="9" name="Rounded Rectangle 8"/>
+          <p:cNvPr id="10" name="Rounded Rectangle 9"/>
           <p:cNvSpPr/>
           <p:nvPr/>
         </p:nvSpPr>
@@ -35234,7 +36016,7 @@
       </p:sp>
       <p:sp>
         <p:nvSpPr>
-          <p:cNvPr id="10" name="Rectangle 9"/>
+          <p:cNvPr id="11" name="Rectangle 10"/>
           <p:cNvSpPr/>
           <p:nvPr/>
         </p:nvSpPr>
@@ -35338,9 +36120,33 @@
           </a:p>
         </p:txBody>
       </p:sp>
-      <p:sp>
-        <p:nvSpPr>
-          <p:cNvPr id="3" name="TextBox 2"/>
+      <p:pic>
+        <p:nvPicPr>
+          <p:cNvPr id="3" name="college-logo" descr="logo-mark.png"/>
+          <p:cNvPicPr>
+            <a:picLocks noChangeAspect="1"/>
+          </p:cNvPicPr>
+          <p:nvPr/>
+        </p:nvPicPr>
+        <p:blipFill>
+          <a:blip r:embed="rId2"/>
+          <a:stretch>
+            <a:fillRect/>
+          </a:stretch>
+        </p:blipFill>
+        <p:spPr>
+          <a:xfrm>
+            <a:off x="11203333" y="6199632"/>
+            <a:ext cx="275129" cy="310896"/>
+          </a:xfrm>
+          <a:prstGeom prst="rect">
+            <a:avLst/>
+          </a:prstGeom>
+        </p:spPr>
+      </p:pic>
+      <p:sp>
+        <p:nvSpPr>
+          <p:cNvPr id="4" name="TextBox 3"/>
           <p:cNvSpPr txBox="1"/>
           <p:nvPr/>
         </p:nvSpPr>
@@ -35409,13 +36215,13 @@
       </p:sp>
       <p:sp>
         <p:nvSpPr>
-          <p:cNvPr id="4" name="TextBox 3"/>
+          <p:cNvPr id="5" name="TextBox 4"/>
           <p:cNvSpPr txBox="1"/>
           <p:nvPr/>
         </p:nvSpPr>
         <p:spPr>
           <a:xfrm>
-            <a:off x="8826703" y="6272784"/>
+            <a:off x="8240677" y="6272784"/>
             <a:ext cx="2651760" cy="219456"/>
           </a:xfrm>
           <a:prstGeom prst="rect">
@@ -35478,7 +36284,7 @@
       </p:sp>
       <p:sp>
         <p:nvSpPr>
-          <p:cNvPr id="5" name="TextBox 4"/>
+          <p:cNvPr id="6" name="TextBox 5"/>
           <p:cNvSpPr txBox="1"/>
           <p:nvPr/>
         </p:nvSpPr>
@@ -35525,7 +36331,7 @@
       </p:sp>
       <p:sp>
         <p:nvSpPr>
-          <p:cNvPr id="6" name="TextBox 5"/>
+          <p:cNvPr id="7" name="TextBox 6"/>
           <p:cNvSpPr txBox="1"/>
           <p:nvPr/>
         </p:nvSpPr>
@@ -35572,7 +36378,7 @@
       </p:sp>
       <p:sp>
         <p:nvSpPr>
-          <p:cNvPr id="7" name="Rectangle 6"/>
+          <p:cNvPr id="8" name="Rectangle 7"/>
           <p:cNvSpPr/>
           <p:nvPr/>
         </p:nvSpPr>
@@ -35616,7 +36422,7 @@
       </p:sp>
       <p:sp>
         <p:nvSpPr>
-          <p:cNvPr id="8" name="Rectangle 7"/>
+          <p:cNvPr id="9" name="Rectangle 8"/>
           <p:cNvSpPr/>
           <p:nvPr/>
         </p:nvSpPr>
@@ -35660,7 +36466,7 @@
       </p:sp>
       <p:sp>
         <p:nvSpPr>
-          <p:cNvPr id="9" name="Oval 8"/>
+          <p:cNvPr id="10" name="Oval 9"/>
           <p:cNvSpPr/>
           <p:nvPr/>
         </p:nvSpPr>
@@ -35704,7 +36510,7 @@
       </p:sp>
       <p:sp>
         <p:nvSpPr>
-          <p:cNvPr id="10" name="TextBox 9"/>
+          <p:cNvPr id="11" name="TextBox 10"/>
           <p:cNvSpPr txBox="1"/>
           <p:nvPr/>
         </p:nvSpPr>
@@ -35751,7 +36557,7 @@
       </p:sp>
       <p:sp>
         <p:nvSpPr>
-          <p:cNvPr id="11" name="Rounded Rectangle 10"/>
+          <p:cNvPr id="12" name="Rounded Rectangle 11"/>
           <p:cNvSpPr/>
           <p:nvPr/>
         </p:nvSpPr>
@@ -35799,7 +36605,7 @@
       </p:sp>
       <p:sp>
         <p:nvSpPr>
-          <p:cNvPr id="12" name="TextBox 11"/>
+          <p:cNvPr id="13" name="TextBox 12"/>
           <p:cNvSpPr txBox="1"/>
           <p:nvPr/>
         </p:nvSpPr>
@@ -35846,7 +36652,7 @@
       </p:sp>
       <p:sp>
         <p:nvSpPr>
-          <p:cNvPr id="13" name="TextBox 12"/>
+          <p:cNvPr id="14" name="TextBox 13"/>
           <p:cNvSpPr txBox="1"/>
           <p:nvPr/>
         </p:nvSpPr>
@@ -35893,7 +36699,7 @@
       </p:sp>
       <p:sp>
         <p:nvSpPr>
-          <p:cNvPr id="14" name="Oval 13"/>
+          <p:cNvPr id="15" name="Oval 14"/>
           <p:cNvSpPr/>
           <p:nvPr/>
         </p:nvSpPr>
@@ -35937,7 +36743,7 @@
       </p:sp>
       <p:sp>
         <p:nvSpPr>
-          <p:cNvPr id="15" name="TextBox 14"/>
+          <p:cNvPr id="16" name="TextBox 15"/>
           <p:cNvSpPr txBox="1"/>
           <p:nvPr/>
         </p:nvSpPr>
@@ -35984,7 +36790,7 @@
       </p:sp>
       <p:sp>
         <p:nvSpPr>
-          <p:cNvPr id="16" name="Rounded Rectangle 15"/>
+          <p:cNvPr id="17" name="Rounded Rectangle 16"/>
           <p:cNvSpPr/>
           <p:nvPr/>
         </p:nvSpPr>
@@ -36032,7 +36838,7 @@
       </p:sp>
       <p:sp>
         <p:nvSpPr>
-          <p:cNvPr id="17" name="TextBox 16"/>
+          <p:cNvPr id="18" name="TextBox 17"/>
           <p:cNvSpPr txBox="1"/>
           <p:nvPr/>
         </p:nvSpPr>
@@ -36079,7 +36885,7 @@
       </p:sp>
       <p:sp>
         <p:nvSpPr>
-          <p:cNvPr id="18" name="TextBox 17"/>
+          <p:cNvPr id="19" name="TextBox 18"/>
           <p:cNvSpPr txBox="1"/>
           <p:nvPr/>
         </p:nvSpPr>
@@ -36126,7 +36932,7 @@
       </p:sp>
       <p:sp>
         <p:nvSpPr>
-          <p:cNvPr id="19" name="Oval 18"/>
+          <p:cNvPr id="20" name="Oval 19"/>
           <p:cNvSpPr/>
           <p:nvPr/>
         </p:nvSpPr>
@@ -36170,7 +36976,7 @@
       </p:sp>
       <p:sp>
         <p:nvSpPr>
-          <p:cNvPr id="20" name="TextBox 19"/>
+          <p:cNvPr id="21" name="TextBox 20"/>
           <p:cNvSpPr txBox="1"/>
           <p:nvPr/>
         </p:nvSpPr>
@@ -36217,7 +37023,7 @@
       </p:sp>
       <p:sp>
         <p:nvSpPr>
-          <p:cNvPr id="21" name="Rounded Rectangle 20"/>
+          <p:cNvPr id="22" name="Rounded Rectangle 21"/>
           <p:cNvSpPr/>
           <p:nvPr/>
         </p:nvSpPr>
@@ -36265,7 +37071,7 @@
       </p:sp>
       <p:sp>
         <p:nvSpPr>
-          <p:cNvPr id="22" name="TextBox 21"/>
+          <p:cNvPr id="23" name="TextBox 22"/>
           <p:cNvSpPr txBox="1"/>
           <p:nvPr/>
         </p:nvSpPr>
@@ -36312,7 +37118,7 @@
       </p:sp>
       <p:sp>
         <p:nvSpPr>
-          <p:cNvPr id="23" name="TextBox 22"/>
+          <p:cNvPr id="24" name="TextBox 23"/>
           <p:cNvSpPr txBox="1"/>
           <p:nvPr/>
         </p:nvSpPr>
@@ -36359,7 +37165,7 @@
       </p:sp>
       <p:sp>
         <p:nvSpPr>
-          <p:cNvPr id="24" name="Oval 23"/>
+          <p:cNvPr id="25" name="Oval 24"/>
           <p:cNvSpPr/>
           <p:nvPr/>
         </p:nvSpPr>
@@ -36403,7 +37209,7 @@
       </p:sp>
       <p:sp>
         <p:nvSpPr>
-          <p:cNvPr id="25" name="TextBox 24"/>
+          <p:cNvPr id="26" name="TextBox 25"/>
           <p:cNvSpPr txBox="1"/>
           <p:nvPr/>
         </p:nvSpPr>
@@ -36450,7 +37256,7 @@
       </p:sp>
       <p:sp>
         <p:nvSpPr>
-          <p:cNvPr id="26" name="Rounded Rectangle 25"/>
+          <p:cNvPr id="27" name="Rounded Rectangle 26"/>
           <p:cNvSpPr/>
           <p:nvPr/>
         </p:nvSpPr>
@@ -36498,7 +37304,7 @@
       </p:sp>
       <p:sp>
         <p:nvSpPr>
-          <p:cNvPr id="27" name="TextBox 26"/>
+          <p:cNvPr id="28" name="TextBox 27"/>
           <p:cNvSpPr txBox="1"/>
           <p:nvPr/>
         </p:nvSpPr>
@@ -36545,7 +37351,7 @@
       </p:sp>
       <p:sp>
         <p:nvSpPr>
-          <p:cNvPr id="28" name="TextBox 27"/>
+          <p:cNvPr id="29" name="TextBox 28"/>
           <p:cNvSpPr txBox="1"/>
           <p:nvPr/>
         </p:nvSpPr>
@@ -36592,7 +37398,7 @@
       </p:sp>
       <p:sp>
         <p:nvSpPr>
-          <p:cNvPr id="29" name="Rounded Rectangle 28"/>
+          <p:cNvPr id="30" name="Rounded Rectangle 29"/>
           <p:cNvSpPr/>
           <p:nvPr/>
         </p:nvSpPr>
@@ -36659,7 +37465,7 @@
       </p:sp>
       <p:sp>
         <p:nvSpPr>
-          <p:cNvPr id="30" name="Rectangle 29"/>
+          <p:cNvPr id="31" name="Rectangle 30"/>
           <p:cNvSpPr/>
           <p:nvPr/>
         </p:nvSpPr>

--- a/Unit 2 - Tools and Technologies.pptx
+++ b/Unit 2 - Tools and Technologies.pptx
@@ -4187,60 +4187,13 @@
       </p:pic>
       <p:sp>
         <p:nvSpPr>
-          <p:cNvPr id="9" name="TextBox 8"/>
-          <p:cNvSpPr txBox="1"/>
-          <p:nvPr/>
-        </p:nvSpPr>
-        <p:spPr>
-          <a:xfrm>
-            <a:off x="932688" y="1170432"/>
-            <a:ext cx="7223760" cy="274320"/>
-          </a:xfrm>
-          <a:prstGeom prst="rect">
-            <a:avLst/>
-          </a:prstGeom>
-          <a:noFill/>
-        </p:spPr>
-        <p:txBody>
-          <a:bodyPr wrap="square" lIns="0" rIns="0" tIns="0" bIns="0" anchor="t">
-            <a:spAutoFit/>
-          </a:bodyPr>
-          <a:lstStyle/>
-          <a:p>
-            <a:pPr algn="l">
-              <a:lnSpc>
-                <a:spcPct val="122000"/>
-              </a:lnSpc>
-              <a:spcBef>
-                <a:spcPts val="0"/>
-              </a:spcBef>
-              <a:spcAft>
-                <a:spcPts val="0"/>
-              </a:spcAft>
-            </a:pPr>
-            <a:r>
-              <a:rPr sz="1050" b="1" i="0" spc="220">
-                <a:solidFill>
-                  <a:srgbClr val="00B3A4"/>
-                </a:solidFill>
-                <a:latin typeface="Segoe UI"/>
-                <a:ea typeface="Segoe UI"/>
-                <a:cs typeface="Segoe UI"/>
-              </a:rPr>
-              <a:t>PGPM · SYSTEMS SPECIALISATION</a:t>
-            </a:r>
-          </a:p>
-        </p:txBody>
-      </p:sp>
-      <p:sp>
-        <p:nvSpPr>
-          <p:cNvPr id="10" name="Rounded Rectangle 9"/>
+          <p:cNvPr id="9" name="Rounded Rectangle 8"/>
           <p:cNvSpPr/>
           <p:nvPr/>
         </p:nvSpPr>
         <p:spPr>
           <a:xfrm>
-            <a:off x="932688" y="1627632"/>
+            <a:off x="932688" y="1572768"/>
             <a:ext cx="1481328" cy="384048"/>
           </a:xfrm>
           <a:prstGeom prst="roundRect">
@@ -4301,7 +4254,7 @@
       </p:sp>
       <p:sp>
         <p:nvSpPr>
-          <p:cNvPr id="11" name="TextBox 10"/>
+          <p:cNvPr id="10" name="TextBox 9"/>
           <p:cNvSpPr txBox="1"/>
           <p:nvPr/>
         </p:nvSpPr>
@@ -4348,7 +4301,7 @@
       </p:sp>
       <p:sp>
         <p:nvSpPr>
-          <p:cNvPr id="12" name="Rectangle 11"/>
+          <p:cNvPr id="11" name="Rectangle 10"/>
           <p:cNvSpPr/>
           <p:nvPr/>
         </p:nvSpPr>
@@ -4392,7 +4345,7 @@
       </p:sp>
       <p:sp>
         <p:nvSpPr>
-          <p:cNvPr id="13" name="TextBox 12"/>
+          <p:cNvPr id="12" name="TextBox 11"/>
           <p:cNvSpPr txBox="1"/>
           <p:nvPr/>
         </p:nvSpPr>
@@ -4439,7 +4392,7 @@
       </p:sp>
       <p:sp>
         <p:nvSpPr>
-          <p:cNvPr id="14" name="Rounded Rectangle 13"/>
+          <p:cNvPr id="13" name="Rounded Rectangle 12"/>
           <p:cNvSpPr/>
           <p:nvPr/>
         </p:nvSpPr>
@@ -4506,7 +4459,7 @@
       </p:sp>
       <p:sp>
         <p:nvSpPr>
-          <p:cNvPr id="15" name="Rounded Rectangle 14"/>
+          <p:cNvPr id="14" name="Rounded Rectangle 13"/>
           <p:cNvSpPr/>
           <p:nvPr/>
         </p:nvSpPr>
@@ -4573,7 +4526,7 @@
       </p:sp>
       <p:sp>
         <p:nvSpPr>
-          <p:cNvPr id="16" name="Rounded Rectangle 15"/>
+          <p:cNvPr id="15" name="Rounded Rectangle 14"/>
           <p:cNvSpPr/>
           <p:nvPr/>
         </p:nvSpPr>
@@ -4640,7 +4593,7 @@
       </p:sp>
       <p:sp>
         <p:nvSpPr>
-          <p:cNvPr id="17" name="Rounded Rectangle 16"/>
+          <p:cNvPr id="16" name="Rounded Rectangle 15"/>
           <p:cNvSpPr/>
           <p:nvPr/>
         </p:nvSpPr>
@@ -4707,7 +4660,7 @@
       </p:sp>
       <p:sp>
         <p:nvSpPr>
-          <p:cNvPr id="18" name="Rectangle 17"/>
+          <p:cNvPr id="17" name="Rectangle 16"/>
           <p:cNvSpPr/>
           <p:nvPr/>
         </p:nvSpPr>
@@ -4751,7 +4704,7 @@
       </p:sp>
       <p:sp>
         <p:nvSpPr>
-          <p:cNvPr id="19" name="TextBox 18"/>
+          <p:cNvPr id="18" name="TextBox 17"/>
           <p:cNvSpPr txBox="1"/>
           <p:nvPr/>
         </p:nvSpPr>
@@ -4838,53 +4791,6 @@
                 <a:cs typeface="Segoe UI"/>
               </a:rPr>
               <a:t>OSI2509030</a:t>
-            </a:r>
-          </a:p>
-        </p:txBody>
-      </p:sp>
-      <p:sp>
-        <p:nvSpPr>
-          <p:cNvPr id="20" name="TextBox 19"/>
-          <p:cNvSpPr txBox="1"/>
-          <p:nvPr/>
-        </p:nvSpPr>
-        <p:spPr>
-          <a:xfrm>
-            <a:off x="7180783" y="5870448"/>
-            <a:ext cx="4206240" cy="640080"/>
-          </a:xfrm>
-          <a:prstGeom prst="rect">
-            <a:avLst/>
-          </a:prstGeom>
-          <a:noFill/>
-        </p:spPr>
-        <p:txBody>
-          <a:bodyPr wrap="square" lIns="0" rIns="0" tIns="0" bIns="0" anchor="t">
-            <a:spAutoFit/>
-          </a:bodyPr>
-          <a:lstStyle/>
-          <a:p>
-            <a:pPr algn="r">
-              <a:lnSpc>
-                <a:spcPct val="134000"/>
-              </a:lnSpc>
-              <a:spcBef>
-                <a:spcPts val="0"/>
-              </a:spcBef>
-              <a:spcAft>
-                <a:spcPts val="0"/>
-              </a:spcAft>
-            </a:pPr>
-            <a:r>
-              <a:rPr sz="1000" b="1" i="0">
-                <a:solidFill>
-                  <a:srgbClr val="C5D2E8"/>
-                </a:solidFill>
-                <a:latin typeface="Segoe UI"/>
-                <a:ea typeface="Segoe UI"/>
-                <a:cs typeface="Segoe UI"/>
-              </a:rPr>
-              <a:t>Unit 2 of 5</a:t>
             </a:r>
           </a:p>
         </p:txBody>
@@ -5282,54 +5188,7 @@
       </p:sp>
       <p:sp>
         <p:nvSpPr>
-          <p:cNvPr id="10" name="TextBox 9"/>
-          <p:cNvSpPr txBox="1"/>
-          <p:nvPr/>
-        </p:nvSpPr>
-        <p:spPr>
-          <a:xfrm>
-            <a:off x="987552" y="5943600"/>
-            <a:ext cx="6400800" cy="274320"/>
-          </a:xfrm>
-          <a:prstGeom prst="rect">
-            <a:avLst/>
-          </a:prstGeom>
-          <a:noFill/>
-        </p:spPr>
-        <p:txBody>
-          <a:bodyPr wrap="square" lIns="0" rIns="0" tIns="0" bIns="0" anchor="t">
-            <a:spAutoFit/>
-          </a:bodyPr>
-          <a:lstStyle/>
-          <a:p>
-            <a:pPr algn="l">
-              <a:lnSpc>
-                <a:spcPct val="122000"/>
-              </a:lnSpc>
-              <a:spcBef>
-                <a:spcPts val="0"/>
-              </a:spcBef>
-              <a:spcAft>
-                <a:spcPts val="0"/>
-              </a:spcAft>
-            </a:pPr>
-            <a:r>
-              <a:rPr sz="900" b="1" i="0" spc="160">
-                <a:solidFill>
-                  <a:srgbClr val="6B7FA6"/>
-                </a:solidFill>
-                <a:latin typeface="Segoe UI"/>
-                <a:ea typeface="Segoe UI"/>
-                <a:cs typeface="Segoe UI"/>
-              </a:rPr>
-              <a:t>UNIT 2  ·  TOOLS AND TECHNOLOGIES</a:t>
-            </a:r>
-          </a:p>
-        </p:txBody>
-      </p:sp>
-      <p:sp>
-        <p:nvSpPr>
-          <p:cNvPr id="11" name="logo-plate"/>
+          <p:cNvPr id="10" name="logo-plate"/>
           <p:cNvSpPr/>
           <p:nvPr/>
         </p:nvSpPr>
@@ -5375,7 +5234,7 @@
       </p:sp>
       <p:pic>
         <p:nvPicPr>
-          <p:cNvPr id="12" name="college-logo" descr="logo-full.png"/>
+          <p:cNvPr id="11" name="college-logo" descr="logo-full.png"/>
           <p:cNvPicPr>
             <a:picLocks noChangeAspect="1"/>
           </p:cNvPicPr>
@@ -5491,8 +5350,77 @@
         </p:nvSpPr>
         <p:spPr>
           <a:xfrm>
-            <a:off x="713232" y="6272784"/>
-            <a:ext cx="5597920" cy="219456"/>
+            <a:off x="8240677" y="6272784"/>
+            <a:ext cx="2651760" cy="219456"/>
+          </a:xfrm>
+          <a:prstGeom prst="rect">
+            <a:avLst/>
+          </a:prstGeom>
+          <a:noFill/>
+        </p:spPr>
+        <p:txBody>
+          <a:bodyPr wrap="square" lIns="0" rIns="0" tIns="0" bIns="0" anchor="t">
+            <a:spAutoFit/>
+          </a:bodyPr>
+          <a:lstStyle/>
+          <a:p>
+            <a:pPr algn="r">
+              <a:lnSpc>
+                <a:spcPct val="122000"/>
+              </a:lnSpc>
+              <a:spcBef>
+                <a:spcPts val="0"/>
+              </a:spcBef>
+              <a:spcAft>
+                <a:spcPts val="0"/>
+              </a:spcAft>
+            </a:pPr>
+            <a:r>
+              <a:rPr sz="900" b="0" i="0">
+                <a:solidFill>
+                  <a:srgbClr val="636E85"/>
+                </a:solidFill>
+                <a:latin typeface="Segoe UI"/>
+                <a:ea typeface="Segoe UI"/>
+                <a:cs typeface="Segoe UI"/>
+              </a:rPr>
+              <a:t>Lingesh K  ·  OSI2509030</a:t>
+            </a:r>
+            <a:r>
+              <a:rPr sz="900" b="0" i="0">
+                <a:solidFill>
+                  <a:srgbClr val="141C2E"/>
+                </a:solidFill>
+                <a:latin typeface="Segoe UI"/>
+                <a:ea typeface="Segoe UI"/>
+                <a:cs typeface="Segoe UI"/>
+              </a:rPr>
+              <a:t>     </a:t>
+            </a:r>
+            <a:r>
+              <a:rPr sz="900" b="1" i="0">
+                <a:solidFill>
+                  <a:srgbClr val="0E1E3C"/>
+                </a:solidFill>
+                <a:latin typeface="Segoe UI"/>
+                <a:ea typeface="Segoe UI"/>
+                <a:cs typeface="Segoe UI"/>
+              </a:rPr>
+              <a:t>11</a:t>
+            </a:r>
+          </a:p>
+        </p:txBody>
+      </p:sp>
+      <p:sp>
+        <p:nvSpPr>
+          <p:cNvPr id="5" name="TextBox 4"/>
+          <p:cNvSpPr txBox="1"/>
+          <p:nvPr/>
+        </p:nvSpPr>
+        <p:spPr>
+          <a:xfrm>
+            <a:off x="713232" y="566928"/>
+            <a:ext cx="10765231" cy="219456"/>
           </a:xfrm>
           <a:prstGeom prst="rect">
             <a:avLst/>
@@ -5517,106 +5445,15 @@
               </a:spcAft>
             </a:pPr>
             <a:r>
-              <a:rPr sz="900" b="1" i="0">
-                <a:solidFill>
-                  <a:srgbClr val="0E1E3C"/>
-                </a:solidFill>
-                <a:latin typeface="Segoe UI"/>
-                <a:ea typeface="Segoe UI"/>
-                <a:cs typeface="Segoe UI"/>
-              </a:rPr>
-              <a:t>Unit 2</a:t>
-            </a:r>
-            <a:r>
-              <a:rPr sz="900" b="0" i="0">
-                <a:solidFill>
-                  <a:srgbClr val="939EB3"/>
-                </a:solidFill>
-                <a:latin typeface="Segoe UI"/>
-                <a:ea typeface="Segoe UI"/>
-                <a:cs typeface="Segoe UI"/>
-              </a:rPr>
-              <a:t>  ·  </a:t>
-            </a:r>
-            <a:r>
-              <a:rPr sz="900" b="0" i="0">
-                <a:solidFill>
-                  <a:srgbClr val="636E85"/>
-                </a:solidFill>
-                <a:latin typeface="Segoe UI"/>
-                <a:ea typeface="Segoe UI"/>
-                <a:cs typeface="Segoe UI"/>
-              </a:rPr>
-              <a:t>Tools and Technologies</a:t>
-            </a:r>
-          </a:p>
-        </p:txBody>
-      </p:sp>
-      <p:sp>
-        <p:nvSpPr>
-          <p:cNvPr id="5" name="TextBox 4"/>
-          <p:cNvSpPr txBox="1"/>
-          <p:nvPr/>
-        </p:nvSpPr>
-        <p:spPr>
-          <a:xfrm>
-            <a:off x="8240677" y="6272784"/>
-            <a:ext cx="2651760" cy="219456"/>
-          </a:xfrm>
-          <a:prstGeom prst="rect">
-            <a:avLst/>
-          </a:prstGeom>
-          <a:noFill/>
-        </p:spPr>
-        <p:txBody>
-          <a:bodyPr wrap="square" lIns="0" rIns="0" tIns="0" bIns="0" anchor="t">
-            <a:spAutoFit/>
-          </a:bodyPr>
-          <a:lstStyle/>
-          <a:p>
-            <a:pPr algn="r">
-              <a:lnSpc>
-                <a:spcPct val="122000"/>
-              </a:lnSpc>
-              <a:spcBef>
-                <a:spcPts val="0"/>
-              </a:spcBef>
-              <a:spcAft>
-                <a:spcPts val="0"/>
-              </a:spcAft>
-            </a:pPr>
-            <a:r>
-              <a:rPr sz="900" b="0" i="0">
-                <a:solidFill>
-                  <a:srgbClr val="636E85"/>
-                </a:solidFill>
-                <a:latin typeface="Segoe UI"/>
-                <a:ea typeface="Segoe UI"/>
-                <a:cs typeface="Segoe UI"/>
-              </a:rPr>
-              <a:t>Lingesh K  ·  OSI2509030</a:t>
-            </a:r>
-            <a:r>
-              <a:rPr sz="900" b="0" i="0">
-                <a:solidFill>
-                  <a:srgbClr val="141C2E"/>
-                </a:solidFill>
-                <a:latin typeface="Segoe UI"/>
-                <a:ea typeface="Segoe UI"/>
-                <a:cs typeface="Segoe UI"/>
-              </a:rPr>
-              <a:t>     </a:t>
-            </a:r>
-            <a:r>
-              <a:rPr sz="900" b="1" i="0">
-                <a:solidFill>
-                  <a:srgbClr val="0E1E3C"/>
-                </a:solidFill>
-                <a:latin typeface="Segoe UI"/>
-                <a:ea typeface="Segoe UI"/>
-                <a:cs typeface="Segoe UI"/>
-              </a:rPr>
-              <a:t>11</a:t>
+              <a:rPr sz="950" b="1" i="0" spc="160">
+                <a:solidFill>
+                  <a:srgbClr val="F5A623"/>
+                </a:solidFill>
+                <a:latin typeface="Segoe UI"/>
+                <a:ea typeface="Segoe UI"/>
+                <a:cs typeface="Segoe UI"/>
+              </a:rPr>
+              <a:t>DEFINITION</a:t>
             </a:r>
           </a:p>
         </p:txBody>
@@ -5624,53 +5461,6 @@
       <p:sp>
         <p:nvSpPr>
           <p:cNvPr id="6" name="TextBox 5"/>
-          <p:cNvSpPr txBox="1"/>
-          <p:nvPr/>
-        </p:nvSpPr>
-        <p:spPr>
-          <a:xfrm>
-            <a:off x="713232" y="566928"/>
-            <a:ext cx="10765231" cy="219456"/>
-          </a:xfrm>
-          <a:prstGeom prst="rect">
-            <a:avLst/>
-          </a:prstGeom>
-          <a:noFill/>
-        </p:spPr>
-        <p:txBody>
-          <a:bodyPr wrap="square" lIns="0" rIns="0" tIns="0" bIns="0" anchor="t">
-            <a:spAutoFit/>
-          </a:bodyPr>
-          <a:lstStyle/>
-          <a:p>
-            <a:pPr algn="l">
-              <a:lnSpc>
-                <a:spcPct val="122000"/>
-              </a:lnSpc>
-              <a:spcBef>
-                <a:spcPts val="0"/>
-              </a:spcBef>
-              <a:spcAft>
-                <a:spcPts val="0"/>
-              </a:spcAft>
-            </a:pPr>
-            <a:r>
-              <a:rPr sz="950" b="1" i="0" spc="160">
-                <a:solidFill>
-                  <a:srgbClr val="F5A623"/>
-                </a:solidFill>
-                <a:latin typeface="Segoe UI"/>
-                <a:ea typeface="Segoe UI"/>
-                <a:cs typeface="Segoe UI"/>
-              </a:rPr>
-              <a:t>DEFINITION</a:t>
-            </a:r>
-          </a:p>
-        </p:txBody>
-      </p:sp>
-      <p:sp>
-        <p:nvSpPr>
-          <p:cNvPr id="7" name="TextBox 6"/>
           <p:cNvSpPr txBox="1"/>
           <p:nvPr/>
         </p:nvSpPr>
@@ -5717,7 +5507,7 @@
       </p:sp>
       <p:sp>
         <p:nvSpPr>
-          <p:cNvPr id="8" name="Rectangle 7"/>
+          <p:cNvPr id="7" name="Rectangle 6"/>
           <p:cNvSpPr/>
           <p:nvPr/>
         </p:nvSpPr>
@@ -5761,7 +5551,7 @@
       </p:sp>
       <p:sp>
         <p:nvSpPr>
-          <p:cNvPr id="9" name="TextBox 8"/>
+          <p:cNvPr id="8" name="TextBox 7"/>
           <p:cNvSpPr txBox="1"/>
           <p:nvPr/>
         </p:nvSpPr>
@@ -5808,7 +5598,7 @@
       </p:sp>
       <p:sp>
         <p:nvSpPr>
-          <p:cNvPr id="10" name="Rectangle 9"/>
+          <p:cNvPr id="9" name="Rectangle 8"/>
           <p:cNvSpPr/>
           <p:nvPr/>
         </p:nvSpPr>
@@ -5852,7 +5642,7 @@
       </p:sp>
       <p:sp>
         <p:nvSpPr>
-          <p:cNvPr id="11" name="Rounded Rectangle 10"/>
+          <p:cNvPr id="10" name="Rounded Rectangle 9"/>
           <p:cNvSpPr/>
           <p:nvPr/>
         </p:nvSpPr>
@@ -5898,7 +5688,7 @@
       </p:sp>
       <p:sp>
         <p:nvSpPr>
-          <p:cNvPr id="12" name="TextBox 11"/>
+          <p:cNvPr id="11" name="TextBox 10"/>
           <p:cNvSpPr txBox="1"/>
           <p:nvPr/>
         </p:nvSpPr>
@@ -5945,7 +5735,7 @@
       </p:sp>
       <p:sp>
         <p:nvSpPr>
-          <p:cNvPr id="13" name="Rounded Rectangle 12"/>
+          <p:cNvPr id="12" name="Rounded Rectangle 11"/>
           <p:cNvSpPr/>
           <p:nvPr/>
         </p:nvSpPr>
@@ -5991,7 +5781,7 @@
       </p:sp>
       <p:sp>
         <p:nvSpPr>
-          <p:cNvPr id="14" name="TextBox 13"/>
+          <p:cNvPr id="13" name="TextBox 12"/>
           <p:cNvSpPr txBox="1"/>
           <p:nvPr/>
         </p:nvSpPr>
@@ -6038,7 +5828,7 @@
       </p:sp>
       <p:sp>
         <p:nvSpPr>
-          <p:cNvPr id="15" name="Rounded Rectangle 14"/>
+          <p:cNvPr id="14" name="Rounded Rectangle 13"/>
           <p:cNvSpPr/>
           <p:nvPr/>
         </p:nvSpPr>
@@ -6084,7 +5874,7 @@
       </p:sp>
       <p:sp>
         <p:nvSpPr>
-          <p:cNvPr id="16" name="TextBox 15"/>
+          <p:cNvPr id="15" name="TextBox 14"/>
           <p:cNvSpPr txBox="1"/>
           <p:nvPr/>
         </p:nvSpPr>
@@ -6131,7 +5921,7 @@
       </p:sp>
       <p:sp>
         <p:nvSpPr>
-          <p:cNvPr id="17" name="Rounded Rectangle 16"/>
+          <p:cNvPr id="16" name="Rounded Rectangle 15"/>
           <p:cNvSpPr/>
           <p:nvPr/>
         </p:nvSpPr>
@@ -6177,7 +5967,7 @@
       </p:sp>
       <p:sp>
         <p:nvSpPr>
-          <p:cNvPr id="18" name="TextBox 17"/>
+          <p:cNvPr id="17" name="TextBox 16"/>
           <p:cNvSpPr txBox="1"/>
           <p:nvPr/>
         </p:nvSpPr>
@@ -6224,7 +6014,7 @@
       </p:sp>
       <p:sp>
         <p:nvSpPr>
-          <p:cNvPr id="19" name="Rounded Rectangle 18"/>
+          <p:cNvPr id="18" name="Rounded Rectangle 17"/>
           <p:cNvSpPr/>
           <p:nvPr/>
         </p:nvSpPr>
@@ -6270,7 +6060,7 @@
       </p:sp>
       <p:sp>
         <p:nvSpPr>
-          <p:cNvPr id="20" name="TextBox 19"/>
+          <p:cNvPr id="19" name="TextBox 18"/>
           <p:cNvSpPr txBox="1"/>
           <p:nvPr/>
         </p:nvSpPr>
@@ -6317,7 +6107,7 @@
       </p:sp>
       <p:sp>
         <p:nvSpPr>
-          <p:cNvPr id="21" name="Rounded Rectangle 20"/>
+          <p:cNvPr id="20" name="Rounded Rectangle 19"/>
           <p:cNvSpPr/>
           <p:nvPr/>
         </p:nvSpPr>
@@ -6371,7 +6161,7 @@
       </p:sp>
       <p:sp>
         <p:nvSpPr>
-          <p:cNvPr id="22" name="Rectangle 21"/>
+          <p:cNvPr id="21" name="Rectangle 20"/>
           <p:cNvSpPr/>
           <p:nvPr/>
         </p:nvSpPr>
@@ -6415,7 +6205,7 @@
       </p:sp>
       <p:sp>
         <p:nvSpPr>
-          <p:cNvPr id="23" name="TextBox 22"/>
+          <p:cNvPr id="22" name="TextBox 21"/>
           <p:cNvSpPr txBox="1"/>
           <p:nvPr/>
         </p:nvSpPr>
@@ -6462,7 +6252,7 @@
       </p:sp>
       <p:sp>
         <p:nvSpPr>
-          <p:cNvPr id="24" name="TextBox 23"/>
+          <p:cNvPr id="23" name="TextBox 22"/>
           <p:cNvSpPr txBox="1"/>
           <p:nvPr/>
         </p:nvSpPr>
@@ -6509,7 +6299,7 @@
       </p:sp>
       <p:sp>
         <p:nvSpPr>
-          <p:cNvPr id="25" name="Rounded Rectangle 24"/>
+          <p:cNvPr id="24" name="Rounded Rectangle 23"/>
           <p:cNvSpPr/>
           <p:nvPr/>
         </p:nvSpPr>
@@ -6563,7 +6353,7 @@
       </p:sp>
       <p:sp>
         <p:nvSpPr>
-          <p:cNvPr id="26" name="Rectangle 25"/>
+          <p:cNvPr id="25" name="Rectangle 24"/>
           <p:cNvSpPr/>
           <p:nvPr/>
         </p:nvSpPr>
@@ -6607,7 +6397,7 @@
       </p:sp>
       <p:sp>
         <p:nvSpPr>
-          <p:cNvPr id="27" name="TextBox 26"/>
+          <p:cNvPr id="26" name="TextBox 25"/>
           <p:cNvSpPr txBox="1"/>
           <p:nvPr/>
         </p:nvSpPr>
@@ -6654,7 +6444,7 @@
       </p:sp>
       <p:sp>
         <p:nvSpPr>
-          <p:cNvPr id="28" name="TextBox 27"/>
+          <p:cNvPr id="27" name="TextBox 26"/>
           <p:cNvSpPr txBox="1"/>
           <p:nvPr/>
         </p:nvSpPr>
@@ -6701,7 +6491,7 @@
       </p:sp>
       <p:sp>
         <p:nvSpPr>
-          <p:cNvPr id="29" name="Rounded Rectangle 28"/>
+          <p:cNvPr id="28" name="Rounded Rectangle 27"/>
           <p:cNvSpPr/>
           <p:nvPr/>
         </p:nvSpPr>
@@ -6755,7 +6545,7 @@
       </p:sp>
       <p:sp>
         <p:nvSpPr>
-          <p:cNvPr id="30" name="Rectangle 29"/>
+          <p:cNvPr id="29" name="Rectangle 28"/>
           <p:cNvSpPr/>
           <p:nvPr/>
         </p:nvSpPr>
@@ -6799,7 +6589,7 @@
       </p:sp>
       <p:sp>
         <p:nvSpPr>
-          <p:cNvPr id="31" name="TextBox 30"/>
+          <p:cNvPr id="30" name="TextBox 29"/>
           <p:cNvSpPr txBox="1"/>
           <p:nvPr/>
         </p:nvSpPr>
@@ -6846,7 +6636,7 @@
       </p:sp>
       <p:sp>
         <p:nvSpPr>
-          <p:cNvPr id="32" name="TextBox 31"/>
+          <p:cNvPr id="31" name="TextBox 30"/>
           <p:cNvSpPr txBox="1"/>
           <p:nvPr/>
         </p:nvSpPr>
@@ -6985,8 +6775,77 @@
         </p:nvSpPr>
         <p:spPr>
           <a:xfrm>
-            <a:off x="713232" y="6272784"/>
-            <a:ext cx="5597920" cy="219456"/>
+            <a:off x="8240677" y="6272784"/>
+            <a:ext cx="2651760" cy="219456"/>
+          </a:xfrm>
+          <a:prstGeom prst="rect">
+            <a:avLst/>
+          </a:prstGeom>
+          <a:noFill/>
+        </p:spPr>
+        <p:txBody>
+          <a:bodyPr wrap="square" lIns="0" rIns="0" tIns="0" bIns="0" anchor="t">
+            <a:spAutoFit/>
+          </a:bodyPr>
+          <a:lstStyle/>
+          <a:p>
+            <a:pPr algn="r">
+              <a:lnSpc>
+                <a:spcPct val="122000"/>
+              </a:lnSpc>
+              <a:spcBef>
+                <a:spcPts val="0"/>
+              </a:spcBef>
+              <a:spcAft>
+                <a:spcPts val="0"/>
+              </a:spcAft>
+            </a:pPr>
+            <a:r>
+              <a:rPr sz="900" b="0" i="0">
+                <a:solidFill>
+                  <a:srgbClr val="636E85"/>
+                </a:solidFill>
+                <a:latin typeface="Segoe UI"/>
+                <a:ea typeface="Segoe UI"/>
+                <a:cs typeface="Segoe UI"/>
+              </a:rPr>
+              <a:t>Lingesh K  ·  OSI2509030</a:t>
+            </a:r>
+            <a:r>
+              <a:rPr sz="900" b="0" i="0">
+                <a:solidFill>
+                  <a:srgbClr val="141C2E"/>
+                </a:solidFill>
+                <a:latin typeface="Segoe UI"/>
+                <a:ea typeface="Segoe UI"/>
+                <a:cs typeface="Segoe UI"/>
+              </a:rPr>
+              <a:t>     </a:t>
+            </a:r>
+            <a:r>
+              <a:rPr sz="900" b="1" i="0">
+                <a:solidFill>
+                  <a:srgbClr val="0E1E3C"/>
+                </a:solidFill>
+                <a:latin typeface="Segoe UI"/>
+                <a:ea typeface="Segoe UI"/>
+                <a:cs typeface="Segoe UI"/>
+              </a:rPr>
+              <a:t>12</a:t>
+            </a:r>
+          </a:p>
+        </p:txBody>
+      </p:sp>
+      <p:sp>
+        <p:nvSpPr>
+          <p:cNvPr id="5" name="TextBox 4"/>
+          <p:cNvSpPr txBox="1"/>
+          <p:nvPr/>
+        </p:nvSpPr>
+        <p:spPr>
+          <a:xfrm>
+            <a:off x="713232" y="566928"/>
+            <a:ext cx="10765231" cy="219456"/>
           </a:xfrm>
           <a:prstGeom prst="rect">
             <a:avLst/>
@@ -7011,106 +6870,15 @@
               </a:spcAft>
             </a:pPr>
             <a:r>
-              <a:rPr sz="900" b="1" i="0">
-                <a:solidFill>
-                  <a:srgbClr val="0E1E3C"/>
-                </a:solidFill>
-                <a:latin typeface="Segoe UI"/>
-                <a:ea typeface="Segoe UI"/>
-                <a:cs typeface="Segoe UI"/>
-              </a:rPr>
-              <a:t>Unit 2</a:t>
-            </a:r>
-            <a:r>
-              <a:rPr sz="900" b="0" i="0">
-                <a:solidFill>
-                  <a:srgbClr val="939EB3"/>
-                </a:solidFill>
-                <a:latin typeface="Segoe UI"/>
-                <a:ea typeface="Segoe UI"/>
-                <a:cs typeface="Segoe UI"/>
-              </a:rPr>
-              <a:t>  ·  </a:t>
-            </a:r>
-            <a:r>
-              <a:rPr sz="900" b="0" i="0">
-                <a:solidFill>
-                  <a:srgbClr val="636E85"/>
-                </a:solidFill>
-                <a:latin typeface="Segoe UI"/>
-                <a:ea typeface="Segoe UI"/>
-                <a:cs typeface="Segoe UI"/>
-              </a:rPr>
-              <a:t>Tools and Technologies</a:t>
-            </a:r>
-          </a:p>
-        </p:txBody>
-      </p:sp>
-      <p:sp>
-        <p:nvSpPr>
-          <p:cNvPr id="5" name="TextBox 4"/>
-          <p:cNvSpPr txBox="1"/>
-          <p:nvPr/>
-        </p:nvSpPr>
-        <p:spPr>
-          <a:xfrm>
-            <a:off x="8240677" y="6272784"/>
-            <a:ext cx="2651760" cy="219456"/>
-          </a:xfrm>
-          <a:prstGeom prst="rect">
-            <a:avLst/>
-          </a:prstGeom>
-          <a:noFill/>
-        </p:spPr>
-        <p:txBody>
-          <a:bodyPr wrap="square" lIns="0" rIns="0" tIns="0" bIns="0" anchor="t">
-            <a:spAutoFit/>
-          </a:bodyPr>
-          <a:lstStyle/>
-          <a:p>
-            <a:pPr algn="r">
-              <a:lnSpc>
-                <a:spcPct val="122000"/>
-              </a:lnSpc>
-              <a:spcBef>
-                <a:spcPts val="0"/>
-              </a:spcBef>
-              <a:spcAft>
-                <a:spcPts val="0"/>
-              </a:spcAft>
-            </a:pPr>
-            <a:r>
-              <a:rPr sz="900" b="0" i="0">
-                <a:solidFill>
-                  <a:srgbClr val="636E85"/>
-                </a:solidFill>
-                <a:latin typeface="Segoe UI"/>
-                <a:ea typeface="Segoe UI"/>
-                <a:cs typeface="Segoe UI"/>
-              </a:rPr>
-              <a:t>Lingesh K  ·  OSI2509030</a:t>
-            </a:r>
-            <a:r>
-              <a:rPr sz="900" b="0" i="0">
-                <a:solidFill>
-                  <a:srgbClr val="141C2E"/>
-                </a:solidFill>
-                <a:latin typeface="Segoe UI"/>
-                <a:ea typeface="Segoe UI"/>
-                <a:cs typeface="Segoe UI"/>
-              </a:rPr>
-              <a:t>     </a:t>
-            </a:r>
-            <a:r>
-              <a:rPr sz="900" b="1" i="0">
-                <a:solidFill>
-                  <a:srgbClr val="0E1E3C"/>
-                </a:solidFill>
-                <a:latin typeface="Segoe UI"/>
-                <a:ea typeface="Segoe UI"/>
-                <a:cs typeface="Segoe UI"/>
-              </a:rPr>
-              <a:t>12</a:t>
+              <a:rPr sz="950" b="1" i="0" spc="160">
+                <a:solidFill>
+                  <a:srgbClr val="E05151"/>
+                </a:solidFill>
+                <a:latin typeface="Segoe UI"/>
+                <a:ea typeface="Segoe UI"/>
+                <a:cs typeface="Segoe UI"/>
+              </a:rPr>
+              <a:t>WHY IT MATTERS</a:t>
             </a:r>
           </a:p>
         </p:txBody>
@@ -7118,53 +6886,6 @@
       <p:sp>
         <p:nvSpPr>
           <p:cNvPr id="6" name="TextBox 5"/>
-          <p:cNvSpPr txBox="1"/>
-          <p:nvPr/>
-        </p:nvSpPr>
-        <p:spPr>
-          <a:xfrm>
-            <a:off x="713232" y="566928"/>
-            <a:ext cx="10765231" cy="219456"/>
-          </a:xfrm>
-          <a:prstGeom prst="rect">
-            <a:avLst/>
-          </a:prstGeom>
-          <a:noFill/>
-        </p:spPr>
-        <p:txBody>
-          <a:bodyPr wrap="square" lIns="0" rIns="0" tIns="0" bIns="0" anchor="t">
-            <a:spAutoFit/>
-          </a:bodyPr>
-          <a:lstStyle/>
-          <a:p>
-            <a:pPr algn="l">
-              <a:lnSpc>
-                <a:spcPct val="122000"/>
-              </a:lnSpc>
-              <a:spcBef>
-                <a:spcPts val="0"/>
-              </a:spcBef>
-              <a:spcAft>
-                <a:spcPts val="0"/>
-              </a:spcAft>
-            </a:pPr>
-            <a:r>
-              <a:rPr sz="950" b="1" i="0" spc="160">
-                <a:solidFill>
-                  <a:srgbClr val="E05151"/>
-                </a:solidFill>
-                <a:latin typeface="Segoe UI"/>
-                <a:ea typeface="Segoe UI"/>
-                <a:cs typeface="Segoe UI"/>
-              </a:rPr>
-              <a:t>WHY IT MATTERS</a:t>
-            </a:r>
-          </a:p>
-        </p:txBody>
-      </p:sp>
-      <p:sp>
-        <p:nvSpPr>
-          <p:cNvPr id="7" name="TextBox 6"/>
           <p:cNvSpPr txBox="1"/>
           <p:nvPr/>
         </p:nvSpPr>
@@ -7211,7 +6932,7 @@
       </p:sp>
       <p:sp>
         <p:nvSpPr>
-          <p:cNvPr id="8" name="Rectangle 7"/>
+          <p:cNvPr id="7" name="Rectangle 6"/>
           <p:cNvSpPr/>
           <p:nvPr/>
         </p:nvSpPr>
@@ -7255,7 +6976,7 @@
       </p:sp>
       <p:sp>
         <p:nvSpPr>
-          <p:cNvPr id="9" name="TextBox 8"/>
+          <p:cNvPr id="8" name="TextBox 7"/>
           <p:cNvSpPr txBox="1"/>
           <p:nvPr/>
         </p:nvSpPr>
@@ -7302,7 +7023,7 @@
       </p:sp>
       <p:sp>
         <p:nvSpPr>
-          <p:cNvPr id="10" name="Rounded Rectangle 9"/>
+          <p:cNvPr id="9" name="Rounded Rectangle 8"/>
           <p:cNvSpPr/>
           <p:nvPr/>
         </p:nvSpPr>
@@ -7356,7 +7077,7 @@
       </p:sp>
       <p:sp>
         <p:nvSpPr>
-          <p:cNvPr id="11" name="Rectangle 10"/>
+          <p:cNvPr id="10" name="Rectangle 9"/>
           <p:cNvSpPr/>
           <p:nvPr/>
         </p:nvSpPr>
@@ -7400,7 +7121,7 @@
       </p:sp>
       <p:sp>
         <p:nvSpPr>
-          <p:cNvPr id="12" name="Rounded Rectangle 11"/>
+          <p:cNvPr id="11" name="Rounded Rectangle 10"/>
           <p:cNvSpPr/>
           <p:nvPr/>
         </p:nvSpPr>
@@ -7467,7 +7188,7 @@
       </p:sp>
       <p:sp>
         <p:nvSpPr>
-          <p:cNvPr id="13" name="TextBox 12"/>
+          <p:cNvPr id="12" name="TextBox 11"/>
           <p:cNvSpPr txBox="1"/>
           <p:nvPr/>
         </p:nvSpPr>
@@ -7514,7 +7235,7 @@
       </p:sp>
       <p:sp>
         <p:nvSpPr>
-          <p:cNvPr id="14" name="Rectangle 13"/>
+          <p:cNvPr id="13" name="Rectangle 12"/>
           <p:cNvSpPr/>
           <p:nvPr/>
         </p:nvSpPr>
@@ -7558,7 +7279,7 @@
       </p:sp>
       <p:sp>
         <p:nvSpPr>
-          <p:cNvPr id="15" name="Rounded Rectangle 14"/>
+          <p:cNvPr id="14" name="Rounded Rectangle 13"/>
           <p:cNvSpPr/>
           <p:nvPr/>
         </p:nvSpPr>
@@ -7604,7 +7325,7 @@
       </p:sp>
       <p:sp>
         <p:nvSpPr>
-          <p:cNvPr id="16" name="TextBox 15"/>
+          <p:cNvPr id="15" name="TextBox 14"/>
           <p:cNvSpPr txBox="1"/>
           <p:nvPr/>
         </p:nvSpPr>
@@ -7651,7 +7372,7 @@
       </p:sp>
       <p:sp>
         <p:nvSpPr>
-          <p:cNvPr id="17" name="Rounded Rectangle 16"/>
+          <p:cNvPr id="16" name="Rounded Rectangle 15"/>
           <p:cNvSpPr/>
           <p:nvPr/>
         </p:nvSpPr>
@@ -7697,7 +7418,7 @@
       </p:sp>
       <p:sp>
         <p:nvSpPr>
-          <p:cNvPr id="18" name="TextBox 17"/>
+          <p:cNvPr id="17" name="TextBox 16"/>
           <p:cNvSpPr txBox="1"/>
           <p:nvPr/>
         </p:nvSpPr>
@@ -7744,7 +7465,7 @@
       </p:sp>
       <p:sp>
         <p:nvSpPr>
-          <p:cNvPr id="19" name="Rounded Rectangle 18"/>
+          <p:cNvPr id="18" name="Rounded Rectangle 17"/>
           <p:cNvSpPr/>
           <p:nvPr/>
         </p:nvSpPr>
@@ -7790,7 +7511,7 @@
       </p:sp>
       <p:sp>
         <p:nvSpPr>
-          <p:cNvPr id="20" name="TextBox 19"/>
+          <p:cNvPr id="19" name="TextBox 18"/>
           <p:cNvSpPr txBox="1"/>
           <p:nvPr/>
         </p:nvSpPr>
@@ -7837,7 +7558,7 @@
       </p:sp>
       <p:sp>
         <p:nvSpPr>
-          <p:cNvPr id="21" name="Rounded Rectangle 20"/>
+          <p:cNvPr id="20" name="Rounded Rectangle 19"/>
           <p:cNvSpPr/>
           <p:nvPr/>
         </p:nvSpPr>
@@ -7883,7 +7604,7 @@
       </p:sp>
       <p:sp>
         <p:nvSpPr>
-          <p:cNvPr id="22" name="TextBox 21"/>
+          <p:cNvPr id="21" name="TextBox 20"/>
           <p:cNvSpPr txBox="1"/>
           <p:nvPr/>
         </p:nvSpPr>
@@ -7930,7 +7651,7 @@
       </p:sp>
       <p:sp>
         <p:nvSpPr>
-          <p:cNvPr id="23" name="Rounded Rectangle 22"/>
+          <p:cNvPr id="22" name="Rounded Rectangle 21"/>
           <p:cNvSpPr/>
           <p:nvPr/>
         </p:nvSpPr>
@@ -7976,7 +7697,7 @@
       </p:sp>
       <p:sp>
         <p:nvSpPr>
-          <p:cNvPr id="24" name="TextBox 23"/>
+          <p:cNvPr id="23" name="TextBox 22"/>
           <p:cNvSpPr txBox="1"/>
           <p:nvPr/>
         </p:nvSpPr>
@@ -8023,7 +7744,7 @@
       </p:sp>
       <p:sp>
         <p:nvSpPr>
-          <p:cNvPr id="25" name="Rounded Rectangle 24"/>
+          <p:cNvPr id="24" name="Rounded Rectangle 23"/>
           <p:cNvSpPr/>
           <p:nvPr/>
         </p:nvSpPr>
@@ -8077,7 +7798,7 @@
       </p:sp>
       <p:sp>
         <p:nvSpPr>
-          <p:cNvPr id="26" name="Rectangle 25"/>
+          <p:cNvPr id="25" name="Rectangle 24"/>
           <p:cNvSpPr/>
           <p:nvPr/>
         </p:nvSpPr>
@@ -8121,7 +7842,7 @@
       </p:sp>
       <p:sp>
         <p:nvSpPr>
-          <p:cNvPr id="27" name="Rounded Rectangle 26"/>
+          <p:cNvPr id="26" name="Rounded Rectangle 25"/>
           <p:cNvSpPr/>
           <p:nvPr/>
         </p:nvSpPr>
@@ -8188,7 +7909,7 @@
       </p:sp>
       <p:sp>
         <p:nvSpPr>
-          <p:cNvPr id="28" name="TextBox 27"/>
+          <p:cNvPr id="27" name="TextBox 26"/>
           <p:cNvSpPr txBox="1"/>
           <p:nvPr/>
         </p:nvSpPr>
@@ -8235,7 +7956,7 @@
       </p:sp>
       <p:sp>
         <p:nvSpPr>
-          <p:cNvPr id="29" name="Rectangle 28"/>
+          <p:cNvPr id="28" name="Rectangle 27"/>
           <p:cNvSpPr/>
           <p:nvPr/>
         </p:nvSpPr>
@@ -8279,7 +8000,7 @@
       </p:sp>
       <p:sp>
         <p:nvSpPr>
-          <p:cNvPr id="30" name="Rounded Rectangle 29"/>
+          <p:cNvPr id="29" name="Rounded Rectangle 28"/>
           <p:cNvSpPr/>
           <p:nvPr/>
         </p:nvSpPr>
@@ -8325,7 +8046,7 @@
       </p:sp>
       <p:sp>
         <p:nvSpPr>
-          <p:cNvPr id="31" name="TextBox 30"/>
+          <p:cNvPr id="30" name="TextBox 29"/>
           <p:cNvSpPr txBox="1"/>
           <p:nvPr/>
         </p:nvSpPr>
@@ -8372,7 +8093,7 @@
       </p:sp>
       <p:sp>
         <p:nvSpPr>
-          <p:cNvPr id="32" name="Rounded Rectangle 31"/>
+          <p:cNvPr id="31" name="Rounded Rectangle 30"/>
           <p:cNvSpPr/>
           <p:nvPr/>
         </p:nvSpPr>
@@ -8418,7 +8139,7 @@
       </p:sp>
       <p:sp>
         <p:nvSpPr>
-          <p:cNvPr id="33" name="TextBox 32"/>
+          <p:cNvPr id="32" name="TextBox 31"/>
           <p:cNvSpPr txBox="1"/>
           <p:nvPr/>
         </p:nvSpPr>
@@ -8465,7 +8186,7 @@
       </p:sp>
       <p:sp>
         <p:nvSpPr>
-          <p:cNvPr id="34" name="Rounded Rectangle 33"/>
+          <p:cNvPr id="33" name="Rounded Rectangle 32"/>
           <p:cNvSpPr/>
           <p:nvPr/>
         </p:nvSpPr>
@@ -8511,7 +8232,7 @@
       </p:sp>
       <p:sp>
         <p:nvSpPr>
-          <p:cNvPr id="35" name="TextBox 34"/>
+          <p:cNvPr id="34" name="TextBox 33"/>
           <p:cNvSpPr txBox="1"/>
           <p:nvPr/>
         </p:nvSpPr>
@@ -8558,7 +8279,7 @@
       </p:sp>
       <p:sp>
         <p:nvSpPr>
-          <p:cNvPr id="36" name="Rounded Rectangle 35"/>
+          <p:cNvPr id="35" name="Rounded Rectangle 34"/>
           <p:cNvSpPr/>
           <p:nvPr/>
         </p:nvSpPr>
@@ -8604,7 +8325,7 @@
       </p:sp>
       <p:sp>
         <p:nvSpPr>
-          <p:cNvPr id="37" name="TextBox 36"/>
+          <p:cNvPr id="36" name="TextBox 35"/>
           <p:cNvSpPr txBox="1"/>
           <p:nvPr/>
         </p:nvSpPr>
@@ -8651,7 +8372,7 @@
       </p:sp>
       <p:sp>
         <p:nvSpPr>
-          <p:cNvPr id="38" name="Rounded Rectangle 37"/>
+          <p:cNvPr id="37" name="Rounded Rectangle 36"/>
           <p:cNvSpPr/>
           <p:nvPr/>
         </p:nvSpPr>
@@ -8697,7 +8418,7 @@
       </p:sp>
       <p:sp>
         <p:nvSpPr>
-          <p:cNvPr id="39" name="TextBox 38"/>
+          <p:cNvPr id="38" name="TextBox 37"/>
           <p:cNvSpPr txBox="1"/>
           <p:nvPr/>
         </p:nvSpPr>
@@ -8744,7 +8465,7 @@
       </p:sp>
       <p:sp>
         <p:nvSpPr>
-          <p:cNvPr id="40" name="Rounded Rectangle 39"/>
+          <p:cNvPr id="39" name="Rounded Rectangle 38"/>
           <p:cNvSpPr/>
           <p:nvPr/>
         </p:nvSpPr>
@@ -8914,8 +8635,77 @@
         </p:nvSpPr>
         <p:spPr>
           <a:xfrm>
-            <a:off x="713232" y="6272784"/>
-            <a:ext cx="5597920" cy="219456"/>
+            <a:off x="8240677" y="6272784"/>
+            <a:ext cx="2651760" cy="219456"/>
+          </a:xfrm>
+          <a:prstGeom prst="rect">
+            <a:avLst/>
+          </a:prstGeom>
+          <a:noFill/>
+        </p:spPr>
+        <p:txBody>
+          <a:bodyPr wrap="square" lIns="0" rIns="0" tIns="0" bIns="0" anchor="t">
+            <a:spAutoFit/>
+          </a:bodyPr>
+          <a:lstStyle/>
+          <a:p>
+            <a:pPr algn="r">
+              <a:lnSpc>
+                <a:spcPct val="122000"/>
+              </a:lnSpc>
+              <a:spcBef>
+                <a:spcPts val="0"/>
+              </a:spcBef>
+              <a:spcAft>
+                <a:spcPts val="0"/>
+              </a:spcAft>
+            </a:pPr>
+            <a:r>
+              <a:rPr sz="900" b="0" i="0">
+                <a:solidFill>
+                  <a:srgbClr val="636E85"/>
+                </a:solidFill>
+                <a:latin typeface="Segoe UI"/>
+                <a:ea typeface="Segoe UI"/>
+                <a:cs typeface="Segoe UI"/>
+              </a:rPr>
+              <a:t>Lingesh K  ·  OSI2509030</a:t>
+            </a:r>
+            <a:r>
+              <a:rPr sz="900" b="0" i="0">
+                <a:solidFill>
+                  <a:srgbClr val="141C2E"/>
+                </a:solidFill>
+                <a:latin typeface="Segoe UI"/>
+                <a:ea typeface="Segoe UI"/>
+                <a:cs typeface="Segoe UI"/>
+              </a:rPr>
+              <a:t>     </a:t>
+            </a:r>
+            <a:r>
+              <a:rPr sz="900" b="1" i="0">
+                <a:solidFill>
+                  <a:srgbClr val="0E1E3C"/>
+                </a:solidFill>
+                <a:latin typeface="Segoe UI"/>
+                <a:ea typeface="Segoe UI"/>
+                <a:cs typeface="Segoe UI"/>
+              </a:rPr>
+              <a:t>13</a:t>
+            </a:r>
+          </a:p>
+        </p:txBody>
+      </p:sp>
+      <p:sp>
+        <p:nvSpPr>
+          <p:cNvPr id="5" name="TextBox 4"/>
+          <p:cNvSpPr txBox="1"/>
+          <p:nvPr/>
+        </p:nvSpPr>
+        <p:spPr>
+          <a:xfrm>
+            <a:off x="713232" y="566928"/>
+            <a:ext cx="10765231" cy="219456"/>
           </a:xfrm>
           <a:prstGeom prst="rect">
             <a:avLst/>
@@ -8940,106 +8730,15 @@
               </a:spcAft>
             </a:pPr>
             <a:r>
-              <a:rPr sz="900" b="1" i="0">
-                <a:solidFill>
-                  <a:srgbClr val="0E1E3C"/>
-                </a:solidFill>
-                <a:latin typeface="Segoe UI"/>
-                <a:ea typeface="Segoe UI"/>
-                <a:cs typeface="Segoe UI"/>
-              </a:rPr>
-              <a:t>Unit 2</a:t>
-            </a:r>
-            <a:r>
-              <a:rPr sz="900" b="0" i="0">
-                <a:solidFill>
-                  <a:srgbClr val="939EB3"/>
-                </a:solidFill>
-                <a:latin typeface="Segoe UI"/>
-                <a:ea typeface="Segoe UI"/>
-                <a:cs typeface="Segoe UI"/>
-              </a:rPr>
-              <a:t>  ·  </a:t>
-            </a:r>
-            <a:r>
-              <a:rPr sz="900" b="0" i="0">
-                <a:solidFill>
-                  <a:srgbClr val="636E85"/>
-                </a:solidFill>
-                <a:latin typeface="Segoe UI"/>
-                <a:ea typeface="Segoe UI"/>
-                <a:cs typeface="Segoe UI"/>
-              </a:rPr>
-              <a:t>Tools and Technologies</a:t>
-            </a:r>
-          </a:p>
-        </p:txBody>
-      </p:sp>
-      <p:sp>
-        <p:nvSpPr>
-          <p:cNvPr id="5" name="TextBox 4"/>
-          <p:cNvSpPr txBox="1"/>
-          <p:nvPr/>
-        </p:nvSpPr>
-        <p:spPr>
-          <a:xfrm>
-            <a:off x="8240677" y="6272784"/>
-            <a:ext cx="2651760" cy="219456"/>
-          </a:xfrm>
-          <a:prstGeom prst="rect">
-            <a:avLst/>
-          </a:prstGeom>
-          <a:noFill/>
-        </p:spPr>
-        <p:txBody>
-          <a:bodyPr wrap="square" lIns="0" rIns="0" tIns="0" bIns="0" anchor="t">
-            <a:spAutoFit/>
-          </a:bodyPr>
-          <a:lstStyle/>
-          <a:p>
-            <a:pPr algn="r">
-              <a:lnSpc>
-                <a:spcPct val="122000"/>
-              </a:lnSpc>
-              <a:spcBef>
-                <a:spcPts val="0"/>
-              </a:spcBef>
-              <a:spcAft>
-                <a:spcPts val="0"/>
-              </a:spcAft>
-            </a:pPr>
-            <a:r>
-              <a:rPr sz="900" b="0" i="0">
-                <a:solidFill>
-                  <a:srgbClr val="636E85"/>
-                </a:solidFill>
-                <a:latin typeface="Segoe UI"/>
-                <a:ea typeface="Segoe UI"/>
-                <a:cs typeface="Segoe UI"/>
-              </a:rPr>
-              <a:t>Lingesh K  ·  OSI2509030</a:t>
-            </a:r>
-            <a:r>
-              <a:rPr sz="900" b="0" i="0">
-                <a:solidFill>
-                  <a:srgbClr val="141C2E"/>
-                </a:solidFill>
-                <a:latin typeface="Segoe UI"/>
-                <a:ea typeface="Segoe UI"/>
-                <a:cs typeface="Segoe UI"/>
-              </a:rPr>
-              <a:t>     </a:t>
-            </a:r>
-            <a:r>
-              <a:rPr sz="900" b="1" i="0">
-                <a:solidFill>
-                  <a:srgbClr val="0E1E3C"/>
-                </a:solidFill>
-                <a:latin typeface="Segoe UI"/>
-                <a:ea typeface="Segoe UI"/>
-                <a:cs typeface="Segoe UI"/>
-              </a:rPr>
-              <a:t>13</a:t>
+              <a:rPr sz="950" b="1" i="0" spc="160">
+                <a:solidFill>
+                  <a:srgbClr val="F5A623"/>
+                </a:solidFill>
+                <a:latin typeface="Segoe UI"/>
+                <a:ea typeface="Segoe UI"/>
+                <a:cs typeface="Segoe UI"/>
+              </a:rPr>
+              <a:t>THE RECIPE</a:t>
             </a:r>
           </a:p>
         </p:txBody>
@@ -9047,53 +8746,6 @@
       <p:sp>
         <p:nvSpPr>
           <p:cNvPr id="6" name="TextBox 5"/>
-          <p:cNvSpPr txBox="1"/>
-          <p:nvPr/>
-        </p:nvSpPr>
-        <p:spPr>
-          <a:xfrm>
-            <a:off x="713232" y="566928"/>
-            <a:ext cx="10765231" cy="219456"/>
-          </a:xfrm>
-          <a:prstGeom prst="rect">
-            <a:avLst/>
-          </a:prstGeom>
-          <a:noFill/>
-        </p:spPr>
-        <p:txBody>
-          <a:bodyPr wrap="square" lIns="0" rIns="0" tIns="0" bIns="0" anchor="t">
-            <a:spAutoFit/>
-          </a:bodyPr>
-          <a:lstStyle/>
-          <a:p>
-            <a:pPr algn="l">
-              <a:lnSpc>
-                <a:spcPct val="122000"/>
-              </a:lnSpc>
-              <a:spcBef>
-                <a:spcPts val="0"/>
-              </a:spcBef>
-              <a:spcAft>
-                <a:spcPts val="0"/>
-              </a:spcAft>
-            </a:pPr>
-            <a:r>
-              <a:rPr sz="950" b="1" i="0" spc="160">
-                <a:solidFill>
-                  <a:srgbClr val="F5A623"/>
-                </a:solidFill>
-                <a:latin typeface="Segoe UI"/>
-                <a:ea typeface="Segoe UI"/>
-                <a:cs typeface="Segoe UI"/>
-              </a:rPr>
-              <a:t>THE RECIPE</a:t>
-            </a:r>
-          </a:p>
-        </p:txBody>
-      </p:sp>
-      <p:sp>
-        <p:nvSpPr>
-          <p:cNvPr id="7" name="TextBox 6"/>
           <p:cNvSpPr txBox="1"/>
           <p:nvPr/>
         </p:nvSpPr>
@@ -9140,7 +8792,7 @@
       </p:sp>
       <p:sp>
         <p:nvSpPr>
-          <p:cNvPr id="8" name="Rectangle 7"/>
+          <p:cNvPr id="7" name="Rectangle 6"/>
           <p:cNvSpPr/>
           <p:nvPr/>
         </p:nvSpPr>
@@ -9184,7 +8836,7 @@
       </p:sp>
       <p:sp>
         <p:nvSpPr>
-          <p:cNvPr id="9" name="TextBox 8"/>
+          <p:cNvPr id="8" name="TextBox 7"/>
           <p:cNvSpPr txBox="1"/>
           <p:nvPr/>
         </p:nvSpPr>
@@ -9231,7 +8883,7 @@
       </p:sp>
       <p:sp>
         <p:nvSpPr>
-          <p:cNvPr id="10" name="Rounded Rectangle 9"/>
+          <p:cNvPr id="9" name="Rounded Rectangle 8"/>
           <p:cNvSpPr/>
           <p:nvPr/>
         </p:nvSpPr>
@@ -9277,7 +8929,7 @@
       </p:sp>
       <p:sp>
         <p:nvSpPr>
-          <p:cNvPr id="11" name="Rectangle 10"/>
+          <p:cNvPr id="10" name="Rectangle 9"/>
           <p:cNvSpPr/>
           <p:nvPr/>
         </p:nvSpPr>
@@ -9321,7 +8973,7 @@
       </p:sp>
       <p:sp>
         <p:nvSpPr>
-          <p:cNvPr id="12" name="TextBox 11"/>
+          <p:cNvPr id="11" name="TextBox 10"/>
           <p:cNvSpPr txBox="1"/>
           <p:nvPr/>
         </p:nvSpPr>
@@ -9368,7 +9020,7 @@
       </p:sp>
       <p:sp>
         <p:nvSpPr>
-          <p:cNvPr id="13" name="TextBox 12"/>
+          <p:cNvPr id="12" name="TextBox 11"/>
           <p:cNvSpPr txBox="1"/>
           <p:nvPr/>
         </p:nvSpPr>
@@ -9427,7 +9079,7 @@
       </p:sp>
       <p:sp>
         <p:nvSpPr>
-          <p:cNvPr id="14" name="Rounded Rectangle 13"/>
+          <p:cNvPr id="13" name="Rounded Rectangle 12"/>
           <p:cNvSpPr/>
           <p:nvPr/>
         </p:nvSpPr>
@@ -9473,7 +9125,7 @@
       </p:sp>
       <p:sp>
         <p:nvSpPr>
-          <p:cNvPr id="15" name="Rectangle 14"/>
+          <p:cNvPr id="14" name="Rectangle 13"/>
           <p:cNvSpPr/>
           <p:nvPr/>
         </p:nvSpPr>
@@ -9517,7 +9169,7 @@
       </p:sp>
       <p:sp>
         <p:nvSpPr>
-          <p:cNvPr id="16" name="TextBox 15"/>
+          <p:cNvPr id="15" name="TextBox 14"/>
           <p:cNvSpPr txBox="1"/>
           <p:nvPr/>
         </p:nvSpPr>
@@ -9564,7 +9216,7 @@
       </p:sp>
       <p:sp>
         <p:nvSpPr>
-          <p:cNvPr id="17" name="TextBox 16"/>
+          <p:cNvPr id="16" name="TextBox 15"/>
           <p:cNvSpPr txBox="1"/>
           <p:nvPr/>
         </p:nvSpPr>
@@ -9623,7 +9275,7 @@
       </p:sp>
       <p:sp>
         <p:nvSpPr>
-          <p:cNvPr id="18" name="Rounded Rectangle 17"/>
+          <p:cNvPr id="17" name="Rounded Rectangle 16"/>
           <p:cNvSpPr/>
           <p:nvPr/>
         </p:nvSpPr>
@@ -9669,7 +9321,7 @@
       </p:sp>
       <p:sp>
         <p:nvSpPr>
-          <p:cNvPr id="19" name="Rectangle 18"/>
+          <p:cNvPr id="18" name="Rectangle 17"/>
           <p:cNvSpPr/>
           <p:nvPr/>
         </p:nvSpPr>
@@ -9713,7 +9365,7 @@
       </p:sp>
       <p:sp>
         <p:nvSpPr>
-          <p:cNvPr id="20" name="TextBox 19"/>
+          <p:cNvPr id="19" name="TextBox 18"/>
           <p:cNvSpPr txBox="1"/>
           <p:nvPr/>
         </p:nvSpPr>
@@ -9760,7 +9412,7 @@
       </p:sp>
       <p:sp>
         <p:nvSpPr>
-          <p:cNvPr id="21" name="TextBox 20"/>
+          <p:cNvPr id="20" name="TextBox 19"/>
           <p:cNvSpPr txBox="1"/>
           <p:nvPr/>
         </p:nvSpPr>
@@ -9819,7 +9471,7 @@
       </p:sp>
       <p:sp>
         <p:nvSpPr>
-          <p:cNvPr id="22" name="Rounded Rectangle 21"/>
+          <p:cNvPr id="21" name="Rounded Rectangle 20"/>
           <p:cNvSpPr/>
           <p:nvPr/>
         </p:nvSpPr>
@@ -9865,7 +9517,7 @@
       </p:sp>
       <p:sp>
         <p:nvSpPr>
-          <p:cNvPr id="23" name="Rectangle 22"/>
+          <p:cNvPr id="22" name="Rectangle 21"/>
           <p:cNvSpPr/>
           <p:nvPr/>
         </p:nvSpPr>
@@ -9909,7 +9561,7 @@
       </p:sp>
       <p:sp>
         <p:nvSpPr>
-          <p:cNvPr id="24" name="TextBox 23"/>
+          <p:cNvPr id="23" name="TextBox 22"/>
           <p:cNvSpPr txBox="1"/>
           <p:nvPr/>
         </p:nvSpPr>
@@ -9956,7 +9608,7 @@
       </p:sp>
       <p:sp>
         <p:nvSpPr>
-          <p:cNvPr id="25" name="TextBox 24"/>
+          <p:cNvPr id="24" name="TextBox 23"/>
           <p:cNvSpPr txBox="1"/>
           <p:nvPr/>
         </p:nvSpPr>
@@ -10015,7 +9667,7 @@
       </p:sp>
       <p:sp>
         <p:nvSpPr>
-          <p:cNvPr id="26" name="Rounded Rectangle 25"/>
+          <p:cNvPr id="25" name="Rounded Rectangle 24"/>
           <p:cNvSpPr/>
           <p:nvPr/>
         </p:nvSpPr>
@@ -10061,7 +9713,7 @@
       </p:sp>
       <p:sp>
         <p:nvSpPr>
-          <p:cNvPr id="27" name="Rectangle 26"/>
+          <p:cNvPr id="26" name="Rectangle 25"/>
           <p:cNvSpPr/>
           <p:nvPr/>
         </p:nvSpPr>
@@ -10105,7 +9757,7 @@
       </p:sp>
       <p:sp>
         <p:nvSpPr>
-          <p:cNvPr id="28" name="TextBox 27"/>
+          <p:cNvPr id="27" name="TextBox 26"/>
           <p:cNvSpPr txBox="1"/>
           <p:nvPr/>
         </p:nvSpPr>
@@ -10152,7 +9804,7 @@
       </p:sp>
       <p:sp>
         <p:nvSpPr>
-          <p:cNvPr id="29" name="TextBox 28"/>
+          <p:cNvPr id="28" name="TextBox 27"/>
           <p:cNvSpPr txBox="1"/>
           <p:nvPr/>
         </p:nvSpPr>
@@ -10303,8 +9955,77 @@
         </p:nvSpPr>
         <p:spPr>
           <a:xfrm>
-            <a:off x="713232" y="6272784"/>
-            <a:ext cx="5597920" cy="219456"/>
+            <a:off x="8240677" y="6272784"/>
+            <a:ext cx="2651760" cy="219456"/>
+          </a:xfrm>
+          <a:prstGeom prst="rect">
+            <a:avLst/>
+          </a:prstGeom>
+          <a:noFill/>
+        </p:spPr>
+        <p:txBody>
+          <a:bodyPr wrap="square" lIns="0" rIns="0" tIns="0" bIns="0" anchor="t">
+            <a:spAutoFit/>
+          </a:bodyPr>
+          <a:lstStyle/>
+          <a:p>
+            <a:pPr algn="r">
+              <a:lnSpc>
+                <a:spcPct val="122000"/>
+              </a:lnSpc>
+              <a:spcBef>
+                <a:spcPts val="0"/>
+              </a:spcBef>
+              <a:spcAft>
+                <a:spcPts val="0"/>
+              </a:spcAft>
+            </a:pPr>
+            <a:r>
+              <a:rPr sz="900" b="0" i="0">
+                <a:solidFill>
+                  <a:srgbClr val="636E85"/>
+                </a:solidFill>
+                <a:latin typeface="Segoe UI"/>
+                <a:ea typeface="Segoe UI"/>
+                <a:cs typeface="Segoe UI"/>
+              </a:rPr>
+              <a:t>Lingesh K  ·  OSI2509030</a:t>
+            </a:r>
+            <a:r>
+              <a:rPr sz="900" b="0" i="0">
+                <a:solidFill>
+                  <a:srgbClr val="141C2E"/>
+                </a:solidFill>
+                <a:latin typeface="Segoe UI"/>
+                <a:ea typeface="Segoe UI"/>
+                <a:cs typeface="Segoe UI"/>
+              </a:rPr>
+              <a:t>     </a:t>
+            </a:r>
+            <a:r>
+              <a:rPr sz="900" b="1" i="0">
+                <a:solidFill>
+                  <a:srgbClr val="0E1E3C"/>
+                </a:solidFill>
+                <a:latin typeface="Segoe UI"/>
+                <a:ea typeface="Segoe UI"/>
+                <a:cs typeface="Segoe UI"/>
+              </a:rPr>
+              <a:t>14</a:t>
+            </a:r>
+          </a:p>
+        </p:txBody>
+      </p:sp>
+      <p:sp>
+        <p:nvSpPr>
+          <p:cNvPr id="5" name="TextBox 4"/>
+          <p:cNvSpPr txBox="1"/>
+          <p:nvPr/>
+        </p:nvSpPr>
+        <p:spPr>
+          <a:xfrm>
+            <a:off x="713232" y="566928"/>
+            <a:ext cx="10765231" cy="219456"/>
           </a:xfrm>
           <a:prstGeom prst="rect">
             <a:avLst/>
@@ -10329,106 +10050,15 @@
               </a:spcAft>
             </a:pPr>
             <a:r>
-              <a:rPr sz="900" b="1" i="0">
-                <a:solidFill>
-                  <a:srgbClr val="0E1E3C"/>
-                </a:solidFill>
-                <a:latin typeface="Segoe UI"/>
-                <a:ea typeface="Segoe UI"/>
-                <a:cs typeface="Segoe UI"/>
-              </a:rPr>
-              <a:t>Unit 2</a:t>
-            </a:r>
-            <a:r>
-              <a:rPr sz="900" b="0" i="0">
-                <a:solidFill>
-                  <a:srgbClr val="939EB3"/>
-                </a:solidFill>
-                <a:latin typeface="Segoe UI"/>
-                <a:ea typeface="Segoe UI"/>
-                <a:cs typeface="Segoe UI"/>
-              </a:rPr>
-              <a:t>  ·  </a:t>
-            </a:r>
-            <a:r>
-              <a:rPr sz="900" b="0" i="0">
-                <a:solidFill>
-                  <a:srgbClr val="636E85"/>
-                </a:solidFill>
-                <a:latin typeface="Segoe UI"/>
-                <a:ea typeface="Segoe UI"/>
-                <a:cs typeface="Segoe UI"/>
-              </a:rPr>
-              <a:t>Tools and Technologies</a:t>
-            </a:r>
-          </a:p>
-        </p:txBody>
-      </p:sp>
-      <p:sp>
-        <p:nvSpPr>
-          <p:cNvPr id="5" name="TextBox 4"/>
-          <p:cNvSpPr txBox="1"/>
-          <p:nvPr/>
-        </p:nvSpPr>
-        <p:spPr>
-          <a:xfrm>
-            <a:off x="8240677" y="6272784"/>
-            <a:ext cx="2651760" cy="219456"/>
-          </a:xfrm>
-          <a:prstGeom prst="rect">
-            <a:avLst/>
-          </a:prstGeom>
-          <a:noFill/>
-        </p:spPr>
-        <p:txBody>
-          <a:bodyPr wrap="square" lIns="0" rIns="0" tIns="0" bIns="0" anchor="t">
-            <a:spAutoFit/>
-          </a:bodyPr>
-          <a:lstStyle/>
-          <a:p>
-            <a:pPr algn="r">
-              <a:lnSpc>
-                <a:spcPct val="122000"/>
-              </a:lnSpc>
-              <a:spcBef>
-                <a:spcPts val="0"/>
-              </a:spcBef>
-              <a:spcAft>
-                <a:spcPts val="0"/>
-              </a:spcAft>
-            </a:pPr>
-            <a:r>
-              <a:rPr sz="900" b="0" i="0">
-                <a:solidFill>
-                  <a:srgbClr val="636E85"/>
-                </a:solidFill>
-                <a:latin typeface="Segoe UI"/>
-                <a:ea typeface="Segoe UI"/>
-                <a:cs typeface="Segoe UI"/>
-              </a:rPr>
-              <a:t>Lingesh K  ·  OSI2509030</a:t>
-            </a:r>
-            <a:r>
-              <a:rPr sz="900" b="0" i="0">
-                <a:solidFill>
-                  <a:srgbClr val="141C2E"/>
-                </a:solidFill>
-                <a:latin typeface="Segoe UI"/>
-                <a:ea typeface="Segoe UI"/>
-                <a:cs typeface="Segoe UI"/>
-              </a:rPr>
-              <a:t>     </a:t>
-            </a:r>
-            <a:r>
-              <a:rPr sz="900" b="1" i="0">
-                <a:solidFill>
-                  <a:srgbClr val="0E1E3C"/>
-                </a:solidFill>
-                <a:latin typeface="Segoe UI"/>
-                <a:ea typeface="Segoe UI"/>
-                <a:cs typeface="Segoe UI"/>
-              </a:rPr>
-              <a:t>14</a:t>
+              <a:rPr sz="950" b="1" i="0" spc="160">
+                <a:solidFill>
+                  <a:srgbClr val="3B7AF7"/>
+                </a:solidFill>
+                <a:latin typeface="Segoe UI"/>
+                <a:ea typeface="Segoe UI"/>
+                <a:cs typeface="Segoe UI"/>
+              </a:rPr>
+              <a:t>THE PROCESS</a:t>
             </a:r>
           </a:p>
         </p:txBody>
@@ -10436,53 +10066,6 @@
       <p:sp>
         <p:nvSpPr>
           <p:cNvPr id="6" name="TextBox 5"/>
-          <p:cNvSpPr txBox="1"/>
-          <p:nvPr/>
-        </p:nvSpPr>
-        <p:spPr>
-          <a:xfrm>
-            <a:off x="713232" y="566928"/>
-            <a:ext cx="10765231" cy="219456"/>
-          </a:xfrm>
-          <a:prstGeom prst="rect">
-            <a:avLst/>
-          </a:prstGeom>
-          <a:noFill/>
-        </p:spPr>
-        <p:txBody>
-          <a:bodyPr wrap="square" lIns="0" rIns="0" tIns="0" bIns="0" anchor="t">
-            <a:spAutoFit/>
-          </a:bodyPr>
-          <a:lstStyle/>
-          <a:p>
-            <a:pPr algn="l">
-              <a:lnSpc>
-                <a:spcPct val="122000"/>
-              </a:lnSpc>
-              <a:spcBef>
-                <a:spcPts val="0"/>
-              </a:spcBef>
-              <a:spcAft>
-                <a:spcPts val="0"/>
-              </a:spcAft>
-            </a:pPr>
-            <a:r>
-              <a:rPr sz="950" b="1" i="0" spc="160">
-                <a:solidFill>
-                  <a:srgbClr val="3B7AF7"/>
-                </a:solidFill>
-                <a:latin typeface="Segoe UI"/>
-                <a:ea typeface="Segoe UI"/>
-                <a:cs typeface="Segoe UI"/>
-              </a:rPr>
-              <a:t>THE PROCESS</a:t>
-            </a:r>
-          </a:p>
-        </p:txBody>
-      </p:sp>
-      <p:sp>
-        <p:nvSpPr>
-          <p:cNvPr id="7" name="TextBox 6"/>
           <p:cNvSpPr txBox="1"/>
           <p:nvPr/>
         </p:nvSpPr>
@@ -10529,7 +10112,7 @@
       </p:sp>
       <p:sp>
         <p:nvSpPr>
-          <p:cNvPr id="8" name="Rectangle 7"/>
+          <p:cNvPr id="7" name="Rectangle 6"/>
           <p:cNvSpPr/>
           <p:nvPr/>
         </p:nvSpPr>
@@ -10573,7 +10156,7 @@
       </p:sp>
       <p:sp>
         <p:nvSpPr>
-          <p:cNvPr id="9" name="TextBox 8"/>
+          <p:cNvPr id="8" name="TextBox 7"/>
           <p:cNvSpPr txBox="1"/>
           <p:nvPr/>
         </p:nvSpPr>
@@ -10620,7 +10203,7 @@
       </p:sp>
       <p:sp>
         <p:nvSpPr>
-          <p:cNvPr id="10" name="Rectangle 9"/>
+          <p:cNvPr id="9" name="Rectangle 8"/>
           <p:cNvSpPr/>
           <p:nvPr/>
         </p:nvSpPr>
@@ -10664,7 +10247,7 @@
       </p:sp>
       <p:sp>
         <p:nvSpPr>
-          <p:cNvPr id="11" name="Oval 10"/>
+          <p:cNvPr id="10" name="Oval 9"/>
           <p:cNvSpPr/>
           <p:nvPr/>
         </p:nvSpPr>
@@ -10708,7 +10291,7 @@
       </p:sp>
       <p:sp>
         <p:nvSpPr>
-          <p:cNvPr id="12" name="TextBox 11"/>
+          <p:cNvPr id="11" name="TextBox 10"/>
           <p:cNvSpPr txBox="1"/>
           <p:nvPr/>
         </p:nvSpPr>
@@ -10755,7 +10338,7 @@
       </p:sp>
       <p:sp>
         <p:nvSpPr>
-          <p:cNvPr id="13" name="Rounded Rectangle 12"/>
+          <p:cNvPr id="12" name="Rounded Rectangle 11"/>
           <p:cNvSpPr/>
           <p:nvPr/>
         </p:nvSpPr>
@@ -10803,7 +10386,7 @@
       </p:sp>
       <p:sp>
         <p:nvSpPr>
-          <p:cNvPr id="14" name="TextBox 13"/>
+          <p:cNvPr id="13" name="TextBox 12"/>
           <p:cNvSpPr txBox="1"/>
           <p:nvPr/>
         </p:nvSpPr>
@@ -10850,7 +10433,7 @@
       </p:sp>
       <p:sp>
         <p:nvSpPr>
-          <p:cNvPr id="15" name="TextBox 14"/>
+          <p:cNvPr id="14" name="TextBox 13"/>
           <p:cNvSpPr txBox="1"/>
           <p:nvPr/>
         </p:nvSpPr>
@@ -10897,7 +10480,7 @@
       </p:sp>
       <p:sp>
         <p:nvSpPr>
-          <p:cNvPr id="16" name="Oval 15"/>
+          <p:cNvPr id="15" name="Oval 14"/>
           <p:cNvSpPr/>
           <p:nvPr/>
         </p:nvSpPr>
@@ -10941,7 +10524,7 @@
       </p:sp>
       <p:sp>
         <p:nvSpPr>
-          <p:cNvPr id="17" name="TextBox 16"/>
+          <p:cNvPr id="16" name="TextBox 15"/>
           <p:cNvSpPr txBox="1"/>
           <p:nvPr/>
         </p:nvSpPr>
@@ -10988,7 +10571,7 @@
       </p:sp>
       <p:sp>
         <p:nvSpPr>
-          <p:cNvPr id="18" name="Rounded Rectangle 17"/>
+          <p:cNvPr id="17" name="Rounded Rectangle 16"/>
           <p:cNvSpPr/>
           <p:nvPr/>
         </p:nvSpPr>
@@ -11036,7 +10619,7 @@
       </p:sp>
       <p:sp>
         <p:nvSpPr>
-          <p:cNvPr id="19" name="TextBox 18"/>
+          <p:cNvPr id="18" name="TextBox 17"/>
           <p:cNvSpPr txBox="1"/>
           <p:nvPr/>
         </p:nvSpPr>
@@ -11083,7 +10666,7 @@
       </p:sp>
       <p:sp>
         <p:nvSpPr>
-          <p:cNvPr id="20" name="TextBox 19"/>
+          <p:cNvPr id="19" name="TextBox 18"/>
           <p:cNvSpPr txBox="1"/>
           <p:nvPr/>
         </p:nvSpPr>
@@ -11130,7 +10713,7 @@
       </p:sp>
       <p:sp>
         <p:nvSpPr>
-          <p:cNvPr id="21" name="Oval 20"/>
+          <p:cNvPr id="20" name="Oval 19"/>
           <p:cNvSpPr/>
           <p:nvPr/>
         </p:nvSpPr>
@@ -11174,7 +10757,7 @@
       </p:sp>
       <p:sp>
         <p:nvSpPr>
-          <p:cNvPr id="22" name="TextBox 21"/>
+          <p:cNvPr id="21" name="TextBox 20"/>
           <p:cNvSpPr txBox="1"/>
           <p:nvPr/>
         </p:nvSpPr>
@@ -11221,7 +10804,7 @@
       </p:sp>
       <p:sp>
         <p:nvSpPr>
-          <p:cNvPr id="23" name="Rounded Rectangle 22"/>
+          <p:cNvPr id="22" name="Rounded Rectangle 21"/>
           <p:cNvSpPr/>
           <p:nvPr/>
         </p:nvSpPr>
@@ -11269,7 +10852,7 @@
       </p:sp>
       <p:sp>
         <p:nvSpPr>
-          <p:cNvPr id="24" name="TextBox 23"/>
+          <p:cNvPr id="23" name="TextBox 22"/>
           <p:cNvSpPr txBox="1"/>
           <p:nvPr/>
         </p:nvSpPr>
@@ -11316,7 +10899,7 @@
       </p:sp>
       <p:sp>
         <p:nvSpPr>
-          <p:cNvPr id="25" name="TextBox 24"/>
+          <p:cNvPr id="24" name="TextBox 23"/>
           <p:cNvSpPr txBox="1"/>
           <p:nvPr/>
         </p:nvSpPr>
@@ -11363,7 +10946,7 @@
       </p:sp>
       <p:sp>
         <p:nvSpPr>
-          <p:cNvPr id="26" name="Oval 25"/>
+          <p:cNvPr id="25" name="Oval 24"/>
           <p:cNvSpPr/>
           <p:nvPr/>
         </p:nvSpPr>
@@ -11407,7 +10990,7 @@
       </p:sp>
       <p:sp>
         <p:nvSpPr>
-          <p:cNvPr id="27" name="TextBox 26"/>
+          <p:cNvPr id="26" name="TextBox 25"/>
           <p:cNvSpPr txBox="1"/>
           <p:nvPr/>
         </p:nvSpPr>
@@ -11454,7 +11037,7 @@
       </p:sp>
       <p:sp>
         <p:nvSpPr>
-          <p:cNvPr id="28" name="Rounded Rectangle 27"/>
+          <p:cNvPr id="27" name="Rounded Rectangle 26"/>
           <p:cNvSpPr/>
           <p:nvPr/>
         </p:nvSpPr>
@@ -11502,7 +11085,7 @@
       </p:sp>
       <p:sp>
         <p:nvSpPr>
-          <p:cNvPr id="29" name="TextBox 28"/>
+          <p:cNvPr id="28" name="TextBox 27"/>
           <p:cNvSpPr txBox="1"/>
           <p:nvPr/>
         </p:nvSpPr>
@@ -11549,7 +11132,7 @@
       </p:sp>
       <p:sp>
         <p:nvSpPr>
-          <p:cNvPr id="30" name="TextBox 29"/>
+          <p:cNvPr id="29" name="TextBox 28"/>
           <p:cNvSpPr txBox="1"/>
           <p:nvPr/>
         </p:nvSpPr>
@@ -11596,7 +11179,7 @@
       </p:sp>
       <p:sp>
         <p:nvSpPr>
-          <p:cNvPr id="31" name="Oval 30"/>
+          <p:cNvPr id="30" name="Oval 29"/>
           <p:cNvSpPr/>
           <p:nvPr/>
         </p:nvSpPr>
@@ -11640,7 +11223,7 @@
       </p:sp>
       <p:sp>
         <p:nvSpPr>
-          <p:cNvPr id="32" name="TextBox 31"/>
+          <p:cNvPr id="31" name="TextBox 30"/>
           <p:cNvSpPr txBox="1"/>
           <p:nvPr/>
         </p:nvSpPr>
@@ -11687,7 +11270,7 @@
       </p:sp>
       <p:sp>
         <p:nvSpPr>
-          <p:cNvPr id="33" name="Rounded Rectangle 32"/>
+          <p:cNvPr id="32" name="Rounded Rectangle 31"/>
           <p:cNvSpPr/>
           <p:nvPr/>
         </p:nvSpPr>
@@ -11735,7 +11318,7 @@
       </p:sp>
       <p:sp>
         <p:nvSpPr>
-          <p:cNvPr id="34" name="TextBox 33"/>
+          <p:cNvPr id="33" name="TextBox 32"/>
           <p:cNvSpPr txBox="1"/>
           <p:nvPr/>
         </p:nvSpPr>
@@ -11782,7 +11365,7 @@
       </p:sp>
       <p:sp>
         <p:nvSpPr>
-          <p:cNvPr id="35" name="TextBox 34"/>
+          <p:cNvPr id="34" name="TextBox 33"/>
           <p:cNvSpPr txBox="1"/>
           <p:nvPr/>
         </p:nvSpPr>
@@ -11829,7 +11412,7 @@
       </p:sp>
       <p:sp>
         <p:nvSpPr>
-          <p:cNvPr id="36" name="Rounded Rectangle 35"/>
+          <p:cNvPr id="35" name="Rounded Rectangle 34"/>
           <p:cNvSpPr/>
           <p:nvPr/>
         </p:nvSpPr>
@@ -11896,7 +11479,7 @@
       </p:sp>
       <p:sp>
         <p:nvSpPr>
-          <p:cNvPr id="37" name="Rectangle 36"/>
+          <p:cNvPr id="36" name="Rectangle 35"/>
           <p:cNvSpPr/>
           <p:nvPr/>
         </p:nvSpPr>
@@ -12032,8 +11615,77 @@
         </p:nvSpPr>
         <p:spPr>
           <a:xfrm>
-            <a:off x="713232" y="6272784"/>
-            <a:ext cx="5597920" cy="219456"/>
+            <a:off x="8240677" y="6272784"/>
+            <a:ext cx="2651760" cy="219456"/>
+          </a:xfrm>
+          <a:prstGeom prst="rect">
+            <a:avLst/>
+          </a:prstGeom>
+          <a:noFill/>
+        </p:spPr>
+        <p:txBody>
+          <a:bodyPr wrap="square" lIns="0" rIns="0" tIns="0" bIns="0" anchor="t">
+            <a:spAutoFit/>
+          </a:bodyPr>
+          <a:lstStyle/>
+          <a:p>
+            <a:pPr algn="r">
+              <a:lnSpc>
+                <a:spcPct val="122000"/>
+              </a:lnSpc>
+              <a:spcBef>
+                <a:spcPts val="0"/>
+              </a:spcBef>
+              <a:spcAft>
+                <a:spcPts val="0"/>
+              </a:spcAft>
+            </a:pPr>
+            <a:r>
+              <a:rPr sz="900" b="0" i="0">
+                <a:solidFill>
+                  <a:srgbClr val="636E85"/>
+                </a:solidFill>
+                <a:latin typeface="Segoe UI"/>
+                <a:ea typeface="Segoe UI"/>
+                <a:cs typeface="Segoe UI"/>
+              </a:rPr>
+              <a:t>Lingesh K  ·  OSI2509030</a:t>
+            </a:r>
+            <a:r>
+              <a:rPr sz="900" b="0" i="0">
+                <a:solidFill>
+                  <a:srgbClr val="141C2E"/>
+                </a:solidFill>
+                <a:latin typeface="Segoe UI"/>
+                <a:ea typeface="Segoe UI"/>
+                <a:cs typeface="Segoe UI"/>
+              </a:rPr>
+              <a:t>     </a:t>
+            </a:r>
+            <a:r>
+              <a:rPr sz="900" b="1" i="0">
+                <a:solidFill>
+                  <a:srgbClr val="0E1E3C"/>
+                </a:solidFill>
+                <a:latin typeface="Segoe UI"/>
+                <a:ea typeface="Segoe UI"/>
+                <a:cs typeface="Segoe UI"/>
+              </a:rPr>
+              <a:t>15</a:t>
+            </a:r>
+          </a:p>
+        </p:txBody>
+      </p:sp>
+      <p:sp>
+        <p:nvSpPr>
+          <p:cNvPr id="5" name="TextBox 4"/>
+          <p:cNvSpPr txBox="1"/>
+          <p:nvPr/>
+        </p:nvSpPr>
+        <p:spPr>
+          <a:xfrm>
+            <a:off x="713232" y="566928"/>
+            <a:ext cx="10765231" cy="219456"/>
           </a:xfrm>
           <a:prstGeom prst="rect">
             <a:avLst/>
@@ -12058,106 +11710,15 @@
               </a:spcAft>
             </a:pPr>
             <a:r>
-              <a:rPr sz="900" b="1" i="0">
-                <a:solidFill>
-                  <a:srgbClr val="0E1E3C"/>
-                </a:solidFill>
-                <a:latin typeface="Segoe UI"/>
-                <a:ea typeface="Segoe UI"/>
-                <a:cs typeface="Segoe UI"/>
-              </a:rPr>
-              <a:t>Unit 2</a:t>
-            </a:r>
-            <a:r>
-              <a:rPr sz="900" b="0" i="0">
-                <a:solidFill>
-                  <a:srgbClr val="939EB3"/>
-                </a:solidFill>
-                <a:latin typeface="Segoe UI"/>
-                <a:ea typeface="Segoe UI"/>
-                <a:cs typeface="Segoe UI"/>
-              </a:rPr>
-              <a:t>  ·  </a:t>
-            </a:r>
-            <a:r>
-              <a:rPr sz="900" b="0" i="0">
-                <a:solidFill>
-                  <a:srgbClr val="636E85"/>
-                </a:solidFill>
-                <a:latin typeface="Segoe UI"/>
-                <a:ea typeface="Segoe UI"/>
-                <a:cs typeface="Segoe UI"/>
-              </a:rPr>
-              <a:t>Tools and Technologies</a:t>
-            </a:r>
-          </a:p>
-        </p:txBody>
-      </p:sp>
-      <p:sp>
-        <p:nvSpPr>
-          <p:cNvPr id="5" name="TextBox 4"/>
-          <p:cNvSpPr txBox="1"/>
-          <p:nvPr/>
-        </p:nvSpPr>
-        <p:spPr>
-          <a:xfrm>
-            <a:off x="8240677" y="6272784"/>
-            <a:ext cx="2651760" cy="219456"/>
-          </a:xfrm>
-          <a:prstGeom prst="rect">
-            <a:avLst/>
-          </a:prstGeom>
-          <a:noFill/>
-        </p:spPr>
-        <p:txBody>
-          <a:bodyPr wrap="square" lIns="0" rIns="0" tIns="0" bIns="0" anchor="t">
-            <a:spAutoFit/>
-          </a:bodyPr>
-          <a:lstStyle/>
-          <a:p>
-            <a:pPr algn="r">
-              <a:lnSpc>
-                <a:spcPct val="122000"/>
-              </a:lnSpc>
-              <a:spcBef>
-                <a:spcPts val="0"/>
-              </a:spcBef>
-              <a:spcAft>
-                <a:spcPts val="0"/>
-              </a:spcAft>
-            </a:pPr>
-            <a:r>
-              <a:rPr sz="900" b="0" i="0">
-                <a:solidFill>
-                  <a:srgbClr val="636E85"/>
-                </a:solidFill>
-                <a:latin typeface="Segoe UI"/>
-                <a:ea typeface="Segoe UI"/>
-                <a:cs typeface="Segoe UI"/>
-              </a:rPr>
-              <a:t>Lingesh K  ·  OSI2509030</a:t>
-            </a:r>
-            <a:r>
-              <a:rPr sz="900" b="0" i="0">
-                <a:solidFill>
-                  <a:srgbClr val="141C2E"/>
-                </a:solidFill>
-                <a:latin typeface="Segoe UI"/>
-                <a:ea typeface="Segoe UI"/>
-                <a:cs typeface="Segoe UI"/>
-              </a:rPr>
-              <a:t>     </a:t>
-            </a:r>
-            <a:r>
-              <a:rPr sz="900" b="1" i="0">
-                <a:solidFill>
-                  <a:srgbClr val="0E1E3C"/>
-                </a:solidFill>
-                <a:latin typeface="Segoe UI"/>
-                <a:ea typeface="Segoe UI"/>
-                <a:cs typeface="Segoe UI"/>
-              </a:rPr>
-              <a:t>15</a:t>
+              <a:rPr sz="950" b="1" i="0" spc="160">
+                <a:solidFill>
+                  <a:srgbClr val="745CE0"/>
+                </a:solidFill>
+                <a:latin typeface="Segoe UI"/>
+                <a:ea typeface="Segoe UI"/>
+                <a:cs typeface="Segoe UI"/>
+              </a:rPr>
+              <a:t>TYPES OF PROMPTS</a:t>
             </a:r>
           </a:p>
         </p:txBody>
@@ -12165,53 +11726,6 @@
       <p:sp>
         <p:nvSpPr>
           <p:cNvPr id="6" name="TextBox 5"/>
-          <p:cNvSpPr txBox="1"/>
-          <p:nvPr/>
-        </p:nvSpPr>
-        <p:spPr>
-          <a:xfrm>
-            <a:off x="713232" y="566928"/>
-            <a:ext cx="10765231" cy="219456"/>
-          </a:xfrm>
-          <a:prstGeom prst="rect">
-            <a:avLst/>
-          </a:prstGeom>
-          <a:noFill/>
-        </p:spPr>
-        <p:txBody>
-          <a:bodyPr wrap="square" lIns="0" rIns="0" tIns="0" bIns="0" anchor="t">
-            <a:spAutoFit/>
-          </a:bodyPr>
-          <a:lstStyle/>
-          <a:p>
-            <a:pPr algn="l">
-              <a:lnSpc>
-                <a:spcPct val="122000"/>
-              </a:lnSpc>
-              <a:spcBef>
-                <a:spcPts val="0"/>
-              </a:spcBef>
-              <a:spcAft>
-                <a:spcPts val="0"/>
-              </a:spcAft>
-            </a:pPr>
-            <a:r>
-              <a:rPr sz="950" b="1" i="0" spc="160">
-                <a:solidFill>
-                  <a:srgbClr val="745CE0"/>
-                </a:solidFill>
-                <a:latin typeface="Segoe UI"/>
-                <a:ea typeface="Segoe UI"/>
-                <a:cs typeface="Segoe UI"/>
-              </a:rPr>
-              <a:t>TYPES OF PROMPTS</a:t>
-            </a:r>
-          </a:p>
-        </p:txBody>
-      </p:sp>
-      <p:sp>
-        <p:nvSpPr>
-          <p:cNvPr id="7" name="TextBox 6"/>
           <p:cNvSpPr txBox="1"/>
           <p:nvPr/>
         </p:nvSpPr>
@@ -12258,7 +11772,7 @@
       </p:sp>
       <p:sp>
         <p:nvSpPr>
-          <p:cNvPr id="8" name="Rectangle 7"/>
+          <p:cNvPr id="7" name="Rectangle 6"/>
           <p:cNvSpPr/>
           <p:nvPr/>
         </p:nvSpPr>
@@ -12302,7 +11816,7 @@
       </p:sp>
       <p:sp>
         <p:nvSpPr>
-          <p:cNvPr id="9" name="TextBox 8"/>
+          <p:cNvPr id="8" name="TextBox 7"/>
           <p:cNvSpPr txBox="1"/>
           <p:nvPr/>
         </p:nvSpPr>
@@ -12349,7 +11863,7 @@
       </p:sp>
       <p:sp>
         <p:nvSpPr>
-          <p:cNvPr id="10" name="Rounded Rectangle 9"/>
+          <p:cNvPr id="9" name="Rounded Rectangle 8"/>
           <p:cNvSpPr/>
           <p:nvPr/>
         </p:nvSpPr>
@@ -12403,7 +11917,7 @@
       </p:sp>
       <p:sp>
         <p:nvSpPr>
-          <p:cNvPr id="11" name="Rectangle 10"/>
+          <p:cNvPr id="10" name="Rectangle 9"/>
           <p:cNvSpPr/>
           <p:nvPr/>
         </p:nvSpPr>
@@ -12447,7 +11961,7 @@
       </p:sp>
       <p:sp>
         <p:nvSpPr>
-          <p:cNvPr id="12" name="TextBox 11"/>
+          <p:cNvPr id="11" name="TextBox 10"/>
           <p:cNvSpPr txBox="1"/>
           <p:nvPr/>
         </p:nvSpPr>
@@ -12494,7 +12008,7 @@
       </p:sp>
       <p:sp>
         <p:nvSpPr>
-          <p:cNvPr id="13" name="TextBox 12"/>
+          <p:cNvPr id="12" name="TextBox 11"/>
           <p:cNvSpPr txBox="1"/>
           <p:nvPr/>
         </p:nvSpPr>
@@ -12541,7 +12055,7 @@
       </p:sp>
       <p:sp>
         <p:nvSpPr>
-          <p:cNvPr id="14" name="Rounded Rectangle 13"/>
+          <p:cNvPr id="13" name="Rounded Rectangle 12"/>
           <p:cNvSpPr/>
           <p:nvPr/>
         </p:nvSpPr>
@@ -12595,7 +12109,7 @@
       </p:sp>
       <p:sp>
         <p:nvSpPr>
-          <p:cNvPr id="15" name="Rectangle 14"/>
+          <p:cNvPr id="14" name="Rectangle 13"/>
           <p:cNvSpPr/>
           <p:nvPr/>
         </p:nvSpPr>
@@ -12639,7 +12153,7 @@
       </p:sp>
       <p:sp>
         <p:nvSpPr>
-          <p:cNvPr id="16" name="TextBox 15"/>
+          <p:cNvPr id="15" name="TextBox 14"/>
           <p:cNvSpPr txBox="1"/>
           <p:nvPr/>
         </p:nvSpPr>
@@ -12686,7 +12200,7 @@
       </p:sp>
       <p:sp>
         <p:nvSpPr>
-          <p:cNvPr id="17" name="TextBox 16"/>
+          <p:cNvPr id="16" name="TextBox 15"/>
           <p:cNvSpPr txBox="1"/>
           <p:nvPr/>
         </p:nvSpPr>
@@ -12733,7 +12247,7 @@
       </p:sp>
       <p:sp>
         <p:nvSpPr>
-          <p:cNvPr id="18" name="Rounded Rectangle 17"/>
+          <p:cNvPr id="17" name="Rounded Rectangle 16"/>
           <p:cNvSpPr/>
           <p:nvPr/>
         </p:nvSpPr>
@@ -12787,7 +12301,7 @@
       </p:sp>
       <p:sp>
         <p:nvSpPr>
-          <p:cNvPr id="19" name="Rectangle 18"/>
+          <p:cNvPr id="18" name="Rectangle 17"/>
           <p:cNvSpPr/>
           <p:nvPr/>
         </p:nvSpPr>
@@ -12831,7 +12345,7 @@
       </p:sp>
       <p:sp>
         <p:nvSpPr>
-          <p:cNvPr id="20" name="TextBox 19"/>
+          <p:cNvPr id="19" name="TextBox 18"/>
           <p:cNvSpPr txBox="1"/>
           <p:nvPr/>
         </p:nvSpPr>
@@ -12878,7 +12392,7 @@
       </p:sp>
       <p:sp>
         <p:nvSpPr>
-          <p:cNvPr id="21" name="TextBox 20"/>
+          <p:cNvPr id="20" name="TextBox 19"/>
           <p:cNvSpPr txBox="1"/>
           <p:nvPr/>
         </p:nvSpPr>
@@ -12925,7 +12439,7 @@
       </p:sp>
       <p:sp>
         <p:nvSpPr>
-          <p:cNvPr id="22" name="Rounded Rectangle 21"/>
+          <p:cNvPr id="21" name="Rounded Rectangle 20"/>
           <p:cNvSpPr/>
           <p:nvPr/>
         </p:nvSpPr>
@@ -12979,7 +12493,7 @@
       </p:sp>
       <p:sp>
         <p:nvSpPr>
-          <p:cNvPr id="23" name="Rectangle 22"/>
+          <p:cNvPr id="22" name="Rectangle 21"/>
           <p:cNvSpPr/>
           <p:nvPr/>
         </p:nvSpPr>
@@ -13023,7 +12537,7 @@
       </p:sp>
       <p:sp>
         <p:nvSpPr>
-          <p:cNvPr id="24" name="TextBox 23"/>
+          <p:cNvPr id="23" name="TextBox 22"/>
           <p:cNvSpPr txBox="1"/>
           <p:nvPr/>
         </p:nvSpPr>
@@ -13070,7 +12584,7 @@
       </p:sp>
       <p:sp>
         <p:nvSpPr>
-          <p:cNvPr id="25" name="TextBox 24"/>
+          <p:cNvPr id="24" name="TextBox 23"/>
           <p:cNvSpPr txBox="1"/>
           <p:nvPr/>
         </p:nvSpPr>
@@ -13117,7 +12631,7 @@
       </p:sp>
       <p:sp>
         <p:nvSpPr>
-          <p:cNvPr id="26" name="Rounded Rectangle 25"/>
+          <p:cNvPr id="25" name="Rounded Rectangle 24"/>
           <p:cNvSpPr/>
           <p:nvPr/>
         </p:nvSpPr>
@@ -13171,7 +12685,7 @@
       </p:sp>
       <p:sp>
         <p:nvSpPr>
-          <p:cNvPr id="27" name="Rectangle 26"/>
+          <p:cNvPr id="26" name="Rectangle 25"/>
           <p:cNvSpPr/>
           <p:nvPr/>
         </p:nvSpPr>
@@ -13215,7 +12729,7 @@
       </p:sp>
       <p:sp>
         <p:nvSpPr>
-          <p:cNvPr id="28" name="TextBox 27"/>
+          <p:cNvPr id="27" name="TextBox 26"/>
           <p:cNvSpPr txBox="1"/>
           <p:nvPr/>
         </p:nvSpPr>
@@ -13262,7 +12776,7 @@
       </p:sp>
       <p:sp>
         <p:nvSpPr>
-          <p:cNvPr id="29" name="TextBox 28"/>
+          <p:cNvPr id="28" name="TextBox 27"/>
           <p:cNvSpPr txBox="1"/>
           <p:nvPr/>
         </p:nvSpPr>
@@ -13309,7 +12823,7 @@
       </p:sp>
       <p:sp>
         <p:nvSpPr>
-          <p:cNvPr id="30" name="Rounded Rectangle 29"/>
+          <p:cNvPr id="29" name="Rounded Rectangle 28"/>
           <p:cNvSpPr/>
           <p:nvPr/>
         </p:nvSpPr>
@@ -13363,7 +12877,7 @@
       </p:sp>
       <p:sp>
         <p:nvSpPr>
-          <p:cNvPr id="31" name="Rectangle 30"/>
+          <p:cNvPr id="30" name="Rectangle 29"/>
           <p:cNvSpPr/>
           <p:nvPr/>
         </p:nvSpPr>
@@ -13407,7 +12921,7 @@
       </p:sp>
       <p:sp>
         <p:nvSpPr>
-          <p:cNvPr id="32" name="TextBox 31"/>
+          <p:cNvPr id="31" name="TextBox 30"/>
           <p:cNvSpPr txBox="1"/>
           <p:nvPr/>
         </p:nvSpPr>
@@ -13454,7 +12968,7 @@
       </p:sp>
       <p:sp>
         <p:nvSpPr>
-          <p:cNvPr id="33" name="TextBox 32"/>
+          <p:cNvPr id="32" name="TextBox 31"/>
           <p:cNvSpPr txBox="1"/>
           <p:nvPr/>
         </p:nvSpPr>
@@ -13593,8 +13107,77 @@
         </p:nvSpPr>
         <p:spPr>
           <a:xfrm>
-            <a:off x="713232" y="6272784"/>
-            <a:ext cx="5597920" cy="219456"/>
+            <a:off x="8240677" y="6272784"/>
+            <a:ext cx="2651760" cy="219456"/>
+          </a:xfrm>
+          <a:prstGeom prst="rect">
+            <a:avLst/>
+          </a:prstGeom>
+          <a:noFill/>
+        </p:spPr>
+        <p:txBody>
+          <a:bodyPr wrap="square" lIns="0" rIns="0" tIns="0" bIns="0" anchor="t">
+            <a:spAutoFit/>
+          </a:bodyPr>
+          <a:lstStyle/>
+          <a:p>
+            <a:pPr algn="r">
+              <a:lnSpc>
+                <a:spcPct val="122000"/>
+              </a:lnSpc>
+              <a:spcBef>
+                <a:spcPts val="0"/>
+              </a:spcBef>
+              <a:spcAft>
+                <a:spcPts val="0"/>
+              </a:spcAft>
+            </a:pPr>
+            <a:r>
+              <a:rPr sz="900" b="0" i="0">
+                <a:solidFill>
+                  <a:srgbClr val="636E85"/>
+                </a:solidFill>
+                <a:latin typeface="Segoe UI"/>
+                <a:ea typeface="Segoe UI"/>
+                <a:cs typeface="Segoe UI"/>
+              </a:rPr>
+              <a:t>Lingesh K  ·  OSI2509030</a:t>
+            </a:r>
+            <a:r>
+              <a:rPr sz="900" b="0" i="0">
+                <a:solidFill>
+                  <a:srgbClr val="141C2E"/>
+                </a:solidFill>
+                <a:latin typeface="Segoe UI"/>
+                <a:ea typeface="Segoe UI"/>
+                <a:cs typeface="Segoe UI"/>
+              </a:rPr>
+              <a:t>     </a:t>
+            </a:r>
+            <a:r>
+              <a:rPr sz="900" b="1" i="0">
+                <a:solidFill>
+                  <a:srgbClr val="0E1E3C"/>
+                </a:solidFill>
+                <a:latin typeface="Segoe UI"/>
+                <a:ea typeface="Segoe UI"/>
+                <a:cs typeface="Segoe UI"/>
+              </a:rPr>
+              <a:t>16</a:t>
+            </a:r>
+          </a:p>
+        </p:txBody>
+      </p:sp>
+      <p:sp>
+        <p:nvSpPr>
+          <p:cNvPr id="5" name="TextBox 4"/>
+          <p:cNvSpPr txBox="1"/>
+          <p:nvPr/>
+        </p:nvSpPr>
+        <p:spPr>
+          <a:xfrm>
+            <a:off x="713232" y="566928"/>
+            <a:ext cx="10765231" cy="219456"/>
           </a:xfrm>
           <a:prstGeom prst="rect">
             <a:avLst/>
@@ -13619,106 +13202,15 @@
               </a:spcAft>
             </a:pPr>
             <a:r>
-              <a:rPr sz="900" b="1" i="0">
-                <a:solidFill>
-                  <a:srgbClr val="0E1E3C"/>
-                </a:solidFill>
-                <a:latin typeface="Segoe UI"/>
-                <a:ea typeface="Segoe UI"/>
-                <a:cs typeface="Segoe UI"/>
-              </a:rPr>
-              <a:t>Unit 2</a:t>
-            </a:r>
-            <a:r>
-              <a:rPr sz="900" b="0" i="0">
-                <a:solidFill>
-                  <a:srgbClr val="939EB3"/>
-                </a:solidFill>
-                <a:latin typeface="Segoe UI"/>
-                <a:ea typeface="Segoe UI"/>
-                <a:cs typeface="Segoe UI"/>
-              </a:rPr>
-              <a:t>  ·  </a:t>
-            </a:r>
-            <a:r>
-              <a:rPr sz="900" b="0" i="0">
-                <a:solidFill>
-                  <a:srgbClr val="636E85"/>
-                </a:solidFill>
-                <a:latin typeface="Segoe UI"/>
-                <a:ea typeface="Segoe UI"/>
-                <a:cs typeface="Segoe UI"/>
-              </a:rPr>
-              <a:t>Tools and Technologies</a:t>
-            </a:r>
-          </a:p>
-        </p:txBody>
-      </p:sp>
-      <p:sp>
-        <p:nvSpPr>
-          <p:cNvPr id="5" name="TextBox 4"/>
-          <p:cNvSpPr txBox="1"/>
-          <p:nvPr/>
-        </p:nvSpPr>
-        <p:spPr>
-          <a:xfrm>
-            <a:off x="8240677" y="6272784"/>
-            <a:ext cx="2651760" cy="219456"/>
-          </a:xfrm>
-          <a:prstGeom prst="rect">
-            <a:avLst/>
-          </a:prstGeom>
-          <a:noFill/>
-        </p:spPr>
-        <p:txBody>
-          <a:bodyPr wrap="square" lIns="0" rIns="0" tIns="0" bIns="0" anchor="t">
-            <a:spAutoFit/>
-          </a:bodyPr>
-          <a:lstStyle/>
-          <a:p>
-            <a:pPr algn="r">
-              <a:lnSpc>
-                <a:spcPct val="122000"/>
-              </a:lnSpc>
-              <a:spcBef>
-                <a:spcPts val="0"/>
-              </a:spcBef>
-              <a:spcAft>
-                <a:spcPts val="0"/>
-              </a:spcAft>
-            </a:pPr>
-            <a:r>
-              <a:rPr sz="900" b="0" i="0">
-                <a:solidFill>
-                  <a:srgbClr val="636E85"/>
-                </a:solidFill>
-                <a:latin typeface="Segoe UI"/>
-                <a:ea typeface="Segoe UI"/>
-                <a:cs typeface="Segoe UI"/>
-              </a:rPr>
-              <a:t>Lingesh K  ·  OSI2509030</a:t>
-            </a:r>
-            <a:r>
-              <a:rPr sz="900" b="0" i="0">
-                <a:solidFill>
-                  <a:srgbClr val="141C2E"/>
-                </a:solidFill>
-                <a:latin typeface="Segoe UI"/>
-                <a:ea typeface="Segoe UI"/>
-                <a:cs typeface="Segoe UI"/>
-              </a:rPr>
-              <a:t>     </a:t>
-            </a:r>
-            <a:r>
-              <a:rPr sz="900" b="1" i="0">
-                <a:solidFill>
-                  <a:srgbClr val="0E1E3C"/>
-                </a:solidFill>
-                <a:latin typeface="Segoe UI"/>
-                <a:ea typeface="Segoe UI"/>
-                <a:cs typeface="Segoe UI"/>
-              </a:rPr>
-              <a:t>16</a:t>
+              <a:rPr sz="950" b="1" i="0" spc="160">
+                <a:solidFill>
+                  <a:srgbClr val="3B7AF7"/>
+                </a:solidFill>
+                <a:latin typeface="Segoe UI"/>
+                <a:ea typeface="Segoe UI"/>
+                <a:cs typeface="Segoe UI"/>
+              </a:rPr>
+              <a:t>WHERE IT IS USED</a:t>
             </a:r>
           </a:p>
         </p:txBody>
@@ -13726,53 +13218,6 @@
       <p:sp>
         <p:nvSpPr>
           <p:cNvPr id="6" name="TextBox 5"/>
-          <p:cNvSpPr txBox="1"/>
-          <p:nvPr/>
-        </p:nvSpPr>
-        <p:spPr>
-          <a:xfrm>
-            <a:off x="713232" y="566928"/>
-            <a:ext cx="10765231" cy="219456"/>
-          </a:xfrm>
-          <a:prstGeom prst="rect">
-            <a:avLst/>
-          </a:prstGeom>
-          <a:noFill/>
-        </p:spPr>
-        <p:txBody>
-          <a:bodyPr wrap="square" lIns="0" rIns="0" tIns="0" bIns="0" anchor="t">
-            <a:spAutoFit/>
-          </a:bodyPr>
-          <a:lstStyle/>
-          <a:p>
-            <a:pPr algn="l">
-              <a:lnSpc>
-                <a:spcPct val="122000"/>
-              </a:lnSpc>
-              <a:spcBef>
-                <a:spcPts val="0"/>
-              </a:spcBef>
-              <a:spcAft>
-                <a:spcPts val="0"/>
-              </a:spcAft>
-            </a:pPr>
-            <a:r>
-              <a:rPr sz="950" b="1" i="0" spc="160">
-                <a:solidFill>
-                  <a:srgbClr val="3B7AF7"/>
-                </a:solidFill>
-                <a:latin typeface="Segoe UI"/>
-                <a:ea typeface="Segoe UI"/>
-                <a:cs typeface="Segoe UI"/>
-              </a:rPr>
-              <a:t>WHERE IT IS USED</a:t>
-            </a:r>
-          </a:p>
-        </p:txBody>
-      </p:sp>
-      <p:sp>
-        <p:nvSpPr>
-          <p:cNvPr id="7" name="TextBox 6"/>
           <p:cNvSpPr txBox="1"/>
           <p:nvPr/>
         </p:nvSpPr>
@@ -13819,7 +13264,7 @@
       </p:sp>
       <p:sp>
         <p:nvSpPr>
-          <p:cNvPr id="8" name="Rectangle 7"/>
+          <p:cNvPr id="7" name="Rectangle 6"/>
           <p:cNvSpPr/>
           <p:nvPr/>
         </p:nvSpPr>
@@ -13863,7 +13308,7 @@
       </p:sp>
       <p:sp>
         <p:nvSpPr>
-          <p:cNvPr id="9" name="TextBox 8"/>
+          <p:cNvPr id="8" name="TextBox 7"/>
           <p:cNvSpPr txBox="1"/>
           <p:nvPr/>
         </p:nvSpPr>
@@ -13910,7 +13355,7 @@
       </p:sp>
       <p:sp>
         <p:nvSpPr>
-          <p:cNvPr id="10" name="Rounded Rectangle 9"/>
+          <p:cNvPr id="9" name="Rounded Rectangle 8"/>
           <p:cNvSpPr/>
           <p:nvPr/>
         </p:nvSpPr>
@@ -13964,7 +13409,7 @@
       </p:sp>
       <p:sp>
         <p:nvSpPr>
-          <p:cNvPr id="11" name="Rectangle 10"/>
+          <p:cNvPr id="10" name="Rectangle 9"/>
           <p:cNvSpPr/>
           <p:nvPr/>
         </p:nvSpPr>
@@ -14008,7 +13453,7 @@
       </p:sp>
       <p:sp>
         <p:nvSpPr>
-          <p:cNvPr id="12" name="TextBox 11"/>
+          <p:cNvPr id="11" name="TextBox 10"/>
           <p:cNvSpPr txBox="1"/>
           <p:nvPr/>
         </p:nvSpPr>
@@ -14055,7 +13500,7 @@
       </p:sp>
       <p:sp>
         <p:nvSpPr>
-          <p:cNvPr id="13" name="Rounded Rectangle 12"/>
+          <p:cNvPr id="12" name="Rounded Rectangle 11"/>
           <p:cNvSpPr/>
           <p:nvPr/>
         </p:nvSpPr>
@@ -14101,7 +13546,7 @@
       </p:sp>
       <p:sp>
         <p:nvSpPr>
-          <p:cNvPr id="14" name="TextBox 13"/>
+          <p:cNvPr id="13" name="TextBox 12"/>
           <p:cNvSpPr txBox="1"/>
           <p:nvPr/>
         </p:nvSpPr>
@@ -14148,7 +13593,7 @@
       </p:sp>
       <p:sp>
         <p:nvSpPr>
-          <p:cNvPr id="15" name="Rounded Rectangle 14"/>
+          <p:cNvPr id="14" name="Rounded Rectangle 13"/>
           <p:cNvSpPr/>
           <p:nvPr/>
         </p:nvSpPr>
@@ -14194,7 +13639,7 @@
       </p:sp>
       <p:sp>
         <p:nvSpPr>
-          <p:cNvPr id="16" name="TextBox 15"/>
+          <p:cNvPr id="15" name="TextBox 14"/>
           <p:cNvSpPr txBox="1"/>
           <p:nvPr/>
         </p:nvSpPr>
@@ -14241,7 +13686,7 @@
       </p:sp>
       <p:sp>
         <p:nvSpPr>
-          <p:cNvPr id="17" name="Rounded Rectangle 16"/>
+          <p:cNvPr id="16" name="Rounded Rectangle 15"/>
           <p:cNvSpPr/>
           <p:nvPr/>
         </p:nvSpPr>
@@ -14287,7 +13732,7 @@
       </p:sp>
       <p:sp>
         <p:nvSpPr>
-          <p:cNvPr id="18" name="TextBox 17"/>
+          <p:cNvPr id="17" name="TextBox 16"/>
           <p:cNvSpPr txBox="1"/>
           <p:nvPr/>
         </p:nvSpPr>
@@ -14334,7 +13779,7 @@
       </p:sp>
       <p:sp>
         <p:nvSpPr>
-          <p:cNvPr id="19" name="Rounded Rectangle 18"/>
+          <p:cNvPr id="18" name="Rounded Rectangle 17"/>
           <p:cNvSpPr/>
           <p:nvPr/>
         </p:nvSpPr>
@@ -14388,7 +13833,7 @@
       </p:sp>
       <p:sp>
         <p:nvSpPr>
-          <p:cNvPr id="20" name="Rectangle 19"/>
+          <p:cNvPr id="19" name="Rectangle 18"/>
           <p:cNvSpPr/>
           <p:nvPr/>
         </p:nvSpPr>
@@ -14432,7 +13877,7 @@
       </p:sp>
       <p:sp>
         <p:nvSpPr>
-          <p:cNvPr id="21" name="TextBox 20"/>
+          <p:cNvPr id="20" name="TextBox 19"/>
           <p:cNvSpPr txBox="1"/>
           <p:nvPr/>
         </p:nvSpPr>
@@ -14479,7 +13924,7 @@
       </p:sp>
       <p:sp>
         <p:nvSpPr>
-          <p:cNvPr id="22" name="Rounded Rectangle 21"/>
+          <p:cNvPr id="21" name="Rounded Rectangle 20"/>
           <p:cNvSpPr/>
           <p:nvPr/>
         </p:nvSpPr>
@@ -14525,7 +13970,7 @@
       </p:sp>
       <p:sp>
         <p:nvSpPr>
-          <p:cNvPr id="23" name="TextBox 22"/>
+          <p:cNvPr id="22" name="TextBox 21"/>
           <p:cNvSpPr txBox="1"/>
           <p:nvPr/>
         </p:nvSpPr>
@@ -14572,7 +14017,7 @@
       </p:sp>
       <p:sp>
         <p:nvSpPr>
-          <p:cNvPr id="24" name="Rounded Rectangle 23"/>
+          <p:cNvPr id="23" name="Rounded Rectangle 22"/>
           <p:cNvSpPr/>
           <p:nvPr/>
         </p:nvSpPr>
@@ -14618,7 +14063,7 @@
       </p:sp>
       <p:sp>
         <p:nvSpPr>
-          <p:cNvPr id="25" name="TextBox 24"/>
+          <p:cNvPr id="24" name="TextBox 23"/>
           <p:cNvSpPr txBox="1"/>
           <p:nvPr/>
         </p:nvSpPr>
@@ -14665,7 +14110,7 @@
       </p:sp>
       <p:sp>
         <p:nvSpPr>
-          <p:cNvPr id="26" name="Rounded Rectangle 25"/>
+          <p:cNvPr id="25" name="Rounded Rectangle 24"/>
           <p:cNvSpPr/>
           <p:nvPr/>
         </p:nvSpPr>
@@ -14711,7 +14156,7 @@
       </p:sp>
       <p:sp>
         <p:nvSpPr>
-          <p:cNvPr id="27" name="TextBox 26"/>
+          <p:cNvPr id="26" name="TextBox 25"/>
           <p:cNvSpPr txBox="1"/>
           <p:nvPr/>
         </p:nvSpPr>
@@ -14758,7 +14203,7 @@
       </p:sp>
       <p:sp>
         <p:nvSpPr>
-          <p:cNvPr id="28" name="Rounded Rectangle 27"/>
+          <p:cNvPr id="27" name="Rounded Rectangle 26"/>
           <p:cNvSpPr/>
           <p:nvPr/>
         </p:nvSpPr>
@@ -14812,7 +14257,7 @@
       </p:sp>
       <p:sp>
         <p:nvSpPr>
-          <p:cNvPr id="29" name="Rectangle 28"/>
+          <p:cNvPr id="28" name="Rectangle 27"/>
           <p:cNvSpPr/>
           <p:nvPr/>
         </p:nvSpPr>
@@ -14856,7 +14301,7 @@
       </p:sp>
       <p:sp>
         <p:nvSpPr>
-          <p:cNvPr id="30" name="TextBox 29"/>
+          <p:cNvPr id="29" name="TextBox 28"/>
           <p:cNvSpPr txBox="1"/>
           <p:nvPr/>
         </p:nvSpPr>
@@ -14903,7 +14348,7 @@
       </p:sp>
       <p:sp>
         <p:nvSpPr>
-          <p:cNvPr id="31" name="Rounded Rectangle 30"/>
+          <p:cNvPr id="30" name="Rounded Rectangle 29"/>
           <p:cNvSpPr/>
           <p:nvPr/>
         </p:nvSpPr>
@@ -14949,7 +14394,7 @@
       </p:sp>
       <p:sp>
         <p:nvSpPr>
-          <p:cNvPr id="32" name="TextBox 31"/>
+          <p:cNvPr id="31" name="TextBox 30"/>
           <p:cNvSpPr txBox="1"/>
           <p:nvPr/>
         </p:nvSpPr>
@@ -14996,7 +14441,7 @@
       </p:sp>
       <p:sp>
         <p:nvSpPr>
-          <p:cNvPr id="33" name="Rounded Rectangle 32"/>
+          <p:cNvPr id="32" name="Rounded Rectangle 31"/>
           <p:cNvSpPr/>
           <p:nvPr/>
         </p:nvSpPr>
@@ -15042,7 +14487,7 @@
       </p:sp>
       <p:sp>
         <p:nvSpPr>
-          <p:cNvPr id="34" name="TextBox 33"/>
+          <p:cNvPr id="33" name="TextBox 32"/>
           <p:cNvSpPr txBox="1"/>
           <p:nvPr/>
         </p:nvSpPr>
@@ -15089,7 +14534,7 @@
       </p:sp>
       <p:sp>
         <p:nvSpPr>
-          <p:cNvPr id="35" name="Rounded Rectangle 34"/>
+          <p:cNvPr id="34" name="Rounded Rectangle 33"/>
           <p:cNvSpPr/>
           <p:nvPr/>
         </p:nvSpPr>
@@ -15135,7 +14580,7 @@
       </p:sp>
       <p:sp>
         <p:nvSpPr>
-          <p:cNvPr id="36" name="TextBox 35"/>
+          <p:cNvPr id="35" name="TextBox 34"/>
           <p:cNvSpPr txBox="1"/>
           <p:nvPr/>
         </p:nvSpPr>
@@ -15182,7 +14627,7 @@
       </p:sp>
       <p:sp>
         <p:nvSpPr>
-          <p:cNvPr id="37" name="Rounded Rectangle 36"/>
+          <p:cNvPr id="36" name="Rounded Rectangle 35"/>
           <p:cNvSpPr/>
           <p:nvPr/>
         </p:nvSpPr>
@@ -15236,7 +14681,7 @@
       </p:sp>
       <p:sp>
         <p:nvSpPr>
-          <p:cNvPr id="38" name="Rectangle 37"/>
+          <p:cNvPr id="37" name="Rectangle 36"/>
           <p:cNvSpPr/>
           <p:nvPr/>
         </p:nvSpPr>
@@ -15280,7 +14725,7 @@
       </p:sp>
       <p:sp>
         <p:nvSpPr>
-          <p:cNvPr id="39" name="TextBox 38"/>
+          <p:cNvPr id="38" name="TextBox 37"/>
           <p:cNvSpPr txBox="1"/>
           <p:nvPr/>
         </p:nvSpPr>
@@ -15327,7 +14772,7 @@
       </p:sp>
       <p:sp>
         <p:nvSpPr>
-          <p:cNvPr id="40" name="Rounded Rectangle 39"/>
+          <p:cNvPr id="39" name="Rounded Rectangle 38"/>
           <p:cNvSpPr/>
           <p:nvPr/>
         </p:nvSpPr>
@@ -15373,7 +14818,7 @@
       </p:sp>
       <p:sp>
         <p:nvSpPr>
-          <p:cNvPr id="41" name="TextBox 40"/>
+          <p:cNvPr id="40" name="TextBox 39"/>
           <p:cNvSpPr txBox="1"/>
           <p:nvPr/>
         </p:nvSpPr>
@@ -15420,7 +14865,7 @@
       </p:sp>
       <p:sp>
         <p:nvSpPr>
-          <p:cNvPr id="42" name="Rounded Rectangle 41"/>
+          <p:cNvPr id="41" name="Rounded Rectangle 40"/>
           <p:cNvSpPr/>
           <p:nvPr/>
         </p:nvSpPr>
@@ -15466,7 +14911,7 @@
       </p:sp>
       <p:sp>
         <p:nvSpPr>
-          <p:cNvPr id="43" name="TextBox 42"/>
+          <p:cNvPr id="42" name="TextBox 41"/>
           <p:cNvSpPr txBox="1"/>
           <p:nvPr/>
         </p:nvSpPr>
@@ -15513,7 +14958,7 @@
       </p:sp>
       <p:sp>
         <p:nvSpPr>
-          <p:cNvPr id="44" name="Rounded Rectangle 43"/>
+          <p:cNvPr id="43" name="Rounded Rectangle 42"/>
           <p:cNvSpPr/>
           <p:nvPr/>
         </p:nvSpPr>
@@ -15559,7 +15004,7 @@
       </p:sp>
       <p:sp>
         <p:nvSpPr>
-          <p:cNvPr id="45" name="TextBox 44"/>
+          <p:cNvPr id="44" name="TextBox 43"/>
           <p:cNvSpPr txBox="1"/>
           <p:nvPr/>
         </p:nvSpPr>
@@ -15698,8 +15143,77 @@
         </p:nvSpPr>
         <p:spPr>
           <a:xfrm>
-            <a:off x="713232" y="6272784"/>
-            <a:ext cx="5597920" cy="219456"/>
+            <a:off x="8240677" y="6272784"/>
+            <a:ext cx="2651760" cy="219456"/>
+          </a:xfrm>
+          <a:prstGeom prst="rect">
+            <a:avLst/>
+          </a:prstGeom>
+          <a:noFill/>
+        </p:spPr>
+        <p:txBody>
+          <a:bodyPr wrap="square" lIns="0" rIns="0" tIns="0" bIns="0" anchor="t">
+            <a:spAutoFit/>
+          </a:bodyPr>
+          <a:lstStyle/>
+          <a:p>
+            <a:pPr algn="r">
+              <a:lnSpc>
+                <a:spcPct val="122000"/>
+              </a:lnSpc>
+              <a:spcBef>
+                <a:spcPts val="0"/>
+              </a:spcBef>
+              <a:spcAft>
+                <a:spcPts val="0"/>
+              </a:spcAft>
+            </a:pPr>
+            <a:r>
+              <a:rPr sz="900" b="0" i="0">
+                <a:solidFill>
+                  <a:srgbClr val="636E85"/>
+                </a:solidFill>
+                <a:latin typeface="Segoe UI"/>
+                <a:ea typeface="Segoe UI"/>
+                <a:cs typeface="Segoe UI"/>
+              </a:rPr>
+              <a:t>Lingesh K  ·  OSI2509030</a:t>
+            </a:r>
+            <a:r>
+              <a:rPr sz="900" b="0" i="0">
+                <a:solidFill>
+                  <a:srgbClr val="141C2E"/>
+                </a:solidFill>
+                <a:latin typeface="Segoe UI"/>
+                <a:ea typeface="Segoe UI"/>
+                <a:cs typeface="Segoe UI"/>
+              </a:rPr>
+              <a:t>     </a:t>
+            </a:r>
+            <a:r>
+              <a:rPr sz="900" b="1" i="0">
+                <a:solidFill>
+                  <a:srgbClr val="0E1E3C"/>
+                </a:solidFill>
+                <a:latin typeface="Segoe UI"/>
+                <a:ea typeface="Segoe UI"/>
+                <a:cs typeface="Segoe UI"/>
+              </a:rPr>
+              <a:t>17</a:t>
+            </a:r>
+          </a:p>
+        </p:txBody>
+      </p:sp>
+      <p:sp>
+        <p:nvSpPr>
+          <p:cNvPr id="5" name="TextBox 4"/>
+          <p:cNvSpPr txBox="1"/>
+          <p:nvPr/>
+        </p:nvSpPr>
+        <p:spPr>
+          <a:xfrm>
+            <a:off x="713232" y="566928"/>
+            <a:ext cx="10765231" cy="219456"/>
           </a:xfrm>
           <a:prstGeom prst="rect">
             <a:avLst/>
@@ -15724,106 +15238,15 @@
               </a:spcAft>
             </a:pPr>
             <a:r>
-              <a:rPr sz="900" b="1" i="0">
-                <a:solidFill>
-                  <a:srgbClr val="0E1E3C"/>
-                </a:solidFill>
-                <a:latin typeface="Segoe UI"/>
-                <a:ea typeface="Segoe UI"/>
-                <a:cs typeface="Segoe UI"/>
-              </a:rPr>
-              <a:t>Unit 2</a:t>
-            </a:r>
-            <a:r>
-              <a:rPr sz="900" b="0" i="0">
-                <a:solidFill>
-                  <a:srgbClr val="939EB3"/>
-                </a:solidFill>
-                <a:latin typeface="Segoe UI"/>
-                <a:ea typeface="Segoe UI"/>
-                <a:cs typeface="Segoe UI"/>
-              </a:rPr>
-              <a:t>  ·  </a:t>
-            </a:r>
-            <a:r>
-              <a:rPr sz="900" b="0" i="0">
-                <a:solidFill>
-                  <a:srgbClr val="636E85"/>
-                </a:solidFill>
-                <a:latin typeface="Segoe UI"/>
-                <a:ea typeface="Segoe UI"/>
-                <a:cs typeface="Segoe UI"/>
-              </a:rPr>
-              <a:t>Tools and Technologies</a:t>
-            </a:r>
-          </a:p>
-        </p:txBody>
-      </p:sp>
-      <p:sp>
-        <p:nvSpPr>
-          <p:cNvPr id="5" name="TextBox 4"/>
-          <p:cNvSpPr txBox="1"/>
-          <p:nvPr/>
-        </p:nvSpPr>
-        <p:spPr>
-          <a:xfrm>
-            <a:off x="8240677" y="6272784"/>
-            <a:ext cx="2651760" cy="219456"/>
-          </a:xfrm>
-          <a:prstGeom prst="rect">
-            <a:avLst/>
-          </a:prstGeom>
-          <a:noFill/>
-        </p:spPr>
-        <p:txBody>
-          <a:bodyPr wrap="square" lIns="0" rIns="0" tIns="0" bIns="0" anchor="t">
-            <a:spAutoFit/>
-          </a:bodyPr>
-          <a:lstStyle/>
-          <a:p>
-            <a:pPr algn="r">
-              <a:lnSpc>
-                <a:spcPct val="122000"/>
-              </a:lnSpc>
-              <a:spcBef>
-                <a:spcPts val="0"/>
-              </a:spcBef>
-              <a:spcAft>
-                <a:spcPts val="0"/>
-              </a:spcAft>
-            </a:pPr>
-            <a:r>
-              <a:rPr sz="900" b="0" i="0">
-                <a:solidFill>
-                  <a:srgbClr val="636E85"/>
-                </a:solidFill>
-                <a:latin typeface="Segoe UI"/>
-                <a:ea typeface="Segoe UI"/>
-                <a:cs typeface="Segoe UI"/>
-              </a:rPr>
-              <a:t>Lingesh K  ·  OSI2509030</a:t>
-            </a:r>
-            <a:r>
-              <a:rPr sz="900" b="0" i="0">
-                <a:solidFill>
-                  <a:srgbClr val="141C2E"/>
-                </a:solidFill>
-                <a:latin typeface="Segoe UI"/>
-                <a:ea typeface="Segoe UI"/>
-                <a:cs typeface="Segoe UI"/>
-              </a:rPr>
-              <a:t>     </a:t>
-            </a:r>
-            <a:r>
-              <a:rPr sz="900" b="1" i="0">
-                <a:solidFill>
-                  <a:srgbClr val="0E1E3C"/>
-                </a:solidFill>
-                <a:latin typeface="Segoe UI"/>
-                <a:ea typeface="Segoe UI"/>
-                <a:cs typeface="Segoe UI"/>
-              </a:rPr>
-              <a:t>17</a:t>
+              <a:rPr sz="950" b="1" i="0" spc="160">
+                <a:solidFill>
+                  <a:srgbClr val="27A06A"/>
+                </a:solidFill>
+                <a:latin typeface="Segoe UI"/>
+                <a:ea typeface="Segoe UI"/>
+                <a:cs typeface="Segoe UI"/>
+              </a:rPr>
+              <a:t>HABITS</a:t>
             </a:r>
           </a:p>
         </p:txBody>
@@ -15831,53 +15254,6 @@
       <p:sp>
         <p:nvSpPr>
           <p:cNvPr id="6" name="TextBox 5"/>
-          <p:cNvSpPr txBox="1"/>
-          <p:nvPr/>
-        </p:nvSpPr>
-        <p:spPr>
-          <a:xfrm>
-            <a:off x="713232" y="566928"/>
-            <a:ext cx="10765231" cy="219456"/>
-          </a:xfrm>
-          <a:prstGeom prst="rect">
-            <a:avLst/>
-          </a:prstGeom>
-          <a:noFill/>
-        </p:spPr>
-        <p:txBody>
-          <a:bodyPr wrap="square" lIns="0" rIns="0" tIns="0" bIns="0" anchor="t">
-            <a:spAutoFit/>
-          </a:bodyPr>
-          <a:lstStyle/>
-          <a:p>
-            <a:pPr algn="l">
-              <a:lnSpc>
-                <a:spcPct val="122000"/>
-              </a:lnSpc>
-              <a:spcBef>
-                <a:spcPts val="0"/>
-              </a:spcBef>
-              <a:spcAft>
-                <a:spcPts val="0"/>
-              </a:spcAft>
-            </a:pPr>
-            <a:r>
-              <a:rPr sz="950" b="1" i="0" spc="160">
-                <a:solidFill>
-                  <a:srgbClr val="27A06A"/>
-                </a:solidFill>
-                <a:latin typeface="Segoe UI"/>
-                <a:ea typeface="Segoe UI"/>
-                <a:cs typeface="Segoe UI"/>
-              </a:rPr>
-              <a:t>HABITS</a:t>
-            </a:r>
-          </a:p>
-        </p:txBody>
-      </p:sp>
-      <p:sp>
-        <p:nvSpPr>
-          <p:cNvPr id="7" name="TextBox 6"/>
           <p:cNvSpPr txBox="1"/>
           <p:nvPr/>
         </p:nvSpPr>
@@ -15924,7 +15300,7 @@
       </p:sp>
       <p:sp>
         <p:nvSpPr>
-          <p:cNvPr id="8" name="Rectangle 7"/>
+          <p:cNvPr id="7" name="Rectangle 6"/>
           <p:cNvSpPr/>
           <p:nvPr/>
         </p:nvSpPr>
@@ -15968,7 +15344,7 @@
       </p:sp>
       <p:sp>
         <p:nvSpPr>
-          <p:cNvPr id="9" name="Rounded Rectangle 8"/>
+          <p:cNvPr id="8" name="Rounded Rectangle 7"/>
           <p:cNvSpPr/>
           <p:nvPr/>
         </p:nvSpPr>
@@ -16022,7 +15398,7 @@
       </p:sp>
       <p:sp>
         <p:nvSpPr>
-          <p:cNvPr id="10" name="Rectangle 9"/>
+          <p:cNvPr id="9" name="Rectangle 8"/>
           <p:cNvSpPr/>
           <p:nvPr/>
         </p:nvSpPr>
@@ -16066,7 +15442,7 @@
       </p:sp>
       <p:sp>
         <p:nvSpPr>
-          <p:cNvPr id="11" name="Rounded Rectangle 10"/>
+          <p:cNvPr id="10" name="Rounded Rectangle 9"/>
           <p:cNvSpPr/>
           <p:nvPr/>
         </p:nvSpPr>
@@ -16133,7 +15509,7 @@
       </p:sp>
       <p:sp>
         <p:nvSpPr>
-          <p:cNvPr id="12" name="TextBox 11"/>
+          <p:cNvPr id="11" name="TextBox 10"/>
           <p:cNvSpPr txBox="1"/>
           <p:nvPr/>
         </p:nvSpPr>
@@ -16180,7 +15556,7 @@
       </p:sp>
       <p:sp>
         <p:nvSpPr>
-          <p:cNvPr id="13" name="Rectangle 12"/>
+          <p:cNvPr id="12" name="Rectangle 11"/>
           <p:cNvSpPr/>
           <p:nvPr/>
         </p:nvSpPr>
@@ -16224,7 +15600,7 @@
       </p:sp>
       <p:sp>
         <p:nvSpPr>
-          <p:cNvPr id="14" name="Rounded Rectangle 13"/>
+          <p:cNvPr id="13" name="Rounded Rectangle 12"/>
           <p:cNvSpPr/>
           <p:nvPr/>
         </p:nvSpPr>
@@ -16270,7 +15646,7 @@
       </p:sp>
       <p:sp>
         <p:nvSpPr>
-          <p:cNvPr id="15" name="TextBox 14"/>
+          <p:cNvPr id="14" name="TextBox 13"/>
           <p:cNvSpPr txBox="1"/>
           <p:nvPr/>
         </p:nvSpPr>
@@ -16317,7 +15693,7 @@
       </p:sp>
       <p:sp>
         <p:nvSpPr>
-          <p:cNvPr id="16" name="Rounded Rectangle 15"/>
+          <p:cNvPr id="15" name="Rounded Rectangle 14"/>
           <p:cNvSpPr/>
           <p:nvPr/>
         </p:nvSpPr>
@@ -16363,7 +15739,7 @@
       </p:sp>
       <p:sp>
         <p:nvSpPr>
-          <p:cNvPr id="17" name="TextBox 16"/>
+          <p:cNvPr id="16" name="TextBox 15"/>
           <p:cNvSpPr txBox="1"/>
           <p:nvPr/>
         </p:nvSpPr>
@@ -16410,7 +15786,7 @@
       </p:sp>
       <p:sp>
         <p:nvSpPr>
-          <p:cNvPr id="18" name="Rounded Rectangle 17"/>
+          <p:cNvPr id="17" name="Rounded Rectangle 16"/>
           <p:cNvSpPr/>
           <p:nvPr/>
         </p:nvSpPr>
@@ -16456,7 +15832,7 @@
       </p:sp>
       <p:sp>
         <p:nvSpPr>
-          <p:cNvPr id="19" name="TextBox 18"/>
+          <p:cNvPr id="18" name="TextBox 17"/>
           <p:cNvSpPr txBox="1"/>
           <p:nvPr/>
         </p:nvSpPr>
@@ -16503,7 +15879,7 @@
       </p:sp>
       <p:sp>
         <p:nvSpPr>
-          <p:cNvPr id="20" name="Rounded Rectangle 19"/>
+          <p:cNvPr id="19" name="Rounded Rectangle 18"/>
           <p:cNvSpPr/>
           <p:nvPr/>
         </p:nvSpPr>
@@ -16549,7 +15925,7 @@
       </p:sp>
       <p:sp>
         <p:nvSpPr>
-          <p:cNvPr id="21" name="TextBox 20"/>
+          <p:cNvPr id="20" name="TextBox 19"/>
           <p:cNvSpPr txBox="1"/>
           <p:nvPr/>
         </p:nvSpPr>
@@ -16596,7 +15972,7 @@
       </p:sp>
       <p:sp>
         <p:nvSpPr>
-          <p:cNvPr id="22" name="Rounded Rectangle 21"/>
+          <p:cNvPr id="21" name="Rounded Rectangle 20"/>
           <p:cNvSpPr/>
           <p:nvPr/>
         </p:nvSpPr>
@@ -16642,7 +16018,7 @@
       </p:sp>
       <p:sp>
         <p:nvSpPr>
-          <p:cNvPr id="23" name="TextBox 22"/>
+          <p:cNvPr id="22" name="TextBox 21"/>
           <p:cNvSpPr txBox="1"/>
           <p:nvPr/>
         </p:nvSpPr>
@@ -16689,7 +16065,7 @@
       </p:sp>
       <p:sp>
         <p:nvSpPr>
-          <p:cNvPr id="24" name="Rounded Rectangle 23"/>
+          <p:cNvPr id="23" name="Rounded Rectangle 22"/>
           <p:cNvSpPr/>
           <p:nvPr/>
         </p:nvSpPr>
@@ -16743,7 +16119,7 @@
       </p:sp>
       <p:sp>
         <p:nvSpPr>
-          <p:cNvPr id="25" name="Rectangle 24"/>
+          <p:cNvPr id="24" name="Rectangle 23"/>
           <p:cNvSpPr/>
           <p:nvPr/>
         </p:nvSpPr>
@@ -16787,7 +16163,7 @@
       </p:sp>
       <p:sp>
         <p:nvSpPr>
-          <p:cNvPr id="26" name="Rounded Rectangle 25"/>
+          <p:cNvPr id="25" name="Rounded Rectangle 24"/>
           <p:cNvSpPr/>
           <p:nvPr/>
         </p:nvSpPr>
@@ -16854,7 +16230,7 @@
       </p:sp>
       <p:sp>
         <p:nvSpPr>
-          <p:cNvPr id="27" name="TextBox 26"/>
+          <p:cNvPr id="26" name="TextBox 25"/>
           <p:cNvSpPr txBox="1"/>
           <p:nvPr/>
         </p:nvSpPr>
@@ -16901,7 +16277,7 @@
       </p:sp>
       <p:sp>
         <p:nvSpPr>
-          <p:cNvPr id="28" name="Rectangle 27"/>
+          <p:cNvPr id="27" name="Rectangle 26"/>
           <p:cNvSpPr/>
           <p:nvPr/>
         </p:nvSpPr>
@@ -16945,7 +16321,7 @@
       </p:sp>
       <p:sp>
         <p:nvSpPr>
-          <p:cNvPr id="29" name="Rounded Rectangle 28"/>
+          <p:cNvPr id="28" name="Rounded Rectangle 27"/>
           <p:cNvSpPr/>
           <p:nvPr/>
         </p:nvSpPr>
@@ -16991,7 +16367,7 @@
       </p:sp>
       <p:sp>
         <p:nvSpPr>
-          <p:cNvPr id="30" name="TextBox 29"/>
+          <p:cNvPr id="29" name="TextBox 28"/>
           <p:cNvSpPr txBox="1"/>
           <p:nvPr/>
         </p:nvSpPr>
@@ -17038,7 +16414,7 @@
       </p:sp>
       <p:sp>
         <p:nvSpPr>
-          <p:cNvPr id="31" name="Rounded Rectangle 30"/>
+          <p:cNvPr id="30" name="Rounded Rectangle 29"/>
           <p:cNvSpPr/>
           <p:nvPr/>
         </p:nvSpPr>
@@ -17084,7 +16460,7 @@
       </p:sp>
       <p:sp>
         <p:nvSpPr>
-          <p:cNvPr id="32" name="TextBox 31"/>
+          <p:cNvPr id="31" name="TextBox 30"/>
           <p:cNvSpPr txBox="1"/>
           <p:nvPr/>
         </p:nvSpPr>
@@ -17131,7 +16507,7 @@
       </p:sp>
       <p:sp>
         <p:nvSpPr>
-          <p:cNvPr id="33" name="Rounded Rectangle 32"/>
+          <p:cNvPr id="32" name="Rounded Rectangle 31"/>
           <p:cNvSpPr/>
           <p:nvPr/>
         </p:nvSpPr>
@@ -17177,7 +16553,7 @@
       </p:sp>
       <p:sp>
         <p:nvSpPr>
-          <p:cNvPr id="34" name="TextBox 33"/>
+          <p:cNvPr id="33" name="TextBox 32"/>
           <p:cNvSpPr txBox="1"/>
           <p:nvPr/>
         </p:nvSpPr>
@@ -17224,7 +16600,7 @@
       </p:sp>
       <p:sp>
         <p:nvSpPr>
-          <p:cNvPr id="35" name="Rounded Rectangle 34"/>
+          <p:cNvPr id="34" name="Rounded Rectangle 33"/>
           <p:cNvSpPr/>
           <p:nvPr/>
         </p:nvSpPr>
@@ -17270,7 +16646,7 @@
       </p:sp>
       <p:sp>
         <p:nvSpPr>
-          <p:cNvPr id="36" name="TextBox 35"/>
+          <p:cNvPr id="35" name="TextBox 34"/>
           <p:cNvSpPr txBox="1"/>
           <p:nvPr/>
         </p:nvSpPr>
@@ -17317,7 +16693,7 @@
       </p:sp>
       <p:sp>
         <p:nvSpPr>
-          <p:cNvPr id="37" name="Rounded Rectangle 36"/>
+          <p:cNvPr id="36" name="Rounded Rectangle 35"/>
           <p:cNvSpPr/>
           <p:nvPr/>
         </p:nvSpPr>
@@ -17363,7 +16739,7 @@
       </p:sp>
       <p:sp>
         <p:nvSpPr>
-          <p:cNvPr id="38" name="TextBox 37"/>
+          <p:cNvPr id="37" name="TextBox 36"/>
           <p:cNvSpPr txBox="1"/>
           <p:nvPr/>
         </p:nvSpPr>
@@ -17410,7 +16786,7 @@
       </p:sp>
       <p:sp>
         <p:nvSpPr>
-          <p:cNvPr id="39" name="Rounded Rectangle 38"/>
+          <p:cNvPr id="38" name="Rounded Rectangle 37"/>
           <p:cNvSpPr/>
           <p:nvPr/>
         </p:nvSpPr>
@@ -17879,54 +17255,7 @@
       </p:sp>
       <p:sp>
         <p:nvSpPr>
-          <p:cNvPr id="10" name="TextBox 9"/>
-          <p:cNvSpPr txBox="1"/>
-          <p:nvPr/>
-        </p:nvSpPr>
-        <p:spPr>
-          <a:xfrm>
-            <a:off x="987552" y="5943600"/>
-            <a:ext cx="6400800" cy="274320"/>
-          </a:xfrm>
-          <a:prstGeom prst="rect">
-            <a:avLst/>
-          </a:prstGeom>
-          <a:noFill/>
-        </p:spPr>
-        <p:txBody>
-          <a:bodyPr wrap="square" lIns="0" rIns="0" tIns="0" bIns="0" anchor="t">
-            <a:spAutoFit/>
-          </a:bodyPr>
-          <a:lstStyle/>
-          <a:p>
-            <a:pPr algn="l">
-              <a:lnSpc>
-                <a:spcPct val="122000"/>
-              </a:lnSpc>
-              <a:spcBef>
-                <a:spcPts val="0"/>
-              </a:spcBef>
-              <a:spcAft>
-                <a:spcPts val="0"/>
-              </a:spcAft>
-            </a:pPr>
-            <a:r>
-              <a:rPr sz="900" b="1" i="0" spc="160">
-                <a:solidFill>
-                  <a:srgbClr val="6B7FA6"/>
-                </a:solidFill>
-                <a:latin typeface="Segoe UI"/>
-                <a:ea typeface="Segoe UI"/>
-                <a:cs typeface="Segoe UI"/>
-              </a:rPr>
-              <a:t>UNIT 2  ·  TOOLS AND TECHNOLOGIES</a:t>
-            </a:r>
-          </a:p>
-        </p:txBody>
-      </p:sp>
-      <p:sp>
-        <p:nvSpPr>
-          <p:cNvPr id="11" name="logo-plate"/>
+          <p:cNvPr id="10" name="logo-plate"/>
           <p:cNvSpPr/>
           <p:nvPr/>
         </p:nvSpPr>
@@ -17972,7 +17301,7 @@
       </p:sp>
       <p:pic>
         <p:nvPicPr>
-          <p:cNvPr id="12" name="college-logo" descr="logo-full.png"/>
+          <p:cNvPr id="11" name="college-logo" descr="logo-full.png"/>
           <p:cNvPicPr>
             <a:picLocks noChangeAspect="1"/>
           </p:cNvPicPr>
@@ -18088,8 +17417,77 @@
         </p:nvSpPr>
         <p:spPr>
           <a:xfrm>
-            <a:off x="713232" y="6272784"/>
-            <a:ext cx="5597920" cy="219456"/>
+            <a:off x="8240677" y="6272784"/>
+            <a:ext cx="2651760" cy="219456"/>
+          </a:xfrm>
+          <a:prstGeom prst="rect">
+            <a:avLst/>
+          </a:prstGeom>
+          <a:noFill/>
+        </p:spPr>
+        <p:txBody>
+          <a:bodyPr wrap="square" lIns="0" rIns="0" tIns="0" bIns="0" anchor="t">
+            <a:spAutoFit/>
+          </a:bodyPr>
+          <a:lstStyle/>
+          <a:p>
+            <a:pPr algn="r">
+              <a:lnSpc>
+                <a:spcPct val="122000"/>
+              </a:lnSpc>
+              <a:spcBef>
+                <a:spcPts val="0"/>
+              </a:spcBef>
+              <a:spcAft>
+                <a:spcPts val="0"/>
+              </a:spcAft>
+            </a:pPr>
+            <a:r>
+              <a:rPr sz="900" b="0" i="0">
+                <a:solidFill>
+                  <a:srgbClr val="636E85"/>
+                </a:solidFill>
+                <a:latin typeface="Segoe UI"/>
+                <a:ea typeface="Segoe UI"/>
+                <a:cs typeface="Segoe UI"/>
+              </a:rPr>
+              <a:t>Lingesh K  ·  OSI2509030</a:t>
+            </a:r>
+            <a:r>
+              <a:rPr sz="900" b="0" i="0">
+                <a:solidFill>
+                  <a:srgbClr val="141C2E"/>
+                </a:solidFill>
+                <a:latin typeface="Segoe UI"/>
+                <a:ea typeface="Segoe UI"/>
+                <a:cs typeface="Segoe UI"/>
+              </a:rPr>
+              <a:t>     </a:t>
+            </a:r>
+            <a:r>
+              <a:rPr sz="900" b="1" i="0">
+                <a:solidFill>
+                  <a:srgbClr val="0E1E3C"/>
+                </a:solidFill>
+                <a:latin typeface="Segoe UI"/>
+                <a:ea typeface="Segoe UI"/>
+                <a:cs typeface="Segoe UI"/>
+              </a:rPr>
+              <a:t>19</a:t>
+            </a:r>
+          </a:p>
+        </p:txBody>
+      </p:sp>
+      <p:sp>
+        <p:nvSpPr>
+          <p:cNvPr id="5" name="TextBox 4"/>
+          <p:cNvSpPr txBox="1"/>
+          <p:nvPr/>
+        </p:nvSpPr>
+        <p:spPr>
+          <a:xfrm>
+            <a:off x="713232" y="566928"/>
+            <a:ext cx="10765231" cy="219456"/>
           </a:xfrm>
           <a:prstGeom prst="rect">
             <a:avLst/>
@@ -18114,106 +17512,15 @@
               </a:spcAft>
             </a:pPr>
             <a:r>
-              <a:rPr sz="900" b="1" i="0">
-                <a:solidFill>
-                  <a:srgbClr val="0E1E3C"/>
-                </a:solidFill>
-                <a:latin typeface="Segoe UI"/>
-                <a:ea typeface="Segoe UI"/>
-                <a:cs typeface="Segoe UI"/>
-              </a:rPr>
-              <a:t>Unit 2</a:t>
-            </a:r>
-            <a:r>
-              <a:rPr sz="900" b="0" i="0">
-                <a:solidFill>
-                  <a:srgbClr val="939EB3"/>
-                </a:solidFill>
-                <a:latin typeface="Segoe UI"/>
-                <a:ea typeface="Segoe UI"/>
-                <a:cs typeface="Segoe UI"/>
-              </a:rPr>
-              <a:t>  ·  </a:t>
-            </a:r>
-            <a:r>
-              <a:rPr sz="900" b="0" i="0">
-                <a:solidFill>
-                  <a:srgbClr val="636E85"/>
-                </a:solidFill>
-                <a:latin typeface="Segoe UI"/>
-                <a:ea typeface="Segoe UI"/>
-                <a:cs typeface="Segoe UI"/>
-              </a:rPr>
-              <a:t>Tools and Technologies</a:t>
-            </a:r>
-          </a:p>
-        </p:txBody>
-      </p:sp>
-      <p:sp>
-        <p:nvSpPr>
-          <p:cNvPr id="5" name="TextBox 4"/>
-          <p:cNvSpPr txBox="1"/>
-          <p:nvPr/>
-        </p:nvSpPr>
-        <p:spPr>
-          <a:xfrm>
-            <a:off x="8240677" y="6272784"/>
-            <a:ext cx="2651760" cy="219456"/>
-          </a:xfrm>
-          <a:prstGeom prst="rect">
-            <a:avLst/>
-          </a:prstGeom>
-          <a:noFill/>
-        </p:spPr>
-        <p:txBody>
-          <a:bodyPr wrap="square" lIns="0" rIns="0" tIns="0" bIns="0" anchor="t">
-            <a:spAutoFit/>
-          </a:bodyPr>
-          <a:lstStyle/>
-          <a:p>
-            <a:pPr algn="r">
-              <a:lnSpc>
-                <a:spcPct val="122000"/>
-              </a:lnSpc>
-              <a:spcBef>
-                <a:spcPts val="0"/>
-              </a:spcBef>
-              <a:spcAft>
-                <a:spcPts val="0"/>
-              </a:spcAft>
-            </a:pPr>
-            <a:r>
-              <a:rPr sz="900" b="0" i="0">
-                <a:solidFill>
-                  <a:srgbClr val="636E85"/>
-                </a:solidFill>
-                <a:latin typeface="Segoe UI"/>
-                <a:ea typeface="Segoe UI"/>
-                <a:cs typeface="Segoe UI"/>
-              </a:rPr>
-              <a:t>Lingesh K  ·  OSI2509030</a:t>
-            </a:r>
-            <a:r>
-              <a:rPr sz="900" b="0" i="0">
-                <a:solidFill>
-                  <a:srgbClr val="141C2E"/>
-                </a:solidFill>
-                <a:latin typeface="Segoe UI"/>
-                <a:ea typeface="Segoe UI"/>
-                <a:cs typeface="Segoe UI"/>
-              </a:rPr>
-              <a:t>     </a:t>
-            </a:r>
-            <a:r>
-              <a:rPr sz="900" b="1" i="0">
-                <a:solidFill>
-                  <a:srgbClr val="0E1E3C"/>
-                </a:solidFill>
-                <a:latin typeface="Segoe UI"/>
-                <a:ea typeface="Segoe UI"/>
-                <a:cs typeface="Segoe UI"/>
-              </a:rPr>
-              <a:t>19</a:t>
+              <a:rPr sz="950" b="1" i="0" spc="160">
+                <a:solidFill>
+                  <a:srgbClr val="00B3A4"/>
+                </a:solidFill>
+                <a:latin typeface="Segoe UI"/>
+                <a:ea typeface="Segoe UI"/>
+                <a:cs typeface="Segoe UI"/>
+              </a:rPr>
+              <a:t>PLAIN ENGLISH</a:t>
             </a:r>
           </a:p>
         </p:txBody>
@@ -18221,53 +17528,6 @@
       <p:sp>
         <p:nvSpPr>
           <p:cNvPr id="6" name="TextBox 5"/>
-          <p:cNvSpPr txBox="1"/>
-          <p:nvPr/>
-        </p:nvSpPr>
-        <p:spPr>
-          <a:xfrm>
-            <a:off x="713232" y="566928"/>
-            <a:ext cx="10765231" cy="219456"/>
-          </a:xfrm>
-          <a:prstGeom prst="rect">
-            <a:avLst/>
-          </a:prstGeom>
-          <a:noFill/>
-        </p:spPr>
-        <p:txBody>
-          <a:bodyPr wrap="square" lIns="0" rIns="0" tIns="0" bIns="0" anchor="t">
-            <a:spAutoFit/>
-          </a:bodyPr>
-          <a:lstStyle/>
-          <a:p>
-            <a:pPr algn="l">
-              <a:lnSpc>
-                <a:spcPct val="122000"/>
-              </a:lnSpc>
-              <a:spcBef>
-                <a:spcPts val="0"/>
-              </a:spcBef>
-              <a:spcAft>
-                <a:spcPts val="0"/>
-              </a:spcAft>
-            </a:pPr>
-            <a:r>
-              <a:rPr sz="950" b="1" i="0" spc="160">
-                <a:solidFill>
-                  <a:srgbClr val="00B3A4"/>
-                </a:solidFill>
-                <a:latin typeface="Segoe UI"/>
-                <a:ea typeface="Segoe UI"/>
-                <a:cs typeface="Segoe UI"/>
-              </a:rPr>
-              <a:t>PLAIN ENGLISH</a:t>
-            </a:r>
-          </a:p>
-        </p:txBody>
-      </p:sp>
-      <p:sp>
-        <p:nvSpPr>
-          <p:cNvPr id="7" name="TextBox 6"/>
           <p:cNvSpPr txBox="1"/>
           <p:nvPr/>
         </p:nvSpPr>
@@ -18314,7 +17574,7 @@
       </p:sp>
       <p:sp>
         <p:nvSpPr>
-          <p:cNvPr id="8" name="Rectangle 7"/>
+          <p:cNvPr id="7" name="Rectangle 6"/>
           <p:cNvSpPr/>
           <p:nvPr/>
         </p:nvSpPr>
@@ -18358,7 +17618,7 @@
       </p:sp>
       <p:sp>
         <p:nvSpPr>
-          <p:cNvPr id="9" name="TextBox 8"/>
+          <p:cNvPr id="8" name="TextBox 7"/>
           <p:cNvSpPr txBox="1"/>
           <p:nvPr/>
         </p:nvSpPr>
@@ -18405,7 +17665,7 @@
       </p:sp>
       <p:sp>
         <p:nvSpPr>
-          <p:cNvPr id="10" name="Rectangle 9"/>
+          <p:cNvPr id="9" name="Rectangle 8"/>
           <p:cNvSpPr/>
           <p:nvPr/>
         </p:nvSpPr>
@@ -18449,7 +17709,7 @@
       </p:sp>
       <p:sp>
         <p:nvSpPr>
-          <p:cNvPr id="11" name="Rounded Rectangle 10"/>
+          <p:cNvPr id="10" name="Rounded Rectangle 9"/>
           <p:cNvSpPr/>
           <p:nvPr/>
         </p:nvSpPr>
@@ -18495,7 +17755,7 @@
       </p:sp>
       <p:sp>
         <p:nvSpPr>
-          <p:cNvPr id="12" name="TextBox 11"/>
+          <p:cNvPr id="11" name="TextBox 10"/>
           <p:cNvSpPr txBox="1"/>
           <p:nvPr/>
         </p:nvSpPr>
@@ -18542,7 +17802,7 @@
       </p:sp>
       <p:sp>
         <p:nvSpPr>
-          <p:cNvPr id="13" name="Rounded Rectangle 12"/>
+          <p:cNvPr id="12" name="Rounded Rectangle 11"/>
           <p:cNvSpPr/>
           <p:nvPr/>
         </p:nvSpPr>
@@ -18588,7 +17848,7 @@
       </p:sp>
       <p:sp>
         <p:nvSpPr>
-          <p:cNvPr id="14" name="TextBox 13"/>
+          <p:cNvPr id="13" name="TextBox 12"/>
           <p:cNvSpPr txBox="1"/>
           <p:nvPr/>
         </p:nvSpPr>
@@ -18635,7 +17895,7 @@
       </p:sp>
       <p:sp>
         <p:nvSpPr>
-          <p:cNvPr id="15" name="Rounded Rectangle 14"/>
+          <p:cNvPr id="14" name="Rounded Rectangle 13"/>
           <p:cNvSpPr/>
           <p:nvPr/>
         </p:nvSpPr>
@@ -18681,7 +17941,7 @@
       </p:sp>
       <p:sp>
         <p:nvSpPr>
-          <p:cNvPr id="16" name="TextBox 15"/>
+          <p:cNvPr id="15" name="TextBox 14"/>
           <p:cNvSpPr txBox="1"/>
           <p:nvPr/>
         </p:nvSpPr>
@@ -18728,7 +17988,7 @@
       </p:sp>
       <p:sp>
         <p:nvSpPr>
-          <p:cNvPr id="17" name="Rounded Rectangle 16"/>
+          <p:cNvPr id="16" name="Rounded Rectangle 15"/>
           <p:cNvSpPr/>
           <p:nvPr/>
         </p:nvSpPr>
@@ -18774,7 +18034,7 @@
       </p:sp>
       <p:sp>
         <p:nvSpPr>
-          <p:cNvPr id="18" name="TextBox 17"/>
+          <p:cNvPr id="17" name="TextBox 16"/>
           <p:cNvSpPr txBox="1"/>
           <p:nvPr/>
         </p:nvSpPr>
@@ -18821,7 +18081,7 @@
       </p:sp>
       <p:sp>
         <p:nvSpPr>
-          <p:cNvPr id="19" name="Rounded Rectangle 18"/>
+          <p:cNvPr id="18" name="Rounded Rectangle 17"/>
           <p:cNvSpPr/>
           <p:nvPr/>
         </p:nvSpPr>
@@ -18867,7 +18127,7 @@
       </p:sp>
       <p:sp>
         <p:nvSpPr>
-          <p:cNvPr id="20" name="TextBox 19"/>
+          <p:cNvPr id="19" name="TextBox 18"/>
           <p:cNvSpPr txBox="1"/>
           <p:nvPr/>
         </p:nvSpPr>
@@ -18914,7 +18174,7 @@
       </p:sp>
       <p:sp>
         <p:nvSpPr>
-          <p:cNvPr id="21" name="Rounded Rectangle 20"/>
+          <p:cNvPr id="20" name="Rounded Rectangle 19"/>
           <p:cNvSpPr/>
           <p:nvPr/>
         </p:nvSpPr>
@@ -18968,7 +18228,7 @@
       </p:sp>
       <p:sp>
         <p:nvSpPr>
-          <p:cNvPr id="22" name="Rectangle 21"/>
+          <p:cNvPr id="21" name="Rectangle 20"/>
           <p:cNvSpPr/>
           <p:nvPr/>
         </p:nvSpPr>
@@ -19012,7 +18272,7 @@
       </p:sp>
       <p:sp>
         <p:nvSpPr>
-          <p:cNvPr id="23" name="TextBox 22"/>
+          <p:cNvPr id="22" name="TextBox 21"/>
           <p:cNvSpPr txBox="1"/>
           <p:nvPr/>
         </p:nvSpPr>
@@ -19059,7 +18319,7 @@
       </p:sp>
       <p:sp>
         <p:nvSpPr>
-          <p:cNvPr id="24" name="TextBox 23"/>
+          <p:cNvPr id="23" name="TextBox 22"/>
           <p:cNvSpPr txBox="1"/>
           <p:nvPr/>
         </p:nvSpPr>
@@ -19106,7 +18366,7 @@
       </p:sp>
       <p:sp>
         <p:nvSpPr>
-          <p:cNvPr id="25" name="Rounded Rectangle 24"/>
+          <p:cNvPr id="24" name="Rounded Rectangle 23"/>
           <p:cNvSpPr/>
           <p:nvPr/>
         </p:nvSpPr>
@@ -19160,7 +18420,7 @@
       </p:sp>
       <p:sp>
         <p:nvSpPr>
-          <p:cNvPr id="26" name="Rectangle 25"/>
+          <p:cNvPr id="25" name="Rectangle 24"/>
           <p:cNvSpPr/>
           <p:nvPr/>
         </p:nvSpPr>
@@ -19204,7 +18464,7 @@
       </p:sp>
       <p:sp>
         <p:nvSpPr>
-          <p:cNvPr id="27" name="TextBox 26"/>
+          <p:cNvPr id="26" name="TextBox 25"/>
           <p:cNvSpPr txBox="1"/>
           <p:nvPr/>
         </p:nvSpPr>
@@ -19251,7 +18511,7 @@
       </p:sp>
       <p:sp>
         <p:nvSpPr>
-          <p:cNvPr id="28" name="TextBox 27"/>
+          <p:cNvPr id="27" name="TextBox 26"/>
           <p:cNvSpPr txBox="1"/>
           <p:nvPr/>
         </p:nvSpPr>
@@ -19298,7 +18558,7 @@
       </p:sp>
       <p:sp>
         <p:nvSpPr>
-          <p:cNvPr id="29" name="Rounded Rectangle 28"/>
+          <p:cNvPr id="28" name="Rounded Rectangle 27"/>
           <p:cNvSpPr/>
           <p:nvPr/>
         </p:nvSpPr>
@@ -19352,7 +18612,7 @@
       </p:sp>
       <p:sp>
         <p:nvSpPr>
-          <p:cNvPr id="30" name="Rectangle 29"/>
+          <p:cNvPr id="29" name="Rectangle 28"/>
           <p:cNvSpPr/>
           <p:nvPr/>
         </p:nvSpPr>
@@ -19396,7 +18656,7 @@
       </p:sp>
       <p:sp>
         <p:nvSpPr>
-          <p:cNvPr id="31" name="TextBox 30"/>
+          <p:cNvPr id="30" name="TextBox 29"/>
           <p:cNvSpPr txBox="1"/>
           <p:nvPr/>
         </p:nvSpPr>
@@ -19443,7 +18703,7 @@
       </p:sp>
       <p:sp>
         <p:nvSpPr>
-          <p:cNvPr id="32" name="TextBox 31"/>
+          <p:cNvPr id="31" name="TextBox 30"/>
           <p:cNvSpPr txBox="1"/>
           <p:nvPr/>
         </p:nvSpPr>
@@ -19582,8 +18842,77 @@
         </p:nvSpPr>
         <p:spPr>
           <a:xfrm>
-            <a:off x="713232" y="6272784"/>
-            <a:ext cx="5597920" cy="219456"/>
+            <a:off x="8240677" y="6272784"/>
+            <a:ext cx="2651760" cy="219456"/>
+          </a:xfrm>
+          <a:prstGeom prst="rect">
+            <a:avLst/>
+          </a:prstGeom>
+          <a:noFill/>
+        </p:spPr>
+        <p:txBody>
+          <a:bodyPr wrap="square" lIns="0" rIns="0" tIns="0" bIns="0" anchor="t">
+            <a:spAutoFit/>
+          </a:bodyPr>
+          <a:lstStyle/>
+          <a:p>
+            <a:pPr algn="r">
+              <a:lnSpc>
+                <a:spcPct val="122000"/>
+              </a:lnSpc>
+              <a:spcBef>
+                <a:spcPts val="0"/>
+              </a:spcBef>
+              <a:spcAft>
+                <a:spcPts val="0"/>
+              </a:spcAft>
+            </a:pPr>
+            <a:r>
+              <a:rPr sz="900" b="0" i="0">
+                <a:solidFill>
+                  <a:srgbClr val="636E85"/>
+                </a:solidFill>
+                <a:latin typeface="Segoe UI"/>
+                <a:ea typeface="Segoe UI"/>
+                <a:cs typeface="Segoe UI"/>
+              </a:rPr>
+              <a:t>Lingesh K  ·  OSI2509030</a:t>
+            </a:r>
+            <a:r>
+              <a:rPr sz="900" b="0" i="0">
+                <a:solidFill>
+                  <a:srgbClr val="141C2E"/>
+                </a:solidFill>
+                <a:latin typeface="Segoe UI"/>
+                <a:ea typeface="Segoe UI"/>
+                <a:cs typeface="Segoe UI"/>
+              </a:rPr>
+              <a:t>     </a:t>
+            </a:r>
+            <a:r>
+              <a:rPr sz="900" b="1" i="0">
+                <a:solidFill>
+                  <a:srgbClr val="0E1E3C"/>
+                </a:solidFill>
+                <a:latin typeface="Segoe UI"/>
+                <a:ea typeface="Segoe UI"/>
+                <a:cs typeface="Segoe UI"/>
+              </a:rPr>
+              <a:t>02</a:t>
+            </a:r>
+          </a:p>
+        </p:txBody>
+      </p:sp>
+      <p:sp>
+        <p:nvSpPr>
+          <p:cNvPr id="5" name="TextBox 4"/>
+          <p:cNvSpPr txBox="1"/>
+          <p:nvPr/>
+        </p:nvSpPr>
+        <p:spPr>
+          <a:xfrm>
+            <a:off x="713232" y="566928"/>
+            <a:ext cx="10765231" cy="219456"/>
           </a:xfrm>
           <a:prstGeom prst="rect">
             <a:avLst/>
@@ -19608,106 +18937,15 @@
               </a:spcAft>
             </a:pPr>
             <a:r>
-              <a:rPr sz="900" b="1" i="0">
-                <a:solidFill>
-                  <a:srgbClr val="0E1E3C"/>
-                </a:solidFill>
-                <a:latin typeface="Segoe UI"/>
-                <a:ea typeface="Segoe UI"/>
-                <a:cs typeface="Segoe UI"/>
-              </a:rPr>
-              <a:t>Unit 2</a:t>
-            </a:r>
-            <a:r>
-              <a:rPr sz="900" b="0" i="0">
-                <a:solidFill>
-                  <a:srgbClr val="939EB3"/>
-                </a:solidFill>
-                <a:latin typeface="Segoe UI"/>
-                <a:ea typeface="Segoe UI"/>
-                <a:cs typeface="Segoe UI"/>
-              </a:rPr>
-              <a:t>  ·  </a:t>
-            </a:r>
-            <a:r>
-              <a:rPr sz="900" b="0" i="0">
-                <a:solidFill>
-                  <a:srgbClr val="636E85"/>
-                </a:solidFill>
-                <a:latin typeface="Segoe UI"/>
-                <a:ea typeface="Segoe UI"/>
-                <a:cs typeface="Segoe UI"/>
-              </a:rPr>
-              <a:t>Tools and Technologies</a:t>
-            </a:r>
-          </a:p>
-        </p:txBody>
-      </p:sp>
-      <p:sp>
-        <p:nvSpPr>
-          <p:cNvPr id="5" name="TextBox 4"/>
-          <p:cNvSpPr txBox="1"/>
-          <p:nvPr/>
-        </p:nvSpPr>
-        <p:spPr>
-          <a:xfrm>
-            <a:off x="8240677" y="6272784"/>
-            <a:ext cx="2651760" cy="219456"/>
-          </a:xfrm>
-          <a:prstGeom prst="rect">
-            <a:avLst/>
-          </a:prstGeom>
-          <a:noFill/>
-        </p:spPr>
-        <p:txBody>
-          <a:bodyPr wrap="square" lIns="0" rIns="0" tIns="0" bIns="0" anchor="t">
-            <a:spAutoFit/>
-          </a:bodyPr>
-          <a:lstStyle/>
-          <a:p>
-            <a:pPr algn="r">
-              <a:lnSpc>
-                <a:spcPct val="122000"/>
-              </a:lnSpc>
-              <a:spcBef>
-                <a:spcPts val="0"/>
-              </a:spcBef>
-              <a:spcAft>
-                <a:spcPts val="0"/>
-              </a:spcAft>
-            </a:pPr>
-            <a:r>
-              <a:rPr sz="900" b="0" i="0">
-                <a:solidFill>
-                  <a:srgbClr val="636E85"/>
-                </a:solidFill>
-                <a:latin typeface="Segoe UI"/>
-                <a:ea typeface="Segoe UI"/>
-                <a:cs typeface="Segoe UI"/>
-              </a:rPr>
-              <a:t>Lingesh K  ·  OSI2509030</a:t>
-            </a:r>
-            <a:r>
-              <a:rPr sz="900" b="0" i="0">
-                <a:solidFill>
-                  <a:srgbClr val="141C2E"/>
-                </a:solidFill>
-                <a:latin typeface="Segoe UI"/>
-                <a:ea typeface="Segoe UI"/>
-                <a:cs typeface="Segoe UI"/>
-              </a:rPr>
-              <a:t>     </a:t>
-            </a:r>
-            <a:r>
-              <a:rPr sz="900" b="1" i="0">
-                <a:solidFill>
-                  <a:srgbClr val="0E1E3C"/>
-                </a:solidFill>
-                <a:latin typeface="Segoe UI"/>
-                <a:ea typeface="Segoe UI"/>
-                <a:cs typeface="Segoe UI"/>
-              </a:rPr>
-              <a:t>02</a:t>
+              <a:rPr sz="950" b="1" i="0" spc="160">
+                <a:solidFill>
+                  <a:srgbClr val="3B7AF7"/>
+                </a:solidFill>
+                <a:latin typeface="Segoe UI"/>
+                <a:ea typeface="Segoe UI"/>
+                <a:cs typeface="Segoe UI"/>
+              </a:rPr>
+              <a:t>AGENDA</a:t>
             </a:r>
           </a:p>
         </p:txBody>
@@ -19715,53 +18953,6 @@
       <p:sp>
         <p:nvSpPr>
           <p:cNvPr id="6" name="TextBox 5"/>
-          <p:cNvSpPr txBox="1"/>
-          <p:nvPr/>
-        </p:nvSpPr>
-        <p:spPr>
-          <a:xfrm>
-            <a:off x="713232" y="566928"/>
-            <a:ext cx="10765231" cy="219456"/>
-          </a:xfrm>
-          <a:prstGeom prst="rect">
-            <a:avLst/>
-          </a:prstGeom>
-          <a:noFill/>
-        </p:spPr>
-        <p:txBody>
-          <a:bodyPr wrap="square" lIns="0" rIns="0" tIns="0" bIns="0" anchor="t">
-            <a:spAutoFit/>
-          </a:bodyPr>
-          <a:lstStyle/>
-          <a:p>
-            <a:pPr algn="l">
-              <a:lnSpc>
-                <a:spcPct val="122000"/>
-              </a:lnSpc>
-              <a:spcBef>
-                <a:spcPts val="0"/>
-              </a:spcBef>
-              <a:spcAft>
-                <a:spcPts val="0"/>
-              </a:spcAft>
-            </a:pPr>
-            <a:r>
-              <a:rPr sz="950" b="1" i="0" spc="160">
-                <a:solidFill>
-                  <a:srgbClr val="3B7AF7"/>
-                </a:solidFill>
-                <a:latin typeface="Segoe UI"/>
-                <a:ea typeface="Segoe UI"/>
-                <a:cs typeface="Segoe UI"/>
-              </a:rPr>
-              <a:t>AGENDA</a:t>
-            </a:r>
-          </a:p>
-        </p:txBody>
-      </p:sp>
-      <p:sp>
-        <p:nvSpPr>
-          <p:cNvPr id="7" name="TextBox 6"/>
           <p:cNvSpPr txBox="1"/>
           <p:nvPr/>
         </p:nvSpPr>
@@ -19808,7 +18999,7 @@
       </p:sp>
       <p:sp>
         <p:nvSpPr>
-          <p:cNvPr id="8" name="Rectangle 7"/>
+          <p:cNvPr id="7" name="Rectangle 6"/>
           <p:cNvSpPr/>
           <p:nvPr/>
         </p:nvSpPr>
@@ -19852,7 +19043,7 @@
       </p:sp>
       <p:sp>
         <p:nvSpPr>
-          <p:cNvPr id="9" name="TextBox 8"/>
+          <p:cNvPr id="8" name="TextBox 7"/>
           <p:cNvSpPr txBox="1"/>
           <p:nvPr/>
         </p:nvSpPr>
@@ -19899,7 +19090,7 @@
       </p:sp>
       <p:sp>
         <p:nvSpPr>
-          <p:cNvPr id="10" name="Rectangle 9"/>
+          <p:cNvPr id="9" name="Rectangle 8"/>
           <p:cNvSpPr/>
           <p:nvPr/>
         </p:nvSpPr>
@@ -19943,7 +19134,7 @@
       </p:sp>
       <p:sp>
         <p:nvSpPr>
-          <p:cNvPr id="11" name="TextBox 10"/>
+          <p:cNvPr id="10" name="TextBox 9"/>
           <p:cNvSpPr txBox="1"/>
           <p:nvPr/>
         </p:nvSpPr>
@@ -19990,7 +19181,7 @@
       </p:sp>
       <p:sp>
         <p:nvSpPr>
-          <p:cNvPr id="12" name="TextBox 11"/>
+          <p:cNvPr id="11" name="TextBox 10"/>
           <p:cNvSpPr txBox="1"/>
           <p:nvPr/>
         </p:nvSpPr>
@@ -20061,7 +19252,7 @@
       </p:sp>
       <p:sp>
         <p:nvSpPr>
-          <p:cNvPr id="13" name="Rectangle 12"/>
+          <p:cNvPr id="12" name="Rectangle 11"/>
           <p:cNvSpPr/>
           <p:nvPr/>
         </p:nvSpPr>
@@ -20105,7 +19296,7 @@
       </p:sp>
       <p:sp>
         <p:nvSpPr>
-          <p:cNvPr id="14" name="TextBox 13"/>
+          <p:cNvPr id="13" name="TextBox 12"/>
           <p:cNvSpPr txBox="1"/>
           <p:nvPr/>
         </p:nvSpPr>
@@ -20152,7 +19343,7 @@
       </p:sp>
       <p:sp>
         <p:nvSpPr>
-          <p:cNvPr id="15" name="TextBox 14"/>
+          <p:cNvPr id="14" name="TextBox 13"/>
           <p:cNvSpPr txBox="1"/>
           <p:nvPr/>
         </p:nvSpPr>
@@ -20223,7 +19414,7 @@
       </p:sp>
       <p:sp>
         <p:nvSpPr>
-          <p:cNvPr id="16" name="Rectangle 15"/>
+          <p:cNvPr id="15" name="Rectangle 14"/>
           <p:cNvSpPr/>
           <p:nvPr/>
         </p:nvSpPr>
@@ -20267,7 +19458,7 @@
       </p:sp>
       <p:sp>
         <p:nvSpPr>
-          <p:cNvPr id="17" name="TextBox 16"/>
+          <p:cNvPr id="16" name="TextBox 15"/>
           <p:cNvSpPr txBox="1"/>
           <p:nvPr/>
         </p:nvSpPr>
@@ -20314,7 +19505,7 @@
       </p:sp>
       <p:sp>
         <p:nvSpPr>
-          <p:cNvPr id="18" name="TextBox 17"/>
+          <p:cNvPr id="17" name="TextBox 16"/>
           <p:cNvSpPr txBox="1"/>
           <p:nvPr/>
         </p:nvSpPr>
@@ -20385,7 +19576,7 @@
       </p:sp>
       <p:sp>
         <p:nvSpPr>
-          <p:cNvPr id="19" name="Rectangle 18"/>
+          <p:cNvPr id="18" name="Rectangle 17"/>
           <p:cNvSpPr/>
           <p:nvPr/>
         </p:nvSpPr>
@@ -20429,7 +19620,7 @@
       </p:sp>
       <p:sp>
         <p:nvSpPr>
-          <p:cNvPr id="20" name="TextBox 19"/>
+          <p:cNvPr id="19" name="TextBox 18"/>
           <p:cNvSpPr txBox="1"/>
           <p:nvPr/>
         </p:nvSpPr>
@@ -20476,7 +19667,7 @@
       </p:sp>
       <p:sp>
         <p:nvSpPr>
-          <p:cNvPr id="21" name="TextBox 20"/>
+          <p:cNvPr id="20" name="TextBox 19"/>
           <p:cNvSpPr txBox="1"/>
           <p:nvPr/>
         </p:nvSpPr>
@@ -20547,7 +19738,7 @@
       </p:sp>
       <p:sp>
         <p:nvSpPr>
-          <p:cNvPr id="22" name="Rectangle 21"/>
+          <p:cNvPr id="21" name="Rectangle 20"/>
           <p:cNvSpPr/>
           <p:nvPr/>
         </p:nvSpPr>
@@ -20591,7 +19782,7 @@
       </p:sp>
       <p:sp>
         <p:nvSpPr>
-          <p:cNvPr id="23" name="TextBox 22"/>
+          <p:cNvPr id="22" name="TextBox 21"/>
           <p:cNvSpPr txBox="1"/>
           <p:nvPr/>
         </p:nvSpPr>
@@ -20638,7 +19829,7 @@
       </p:sp>
       <p:sp>
         <p:nvSpPr>
-          <p:cNvPr id="24" name="TextBox 23"/>
+          <p:cNvPr id="23" name="TextBox 22"/>
           <p:cNvSpPr txBox="1"/>
           <p:nvPr/>
         </p:nvSpPr>
@@ -20709,7 +19900,7 @@
       </p:sp>
       <p:sp>
         <p:nvSpPr>
-          <p:cNvPr id="25" name="Rectangle 24"/>
+          <p:cNvPr id="24" name="Rectangle 23"/>
           <p:cNvSpPr/>
           <p:nvPr/>
         </p:nvSpPr>
@@ -20753,7 +19944,7 @@
       </p:sp>
       <p:sp>
         <p:nvSpPr>
-          <p:cNvPr id="26" name="TextBox 25"/>
+          <p:cNvPr id="25" name="TextBox 24"/>
           <p:cNvSpPr txBox="1"/>
           <p:nvPr/>
         </p:nvSpPr>
@@ -20800,7 +19991,7 @@
       </p:sp>
       <p:sp>
         <p:nvSpPr>
-          <p:cNvPr id="27" name="TextBox 26"/>
+          <p:cNvPr id="26" name="TextBox 25"/>
           <p:cNvSpPr txBox="1"/>
           <p:nvPr/>
         </p:nvSpPr>
@@ -20871,7 +20062,7 @@
       </p:sp>
       <p:sp>
         <p:nvSpPr>
-          <p:cNvPr id="28" name="Rectangle 27"/>
+          <p:cNvPr id="27" name="Rectangle 26"/>
           <p:cNvSpPr/>
           <p:nvPr/>
         </p:nvSpPr>
@@ -20915,7 +20106,7 @@
       </p:sp>
       <p:sp>
         <p:nvSpPr>
-          <p:cNvPr id="29" name="TextBox 28"/>
+          <p:cNvPr id="28" name="TextBox 27"/>
           <p:cNvSpPr txBox="1"/>
           <p:nvPr/>
         </p:nvSpPr>
@@ -20962,7 +20153,7 @@
       </p:sp>
       <p:sp>
         <p:nvSpPr>
-          <p:cNvPr id="30" name="TextBox 29"/>
+          <p:cNvPr id="29" name="TextBox 28"/>
           <p:cNvSpPr txBox="1"/>
           <p:nvPr/>
         </p:nvSpPr>
@@ -21033,7 +20224,7 @@
       </p:sp>
       <p:sp>
         <p:nvSpPr>
-          <p:cNvPr id="31" name="Rectangle 30"/>
+          <p:cNvPr id="30" name="Rectangle 29"/>
           <p:cNvSpPr/>
           <p:nvPr/>
         </p:nvSpPr>
@@ -21077,7 +20268,7 @@
       </p:sp>
       <p:sp>
         <p:nvSpPr>
-          <p:cNvPr id="32" name="TextBox 31"/>
+          <p:cNvPr id="31" name="TextBox 30"/>
           <p:cNvSpPr txBox="1"/>
           <p:nvPr/>
         </p:nvSpPr>
@@ -21124,7 +20315,7 @@
       </p:sp>
       <p:sp>
         <p:nvSpPr>
-          <p:cNvPr id="33" name="TextBox 32"/>
+          <p:cNvPr id="32" name="TextBox 31"/>
           <p:cNvSpPr txBox="1"/>
           <p:nvPr/>
         </p:nvSpPr>
@@ -21287,8 +20478,77 @@
         </p:nvSpPr>
         <p:spPr>
           <a:xfrm>
-            <a:off x="713232" y="6272784"/>
-            <a:ext cx="5597920" cy="219456"/>
+            <a:off x="8240677" y="6272784"/>
+            <a:ext cx="2651760" cy="219456"/>
+          </a:xfrm>
+          <a:prstGeom prst="rect">
+            <a:avLst/>
+          </a:prstGeom>
+          <a:noFill/>
+        </p:spPr>
+        <p:txBody>
+          <a:bodyPr wrap="square" lIns="0" rIns="0" tIns="0" bIns="0" anchor="t">
+            <a:spAutoFit/>
+          </a:bodyPr>
+          <a:lstStyle/>
+          <a:p>
+            <a:pPr algn="r">
+              <a:lnSpc>
+                <a:spcPct val="122000"/>
+              </a:lnSpc>
+              <a:spcBef>
+                <a:spcPts val="0"/>
+              </a:spcBef>
+              <a:spcAft>
+                <a:spcPts val="0"/>
+              </a:spcAft>
+            </a:pPr>
+            <a:r>
+              <a:rPr sz="900" b="0" i="0">
+                <a:solidFill>
+                  <a:srgbClr val="636E85"/>
+                </a:solidFill>
+                <a:latin typeface="Segoe UI"/>
+                <a:ea typeface="Segoe UI"/>
+                <a:cs typeface="Segoe UI"/>
+              </a:rPr>
+              <a:t>Lingesh K  ·  OSI2509030</a:t>
+            </a:r>
+            <a:r>
+              <a:rPr sz="900" b="0" i="0">
+                <a:solidFill>
+                  <a:srgbClr val="141C2E"/>
+                </a:solidFill>
+                <a:latin typeface="Segoe UI"/>
+                <a:ea typeface="Segoe UI"/>
+                <a:cs typeface="Segoe UI"/>
+              </a:rPr>
+              <a:t>     </a:t>
+            </a:r>
+            <a:r>
+              <a:rPr sz="900" b="1" i="0">
+                <a:solidFill>
+                  <a:srgbClr val="0E1E3C"/>
+                </a:solidFill>
+                <a:latin typeface="Segoe UI"/>
+                <a:ea typeface="Segoe UI"/>
+                <a:cs typeface="Segoe UI"/>
+              </a:rPr>
+              <a:t>20</a:t>
+            </a:r>
+          </a:p>
+        </p:txBody>
+      </p:sp>
+      <p:sp>
+        <p:nvSpPr>
+          <p:cNvPr id="5" name="TextBox 4"/>
+          <p:cNvSpPr txBox="1"/>
+          <p:nvPr/>
+        </p:nvSpPr>
+        <p:spPr>
+          <a:xfrm>
+            <a:off x="713232" y="566928"/>
+            <a:ext cx="10765231" cy="219456"/>
           </a:xfrm>
           <a:prstGeom prst="rect">
             <a:avLst/>
@@ -21313,106 +20573,15 @@
               </a:spcAft>
             </a:pPr>
             <a:r>
-              <a:rPr sz="900" b="1" i="0">
-                <a:solidFill>
-                  <a:srgbClr val="0E1E3C"/>
-                </a:solidFill>
-                <a:latin typeface="Segoe UI"/>
-                <a:ea typeface="Segoe UI"/>
-                <a:cs typeface="Segoe UI"/>
-              </a:rPr>
-              <a:t>Unit 2</a:t>
-            </a:r>
-            <a:r>
-              <a:rPr sz="900" b="0" i="0">
-                <a:solidFill>
-                  <a:srgbClr val="939EB3"/>
-                </a:solidFill>
-                <a:latin typeface="Segoe UI"/>
-                <a:ea typeface="Segoe UI"/>
-                <a:cs typeface="Segoe UI"/>
-              </a:rPr>
-              <a:t>  ·  </a:t>
-            </a:r>
-            <a:r>
-              <a:rPr sz="900" b="0" i="0">
-                <a:solidFill>
-                  <a:srgbClr val="636E85"/>
-                </a:solidFill>
-                <a:latin typeface="Segoe UI"/>
-                <a:ea typeface="Segoe UI"/>
-                <a:cs typeface="Segoe UI"/>
-              </a:rPr>
-              <a:t>Tools and Technologies</a:t>
-            </a:r>
-          </a:p>
-        </p:txBody>
-      </p:sp>
-      <p:sp>
-        <p:nvSpPr>
-          <p:cNvPr id="5" name="TextBox 4"/>
-          <p:cNvSpPr txBox="1"/>
-          <p:nvPr/>
-        </p:nvSpPr>
-        <p:spPr>
-          <a:xfrm>
-            <a:off x="8240677" y="6272784"/>
-            <a:ext cx="2651760" cy="219456"/>
-          </a:xfrm>
-          <a:prstGeom prst="rect">
-            <a:avLst/>
-          </a:prstGeom>
-          <a:noFill/>
-        </p:spPr>
-        <p:txBody>
-          <a:bodyPr wrap="square" lIns="0" rIns="0" tIns="0" bIns="0" anchor="t">
-            <a:spAutoFit/>
-          </a:bodyPr>
-          <a:lstStyle/>
-          <a:p>
-            <a:pPr algn="r">
-              <a:lnSpc>
-                <a:spcPct val="122000"/>
-              </a:lnSpc>
-              <a:spcBef>
-                <a:spcPts val="0"/>
-              </a:spcBef>
-              <a:spcAft>
-                <a:spcPts val="0"/>
-              </a:spcAft>
-            </a:pPr>
-            <a:r>
-              <a:rPr sz="900" b="0" i="0">
-                <a:solidFill>
-                  <a:srgbClr val="636E85"/>
-                </a:solidFill>
-                <a:latin typeface="Segoe UI"/>
-                <a:ea typeface="Segoe UI"/>
-                <a:cs typeface="Segoe UI"/>
-              </a:rPr>
-              <a:t>Lingesh K  ·  OSI2509030</a:t>
-            </a:r>
-            <a:r>
-              <a:rPr sz="900" b="0" i="0">
-                <a:solidFill>
-                  <a:srgbClr val="141C2E"/>
-                </a:solidFill>
-                <a:latin typeface="Segoe UI"/>
-                <a:ea typeface="Segoe UI"/>
-                <a:cs typeface="Segoe UI"/>
-              </a:rPr>
-              <a:t>     </a:t>
-            </a:r>
-            <a:r>
-              <a:rPr sz="900" b="1" i="0">
-                <a:solidFill>
-                  <a:srgbClr val="0E1E3C"/>
-                </a:solidFill>
-                <a:latin typeface="Segoe UI"/>
-                <a:ea typeface="Segoe UI"/>
-                <a:cs typeface="Segoe UI"/>
-              </a:rPr>
-              <a:t>20</a:t>
+              <a:rPr sz="950" b="1" i="0" spc="160">
+                <a:solidFill>
+                  <a:srgbClr val="3B7AF7"/>
+                </a:solidFill>
+                <a:latin typeface="Segoe UI"/>
+                <a:ea typeface="Segoe UI"/>
+                <a:cs typeface="Segoe UI"/>
+              </a:rPr>
+              <a:t>TWO ROUTES</a:t>
             </a:r>
           </a:p>
         </p:txBody>
@@ -21420,53 +20589,6 @@
       <p:sp>
         <p:nvSpPr>
           <p:cNvPr id="6" name="TextBox 5"/>
-          <p:cNvSpPr txBox="1"/>
-          <p:nvPr/>
-        </p:nvSpPr>
-        <p:spPr>
-          <a:xfrm>
-            <a:off x="713232" y="566928"/>
-            <a:ext cx="10765231" cy="219456"/>
-          </a:xfrm>
-          <a:prstGeom prst="rect">
-            <a:avLst/>
-          </a:prstGeom>
-          <a:noFill/>
-        </p:spPr>
-        <p:txBody>
-          <a:bodyPr wrap="square" lIns="0" rIns="0" tIns="0" bIns="0" anchor="t">
-            <a:spAutoFit/>
-          </a:bodyPr>
-          <a:lstStyle/>
-          <a:p>
-            <a:pPr algn="l">
-              <a:lnSpc>
-                <a:spcPct val="122000"/>
-              </a:lnSpc>
-              <a:spcBef>
-                <a:spcPts val="0"/>
-              </a:spcBef>
-              <a:spcAft>
-                <a:spcPts val="0"/>
-              </a:spcAft>
-            </a:pPr>
-            <a:r>
-              <a:rPr sz="950" b="1" i="0" spc="160">
-                <a:solidFill>
-                  <a:srgbClr val="3B7AF7"/>
-                </a:solidFill>
-                <a:latin typeface="Segoe UI"/>
-                <a:ea typeface="Segoe UI"/>
-                <a:cs typeface="Segoe UI"/>
-              </a:rPr>
-              <a:t>TWO ROUTES</a:t>
-            </a:r>
-          </a:p>
-        </p:txBody>
-      </p:sp>
-      <p:sp>
-        <p:nvSpPr>
-          <p:cNvPr id="7" name="TextBox 6"/>
           <p:cNvSpPr txBox="1"/>
           <p:nvPr/>
         </p:nvSpPr>
@@ -21513,7 +20635,7 @@
       </p:sp>
       <p:sp>
         <p:nvSpPr>
-          <p:cNvPr id="8" name="Rectangle 7"/>
+          <p:cNvPr id="7" name="Rectangle 6"/>
           <p:cNvSpPr/>
           <p:nvPr/>
         </p:nvSpPr>
@@ -21557,7 +20679,7 @@
       </p:sp>
       <p:sp>
         <p:nvSpPr>
-          <p:cNvPr id="9" name="TextBox 8"/>
+          <p:cNvPr id="8" name="TextBox 7"/>
           <p:cNvSpPr txBox="1"/>
           <p:nvPr/>
         </p:nvSpPr>
@@ -21604,7 +20726,7 @@
       </p:sp>
       <p:sp>
         <p:nvSpPr>
-          <p:cNvPr id="10" name="Rounded Rectangle 9"/>
+          <p:cNvPr id="9" name="Rounded Rectangle 8"/>
           <p:cNvSpPr/>
           <p:nvPr/>
         </p:nvSpPr>
@@ -21658,7 +20780,7 @@
       </p:sp>
       <p:sp>
         <p:nvSpPr>
-          <p:cNvPr id="11" name="Rectangle 10"/>
+          <p:cNvPr id="10" name="Rectangle 9"/>
           <p:cNvSpPr/>
           <p:nvPr/>
         </p:nvSpPr>
@@ -21702,7 +20824,7 @@
       </p:sp>
       <p:sp>
         <p:nvSpPr>
-          <p:cNvPr id="12" name="Rounded Rectangle 11"/>
+          <p:cNvPr id="11" name="Rounded Rectangle 10"/>
           <p:cNvSpPr/>
           <p:nvPr/>
         </p:nvSpPr>
@@ -21769,7 +20891,7 @@
       </p:sp>
       <p:sp>
         <p:nvSpPr>
-          <p:cNvPr id="13" name="TextBox 12"/>
+          <p:cNvPr id="12" name="TextBox 11"/>
           <p:cNvSpPr txBox="1"/>
           <p:nvPr/>
         </p:nvSpPr>
@@ -21816,7 +20938,7 @@
       </p:sp>
       <p:sp>
         <p:nvSpPr>
-          <p:cNvPr id="14" name="Rectangle 13"/>
+          <p:cNvPr id="13" name="Rectangle 12"/>
           <p:cNvSpPr/>
           <p:nvPr/>
         </p:nvSpPr>
@@ -21860,7 +20982,7 @@
       </p:sp>
       <p:sp>
         <p:nvSpPr>
-          <p:cNvPr id="15" name="Rounded Rectangle 14"/>
+          <p:cNvPr id="14" name="Rounded Rectangle 13"/>
           <p:cNvSpPr/>
           <p:nvPr/>
         </p:nvSpPr>
@@ -21906,7 +21028,7 @@
       </p:sp>
       <p:sp>
         <p:nvSpPr>
-          <p:cNvPr id="16" name="TextBox 15"/>
+          <p:cNvPr id="15" name="TextBox 14"/>
           <p:cNvSpPr txBox="1"/>
           <p:nvPr/>
         </p:nvSpPr>
@@ -21953,7 +21075,7 @@
       </p:sp>
       <p:sp>
         <p:nvSpPr>
-          <p:cNvPr id="17" name="Rounded Rectangle 16"/>
+          <p:cNvPr id="16" name="Rounded Rectangle 15"/>
           <p:cNvSpPr/>
           <p:nvPr/>
         </p:nvSpPr>
@@ -21999,7 +21121,7 @@
       </p:sp>
       <p:sp>
         <p:nvSpPr>
-          <p:cNvPr id="18" name="TextBox 17"/>
+          <p:cNvPr id="17" name="TextBox 16"/>
           <p:cNvSpPr txBox="1"/>
           <p:nvPr/>
         </p:nvSpPr>
@@ -22046,7 +21168,7 @@
       </p:sp>
       <p:sp>
         <p:nvSpPr>
-          <p:cNvPr id="19" name="Rounded Rectangle 18"/>
+          <p:cNvPr id="18" name="Rounded Rectangle 17"/>
           <p:cNvSpPr/>
           <p:nvPr/>
         </p:nvSpPr>
@@ -22092,7 +21214,7 @@
       </p:sp>
       <p:sp>
         <p:nvSpPr>
-          <p:cNvPr id="20" name="TextBox 19"/>
+          <p:cNvPr id="19" name="TextBox 18"/>
           <p:cNvSpPr txBox="1"/>
           <p:nvPr/>
         </p:nvSpPr>
@@ -22139,7 +21261,7 @@
       </p:sp>
       <p:sp>
         <p:nvSpPr>
-          <p:cNvPr id="21" name="Rounded Rectangle 20"/>
+          <p:cNvPr id="20" name="Rounded Rectangle 19"/>
           <p:cNvSpPr/>
           <p:nvPr/>
         </p:nvSpPr>
@@ -22185,7 +21307,7 @@
       </p:sp>
       <p:sp>
         <p:nvSpPr>
-          <p:cNvPr id="22" name="TextBox 21"/>
+          <p:cNvPr id="21" name="TextBox 20"/>
           <p:cNvSpPr txBox="1"/>
           <p:nvPr/>
         </p:nvSpPr>
@@ -22232,7 +21354,7 @@
       </p:sp>
       <p:sp>
         <p:nvSpPr>
-          <p:cNvPr id="23" name="Rounded Rectangle 22"/>
+          <p:cNvPr id="22" name="Rounded Rectangle 21"/>
           <p:cNvSpPr/>
           <p:nvPr/>
         </p:nvSpPr>
@@ -22278,7 +21400,7 @@
       </p:sp>
       <p:sp>
         <p:nvSpPr>
-          <p:cNvPr id="24" name="TextBox 23"/>
+          <p:cNvPr id="23" name="TextBox 22"/>
           <p:cNvSpPr txBox="1"/>
           <p:nvPr/>
         </p:nvSpPr>
@@ -22325,7 +21447,7 @@
       </p:sp>
       <p:sp>
         <p:nvSpPr>
-          <p:cNvPr id="25" name="Rounded Rectangle 24"/>
+          <p:cNvPr id="24" name="Rounded Rectangle 23"/>
           <p:cNvSpPr/>
           <p:nvPr/>
         </p:nvSpPr>
@@ -22379,7 +21501,7 @@
       </p:sp>
       <p:sp>
         <p:nvSpPr>
-          <p:cNvPr id="26" name="Rectangle 25"/>
+          <p:cNvPr id="25" name="Rectangle 24"/>
           <p:cNvSpPr/>
           <p:nvPr/>
         </p:nvSpPr>
@@ -22423,7 +21545,7 @@
       </p:sp>
       <p:sp>
         <p:nvSpPr>
-          <p:cNvPr id="27" name="Rounded Rectangle 26"/>
+          <p:cNvPr id="26" name="Rounded Rectangle 25"/>
           <p:cNvSpPr/>
           <p:nvPr/>
         </p:nvSpPr>
@@ -22490,7 +21612,7 @@
       </p:sp>
       <p:sp>
         <p:nvSpPr>
-          <p:cNvPr id="28" name="TextBox 27"/>
+          <p:cNvPr id="27" name="TextBox 26"/>
           <p:cNvSpPr txBox="1"/>
           <p:nvPr/>
         </p:nvSpPr>
@@ -22537,7 +21659,7 @@
       </p:sp>
       <p:sp>
         <p:nvSpPr>
-          <p:cNvPr id="29" name="Rectangle 28"/>
+          <p:cNvPr id="28" name="Rectangle 27"/>
           <p:cNvSpPr/>
           <p:nvPr/>
         </p:nvSpPr>
@@ -22581,7 +21703,7 @@
       </p:sp>
       <p:sp>
         <p:nvSpPr>
-          <p:cNvPr id="30" name="Rounded Rectangle 29"/>
+          <p:cNvPr id="29" name="Rounded Rectangle 28"/>
           <p:cNvSpPr/>
           <p:nvPr/>
         </p:nvSpPr>
@@ -22627,7 +21749,7 @@
       </p:sp>
       <p:sp>
         <p:nvSpPr>
-          <p:cNvPr id="31" name="TextBox 30"/>
+          <p:cNvPr id="30" name="TextBox 29"/>
           <p:cNvSpPr txBox="1"/>
           <p:nvPr/>
         </p:nvSpPr>
@@ -22674,7 +21796,7 @@
       </p:sp>
       <p:sp>
         <p:nvSpPr>
-          <p:cNvPr id="32" name="Rounded Rectangle 31"/>
+          <p:cNvPr id="31" name="Rounded Rectangle 30"/>
           <p:cNvSpPr/>
           <p:nvPr/>
         </p:nvSpPr>
@@ -22720,7 +21842,7 @@
       </p:sp>
       <p:sp>
         <p:nvSpPr>
-          <p:cNvPr id="33" name="TextBox 32"/>
+          <p:cNvPr id="32" name="TextBox 31"/>
           <p:cNvSpPr txBox="1"/>
           <p:nvPr/>
         </p:nvSpPr>
@@ -22767,7 +21889,7 @@
       </p:sp>
       <p:sp>
         <p:nvSpPr>
-          <p:cNvPr id="34" name="Rounded Rectangle 33"/>
+          <p:cNvPr id="33" name="Rounded Rectangle 32"/>
           <p:cNvSpPr/>
           <p:nvPr/>
         </p:nvSpPr>
@@ -22813,7 +21935,7 @@
       </p:sp>
       <p:sp>
         <p:nvSpPr>
-          <p:cNvPr id="35" name="TextBox 34"/>
+          <p:cNvPr id="34" name="TextBox 33"/>
           <p:cNvSpPr txBox="1"/>
           <p:nvPr/>
         </p:nvSpPr>
@@ -22860,7 +21982,7 @@
       </p:sp>
       <p:sp>
         <p:nvSpPr>
-          <p:cNvPr id="36" name="Rounded Rectangle 35"/>
+          <p:cNvPr id="35" name="Rounded Rectangle 34"/>
           <p:cNvSpPr/>
           <p:nvPr/>
         </p:nvSpPr>
@@ -22906,7 +22028,7 @@
       </p:sp>
       <p:sp>
         <p:nvSpPr>
-          <p:cNvPr id="37" name="TextBox 36"/>
+          <p:cNvPr id="36" name="TextBox 35"/>
           <p:cNvSpPr txBox="1"/>
           <p:nvPr/>
         </p:nvSpPr>
@@ -22953,7 +22075,7 @@
       </p:sp>
       <p:sp>
         <p:nvSpPr>
-          <p:cNvPr id="38" name="Rounded Rectangle 37"/>
+          <p:cNvPr id="37" name="Rounded Rectangle 36"/>
           <p:cNvSpPr/>
           <p:nvPr/>
         </p:nvSpPr>
@@ -22999,7 +22121,7 @@
       </p:sp>
       <p:sp>
         <p:nvSpPr>
-          <p:cNvPr id="39" name="TextBox 38"/>
+          <p:cNvPr id="38" name="TextBox 37"/>
           <p:cNvSpPr txBox="1"/>
           <p:nvPr/>
         </p:nvSpPr>
@@ -23046,7 +22168,7 @@
       </p:sp>
       <p:sp>
         <p:nvSpPr>
-          <p:cNvPr id="40" name="Rounded Rectangle 39"/>
+          <p:cNvPr id="39" name="Rounded Rectangle 38"/>
           <p:cNvSpPr/>
           <p:nvPr/>
         </p:nvSpPr>
@@ -23216,8 +22338,77 @@
         </p:nvSpPr>
         <p:spPr>
           <a:xfrm>
-            <a:off x="713232" y="6272784"/>
-            <a:ext cx="5597920" cy="219456"/>
+            <a:off x="8240677" y="6272784"/>
+            <a:ext cx="2651760" cy="219456"/>
+          </a:xfrm>
+          <a:prstGeom prst="rect">
+            <a:avLst/>
+          </a:prstGeom>
+          <a:noFill/>
+        </p:spPr>
+        <p:txBody>
+          <a:bodyPr wrap="square" lIns="0" rIns="0" tIns="0" bIns="0" anchor="t">
+            <a:spAutoFit/>
+          </a:bodyPr>
+          <a:lstStyle/>
+          <a:p>
+            <a:pPr algn="r">
+              <a:lnSpc>
+                <a:spcPct val="122000"/>
+              </a:lnSpc>
+              <a:spcBef>
+                <a:spcPts val="0"/>
+              </a:spcBef>
+              <a:spcAft>
+                <a:spcPts val="0"/>
+              </a:spcAft>
+            </a:pPr>
+            <a:r>
+              <a:rPr sz="900" b="0" i="0">
+                <a:solidFill>
+                  <a:srgbClr val="636E85"/>
+                </a:solidFill>
+                <a:latin typeface="Segoe UI"/>
+                <a:ea typeface="Segoe UI"/>
+                <a:cs typeface="Segoe UI"/>
+              </a:rPr>
+              <a:t>Lingesh K  ·  OSI2509030</a:t>
+            </a:r>
+            <a:r>
+              <a:rPr sz="900" b="0" i="0">
+                <a:solidFill>
+                  <a:srgbClr val="141C2E"/>
+                </a:solidFill>
+                <a:latin typeface="Segoe UI"/>
+                <a:ea typeface="Segoe UI"/>
+                <a:cs typeface="Segoe UI"/>
+              </a:rPr>
+              <a:t>     </a:t>
+            </a:r>
+            <a:r>
+              <a:rPr sz="900" b="1" i="0">
+                <a:solidFill>
+                  <a:srgbClr val="0E1E3C"/>
+                </a:solidFill>
+                <a:latin typeface="Segoe UI"/>
+                <a:ea typeface="Segoe UI"/>
+                <a:cs typeface="Segoe UI"/>
+              </a:rPr>
+              <a:t>21</a:t>
+            </a:r>
+          </a:p>
+        </p:txBody>
+      </p:sp>
+      <p:sp>
+        <p:nvSpPr>
+          <p:cNvPr id="5" name="TextBox 4"/>
+          <p:cNvSpPr txBox="1"/>
+          <p:nvPr/>
+        </p:nvSpPr>
+        <p:spPr>
+          <a:xfrm>
+            <a:off x="713232" y="566928"/>
+            <a:ext cx="10765231" cy="219456"/>
           </a:xfrm>
           <a:prstGeom prst="rect">
             <a:avLst/>
@@ -23242,106 +22433,15 @@
               </a:spcAft>
             </a:pPr>
             <a:r>
-              <a:rPr sz="900" b="1" i="0">
-                <a:solidFill>
-                  <a:srgbClr val="0E1E3C"/>
-                </a:solidFill>
-                <a:latin typeface="Segoe UI"/>
-                <a:ea typeface="Segoe UI"/>
-                <a:cs typeface="Segoe UI"/>
-              </a:rPr>
-              <a:t>Unit 2</a:t>
-            </a:r>
-            <a:r>
-              <a:rPr sz="900" b="0" i="0">
-                <a:solidFill>
-                  <a:srgbClr val="939EB3"/>
-                </a:solidFill>
-                <a:latin typeface="Segoe UI"/>
-                <a:ea typeface="Segoe UI"/>
-                <a:cs typeface="Segoe UI"/>
-              </a:rPr>
-              <a:t>  ·  </a:t>
-            </a:r>
-            <a:r>
-              <a:rPr sz="900" b="0" i="0">
-                <a:solidFill>
-                  <a:srgbClr val="636E85"/>
-                </a:solidFill>
-                <a:latin typeface="Segoe UI"/>
-                <a:ea typeface="Segoe UI"/>
-                <a:cs typeface="Segoe UI"/>
-              </a:rPr>
-              <a:t>Tools and Technologies</a:t>
-            </a:r>
-          </a:p>
-        </p:txBody>
-      </p:sp>
-      <p:sp>
-        <p:nvSpPr>
-          <p:cNvPr id="5" name="TextBox 4"/>
-          <p:cNvSpPr txBox="1"/>
-          <p:nvPr/>
-        </p:nvSpPr>
-        <p:spPr>
-          <a:xfrm>
-            <a:off x="8240677" y="6272784"/>
-            <a:ext cx="2651760" cy="219456"/>
-          </a:xfrm>
-          <a:prstGeom prst="rect">
-            <a:avLst/>
-          </a:prstGeom>
-          <a:noFill/>
-        </p:spPr>
-        <p:txBody>
-          <a:bodyPr wrap="square" lIns="0" rIns="0" tIns="0" bIns="0" anchor="t">
-            <a:spAutoFit/>
-          </a:bodyPr>
-          <a:lstStyle/>
-          <a:p>
-            <a:pPr algn="r">
-              <a:lnSpc>
-                <a:spcPct val="122000"/>
-              </a:lnSpc>
-              <a:spcBef>
-                <a:spcPts val="0"/>
-              </a:spcBef>
-              <a:spcAft>
-                <a:spcPts val="0"/>
-              </a:spcAft>
-            </a:pPr>
-            <a:r>
-              <a:rPr sz="900" b="0" i="0">
-                <a:solidFill>
-                  <a:srgbClr val="636E85"/>
-                </a:solidFill>
-                <a:latin typeface="Segoe UI"/>
-                <a:ea typeface="Segoe UI"/>
-                <a:cs typeface="Segoe UI"/>
-              </a:rPr>
-              <a:t>Lingesh K  ·  OSI2509030</a:t>
-            </a:r>
-            <a:r>
-              <a:rPr sz="900" b="0" i="0">
-                <a:solidFill>
-                  <a:srgbClr val="141C2E"/>
-                </a:solidFill>
-                <a:latin typeface="Segoe UI"/>
-                <a:ea typeface="Segoe UI"/>
-                <a:cs typeface="Segoe UI"/>
-              </a:rPr>
-              <a:t>     </a:t>
-            </a:r>
-            <a:r>
-              <a:rPr sz="900" b="1" i="0">
-                <a:solidFill>
-                  <a:srgbClr val="0E1E3C"/>
-                </a:solidFill>
-                <a:latin typeface="Segoe UI"/>
-                <a:ea typeface="Segoe UI"/>
-                <a:cs typeface="Segoe UI"/>
-              </a:rPr>
-              <a:t>21</a:t>
+              <a:rPr sz="950" b="1" i="0" spc="160">
+                <a:solidFill>
+                  <a:srgbClr val="27A06A"/>
+                </a:solidFill>
+                <a:latin typeface="Segoe UI"/>
+                <a:ea typeface="Segoe UI"/>
+                <a:cs typeface="Segoe UI"/>
+              </a:rPr>
+              <a:t>NO-CODE TOOLKIT</a:t>
             </a:r>
           </a:p>
         </p:txBody>
@@ -23349,53 +22449,6 @@
       <p:sp>
         <p:nvSpPr>
           <p:cNvPr id="6" name="TextBox 5"/>
-          <p:cNvSpPr txBox="1"/>
-          <p:nvPr/>
-        </p:nvSpPr>
-        <p:spPr>
-          <a:xfrm>
-            <a:off x="713232" y="566928"/>
-            <a:ext cx="10765231" cy="219456"/>
-          </a:xfrm>
-          <a:prstGeom prst="rect">
-            <a:avLst/>
-          </a:prstGeom>
-          <a:noFill/>
-        </p:spPr>
-        <p:txBody>
-          <a:bodyPr wrap="square" lIns="0" rIns="0" tIns="0" bIns="0" anchor="t">
-            <a:spAutoFit/>
-          </a:bodyPr>
-          <a:lstStyle/>
-          <a:p>
-            <a:pPr algn="l">
-              <a:lnSpc>
-                <a:spcPct val="122000"/>
-              </a:lnSpc>
-              <a:spcBef>
-                <a:spcPts val="0"/>
-              </a:spcBef>
-              <a:spcAft>
-                <a:spcPts val="0"/>
-              </a:spcAft>
-            </a:pPr>
-            <a:r>
-              <a:rPr sz="950" b="1" i="0" spc="160">
-                <a:solidFill>
-                  <a:srgbClr val="27A06A"/>
-                </a:solidFill>
-                <a:latin typeface="Segoe UI"/>
-                <a:ea typeface="Segoe UI"/>
-                <a:cs typeface="Segoe UI"/>
-              </a:rPr>
-              <a:t>NO-CODE TOOLKIT</a:t>
-            </a:r>
-          </a:p>
-        </p:txBody>
-      </p:sp>
-      <p:sp>
-        <p:nvSpPr>
-          <p:cNvPr id="7" name="TextBox 6"/>
           <p:cNvSpPr txBox="1"/>
           <p:nvPr/>
         </p:nvSpPr>
@@ -23442,7 +22495,7 @@
       </p:sp>
       <p:sp>
         <p:nvSpPr>
-          <p:cNvPr id="8" name="Rectangle 7"/>
+          <p:cNvPr id="7" name="Rectangle 6"/>
           <p:cNvSpPr/>
           <p:nvPr/>
         </p:nvSpPr>
@@ -23486,7 +22539,7 @@
       </p:sp>
       <p:sp>
         <p:nvSpPr>
-          <p:cNvPr id="9" name="TextBox 8"/>
+          <p:cNvPr id="8" name="TextBox 7"/>
           <p:cNvSpPr txBox="1"/>
           <p:nvPr/>
         </p:nvSpPr>
@@ -23533,7 +22586,7 @@
       </p:sp>
       <p:sp>
         <p:nvSpPr>
-          <p:cNvPr id="10" name="Rounded Rectangle 9"/>
+          <p:cNvPr id="9" name="Rounded Rectangle 8"/>
           <p:cNvSpPr/>
           <p:nvPr/>
         </p:nvSpPr>
@@ -23587,7 +22640,7 @@
       </p:sp>
       <p:sp>
         <p:nvSpPr>
-          <p:cNvPr id="11" name="Rectangle 10"/>
+          <p:cNvPr id="10" name="Rectangle 9"/>
           <p:cNvSpPr/>
           <p:nvPr/>
         </p:nvSpPr>
@@ -23631,7 +22684,7 @@
       </p:sp>
       <p:sp>
         <p:nvSpPr>
-          <p:cNvPr id="12" name="TextBox 11"/>
+          <p:cNvPr id="11" name="TextBox 10"/>
           <p:cNvSpPr txBox="1"/>
           <p:nvPr/>
         </p:nvSpPr>
@@ -23678,7 +22731,7 @@
       </p:sp>
       <p:sp>
         <p:nvSpPr>
-          <p:cNvPr id="13" name="TextBox 12"/>
+          <p:cNvPr id="12" name="TextBox 11"/>
           <p:cNvSpPr txBox="1"/>
           <p:nvPr/>
         </p:nvSpPr>
@@ -23725,7 +22778,7 @@
       </p:sp>
       <p:sp>
         <p:nvSpPr>
-          <p:cNvPr id="14" name="Rounded Rectangle 13"/>
+          <p:cNvPr id="13" name="Rounded Rectangle 12"/>
           <p:cNvSpPr/>
           <p:nvPr/>
         </p:nvSpPr>
@@ -23779,7 +22832,7 @@
       </p:sp>
       <p:sp>
         <p:nvSpPr>
-          <p:cNvPr id="15" name="Rectangle 14"/>
+          <p:cNvPr id="14" name="Rectangle 13"/>
           <p:cNvSpPr/>
           <p:nvPr/>
         </p:nvSpPr>
@@ -23823,7 +22876,7 @@
       </p:sp>
       <p:sp>
         <p:nvSpPr>
-          <p:cNvPr id="16" name="TextBox 15"/>
+          <p:cNvPr id="15" name="TextBox 14"/>
           <p:cNvSpPr txBox="1"/>
           <p:nvPr/>
         </p:nvSpPr>
@@ -23870,7 +22923,7 @@
       </p:sp>
       <p:sp>
         <p:nvSpPr>
-          <p:cNvPr id="17" name="TextBox 16"/>
+          <p:cNvPr id="16" name="TextBox 15"/>
           <p:cNvSpPr txBox="1"/>
           <p:nvPr/>
         </p:nvSpPr>
@@ -23917,7 +22970,7 @@
       </p:sp>
       <p:sp>
         <p:nvSpPr>
-          <p:cNvPr id="18" name="Rounded Rectangle 17"/>
+          <p:cNvPr id="17" name="Rounded Rectangle 16"/>
           <p:cNvSpPr/>
           <p:nvPr/>
         </p:nvSpPr>
@@ -23971,7 +23024,7 @@
       </p:sp>
       <p:sp>
         <p:nvSpPr>
-          <p:cNvPr id="19" name="Rectangle 18"/>
+          <p:cNvPr id="18" name="Rectangle 17"/>
           <p:cNvSpPr/>
           <p:nvPr/>
         </p:nvSpPr>
@@ -24015,7 +23068,7 @@
       </p:sp>
       <p:sp>
         <p:nvSpPr>
-          <p:cNvPr id="20" name="TextBox 19"/>
+          <p:cNvPr id="19" name="TextBox 18"/>
           <p:cNvSpPr txBox="1"/>
           <p:nvPr/>
         </p:nvSpPr>
@@ -24062,7 +23115,7 @@
       </p:sp>
       <p:sp>
         <p:nvSpPr>
-          <p:cNvPr id="21" name="TextBox 20"/>
+          <p:cNvPr id="20" name="TextBox 19"/>
           <p:cNvSpPr txBox="1"/>
           <p:nvPr/>
         </p:nvSpPr>
@@ -24109,7 +23162,7 @@
       </p:sp>
       <p:sp>
         <p:nvSpPr>
-          <p:cNvPr id="22" name="Rounded Rectangle 21"/>
+          <p:cNvPr id="21" name="Rounded Rectangle 20"/>
           <p:cNvSpPr/>
           <p:nvPr/>
         </p:nvSpPr>
@@ -24163,7 +23216,7 @@
       </p:sp>
       <p:sp>
         <p:nvSpPr>
-          <p:cNvPr id="23" name="Rectangle 22"/>
+          <p:cNvPr id="22" name="Rectangle 21"/>
           <p:cNvSpPr/>
           <p:nvPr/>
         </p:nvSpPr>
@@ -24207,7 +23260,7 @@
       </p:sp>
       <p:sp>
         <p:nvSpPr>
-          <p:cNvPr id="24" name="TextBox 23"/>
+          <p:cNvPr id="23" name="TextBox 22"/>
           <p:cNvSpPr txBox="1"/>
           <p:nvPr/>
         </p:nvSpPr>
@@ -24254,7 +23307,7 @@
       </p:sp>
       <p:sp>
         <p:nvSpPr>
-          <p:cNvPr id="25" name="TextBox 24"/>
+          <p:cNvPr id="24" name="TextBox 23"/>
           <p:cNvSpPr txBox="1"/>
           <p:nvPr/>
         </p:nvSpPr>
@@ -24301,7 +23354,7 @@
       </p:sp>
       <p:sp>
         <p:nvSpPr>
-          <p:cNvPr id="26" name="Rounded Rectangle 25"/>
+          <p:cNvPr id="25" name="Rounded Rectangle 24"/>
           <p:cNvSpPr/>
           <p:nvPr/>
         </p:nvSpPr>
@@ -24355,7 +23408,7 @@
       </p:sp>
       <p:sp>
         <p:nvSpPr>
-          <p:cNvPr id="27" name="Rectangle 26"/>
+          <p:cNvPr id="26" name="Rectangle 25"/>
           <p:cNvSpPr/>
           <p:nvPr/>
         </p:nvSpPr>
@@ -24399,7 +23452,7 @@
       </p:sp>
       <p:sp>
         <p:nvSpPr>
-          <p:cNvPr id="28" name="TextBox 27"/>
+          <p:cNvPr id="27" name="TextBox 26"/>
           <p:cNvSpPr txBox="1"/>
           <p:nvPr/>
         </p:nvSpPr>
@@ -24446,7 +23499,7 @@
       </p:sp>
       <p:sp>
         <p:nvSpPr>
-          <p:cNvPr id="29" name="TextBox 28"/>
+          <p:cNvPr id="28" name="TextBox 27"/>
           <p:cNvSpPr txBox="1"/>
           <p:nvPr/>
         </p:nvSpPr>
@@ -24493,7 +23546,7 @@
       </p:sp>
       <p:sp>
         <p:nvSpPr>
-          <p:cNvPr id="30" name="Rounded Rectangle 29"/>
+          <p:cNvPr id="29" name="Rounded Rectangle 28"/>
           <p:cNvSpPr/>
           <p:nvPr/>
         </p:nvSpPr>
@@ -24547,7 +23600,7 @@
       </p:sp>
       <p:sp>
         <p:nvSpPr>
-          <p:cNvPr id="31" name="Rectangle 30"/>
+          <p:cNvPr id="30" name="Rectangle 29"/>
           <p:cNvSpPr/>
           <p:nvPr/>
         </p:nvSpPr>
@@ -24591,7 +23644,7 @@
       </p:sp>
       <p:sp>
         <p:nvSpPr>
-          <p:cNvPr id="32" name="TextBox 31"/>
+          <p:cNvPr id="31" name="TextBox 30"/>
           <p:cNvSpPr txBox="1"/>
           <p:nvPr/>
         </p:nvSpPr>
@@ -24638,7 +23691,7 @@
       </p:sp>
       <p:sp>
         <p:nvSpPr>
-          <p:cNvPr id="33" name="TextBox 32"/>
+          <p:cNvPr id="32" name="TextBox 31"/>
           <p:cNvSpPr txBox="1"/>
           <p:nvPr/>
         </p:nvSpPr>
@@ -24777,8 +23830,77 @@
         </p:nvSpPr>
         <p:spPr>
           <a:xfrm>
-            <a:off x="713232" y="6272784"/>
-            <a:ext cx="5597920" cy="219456"/>
+            <a:off x="8240677" y="6272784"/>
+            <a:ext cx="2651760" cy="219456"/>
+          </a:xfrm>
+          <a:prstGeom prst="rect">
+            <a:avLst/>
+          </a:prstGeom>
+          <a:noFill/>
+        </p:spPr>
+        <p:txBody>
+          <a:bodyPr wrap="square" lIns="0" rIns="0" tIns="0" bIns="0" anchor="t">
+            <a:spAutoFit/>
+          </a:bodyPr>
+          <a:lstStyle/>
+          <a:p>
+            <a:pPr algn="r">
+              <a:lnSpc>
+                <a:spcPct val="122000"/>
+              </a:lnSpc>
+              <a:spcBef>
+                <a:spcPts val="0"/>
+              </a:spcBef>
+              <a:spcAft>
+                <a:spcPts val="0"/>
+              </a:spcAft>
+            </a:pPr>
+            <a:r>
+              <a:rPr sz="900" b="0" i="0">
+                <a:solidFill>
+                  <a:srgbClr val="636E85"/>
+                </a:solidFill>
+                <a:latin typeface="Segoe UI"/>
+                <a:ea typeface="Segoe UI"/>
+                <a:cs typeface="Segoe UI"/>
+              </a:rPr>
+              <a:t>Lingesh K  ·  OSI2509030</a:t>
+            </a:r>
+            <a:r>
+              <a:rPr sz="900" b="0" i="0">
+                <a:solidFill>
+                  <a:srgbClr val="141C2E"/>
+                </a:solidFill>
+                <a:latin typeface="Segoe UI"/>
+                <a:ea typeface="Segoe UI"/>
+                <a:cs typeface="Segoe UI"/>
+              </a:rPr>
+              <a:t>     </a:t>
+            </a:r>
+            <a:r>
+              <a:rPr sz="900" b="1" i="0">
+                <a:solidFill>
+                  <a:srgbClr val="0E1E3C"/>
+                </a:solidFill>
+                <a:latin typeface="Segoe UI"/>
+                <a:ea typeface="Segoe UI"/>
+                <a:cs typeface="Segoe UI"/>
+              </a:rPr>
+              <a:t>22</a:t>
+            </a:r>
+          </a:p>
+        </p:txBody>
+      </p:sp>
+      <p:sp>
+        <p:nvSpPr>
+          <p:cNvPr id="5" name="TextBox 4"/>
+          <p:cNvSpPr txBox="1"/>
+          <p:nvPr/>
+        </p:nvSpPr>
+        <p:spPr>
+          <a:xfrm>
+            <a:off x="713232" y="566928"/>
+            <a:ext cx="10765231" cy="219456"/>
           </a:xfrm>
           <a:prstGeom prst="rect">
             <a:avLst/>
@@ -24803,106 +23925,15 @@
               </a:spcAft>
             </a:pPr>
             <a:r>
-              <a:rPr sz="900" b="1" i="0">
-                <a:solidFill>
-                  <a:srgbClr val="0E1E3C"/>
-                </a:solidFill>
-                <a:latin typeface="Segoe UI"/>
-                <a:ea typeface="Segoe UI"/>
-                <a:cs typeface="Segoe UI"/>
-              </a:rPr>
-              <a:t>Unit 2</a:t>
-            </a:r>
-            <a:r>
-              <a:rPr sz="900" b="0" i="0">
-                <a:solidFill>
-                  <a:srgbClr val="939EB3"/>
-                </a:solidFill>
-                <a:latin typeface="Segoe UI"/>
-                <a:ea typeface="Segoe UI"/>
-                <a:cs typeface="Segoe UI"/>
-              </a:rPr>
-              <a:t>  ·  </a:t>
-            </a:r>
-            <a:r>
-              <a:rPr sz="900" b="0" i="0">
-                <a:solidFill>
-                  <a:srgbClr val="636E85"/>
-                </a:solidFill>
-                <a:latin typeface="Segoe UI"/>
-                <a:ea typeface="Segoe UI"/>
-                <a:cs typeface="Segoe UI"/>
-              </a:rPr>
-              <a:t>Tools and Technologies</a:t>
-            </a:r>
-          </a:p>
-        </p:txBody>
-      </p:sp>
-      <p:sp>
-        <p:nvSpPr>
-          <p:cNvPr id="5" name="TextBox 4"/>
-          <p:cNvSpPr txBox="1"/>
-          <p:nvPr/>
-        </p:nvSpPr>
-        <p:spPr>
-          <a:xfrm>
-            <a:off x="8240677" y="6272784"/>
-            <a:ext cx="2651760" cy="219456"/>
-          </a:xfrm>
-          <a:prstGeom prst="rect">
-            <a:avLst/>
-          </a:prstGeom>
-          <a:noFill/>
-        </p:spPr>
-        <p:txBody>
-          <a:bodyPr wrap="square" lIns="0" rIns="0" tIns="0" bIns="0" anchor="t">
-            <a:spAutoFit/>
-          </a:bodyPr>
-          <a:lstStyle/>
-          <a:p>
-            <a:pPr algn="r">
-              <a:lnSpc>
-                <a:spcPct val="122000"/>
-              </a:lnSpc>
-              <a:spcBef>
-                <a:spcPts val="0"/>
-              </a:spcBef>
-              <a:spcAft>
-                <a:spcPts val="0"/>
-              </a:spcAft>
-            </a:pPr>
-            <a:r>
-              <a:rPr sz="900" b="0" i="0">
-                <a:solidFill>
-                  <a:srgbClr val="636E85"/>
-                </a:solidFill>
-                <a:latin typeface="Segoe UI"/>
-                <a:ea typeface="Segoe UI"/>
-                <a:cs typeface="Segoe UI"/>
-              </a:rPr>
-              <a:t>Lingesh K  ·  OSI2509030</a:t>
-            </a:r>
-            <a:r>
-              <a:rPr sz="900" b="0" i="0">
-                <a:solidFill>
-                  <a:srgbClr val="141C2E"/>
-                </a:solidFill>
-                <a:latin typeface="Segoe UI"/>
-                <a:ea typeface="Segoe UI"/>
-                <a:cs typeface="Segoe UI"/>
-              </a:rPr>
-              <a:t>     </a:t>
-            </a:r>
-            <a:r>
-              <a:rPr sz="900" b="1" i="0">
-                <a:solidFill>
-                  <a:srgbClr val="0E1E3C"/>
-                </a:solidFill>
-                <a:latin typeface="Segoe UI"/>
-                <a:ea typeface="Segoe UI"/>
-                <a:cs typeface="Segoe UI"/>
-              </a:rPr>
-              <a:t>22</a:t>
+              <a:rPr sz="950" b="1" i="0" spc="160">
+                <a:solidFill>
+                  <a:srgbClr val="00B3A4"/>
+                </a:solidFill>
+                <a:latin typeface="Segoe UI"/>
+                <a:ea typeface="Segoe UI"/>
+                <a:cs typeface="Segoe UI"/>
+              </a:rPr>
+              <a:t>A WORKED EXAMPLE</a:t>
             </a:r>
           </a:p>
         </p:txBody>
@@ -24910,53 +23941,6 @@
       <p:sp>
         <p:nvSpPr>
           <p:cNvPr id="6" name="TextBox 5"/>
-          <p:cNvSpPr txBox="1"/>
-          <p:nvPr/>
-        </p:nvSpPr>
-        <p:spPr>
-          <a:xfrm>
-            <a:off x="713232" y="566928"/>
-            <a:ext cx="10765231" cy="219456"/>
-          </a:xfrm>
-          <a:prstGeom prst="rect">
-            <a:avLst/>
-          </a:prstGeom>
-          <a:noFill/>
-        </p:spPr>
-        <p:txBody>
-          <a:bodyPr wrap="square" lIns="0" rIns="0" tIns="0" bIns="0" anchor="t">
-            <a:spAutoFit/>
-          </a:bodyPr>
-          <a:lstStyle/>
-          <a:p>
-            <a:pPr algn="l">
-              <a:lnSpc>
-                <a:spcPct val="122000"/>
-              </a:lnSpc>
-              <a:spcBef>
-                <a:spcPts val="0"/>
-              </a:spcBef>
-              <a:spcAft>
-                <a:spcPts val="0"/>
-              </a:spcAft>
-            </a:pPr>
-            <a:r>
-              <a:rPr sz="950" b="1" i="0" spc="160">
-                <a:solidFill>
-                  <a:srgbClr val="00B3A4"/>
-                </a:solidFill>
-                <a:latin typeface="Segoe UI"/>
-                <a:ea typeface="Segoe UI"/>
-                <a:cs typeface="Segoe UI"/>
-              </a:rPr>
-              <a:t>A WORKED EXAMPLE</a:t>
-            </a:r>
-          </a:p>
-        </p:txBody>
-      </p:sp>
-      <p:sp>
-        <p:nvSpPr>
-          <p:cNvPr id="7" name="TextBox 6"/>
           <p:cNvSpPr txBox="1"/>
           <p:nvPr/>
         </p:nvSpPr>
@@ -25003,7 +23987,7 @@
       </p:sp>
       <p:sp>
         <p:nvSpPr>
-          <p:cNvPr id="8" name="Rectangle 7"/>
+          <p:cNvPr id="7" name="Rectangle 6"/>
           <p:cNvSpPr/>
           <p:nvPr/>
         </p:nvSpPr>
@@ -25047,7 +24031,7 @@
       </p:sp>
       <p:sp>
         <p:nvSpPr>
-          <p:cNvPr id="9" name="TextBox 8"/>
+          <p:cNvPr id="8" name="TextBox 7"/>
           <p:cNvSpPr txBox="1"/>
           <p:nvPr/>
         </p:nvSpPr>
@@ -25094,7 +24078,7 @@
       </p:sp>
       <p:sp>
         <p:nvSpPr>
-          <p:cNvPr id="10" name="Rectangle 9"/>
+          <p:cNvPr id="9" name="Rectangle 8"/>
           <p:cNvSpPr/>
           <p:nvPr/>
         </p:nvSpPr>
@@ -25138,7 +24122,7 @@
       </p:sp>
       <p:sp>
         <p:nvSpPr>
-          <p:cNvPr id="11" name="Oval 10"/>
+          <p:cNvPr id="10" name="Oval 9"/>
           <p:cNvSpPr/>
           <p:nvPr/>
         </p:nvSpPr>
@@ -25182,7 +24166,7 @@
       </p:sp>
       <p:sp>
         <p:nvSpPr>
-          <p:cNvPr id="12" name="TextBox 11"/>
+          <p:cNvPr id="11" name="TextBox 10"/>
           <p:cNvSpPr txBox="1"/>
           <p:nvPr/>
         </p:nvSpPr>
@@ -25229,7 +24213,7 @@
       </p:sp>
       <p:sp>
         <p:nvSpPr>
-          <p:cNvPr id="13" name="Rounded Rectangle 12"/>
+          <p:cNvPr id="12" name="Rounded Rectangle 11"/>
           <p:cNvSpPr/>
           <p:nvPr/>
         </p:nvSpPr>
@@ -25277,7 +24261,7 @@
       </p:sp>
       <p:sp>
         <p:nvSpPr>
-          <p:cNvPr id="14" name="TextBox 13"/>
+          <p:cNvPr id="13" name="TextBox 12"/>
           <p:cNvSpPr txBox="1"/>
           <p:nvPr/>
         </p:nvSpPr>
@@ -25324,7 +24308,7 @@
       </p:sp>
       <p:sp>
         <p:nvSpPr>
-          <p:cNvPr id="15" name="TextBox 14"/>
+          <p:cNvPr id="14" name="TextBox 13"/>
           <p:cNvSpPr txBox="1"/>
           <p:nvPr/>
         </p:nvSpPr>
@@ -25371,7 +24355,7 @@
       </p:sp>
       <p:sp>
         <p:nvSpPr>
-          <p:cNvPr id="16" name="Oval 15"/>
+          <p:cNvPr id="15" name="Oval 14"/>
           <p:cNvSpPr/>
           <p:nvPr/>
         </p:nvSpPr>
@@ -25415,7 +24399,7 @@
       </p:sp>
       <p:sp>
         <p:nvSpPr>
-          <p:cNvPr id="17" name="TextBox 16"/>
+          <p:cNvPr id="16" name="TextBox 15"/>
           <p:cNvSpPr txBox="1"/>
           <p:nvPr/>
         </p:nvSpPr>
@@ -25462,7 +24446,7 @@
       </p:sp>
       <p:sp>
         <p:nvSpPr>
-          <p:cNvPr id="18" name="Rounded Rectangle 17"/>
+          <p:cNvPr id="17" name="Rounded Rectangle 16"/>
           <p:cNvSpPr/>
           <p:nvPr/>
         </p:nvSpPr>
@@ -25510,7 +24494,7 @@
       </p:sp>
       <p:sp>
         <p:nvSpPr>
-          <p:cNvPr id="19" name="TextBox 18"/>
+          <p:cNvPr id="18" name="TextBox 17"/>
           <p:cNvSpPr txBox="1"/>
           <p:nvPr/>
         </p:nvSpPr>
@@ -25557,7 +24541,7 @@
       </p:sp>
       <p:sp>
         <p:nvSpPr>
-          <p:cNvPr id="20" name="TextBox 19"/>
+          <p:cNvPr id="19" name="TextBox 18"/>
           <p:cNvSpPr txBox="1"/>
           <p:nvPr/>
         </p:nvSpPr>
@@ -25604,7 +24588,7 @@
       </p:sp>
       <p:sp>
         <p:nvSpPr>
-          <p:cNvPr id="21" name="Oval 20"/>
+          <p:cNvPr id="20" name="Oval 19"/>
           <p:cNvSpPr/>
           <p:nvPr/>
         </p:nvSpPr>
@@ -25648,7 +24632,7 @@
       </p:sp>
       <p:sp>
         <p:nvSpPr>
-          <p:cNvPr id="22" name="TextBox 21"/>
+          <p:cNvPr id="21" name="TextBox 20"/>
           <p:cNvSpPr txBox="1"/>
           <p:nvPr/>
         </p:nvSpPr>
@@ -25695,7 +24679,7 @@
       </p:sp>
       <p:sp>
         <p:nvSpPr>
-          <p:cNvPr id="23" name="Rounded Rectangle 22"/>
+          <p:cNvPr id="22" name="Rounded Rectangle 21"/>
           <p:cNvSpPr/>
           <p:nvPr/>
         </p:nvSpPr>
@@ -25743,7 +24727,7 @@
       </p:sp>
       <p:sp>
         <p:nvSpPr>
-          <p:cNvPr id="24" name="TextBox 23"/>
+          <p:cNvPr id="23" name="TextBox 22"/>
           <p:cNvSpPr txBox="1"/>
           <p:nvPr/>
         </p:nvSpPr>
@@ -25790,7 +24774,7 @@
       </p:sp>
       <p:sp>
         <p:nvSpPr>
-          <p:cNvPr id="25" name="TextBox 24"/>
+          <p:cNvPr id="24" name="TextBox 23"/>
           <p:cNvSpPr txBox="1"/>
           <p:nvPr/>
         </p:nvSpPr>
@@ -25837,7 +24821,7 @@
       </p:sp>
       <p:sp>
         <p:nvSpPr>
-          <p:cNvPr id="26" name="Oval 25"/>
+          <p:cNvPr id="25" name="Oval 24"/>
           <p:cNvSpPr/>
           <p:nvPr/>
         </p:nvSpPr>
@@ -25881,7 +24865,7 @@
       </p:sp>
       <p:sp>
         <p:nvSpPr>
-          <p:cNvPr id="27" name="TextBox 26"/>
+          <p:cNvPr id="26" name="TextBox 25"/>
           <p:cNvSpPr txBox="1"/>
           <p:nvPr/>
         </p:nvSpPr>
@@ -25928,7 +24912,7 @@
       </p:sp>
       <p:sp>
         <p:nvSpPr>
-          <p:cNvPr id="28" name="Rounded Rectangle 27"/>
+          <p:cNvPr id="27" name="Rounded Rectangle 26"/>
           <p:cNvSpPr/>
           <p:nvPr/>
         </p:nvSpPr>
@@ -25976,7 +24960,7 @@
       </p:sp>
       <p:sp>
         <p:nvSpPr>
-          <p:cNvPr id="29" name="TextBox 28"/>
+          <p:cNvPr id="28" name="TextBox 27"/>
           <p:cNvSpPr txBox="1"/>
           <p:nvPr/>
         </p:nvSpPr>
@@ -26023,7 +25007,7 @@
       </p:sp>
       <p:sp>
         <p:nvSpPr>
-          <p:cNvPr id="30" name="TextBox 29"/>
+          <p:cNvPr id="29" name="TextBox 28"/>
           <p:cNvSpPr txBox="1"/>
           <p:nvPr/>
         </p:nvSpPr>
@@ -26070,7 +25054,7 @@
       </p:sp>
       <p:sp>
         <p:nvSpPr>
-          <p:cNvPr id="31" name="Rounded Rectangle 30"/>
+          <p:cNvPr id="30" name="Rounded Rectangle 29"/>
           <p:cNvSpPr/>
           <p:nvPr/>
         </p:nvSpPr>
@@ -26137,7 +25121,7 @@
       </p:sp>
       <p:sp>
         <p:nvSpPr>
-          <p:cNvPr id="32" name="Rectangle 31"/>
+          <p:cNvPr id="31" name="Rectangle 30"/>
           <p:cNvSpPr/>
           <p:nvPr/>
         </p:nvSpPr>
@@ -26273,8 +25257,77 @@
         </p:nvSpPr>
         <p:spPr>
           <a:xfrm>
-            <a:off x="713232" y="6272784"/>
-            <a:ext cx="5597920" cy="219456"/>
+            <a:off x="8240677" y="6272784"/>
+            <a:ext cx="2651760" cy="219456"/>
+          </a:xfrm>
+          <a:prstGeom prst="rect">
+            <a:avLst/>
+          </a:prstGeom>
+          <a:noFill/>
+        </p:spPr>
+        <p:txBody>
+          <a:bodyPr wrap="square" lIns="0" rIns="0" tIns="0" bIns="0" anchor="t">
+            <a:spAutoFit/>
+          </a:bodyPr>
+          <a:lstStyle/>
+          <a:p>
+            <a:pPr algn="r">
+              <a:lnSpc>
+                <a:spcPct val="122000"/>
+              </a:lnSpc>
+              <a:spcBef>
+                <a:spcPts val="0"/>
+              </a:spcBef>
+              <a:spcAft>
+                <a:spcPts val="0"/>
+              </a:spcAft>
+            </a:pPr>
+            <a:r>
+              <a:rPr sz="900" b="0" i="0">
+                <a:solidFill>
+                  <a:srgbClr val="636E85"/>
+                </a:solidFill>
+                <a:latin typeface="Segoe UI"/>
+                <a:ea typeface="Segoe UI"/>
+                <a:cs typeface="Segoe UI"/>
+              </a:rPr>
+              <a:t>Lingesh K  ·  OSI2509030</a:t>
+            </a:r>
+            <a:r>
+              <a:rPr sz="900" b="0" i="0">
+                <a:solidFill>
+                  <a:srgbClr val="141C2E"/>
+                </a:solidFill>
+                <a:latin typeface="Segoe UI"/>
+                <a:ea typeface="Segoe UI"/>
+                <a:cs typeface="Segoe UI"/>
+              </a:rPr>
+              <a:t>     </a:t>
+            </a:r>
+            <a:r>
+              <a:rPr sz="900" b="1" i="0">
+                <a:solidFill>
+                  <a:srgbClr val="0E1E3C"/>
+                </a:solidFill>
+                <a:latin typeface="Segoe UI"/>
+                <a:ea typeface="Segoe UI"/>
+                <a:cs typeface="Segoe UI"/>
+              </a:rPr>
+              <a:t>23</a:t>
+            </a:r>
+          </a:p>
+        </p:txBody>
+      </p:sp>
+      <p:sp>
+        <p:nvSpPr>
+          <p:cNvPr id="5" name="TextBox 4"/>
+          <p:cNvSpPr txBox="1"/>
+          <p:nvPr/>
+        </p:nvSpPr>
+        <p:spPr>
+          <a:xfrm>
+            <a:off x="713232" y="566928"/>
+            <a:ext cx="10765231" cy="219456"/>
           </a:xfrm>
           <a:prstGeom prst="rect">
             <a:avLst/>
@@ -26299,106 +25352,15 @@
               </a:spcAft>
             </a:pPr>
             <a:r>
-              <a:rPr sz="900" b="1" i="0">
-                <a:solidFill>
-                  <a:srgbClr val="0E1E3C"/>
-                </a:solidFill>
-                <a:latin typeface="Segoe UI"/>
-                <a:ea typeface="Segoe UI"/>
-                <a:cs typeface="Segoe UI"/>
-              </a:rPr>
-              <a:t>Unit 2</a:t>
-            </a:r>
-            <a:r>
-              <a:rPr sz="900" b="0" i="0">
-                <a:solidFill>
-                  <a:srgbClr val="939EB3"/>
-                </a:solidFill>
-                <a:latin typeface="Segoe UI"/>
-                <a:ea typeface="Segoe UI"/>
-                <a:cs typeface="Segoe UI"/>
-              </a:rPr>
-              <a:t>  ·  </a:t>
-            </a:r>
-            <a:r>
-              <a:rPr sz="900" b="0" i="0">
-                <a:solidFill>
-                  <a:srgbClr val="636E85"/>
-                </a:solidFill>
-                <a:latin typeface="Segoe UI"/>
-                <a:ea typeface="Segoe UI"/>
-                <a:cs typeface="Segoe UI"/>
-              </a:rPr>
-              <a:t>Tools and Technologies</a:t>
-            </a:r>
-          </a:p>
-        </p:txBody>
-      </p:sp>
-      <p:sp>
-        <p:nvSpPr>
-          <p:cNvPr id="5" name="TextBox 4"/>
-          <p:cNvSpPr txBox="1"/>
-          <p:nvPr/>
-        </p:nvSpPr>
-        <p:spPr>
-          <a:xfrm>
-            <a:off x="8240677" y="6272784"/>
-            <a:ext cx="2651760" cy="219456"/>
-          </a:xfrm>
-          <a:prstGeom prst="rect">
-            <a:avLst/>
-          </a:prstGeom>
-          <a:noFill/>
-        </p:spPr>
-        <p:txBody>
-          <a:bodyPr wrap="square" lIns="0" rIns="0" tIns="0" bIns="0" anchor="t">
-            <a:spAutoFit/>
-          </a:bodyPr>
-          <a:lstStyle/>
-          <a:p>
-            <a:pPr algn="r">
-              <a:lnSpc>
-                <a:spcPct val="122000"/>
-              </a:lnSpc>
-              <a:spcBef>
-                <a:spcPts val="0"/>
-              </a:spcBef>
-              <a:spcAft>
-                <a:spcPts val="0"/>
-              </a:spcAft>
-            </a:pPr>
-            <a:r>
-              <a:rPr sz="900" b="0" i="0">
-                <a:solidFill>
-                  <a:srgbClr val="636E85"/>
-                </a:solidFill>
-                <a:latin typeface="Segoe UI"/>
-                <a:ea typeface="Segoe UI"/>
-                <a:cs typeface="Segoe UI"/>
-              </a:rPr>
-              <a:t>Lingesh K  ·  OSI2509030</a:t>
-            </a:r>
-            <a:r>
-              <a:rPr sz="900" b="0" i="0">
-                <a:solidFill>
-                  <a:srgbClr val="141C2E"/>
-                </a:solidFill>
-                <a:latin typeface="Segoe UI"/>
-                <a:ea typeface="Segoe UI"/>
-                <a:cs typeface="Segoe UI"/>
-              </a:rPr>
-              <a:t>     </a:t>
-            </a:r>
-            <a:r>
-              <a:rPr sz="900" b="1" i="0">
-                <a:solidFill>
-                  <a:srgbClr val="0E1E3C"/>
-                </a:solidFill>
-                <a:latin typeface="Segoe UI"/>
-                <a:ea typeface="Segoe UI"/>
-                <a:cs typeface="Segoe UI"/>
-              </a:rPr>
-              <a:t>23</a:t>
+              <a:rPr sz="950" b="1" i="0" spc="160">
+                <a:solidFill>
+                  <a:srgbClr val="00B3A4"/>
+                </a:solidFill>
+                <a:latin typeface="Segoe UI"/>
+                <a:ea typeface="Segoe UI"/>
+                <a:cs typeface="Segoe UI"/>
+              </a:rPr>
+              <a:t>RECAP</a:t>
             </a:r>
           </a:p>
         </p:txBody>
@@ -26406,53 +25368,6 @@
       <p:sp>
         <p:nvSpPr>
           <p:cNvPr id="6" name="TextBox 5"/>
-          <p:cNvSpPr txBox="1"/>
-          <p:nvPr/>
-        </p:nvSpPr>
-        <p:spPr>
-          <a:xfrm>
-            <a:off x="713232" y="566928"/>
-            <a:ext cx="10765231" cy="219456"/>
-          </a:xfrm>
-          <a:prstGeom prst="rect">
-            <a:avLst/>
-          </a:prstGeom>
-          <a:noFill/>
-        </p:spPr>
-        <p:txBody>
-          <a:bodyPr wrap="square" lIns="0" rIns="0" tIns="0" bIns="0" anchor="t">
-            <a:spAutoFit/>
-          </a:bodyPr>
-          <a:lstStyle/>
-          <a:p>
-            <a:pPr algn="l">
-              <a:lnSpc>
-                <a:spcPct val="122000"/>
-              </a:lnSpc>
-              <a:spcBef>
-                <a:spcPts val="0"/>
-              </a:spcBef>
-              <a:spcAft>
-                <a:spcPts val="0"/>
-              </a:spcAft>
-            </a:pPr>
-            <a:r>
-              <a:rPr sz="950" b="1" i="0" spc="160">
-                <a:solidFill>
-                  <a:srgbClr val="00B3A4"/>
-                </a:solidFill>
-                <a:latin typeface="Segoe UI"/>
-                <a:ea typeface="Segoe UI"/>
-                <a:cs typeface="Segoe UI"/>
-              </a:rPr>
-              <a:t>RECAP</a:t>
-            </a:r>
-          </a:p>
-        </p:txBody>
-      </p:sp>
-      <p:sp>
-        <p:nvSpPr>
-          <p:cNvPr id="7" name="TextBox 6"/>
           <p:cNvSpPr txBox="1"/>
           <p:nvPr/>
         </p:nvSpPr>
@@ -26499,7 +25414,7 @@
       </p:sp>
       <p:sp>
         <p:nvSpPr>
-          <p:cNvPr id="8" name="Rectangle 7"/>
+          <p:cNvPr id="7" name="Rectangle 6"/>
           <p:cNvSpPr/>
           <p:nvPr/>
         </p:nvSpPr>
@@ -26543,7 +25458,7 @@
       </p:sp>
       <p:sp>
         <p:nvSpPr>
-          <p:cNvPr id="9" name="TextBox 8"/>
+          <p:cNvPr id="8" name="TextBox 7"/>
           <p:cNvSpPr txBox="1"/>
           <p:nvPr/>
         </p:nvSpPr>
@@ -26590,7 +25505,7 @@
       </p:sp>
       <p:sp>
         <p:nvSpPr>
-          <p:cNvPr id="10" name="Rounded Rectangle 9"/>
+          <p:cNvPr id="9" name="Rounded Rectangle 8"/>
           <p:cNvSpPr/>
           <p:nvPr/>
         </p:nvSpPr>
@@ -26644,7 +25559,7 @@
       </p:sp>
       <p:sp>
         <p:nvSpPr>
-          <p:cNvPr id="11" name="Rectangle 10"/>
+          <p:cNvPr id="10" name="Rectangle 9"/>
           <p:cNvSpPr/>
           <p:nvPr/>
         </p:nvSpPr>
@@ -26688,7 +25603,7 @@
       </p:sp>
       <p:sp>
         <p:nvSpPr>
-          <p:cNvPr id="12" name="Oval 11"/>
+          <p:cNvPr id="11" name="Oval 10"/>
           <p:cNvSpPr/>
           <p:nvPr/>
         </p:nvSpPr>
@@ -26732,7 +25647,7 @@
       </p:sp>
       <p:sp>
         <p:nvSpPr>
-          <p:cNvPr id="13" name="TextBox 12"/>
+          <p:cNvPr id="12" name="TextBox 11"/>
           <p:cNvSpPr txBox="1"/>
           <p:nvPr/>
         </p:nvSpPr>
@@ -26779,7 +25694,7 @@
       </p:sp>
       <p:sp>
         <p:nvSpPr>
-          <p:cNvPr id="14" name="TextBox 13"/>
+          <p:cNvPr id="13" name="TextBox 12"/>
           <p:cNvSpPr txBox="1"/>
           <p:nvPr/>
         </p:nvSpPr>
@@ -26850,7 +25765,7 @@
       </p:sp>
       <p:sp>
         <p:nvSpPr>
-          <p:cNvPr id="15" name="Rounded Rectangle 14"/>
+          <p:cNvPr id="14" name="Rounded Rectangle 13"/>
           <p:cNvSpPr/>
           <p:nvPr/>
         </p:nvSpPr>
@@ -26904,7 +25819,7 @@
       </p:sp>
       <p:sp>
         <p:nvSpPr>
-          <p:cNvPr id="16" name="Rectangle 15"/>
+          <p:cNvPr id="15" name="Rectangle 14"/>
           <p:cNvSpPr/>
           <p:nvPr/>
         </p:nvSpPr>
@@ -26948,7 +25863,7 @@
       </p:sp>
       <p:sp>
         <p:nvSpPr>
-          <p:cNvPr id="17" name="Oval 16"/>
+          <p:cNvPr id="16" name="Oval 15"/>
           <p:cNvSpPr/>
           <p:nvPr/>
         </p:nvSpPr>
@@ -26992,7 +25907,7 @@
       </p:sp>
       <p:sp>
         <p:nvSpPr>
-          <p:cNvPr id="18" name="TextBox 17"/>
+          <p:cNvPr id="17" name="TextBox 16"/>
           <p:cNvSpPr txBox="1"/>
           <p:nvPr/>
         </p:nvSpPr>
@@ -27039,7 +25954,7 @@
       </p:sp>
       <p:sp>
         <p:nvSpPr>
-          <p:cNvPr id="19" name="TextBox 18"/>
+          <p:cNvPr id="18" name="TextBox 17"/>
           <p:cNvSpPr txBox="1"/>
           <p:nvPr/>
         </p:nvSpPr>
@@ -27110,7 +26025,7 @@
       </p:sp>
       <p:sp>
         <p:nvSpPr>
-          <p:cNvPr id="20" name="Rounded Rectangle 19"/>
+          <p:cNvPr id="19" name="Rounded Rectangle 18"/>
           <p:cNvSpPr/>
           <p:nvPr/>
         </p:nvSpPr>
@@ -27164,7 +26079,7 @@
       </p:sp>
       <p:sp>
         <p:nvSpPr>
-          <p:cNvPr id="21" name="Rectangle 20"/>
+          <p:cNvPr id="20" name="Rectangle 19"/>
           <p:cNvSpPr/>
           <p:nvPr/>
         </p:nvSpPr>
@@ -27208,7 +26123,7 @@
       </p:sp>
       <p:sp>
         <p:nvSpPr>
-          <p:cNvPr id="22" name="Oval 21"/>
+          <p:cNvPr id="21" name="Oval 20"/>
           <p:cNvSpPr/>
           <p:nvPr/>
         </p:nvSpPr>
@@ -27252,7 +26167,7 @@
       </p:sp>
       <p:sp>
         <p:nvSpPr>
-          <p:cNvPr id="23" name="TextBox 22"/>
+          <p:cNvPr id="22" name="TextBox 21"/>
           <p:cNvSpPr txBox="1"/>
           <p:nvPr/>
         </p:nvSpPr>
@@ -27299,7 +26214,7 @@
       </p:sp>
       <p:sp>
         <p:nvSpPr>
-          <p:cNvPr id="24" name="TextBox 23"/>
+          <p:cNvPr id="23" name="TextBox 22"/>
           <p:cNvSpPr txBox="1"/>
           <p:nvPr/>
         </p:nvSpPr>
@@ -27370,7 +26285,7 @@
       </p:sp>
       <p:sp>
         <p:nvSpPr>
-          <p:cNvPr id="25" name="Rounded Rectangle 24"/>
+          <p:cNvPr id="24" name="Rounded Rectangle 23"/>
           <p:cNvSpPr/>
           <p:nvPr/>
         </p:nvSpPr>
@@ -27424,7 +26339,7 @@
       </p:sp>
       <p:sp>
         <p:nvSpPr>
-          <p:cNvPr id="26" name="Rectangle 25"/>
+          <p:cNvPr id="25" name="Rectangle 24"/>
           <p:cNvSpPr/>
           <p:nvPr/>
         </p:nvSpPr>
@@ -27468,7 +26383,7 @@
       </p:sp>
       <p:sp>
         <p:nvSpPr>
-          <p:cNvPr id="27" name="Oval 26"/>
+          <p:cNvPr id="26" name="Oval 25"/>
           <p:cNvSpPr/>
           <p:nvPr/>
         </p:nvSpPr>
@@ -27512,7 +26427,7 @@
       </p:sp>
       <p:sp>
         <p:nvSpPr>
-          <p:cNvPr id="28" name="TextBox 27"/>
+          <p:cNvPr id="27" name="TextBox 26"/>
           <p:cNvSpPr txBox="1"/>
           <p:nvPr/>
         </p:nvSpPr>
@@ -27559,7 +26474,7 @@
       </p:sp>
       <p:sp>
         <p:nvSpPr>
-          <p:cNvPr id="29" name="TextBox 28"/>
+          <p:cNvPr id="28" name="TextBox 27"/>
           <p:cNvSpPr txBox="1"/>
           <p:nvPr/>
         </p:nvSpPr>
@@ -27630,7 +26545,7 @@
       </p:sp>
       <p:sp>
         <p:nvSpPr>
-          <p:cNvPr id="30" name="Rounded Rectangle 29"/>
+          <p:cNvPr id="29" name="Rounded Rectangle 28"/>
           <p:cNvSpPr/>
           <p:nvPr/>
         </p:nvSpPr>
@@ -27684,7 +26599,7 @@
       </p:sp>
       <p:sp>
         <p:nvSpPr>
-          <p:cNvPr id="31" name="Rectangle 30"/>
+          <p:cNvPr id="30" name="Rectangle 29"/>
           <p:cNvSpPr/>
           <p:nvPr/>
         </p:nvSpPr>
@@ -27728,7 +26643,7 @@
       </p:sp>
       <p:sp>
         <p:nvSpPr>
-          <p:cNvPr id="32" name="Oval 31"/>
+          <p:cNvPr id="31" name="Oval 30"/>
           <p:cNvSpPr/>
           <p:nvPr/>
         </p:nvSpPr>
@@ -27772,7 +26687,7 @@
       </p:sp>
       <p:sp>
         <p:nvSpPr>
-          <p:cNvPr id="33" name="TextBox 32"/>
+          <p:cNvPr id="32" name="TextBox 31"/>
           <p:cNvSpPr txBox="1"/>
           <p:nvPr/>
         </p:nvSpPr>
@@ -27819,7 +26734,7 @@
       </p:sp>
       <p:sp>
         <p:nvSpPr>
-          <p:cNvPr id="34" name="TextBox 33"/>
+          <p:cNvPr id="33" name="TextBox 32"/>
           <p:cNvSpPr txBox="1"/>
           <p:nvPr/>
         </p:nvSpPr>
@@ -27890,7 +26805,7 @@
       </p:sp>
       <p:sp>
         <p:nvSpPr>
-          <p:cNvPr id="35" name="Rounded Rectangle 34"/>
+          <p:cNvPr id="34" name="Rounded Rectangle 33"/>
           <p:cNvSpPr/>
           <p:nvPr/>
         </p:nvSpPr>
@@ -27944,7 +26859,7 @@
       </p:sp>
       <p:sp>
         <p:nvSpPr>
-          <p:cNvPr id="36" name="Rectangle 35"/>
+          <p:cNvPr id="35" name="Rectangle 34"/>
           <p:cNvSpPr/>
           <p:nvPr/>
         </p:nvSpPr>
@@ -27988,7 +26903,7 @@
       </p:sp>
       <p:sp>
         <p:nvSpPr>
-          <p:cNvPr id="37" name="Oval 36"/>
+          <p:cNvPr id="36" name="Oval 35"/>
           <p:cNvSpPr/>
           <p:nvPr/>
         </p:nvSpPr>
@@ -28032,7 +26947,7 @@
       </p:sp>
       <p:sp>
         <p:nvSpPr>
-          <p:cNvPr id="38" name="TextBox 37"/>
+          <p:cNvPr id="37" name="TextBox 36"/>
           <p:cNvSpPr txBox="1"/>
           <p:nvPr/>
         </p:nvSpPr>
@@ -28079,7 +26994,7 @@
       </p:sp>
       <p:sp>
         <p:nvSpPr>
-          <p:cNvPr id="39" name="TextBox 38"/>
+          <p:cNvPr id="38" name="TextBox 37"/>
           <p:cNvSpPr txBox="1"/>
           <p:nvPr/>
         </p:nvSpPr>
@@ -28362,53 +27277,6 @@
         </p:nvSpPr>
         <p:spPr>
           <a:xfrm>
-            <a:off x="987552" y="2157984"/>
-            <a:ext cx="6766560" cy="274320"/>
-          </a:xfrm>
-          <a:prstGeom prst="rect">
-            <a:avLst/>
-          </a:prstGeom>
-          <a:noFill/>
-        </p:spPr>
-        <p:txBody>
-          <a:bodyPr wrap="square" lIns="0" rIns="0" tIns="0" bIns="0" anchor="t">
-            <a:spAutoFit/>
-          </a:bodyPr>
-          <a:lstStyle/>
-          <a:p>
-            <a:pPr algn="l">
-              <a:lnSpc>
-                <a:spcPct val="122000"/>
-              </a:lnSpc>
-              <a:spcBef>
-                <a:spcPts val="0"/>
-              </a:spcBef>
-              <a:spcAft>
-                <a:spcPts val="0"/>
-              </a:spcAft>
-            </a:pPr>
-            <a:r>
-              <a:rPr sz="1000" b="1" i="0" spc="200">
-                <a:solidFill>
-                  <a:srgbClr val="00B3A4"/>
-                </a:solidFill>
-                <a:latin typeface="Segoe UI"/>
-                <a:ea typeface="Segoe UI"/>
-                <a:cs typeface="Segoe UI"/>
-              </a:rPr>
-              <a:t>UNIT 02  ·  TOOLS AND TECHNOLOGIES</a:t>
-            </a:r>
-          </a:p>
-        </p:txBody>
-      </p:sp>
-      <p:sp>
-        <p:nvSpPr>
-          <p:cNvPr id="7" name="TextBox 6"/>
-          <p:cNvSpPr txBox="1"/>
-          <p:nvPr/>
-        </p:nvSpPr>
-        <p:spPr>
-          <a:xfrm>
             <a:off x="987552" y="2542032"/>
             <a:ext cx="7315200" cy="1005840"/>
           </a:xfrm>
@@ -28450,7 +27318,7 @@
       </p:sp>
       <p:sp>
         <p:nvSpPr>
-          <p:cNvPr id="8" name="Rectangle 7"/>
+          <p:cNvPr id="7" name="Rectangle 6"/>
           <p:cNvSpPr/>
           <p:nvPr/>
         </p:nvSpPr>
@@ -28494,7 +27362,7 @@
       </p:sp>
       <p:sp>
         <p:nvSpPr>
-          <p:cNvPr id="9" name="TextBox 8"/>
+          <p:cNvPr id="8" name="TextBox 7"/>
           <p:cNvSpPr txBox="1"/>
           <p:nvPr/>
         </p:nvSpPr>
@@ -28541,7 +27409,7 @@
       </p:sp>
       <p:sp>
         <p:nvSpPr>
-          <p:cNvPr id="10" name="TextBox 9"/>
+          <p:cNvPr id="9" name="TextBox 8"/>
           <p:cNvSpPr txBox="1"/>
           <p:nvPr/>
         </p:nvSpPr>
@@ -28660,7 +27528,7 @@
       </p:sp>
       <p:sp>
         <p:nvSpPr>
-          <p:cNvPr id="11" name="logo-plate"/>
+          <p:cNvPr id="10" name="logo-plate"/>
           <p:cNvSpPr/>
           <p:nvPr/>
         </p:nvSpPr>
@@ -28706,7 +27574,7 @@
       </p:sp>
       <p:pic>
         <p:nvPicPr>
-          <p:cNvPr id="12" name="college-logo" descr="logo-full.png"/>
+          <p:cNvPr id="11" name="college-logo" descr="logo-full.png"/>
           <p:cNvPicPr>
             <a:picLocks noChangeAspect="1"/>
           </p:cNvPicPr>
@@ -28730,7 +27598,7 @@
       </p:pic>
       <p:sp>
         <p:nvSpPr>
-          <p:cNvPr id="13" name="Rectangle 12"/>
+          <p:cNvPr id="12" name="Rectangle 11"/>
           <p:cNvSpPr/>
           <p:nvPr/>
         </p:nvSpPr>
@@ -28774,7 +27642,7 @@
       </p:sp>
       <p:sp>
         <p:nvSpPr>
-          <p:cNvPr id="14" name="TextBox 13"/>
+          <p:cNvPr id="13" name="TextBox 12"/>
           <p:cNvSpPr txBox="1"/>
           <p:nvPr/>
         </p:nvSpPr>
@@ -28837,28 +27705,6 @@
                 <a:cs typeface="Segoe UI"/>
               </a:rPr>
               <a:t>OSI2509030</a:t>
-            </a:r>
-            <a:r>
-              <a:rPr sz="1000" b="0" i="0">
-                <a:solidFill>
-                  <a:srgbClr val="4A5E86"/>
-                </a:solidFill>
-                <a:latin typeface="Segoe UI"/>
-                <a:ea typeface="Segoe UI"/>
-                <a:cs typeface="Segoe UI"/>
-              </a:rPr>
-              <a:t>   ·   </a:t>
-            </a:r>
-            <a:r>
-              <a:rPr sz="1000" b="0" i="0">
-                <a:solidFill>
-                  <a:srgbClr val="7E91B4"/>
-                </a:solidFill>
-                <a:latin typeface="Segoe UI"/>
-                <a:ea typeface="Segoe UI"/>
-                <a:cs typeface="Segoe UI"/>
-              </a:rPr>
-              <a:t>PGPM · Systems Specialisation</a:t>
             </a:r>
           </a:p>
         </p:txBody>
@@ -29256,54 +28102,7 @@
       </p:sp>
       <p:sp>
         <p:nvSpPr>
-          <p:cNvPr id="10" name="TextBox 9"/>
-          <p:cNvSpPr txBox="1"/>
-          <p:nvPr/>
-        </p:nvSpPr>
-        <p:spPr>
-          <a:xfrm>
-            <a:off x="987552" y="5943600"/>
-            <a:ext cx="6400800" cy="274320"/>
-          </a:xfrm>
-          <a:prstGeom prst="rect">
-            <a:avLst/>
-          </a:prstGeom>
-          <a:noFill/>
-        </p:spPr>
-        <p:txBody>
-          <a:bodyPr wrap="square" lIns="0" rIns="0" tIns="0" bIns="0" anchor="t">
-            <a:spAutoFit/>
-          </a:bodyPr>
-          <a:lstStyle/>
-          <a:p>
-            <a:pPr algn="l">
-              <a:lnSpc>
-                <a:spcPct val="122000"/>
-              </a:lnSpc>
-              <a:spcBef>
-                <a:spcPts val="0"/>
-              </a:spcBef>
-              <a:spcAft>
-                <a:spcPts val="0"/>
-              </a:spcAft>
-            </a:pPr>
-            <a:r>
-              <a:rPr sz="900" b="1" i="0" spc="160">
-                <a:solidFill>
-                  <a:srgbClr val="6B7FA6"/>
-                </a:solidFill>
-                <a:latin typeface="Segoe UI"/>
-                <a:ea typeface="Segoe UI"/>
-                <a:cs typeface="Segoe UI"/>
-              </a:rPr>
-              <a:t>UNIT 2  ·  TOOLS AND TECHNOLOGIES</a:t>
-            </a:r>
-          </a:p>
-        </p:txBody>
-      </p:sp>
-      <p:sp>
-        <p:nvSpPr>
-          <p:cNvPr id="11" name="logo-plate"/>
+          <p:cNvPr id="10" name="logo-plate"/>
           <p:cNvSpPr/>
           <p:nvPr/>
         </p:nvSpPr>
@@ -29349,7 +28148,7 @@
       </p:sp>
       <p:pic>
         <p:nvPicPr>
-          <p:cNvPr id="12" name="college-logo" descr="logo-full.png"/>
+          <p:cNvPr id="11" name="college-logo" descr="logo-full.png"/>
           <p:cNvPicPr>
             <a:picLocks noChangeAspect="1"/>
           </p:cNvPicPr>
@@ -29465,8 +28264,77 @@
         </p:nvSpPr>
         <p:spPr>
           <a:xfrm>
-            <a:off x="713232" y="6272784"/>
-            <a:ext cx="5597920" cy="219456"/>
+            <a:off x="8240677" y="6272784"/>
+            <a:ext cx="2651760" cy="219456"/>
+          </a:xfrm>
+          <a:prstGeom prst="rect">
+            <a:avLst/>
+          </a:prstGeom>
+          <a:noFill/>
+        </p:spPr>
+        <p:txBody>
+          <a:bodyPr wrap="square" lIns="0" rIns="0" tIns="0" bIns="0" anchor="t">
+            <a:spAutoFit/>
+          </a:bodyPr>
+          <a:lstStyle/>
+          <a:p>
+            <a:pPr algn="r">
+              <a:lnSpc>
+                <a:spcPct val="122000"/>
+              </a:lnSpc>
+              <a:spcBef>
+                <a:spcPts val="0"/>
+              </a:spcBef>
+              <a:spcAft>
+                <a:spcPts val="0"/>
+              </a:spcAft>
+            </a:pPr>
+            <a:r>
+              <a:rPr sz="900" b="0" i="0">
+                <a:solidFill>
+                  <a:srgbClr val="636E85"/>
+                </a:solidFill>
+                <a:latin typeface="Segoe UI"/>
+                <a:ea typeface="Segoe UI"/>
+                <a:cs typeface="Segoe UI"/>
+              </a:rPr>
+              <a:t>Lingesh K  ·  OSI2509030</a:t>
+            </a:r>
+            <a:r>
+              <a:rPr sz="900" b="0" i="0">
+                <a:solidFill>
+                  <a:srgbClr val="141C2E"/>
+                </a:solidFill>
+                <a:latin typeface="Segoe UI"/>
+                <a:ea typeface="Segoe UI"/>
+                <a:cs typeface="Segoe UI"/>
+              </a:rPr>
+              <a:t>     </a:t>
+            </a:r>
+            <a:r>
+              <a:rPr sz="900" b="1" i="0">
+                <a:solidFill>
+                  <a:srgbClr val="0E1E3C"/>
+                </a:solidFill>
+                <a:latin typeface="Segoe UI"/>
+                <a:ea typeface="Segoe UI"/>
+                <a:cs typeface="Segoe UI"/>
+              </a:rPr>
+              <a:t>04</a:t>
+            </a:r>
+          </a:p>
+        </p:txBody>
+      </p:sp>
+      <p:sp>
+        <p:nvSpPr>
+          <p:cNvPr id="5" name="TextBox 4"/>
+          <p:cNvSpPr txBox="1"/>
+          <p:nvPr/>
+        </p:nvSpPr>
+        <p:spPr>
+          <a:xfrm>
+            <a:off x="713232" y="566928"/>
+            <a:ext cx="10765231" cy="219456"/>
           </a:xfrm>
           <a:prstGeom prst="rect">
             <a:avLst/>
@@ -29491,106 +28359,15 @@
               </a:spcAft>
             </a:pPr>
             <a:r>
-              <a:rPr sz="900" b="1" i="0">
-                <a:solidFill>
-                  <a:srgbClr val="0E1E3C"/>
-                </a:solidFill>
-                <a:latin typeface="Segoe UI"/>
-                <a:ea typeface="Segoe UI"/>
-                <a:cs typeface="Segoe UI"/>
-              </a:rPr>
-              <a:t>Unit 2</a:t>
-            </a:r>
-            <a:r>
-              <a:rPr sz="900" b="0" i="0">
-                <a:solidFill>
-                  <a:srgbClr val="939EB3"/>
-                </a:solidFill>
-                <a:latin typeface="Segoe UI"/>
-                <a:ea typeface="Segoe UI"/>
-                <a:cs typeface="Segoe UI"/>
-              </a:rPr>
-              <a:t>  ·  </a:t>
-            </a:r>
-            <a:r>
-              <a:rPr sz="900" b="0" i="0">
-                <a:solidFill>
-                  <a:srgbClr val="636E85"/>
-                </a:solidFill>
-                <a:latin typeface="Segoe UI"/>
-                <a:ea typeface="Segoe UI"/>
-                <a:cs typeface="Segoe UI"/>
-              </a:rPr>
-              <a:t>Tools and Technologies</a:t>
-            </a:r>
-          </a:p>
-        </p:txBody>
-      </p:sp>
-      <p:sp>
-        <p:nvSpPr>
-          <p:cNvPr id="5" name="TextBox 4"/>
-          <p:cNvSpPr txBox="1"/>
-          <p:nvPr/>
-        </p:nvSpPr>
-        <p:spPr>
-          <a:xfrm>
-            <a:off x="8240677" y="6272784"/>
-            <a:ext cx="2651760" cy="219456"/>
-          </a:xfrm>
-          <a:prstGeom prst="rect">
-            <a:avLst/>
-          </a:prstGeom>
-          <a:noFill/>
-        </p:spPr>
-        <p:txBody>
-          <a:bodyPr wrap="square" lIns="0" rIns="0" tIns="0" bIns="0" anchor="t">
-            <a:spAutoFit/>
-          </a:bodyPr>
-          <a:lstStyle/>
-          <a:p>
-            <a:pPr algn="r">
-              <a:lnSpc>
-                <a:spcPct val="122000"/>
-              </a:lnSpc>
-              <a:spcBef>
-                <a:spcPts val="0"/>
-              </a:spcBef>
-              <a:spcAft>
-                <a:spcPts val="0"/>
-              </a:spcAft>
-            </a:pPr>
-            <a:r>
-              <a:rPr sz="900" b="0" i="0">
-                <a:solidFill>
-                  <a:srgbClr val="636E85"/>
-                </a:solidFill>
-                <a:latin typeface="Segoe UI"/>
-                <a:ea typeface="Segoe UI"/>
-                <a:cs typeface="Segoe UI"/>
-              </a:rPr>
-              <a:t>Lingesh K  ·  OSI2509030</a:t>
-            </a:r>
-            <a:r>
-              <a:rPr sz="900" b="0" i="0">
-                <a:solidFill>
-                  <a:srgbClr val="141C2E"/>
-                </a:solidFill>
-                <a:latin typeface="Segoe UI"/>
-                <a:ea typeface="Segoe UI"/>
-                <a:cs typeface="Segoe UI"/>
-              </a:rPr>
-              <a:t>     </a:t>
-            </a:r>
-            <a:r>
-              <a:rPr sz="900" b="1" i="0">
-                <a:solidFill>
-                  <a:srgbClr val="0E1E3C"/>
-                </a:solidFill>
-                <a:latin typeface="Segoe UI"/>
-                <a:ea typeface="Segoe UI"/>
-                <a:cs typeface="Segoe UI"/>
-              </a:rPr>
-              <a:t>04</a:t>
+              <a:rPr sz="950" b="1" i="0" spc="160">
+                <a:solidFill>
+                  <a:srgbClr val="3B7AF7"/>
+                </a:solidFill>
+                <a:latin typeface="Segoe UI"/>
+                <a:ea typeface="Segoe UI"/>
+                <a:cs typeface="Segoe UI"/>
+              </a:rPr>
+              <a:t>THE MAP</a:t>
             </a:r>
           </a:p>
         </p:txBody>
@@ -29598,53 +28375,6 @@
       <p:sp>
         <p:nvSpPr>
           <p:cNvPr id="6" name="TextBox 5"/>
-          <p:cNvSpPr txBox="1"/>
-          <p:nvPr/>
-        </p:nvSpPr>
-        <p:spPr>
-          <a:xfrm>
-            <a:off x="713232" y="566928"/>
-            <a:ext cx="10765231" cy="219456"/>
-          </a:xfrm>
-          <a:prstGeom prst="rect">
-            <a:avLst/>
-          </a:prstGeom>
-          <a:noFill/>
-        </p:spPr>
-        <p:txBody>
-          <a:bodyPr wrap="square" lIns="0" rIns="0" tIns="0" bIns="0" anchor="t">
-            <a:spAutoFit/>
-          </a:bodyPr>
-          <a:lstStyle/>
-          <a:p>
-            <a:pPr algn="l">
-              <a:lnSpc>
-                <a:spcPct val="122000"/>
-              </a:lnSpc>
-              <a:spcBef>
-                <a:spcPts val="0"/>
-              </a:spcBef>
-              <a:spcAft>
-                <a:spcPts val="0"/>
-              </a:spcAft>
-            </a:pPr>
-            <a:r>
-              <a:rPr sz="950" b="1" i="0" spc="160">
-                <a:solidFill>
-                  <a:srgbClr val="3B7AF7"/>
-                </a:solidFill>
-                <a:latin typeface="Segoe UI"/>
-                <a:ea typeface="Segoe UI"/>
-                <a:cs typeface="Segoe UI"/>
-              </a:rPr>
-              <a:t>THE MAP</a:t>
-            </a:r>
-          </a:p>
-        </p:txBody>
-      </p:sp>
-      <p:sp>
-        <p:nvSpPr>
-          <p:cNvPr id="7" name="TextBox 6"/>
           <p:cNvSpPr txBox="1"/>
           <p:nvPr/>
         </p:nvSpPr>
@@ -29691,7 +28421,7 @@
       </p:sp>
       <p:sp>
         <p:nvSpPr>
-          <p:cNvPr id="8" name="Rectangle 7"/>
+          <p:cNvPr id="7" name="Rectangle 6"/>
           <p:cNvSpPr/>
           <p:nvPr/>
         </p:nvSpPr>
@@ -29735,7 +28465,7 @@
       </p:sp>
       <p:sp>
         <p:nvSpPr>
-          <p:cNvPr id="9" name="TextBox 8"/>
+          <p:cNvPr id="8" name="TextBox 7"/>
           <p:cNvSpPr txBox="1"/>
           <p:nvPr/>
         </p:nvSpPr>
@@ -29782,7 +28512,7 @@
       </p:sp>
       <p:sp>
         <p:nvSpPr>
-          <p:cNvPr id="10" name="Rounded Rectangle 9"/>
+          <p:cNvPr id="9" name="Rounded Rectangle 8"/>
           <p:cNvSpPr/>
           <p:nvPr/>
         </p:nvSpPr>
@@ -29828,7 +28558,7 @@
       </p:sp>
       <p:sp>
         <p:nvSpPr>
-          <p:cNvPr id="11" name="Rectangle 10"/>
+          <p:cNvPr id="10" name="Rectangle 9"/>
           <p:cNvSpPr/>
           <p:nvPr/>
         </p:nvSpPr>
@@ -29872,7 +28602,7 @@
       </p:sp>
       <p:sp>
         <p:nvSpPr>
-          <p:cNvPr id="12" name="TextBox 11"/>
+          <p:cNvPr id="11" name="TextBox 10"/>
           <p:cNvSpPr txBox="1"/>
           <p:nvPr/>
         </p:nvSpPr>
@@ -29919,7 +28649,7 @@
       </p:sp>
       <p:sp>
         <p:nvSpPr>
-          <p:cNvPr id="13" name="TextBox 12"/>
+          <p:cNvPr id="12" name="TextBox 11"/>
           <p:cNvSpPr txBox="1"/>
           <p:nvPr/>
         </p:nvSpPr>
@@ -29978,7 +28708,7 @@
       </p:sp>
       <p:sp>
         <p:nvSpPr>
-          <p:cNvPr id="14" name="Rounded Rectangle 13"/>
+          <p:cNvPr id="13" name="Rounded Rectangle 12"/>
           <p:cNvSpPr/>
           <p:nvPr/>
         </p:nvSpPr>
@@ -30024,7 +28754,7 @@
       </p:sp>
       <p:sp>
         <p:nvSpPr>
-          <p:cNvPr id="15" name="Rectangle 14"/>
+          <p:cNvPr id="14" name="Rectangle 13"/>
           <p:cNvSpPr/>
           <p:nvPr/>
         </p:nvSpPr>
@@ -30068,7 +28798,7 @@
       </p:sp>
       <p:sp>
         <p:nvSpPr>
-          <p:cNvPr id="16" name="TextBox 15"/>
+          <p:cNvPr id="15" name="TextBox 14"/>
           <p:cNvSpPr txBox="1"/>
           <p:nvPr/>
         </p:nvSpPr>
@@ -30115,7 +28845,7 @@
       </p:sp>
       <p:sp>
         <p:nvSpPr>
-          <p:cNvPr id="17" name="TextBox 16"/>
+          <p:cNvPr id="16" name="TextBox 15"/>
           <p:cNvSpPr txBox="1"/>
           <p:nvPr/>
         </p:nvSpPr>
@@ -30174,7 +28904,7 @@
       </p:sp>
       <p:sp>
         <p:nvSpPr>
-          <p:cNvPr id="18" name="Rounded Rectangle 17"/>
+          <p:cNvPr id="17" name="Rounded Rectangle 16"/>
           <p:cNvSpPr/>
           <p:nvPr/>
         </p:nvSpPr>
@@ -30220,7 +28950,7 @@
       </p:sp>
       <p:sp>
         <p:nvSpPr>
-          <p:cNvPr id="19" name="Rectangle 18"/>
+          <p:cNvPr id="18" name="Rectangle 17"/>
           <p:cNvSpPr/>
           <p:nvPr/>
         </p:nvSpPr>
@@ -30264,7 +28994,7 @@
       </p:sp>
       <p:sp>
         <p:nvSpPr>
-          <p:cNvPr id="20" name="TextBox 19"/>
+          <p:cNvPr id="19" name="TextBox 18"/>
           <p:cNvSpPr txBox="1"/>
           <p:nvPr/>
         </p:nvSpPr>
@@ -30311,7 +29041,7 @@
       </p:sp>
       <p:sp>
         <p:nvSpPr>
-          <p:cNvPr id="21" name="TextBox 20"/>
+          <p:cNvPr id="20" name="TextBox 19"/>
           <p:cNvSpPr txBox="1"/>
           <p:nvPr/>
         </p:nvSpPr>
@@ -30370,7 +29100,7 @@
       </p:sp>
       <p:sp>
         <p:nvSpPr>
-          <p:cNvPr id="22" name="Rounded Rectangle 21"/>
+          <p:cNvPr id="21" name="Rounded Rectangle 20"/>
           <p:cNvSpPr/>
           <p:nvPr/>
         </p:nvSpPr>
@@ -30416,7 +29146,7 @@
       </p:sp>
       <p:sp>
         <p:nvSpPr>
-          <p:cNvPr id="23" name="Rectangle 22"/>
+          <p:cNvPr id="22" name="Rectangle 21"/>
           <p:cNvSpPr/>
           <p:nvPr/>
         </p:nvSpPr>
@@ -30460,7 +29190,7 @@
       </p:sp>
       <p:sp>
         <p:nvSpPr>
-          <p:cNvPr id="24" name="TextBox 23"/>
+          <p:cNvPr id="23" name="TextBox 22"/>
           <p:cNvSpPr txBox="1"/>
           <p:nvPr/>
         </p:nvSpPr>
@@ -30507,7 +29237,7 @@
       </p:sp>
       <p:sp>
         <p:nvSpPr>
-          <p:cNvPr id="25" name="TextBox 24"/>
+          <p:cNvPr id="24" name="TextBox 23"/>
           <p:cNvSpPr txBox="1"/>
           <p:nvPr/>
         </p:nvSpPr>
@@ -30566,7 +29296,7 @@
       </p:sp>
       <p:sp>
         <p:nvSpPr>
-          <p:cNvPr id="26" name="Rounded Rectangle 25"/>
+          <p:cNvPr id="25" name="Rounded Rectangle 24"/>
           <p:cNvSpPr/>
           <p:nvPr/>
         </p:nvSpPr>
@@ -30612,7 +29342,7 @@
       </p:sp>
       <p:sp>
         <p:nvSpPr>
-          <p:cNvPr id="27" name="Rectangle 26"/>
+          <p:cNvPr id="26" name="Rectangle 25"/>
           <p:cNvSpPr/>
           <p:nvPr/>
         </p:nvSpPr>
@@ -30656,7 +29386,7 @@
       </p:sp>
       <p:sp>
         <p:nvSpPr>
-          <p:cNvPr id="28" name="TextBox 27"/>
+          <p:cNvPr id="27" name="TextBox 26"/>
           <p:cNvSpPr txBox="1"/>
           <p:nvPr/>
         </p:nvSpPr>
@@ -30703,7 +29433,7 @@
       </p:sp>
       <p:sp>
         <p:nvSpPr>
-          <p:cNvPr id="29" name="TextBox 28"/>
+          <p:cNvPr id="28" name="TextBox 27"/>
           <p:cNvSpPr txBox="1"/>
           <p:nvPr/>
         </p:nvSpPr>
@@ -30762,7 +29492,7 @@
       </p:sp>
       <p:sp>
         <p:nvSpPr>
-          <p:cNvPr id="30" name="Rounded Rectangle 29"/>
+          <p:cNvPr id="29" name="Rounded Rectangle 28"/>
           <p:cNvSpPr/>
           <p:nvPr/>
         </p:nvSpPr>
@@ -30808,7 +29538,7 @@
       </p:sp>
       <p:sp>
         <p:nvSpPr>
-          <p:cNvPr id="31" name="Rectangle 30"/>
+          <p:cNvPr id="30" name="Rectangle 29"/>
           <p:cNvSpPr/>
           <p:nvPr/>
         </p:nvSpPr>
@@ -30852,7 +29582,7 @@
       </p:sp>
       <p:sp>
         <p:nvSpPr>
-          <p:cNvPr id="32" name="TextBox 31"/>
+          <p:cNvPr id="31" name="TextBox 30"/>
           <p:cNvSpPr txBox="1"/>
           <p:nvPr/>
         </p:nvSpPr>
@@ -30899,7 +29629,7 @@
       </p:sp>
       <p:sp>
         <p:nvSpPr>
-          <p:cNvPr id="33" name="TextBox 32"/>
+          <p:cNvPr id="32" name="TextBox 31"/>
           <p:cNvSpPr txBox="1"/>
           <p:nvPr/>
         </p:nvSpPr>
@@ -31050,8 +29780,77 @@
         </p:nvSpPr>
         <p:spPr>
           <a:xfrm>
-            <a:off x="713232" y="6272784"/>
-            <a:ext cx="5597920" cy="219456"/>
+            <a:off x="8240677" y="6272784"/>
+            <a:ext cx="2651760" cy="219456"/>
+          </a:xfrm>
+          <a:prstGeom prst="rect">
+            <a:avLst/>
+          </a:prstGeom>
+          <a:noFill/>
+        </p:spPr>
+        <p:txBody>
+          <a:bodyPr wrap="square" lIns="0" rIns="0" tIns="0" bIns="0" anchor="t">
+            <a:spAutoFit/>
+          </a:bodyPr>
+          <a:lstStyle/>
+          <a:p>
+            <a:pPr algn="r">
+              <a:lnSpc>
+                <a:spcPct val="122000"/>
+              </a:lnSpc>
+              <a:spcBef>
+                <a:spcPts val="0"/>
+              </a:spcBef>
+              <a:spcAft>
+                <a:spcPts val="0"/>
+              </a:spcAft>
+            </a:pPr>
+            <a:r>
+              <a:rPr sz="900" b="0" i="0">
+                <a:solidFill>
+                  <a:srgbClr val="636E85"/>
+                </a:solidFill>
+                <a:latin typeface="Segoe UI"/>
+                <a:ea typeface="Segoe UI"/>
+                <a:cs typeface="Segoe UI"/>
+              </a:rPr>
+              <a:t>Lingesh K  ·  OSI2509030</a:t>
+            </a:r>
+            <a:r>
+              <a:rPr sz="900" b="0" i="0">
+                <a:solidFill>
+                  <a:srgbClr val="141C2E"/>
+                </a:solidFill>
+                <a:latin typeface="Segoe UI"/>
+                <a:ea typeface="Segoe UI"/>
+                <a:cs typeface="Segoe UI"/>
+              </a:rPr>
+              <a:t>     </a:t>
+            </a:r>
+            <a:r>
+              <a:rPr sz="900" b="1" i="0">
+                <a:solidFill>
+                  <a:srgbClr val="0E1E3C"/>
+                </a:solidFill>
+                <a:latin typeface="Segoe UI"/>
+                <a:ea typeface="Segoe UI"/>
+                <a:cs typeface="Segoe UI"/>
+              </a:rPr>
+              <a:t>05</a:t>
+            </a:r>
+          </a:p>
+        </p:txBody>
+      </p:sp>
+      <p:sp>
+        <p:nvSpPr>
+          <p:cNvPr id="5" name="TextBox 4"/>
+          <p:cNvSpPr txBox="1"/>
+          <p:nvPr/>
+        </p:nvSpPr>
+        <p:spPr>
+          <a:xfrm>
+            <a:off x="713232" y="566928"/>
+            <a:ext cx="10765231" cy="219456"/>
           </a:xfrm>
           <a:prstGeom prst="rect">
             <a:avLst/>
@@ -31076,106 +29875,15 @@
               </a:spcAft>
             </a:pPr>
             <a:r>
-              <a:rPr sz="900" b="1" i="0">
-                <a:solidFill>
-                  <a:srgbClr val="0E1E3C"/>
-                </a:solidFill>
-                <a:latin typeface="Segoe UI"/>
-                <a:ea typeface="Segoe UI"/>
-                <a:cs typeface="Segoe UI"/>
-              </a:rPr>
-              <a:t>Unit 2</a:t>
-            </a:r>
-            <a:r>
-              <a:rPr sz="900" b="0" i="0">
-                <a:solidFill>
-                  <a:srgbClr val="939EB3"/>
-                </a:solidFill>
-                <a:latin typeface="Segoe UI"/>
-                <a:ea typeface="Segoe UI"/>
-                <a:cs typeface="Segoe UI"/>
-              </a:rPr>
-              <a:t>  ·  </a:t>
-            </a:r>
-            <a:r>
-              <a:rPr sz="900" b="0" i="0">
-                <a:solidFill>
-                  <a:srgbClr val="636E85"/>
-                </a:solidFill>
-                <a:latin typeface="Segoe UI"/>
-                <a:ea typeface="Segoe UI"/>
-                <a:cs typeface="Segoe UI"/>
-              </a:rPr>
-              <a:t>Tools and Technologies</a:t>
-            </a:r>
-          </a:p>
-        </p:txBody>
-      </p:sp>
-      <p:sp>
-        <p:nvSpPr>
-          <p:cNvPr id="5" name="TextBox 4"/>
-          <p:cNvSpPr txBox="1"/>
-          <p:nvPr/>
-        </p:nvSpPr>
-        <p:spPr>
-          <a:xfrm>
-            <a:off x="8240677" y="6272784"/>
-            <a:ext cx="2651760" cy="219456"/>
-          </a:xfrm>
-          <a:prstGeom prst="rect">
-            <a:avLst/>
-          </a:prstGeom>
-          <a:noFill/>
-        </p:spPr>
-        <p:txBody>
-          <a:bodyPr wrap="square" lIns="0" rIns="0" tIns="0" bIns="0" anchor="t">
-            <a:spAutoFit/>
-          </a:bodyPr>
-          <a:lstStyle/>
-          <a:p>
-            <a:pPr algn="r">
-              <a:lnSpc>
-                <a:spcPct val="122000"/>
-              </a:lnSpc>
-              <a:spcBef>
-                <a:spcPts val="0"/>
-              </a:spcBef>
-              <a:spcAft>
-                <a:spcPts val="0"/>
-              </a:spcAft>
-            </a:pPr>
-            <a:r>
-              <a:rPr sz="900" b="0" i="0">
-                <a:solidFill>
-                  <a:srgbClr val="636E85"/>
-                </a:solidFill>
-                <a:latin typeface="Segoe UI"/>
-                <a:ea typeface="Segoe UI"/>
-                <a:cs typeface="Segoe UI"/>
-              </a:rPr>
-              <a:t>Lingesh K  ·  OSI2509030</a:t>
-            </a:r>
-            <a:r>
-              <a:rPr sz="900" b="0" i="0">
-                <a:solidFill>
-                  <a:srgbClr val="141C2E"/>
-                </a:solidFill>
-                <a:latin typeface="Segoe UI"/>
-                <a:ea typeface="Segoe UI"/>
-                <a:cs typeface="Segoe UI"/>
-              </a:rPr>
-              <a:t>     </a:t>
-            </a:r>
-            <a:r>
-              <a:rPr sz="900" b="1" i="0">
-                <a:solidFill>
-                  <a:srgbClr val="0E1E3C"/>
-                </a:solidFill>
-                <a:latin typeface="Segoe UI"/>
-                <a:ea typeface="Segoe UI"/>
-                <a:cs typeface="Segoe UI"/>
-              </a:rPr>
-              <a:t>05</a:t>
+              <a:rPr sz="950" b="1" i="0" spc="160">
+                <a:solidFill>
+                  <a:srgbClr val="00B3A4"/>
+                </a:solidFill>
+                <a:latin typeface="Segoe UI"/>
+                <a:ea typeface="Segoe UI"/>
+                <a:cs typeface="Segoe UI"/>
+              </a:rPr>
+              <a:t>TOOLS UP CLOSE — PART 1</a:t>
             </a:r>
           </a:p>
         </p:txBody>
@@ -31183,53 +29891,6 @@
       <p:sp>
         <p:nvSpPr>
           <p:cNvPr id="6" name="TextBox 5"/>
-          <p:cNvSpPr txBox="1"/>
-          <p:nvPr/>
-        </p:nvSpPr>
-        <p:spPr>
-          <a:xfrm>
-            <a:off x="713232" y="566928"/>
-            <a:ext cx="10765231" cy="219456"/>
-          </a:xfrm>
-          <a:prstGeom prst="rect">
-            <a:avLst/>
-          </a:prstGeom>
-          <a:noFill/>
-        </p:spPr>
-        <p:txBody>
-          <a:bodyPr wrap="square" lIns="0" rIns="0" tIns="0" bIns="0" anchor="t">
-            <a:spAutoFit/>
-          </a:bodyPr>
-          <a:lstStyle/>
-          <a:p>
-            <a:pPr algn="l">
-              <a:lnSpc>
-                <a:spcPct val="122000"/>
-              </a:lnSpc>
-              <a:spcBef>
-                <a:spcPts val="0"/>
-              </a:spcBef>
-              <a:spcAft>
-                <a:spcPts val="0"/>
-              </a:spcAft>
-            </a:pPr>
-            <a:r>
-              <a:rPr sz="950" b="1" i="0" spc="160">
-                <a:solidFill>
-                  <a:srgbClr val="00B3A4"/>
-                </a:solidFill>
-                <a:latin typeface="Segoe UI"/>
-                <a:ea typeface="Segoe UI"/>
-                <a:cs typeface="Segoe UI"/>
-              </a:rPr>
-              <a:t>TOOLS UP CLOSE — PART 1</a:t>
-            </a:r>
-          </a:p>
-        </p:txBody>
-      </p:sp>
-      <p:sp>
-        <p:nvSpPr>
-          <p:cNvPr id="7" name="TextBox 6"/>
           <p:cNvSpPr txBox="1"/>
           <p:nvPr/>
         </p:nvSpPr>
@@ -31276,7 +29937,7 @@
       </p:sp>
       <p:sp>
         <p:nvSpPr>
-          <p:cNvPr id="8" name="Rectangle 7"/>
+          <p:cNvPr id="7" name="Rectangle 6"/>
           <p:cNvSpPr/>
           <p:nvPr/>
         </p:nvSpPr>
@@ -31320,7 +29981,7 @@
       </p:sp>
       <p:sp>
         <p:nvSpPr>
-          <p:cNvPr id="9" name="Rounded Rectangle 8"/>
+          <p:cNvPr id="8" name="Rounded Rectangle 7"/>
           <p:cNvSpPr/>
           <p:nvPr/>
         </p:nvSpPr>
@@ -31374,7 +30035,7 @@
       </p:sp>
       <p:sp>
         <p:nvSpPr>
-          <p:cNvPr id="10" name="Rectangle 9"/>
+          <p:cNvPr id="9" name="Rectangle 8"/>
           <p:cNvSpPr/>
           <p:nvPr/>
         </p:nvSpPr>
@@ -31418,7 +30079,7 @@
       </p:sp>
       <p:sp>
         <p:nvSpPr>
-          <p:cNvPr id="11" name="TextBox 10"/>
+          <p:cNvPr id="10" name="TextBox 9"/>
           <p:cNvSpPr txBox="1"/>
           <p:nvPr/>
         </p:nvSpPr>
@@ -31465,7 +30126,7 @@
       </p:sp>
       <p:sp>
         <p:nvSpPr>
-          <p:cNvPr id="12" name="TextBox 11"/>
+          <p:cNvPr id="11" name="TextBox 10"/>
           <p:cNvSpPr txBox="1"/>
           <p:nvPr/>
         </p:nvSpPr>
@@ -31536,7 +30197,7 @@
       </p:sp>
       <p:sp>
         <p:nvSpPr>
-          <p:cNvPr id="13" name="Rounded Rectangle 12"/>
+          <p:cNvPr id="12" name="Rounded Rectangle 11"/>
           <p:cNvSpPr/>
           <p:nvPr/>
         </p:nvSpPr>
@@ -31590,7 +30251,7 @@
       </p:sp>
       <p:sp>
         <p:nvSpPr>
-          <p:cNvPr id="14" name="Rectangle 13"/>
+          <p:cNvPr id="13" name="Rectangle 12"/>
           <p:cNvSpPr/>
           <p:nvPr/>
         </p:nvSpPr>
@@ -31634,7 +30295,7 @@
       </p:sp>
       <p:sp>
         <p:nvSpPr>
-          <p:cNvPr id="15" name="TextBox 14"/>
+          <p:cNvPr id="14" name="TextBox 13"/>
           <p:cNvSpPr txBox="1"/>
           <p:nvPr/>
         </p:nvSpPr>
@@ -31681,7 +30342,7 @@
       </p:sp>
       <p:sp>
         <p:nvSpPr>
-          <p:cNvPr id="16" name="TextBox 15"/>
+          <p:cNvPr id="15" name="TextBox 14"/>
           <p:cNvSpPr txBox="1"/>
           <p:nvPr/>
         </p:nvSpPr>
@@ -31752,7 +30413,7 @@
       </p:sp>
       <p:sp>
         <p:nvSpPr>
-          <p:cNvPr id="17" name="Rounded Rectangle 16"/>
+          <p:cNvPr id="16" name="Rounded Rectangle 15"/>
           <p:cNvSpPr/>
           <p:nvPr/>
         </p:nvSpPr>
@@ -31806,7 +30467,7 @@
       </p:sp>
       <p:sp>
         <p:nvSpPr>
-          <p:cNvPr id="18" name="Rectangle 17"/>
+          <p:cNvPr id="17" name="Rectangle 16"/>
           <p:cNvSpPr/>
           <p:nvPr/>
         </p:nvSpPr>
@@ -31850,7 +30511,7 @@
       </p:sp>
       <p:sp>
         <p:nvSpPr>
-          <p:cNvPr id="19" name="TextBox 18"/>
+          <p:cNvPr id="18" name="TextBox 17"/>
           <p:cNvSpPr txBox="1"/>
           <p:nvPr/>
         </p:nvSpPr>
@@ -31897,7 +30558,7 @@
       </p:sp>
       <p:sp>
         <p:nvSpPr>
-          <p:cNvPr id="20" name="TextBox 19"/>
+          <p:cNvPr id="19" name="TextBox 18"/>
           <p:cNvSpPr txBox="1"/>
           <p:nvPr/>
         </p:nvSpPr>
@@ -32060,8 +30721,77 @@
         </p:nvSpPr>
         <p:spPr>
           <a:xfrm>
-            <a:off x="713232" y="6272784"/>
-            <a:ext cx="5597920" cy="219456"/>
+            <a:off x="8240677" y="6272784"/>
+            <a:ext cx="2651760" cy="219456"/>
+          </a:xfrm>
+          <a:prstGeom prst="rect">
+            <a:avLst/>
+          </a:prstGeom>
+          <a:noFill/>
+        </p:spPr>
+        <p:txBody>
+          <a:bodyPr wrap="square" lIns="0" rIns="0" tIns="0" bIns="0" anchor="t">
+            <a:spAutoFit/>
+          </a:bodyPr>
+          <a:lstStyle/>
+          <a:p>
+            <a:pPr algn="r">
+              <a:lnSpc>
+                <a:spcPct val="122000"/>
+              </a:lnSpc>
+              <a:spcBef>
+                <a:spcPts val="0"/>
+              </a:spcBef>
+              <a:spcAft>
+                <a:spcPts val="0"/>
+              </a:spcAft>
+            </a:pPr>
+            <a:r>
+              <a:rPr sz="900" b="0" i="0">
+                <a:solidFill>
+                  <a:srgbClr val="636E85"/>
+                </a:solidFill>
+                <a:latin typeface="Segoe UI"/>
+                <a:ea typeface="Segoe UI"/>
+                <a:cs typeface="Segoe UI"/>
+              </a:rPr>
+              <a:t>Lingesh K  ·  OSI2509030</a:t>
+            </a:r>
+            <a:r>
+              <a:rPr sz="900" b="0" i="0">
+                <a:solidFill>
+                  <a:srgbClr val="141C2E"/>
+                </a:solidFill>
+                <a:latin typeface="Segoe UI"/>
+                <a:ea typeface="Segoe UI"/>
+                <a:cs typeface="Segoe UI"/>
+              </a:rPr>
+              <a:t>     </a:t>
+            </a:r>
+            <a:r>
+              <a:rPr sz="900" b="1" i="0">
+                <a:solidFill>
+                  <a:srgbClr val="0E1E3C"/>
+                </a:solidFill>
+                <a:latin typeface="Segoe UI"/>
+                <a:ea typeface="Segoe UI"/>
+                <a:cs typeface="Segoe UI"/>
+              </a:rPr>
+              <a:t>06</a:t>
+            </a:r>
+          </a:p>
+        </p:txBody>
+      </p:sp>
+      <p:sp>
+        <p:nvSpPr>
+          <p:cNvPr id="5" name="TextBox 4"/>
+          <p:cNvSpPr txBox="1"/>
+          <p:nvPr/>
+        </p:nvSpPr>
+        <p:spPr>
+          <a:xfrm>
+            <a:off x="713232" y="566928"/>
+            <a:ext cx="10765231" cy="219456"/>
           </a:xfrm>
           <a:prstGeom prst="rect">
             <a:avLst/>
@@ -32086,106 +30816,15 @@
               </a:spcAft>
             </a:pPr>
             <a:r>
-              <a:rPr sz="900" b="1" i="0">
-                <a:solidFill>
-                  <a:srgbClr val="0E1E3C"/>
-                </a:solidFill>
-                <a:latin typeface="Segoe UI"/>
-                <a:ea typeface="Segoe UI"/>
-                <a:cs typeface="Segoe UI"/>
-              </a:rPr>
-              <a:t>Unit 2</a:t>
-            </a:r>
-            <a:r>
-              <a:rPr sz="900" b="0" i="0">
-                <a:solidFill>
-                  <a:srgbClr val="939EB3"/>
-                </a:solidFill>
-                <a:latin typeface="Segoe UI"/>
-                <a:ea typeface="Segoe UI"/>
-                <a:cs typeface="Segoe UI"/>
-              </a:rPr>
-              <a:t>  ·  </a:t>
-            </a:r>
-            <a:r>
-              <a:rPr sz="900" b="0" i="0">
-                <a:solidFill>
-                  <a:srgbClr val="636E85"/>
-                </a:solidFill>
-                <a:latin typeface="Segoe UI"/>
-                <a:ea typeface="Segoe UI"/>
-                <a:cs typeface="Segoe UI"/>
-              </a:rPr>
-              <a:t>Tools and Technologies</a:t>
-            </a:r>
-          </a:p>
-        </p:txBody>
-      </p:sp>
-      <p:sp>
-        <p:nvSpPr>
-          <p:cNvPr id="5" name="TextBox 4"/>
-          <p:cNvSpPr txBox="1"/>
-          <p:nvPr/>
-        </p:nvSpPr>
-        <p:spPr>
-          <a:xfrm>
-            <a:off x="8240677" y="6272784"/>
-            <a:ext cx="2651760" cy="219456"/>
-          </a:xfrm>
-          <a:prstGeom prst="rect">
-            <a:avLst/>
-          </a:prstGeom>
-          <a:noFill/>
-        </p:spPr>
-        <p:txBody>
-          <a:bodyPr wrap="square" lIns="0" rIns="0" tIns="0" bIns="0" anchor="t">
-            <a:spAutoFit/>
-          </a:bodyPr>
-          <a:lstStyle/>
-          <a:p>
-            <a:pPr algn="r">
-              <a:lnSpc>
-                <a:spcPct val="122000"/>
-              </a:lnSpc>
-              <a:spcBef>
-                <a:spcPts val="0"/>
-              </a:spcBef>
-              <a:spcAft>
-                <a:spcPts val="0"/>
-              </a:spcAft>
-            </a:pPr>
-            <a:r>
-              <a:rPr sz="900" b="0" i="0">
-                <a:solidFill>
-                  <a:srgbClr val="636E85"/>
-                </a:solidFill>
-                <a:latin typeface="Segoe UI"/>
-                <a:ea typeface="Segoe UI"/>
-                <a:cs typeface="Segoe UI"/>
-              </a:rPr>
-              <a:t>Lingesh K  ·  OSI2509030</a:t>
-            </a:r>
-            <a:r>
-              <a:rPr sz="900" b="0" i="0">
-                <a:solidFill>
-                  <a:srgbClr val="141C2E"/>
-                </a:solidFill>
-                <a:latin typeface="Segoe UI"/>
-                <a:ea typeface="Segoe UI"/>
-                <a:cs typeface="Segoe UI"/>
-              </a:rPr>
-              <a:t>     </a:t>
-            </a:r>
-            <a:r>
-              <a:rPr sz="900" b="1" i="0">
-                <a:solidFill>
-                  <a:srgbClr val="0E1E3C"/>
-                </a:solidFill>
-                <a:latin typeface="Segoe UI"/>
-                <a:ea typeface="Segoe UI"/>
-                <a:cs typeface="Segoe UI"/>
-              </a:rPr>
-              <a:t>06</a:t>
+              <a:rPr sz="950" b="1" i="0" spc="160">
+                <a:solidFill>
+                  <a:srgbClr val="745CE0"/>
+                </a:solidFill>
+                <a:latin typeface="Segoe UI"/>
+                <a:ea typeface="Segoe UI"/>
+                <a:cs typeface="Segoe UI"/>
+              </a:rPr>
+              <a:t>TOOLS UP CLOSE — PART 2</a:t>
             </a:r>
           </a:p>
         </p:txBody>
@@ -32193,53 +30832,6 @@
       <p:sp>
         <p:nvSpPr>
           <p:cNvPr id="6" name="TextBox 5"/>
-          <p:cNvSpPr txBox="1"/>
-          <p:nvPr/>
-        </p:nvSpPr>
-        <p:spPr>
-          <a:xfrm>
-            <a:off x="713232" y="566928"/>
-            <a:ext cx="10765231" cy="219456"/>
-          </a:xfrm>
-          <a:prstGeom prst="rect">
-            <a:avLst/>
-          </a:prstGeom>
-          <a:noFill/>
-        </p:spPr>
-        <p:txBody>
-          <a:bodyPr wrap="square" lIns="0" rIns="0" tIns="0" bIns="0" anchor="t">
-            <a:spAutoFit/>
-          </a:bodyPr>
-          <a:lstStyle/>
-          <a:p>
-            <a:pPr algn="l">
-              <a:lnSpc>
-                <a:spcPct val="122000"/>
-              </a:lnSpc>
-              <a:spcBef>
-                <a:spcPts val="0"/>
-              </a:spcBef>
-              <a:spcAft>
-                <a:spcPts val="0"/>
-              </a:spcAft>
-            </a:pPr>
-            <a:r>
-              <a:rPr sz="950" b="1" i="0" spc="160">
-                <a:solidFill>
-                  <a:srgbClr val="745CE0"/>
-                </a:solidFill>
-                <a:latin typeface="Segoe UI"/>
-                <a:ea typeface="Segoe UI"/>
-                <a:cs typeface="Segoe UI"/>
-              </a:rPr>
-              <a:t>TOOLS UP CLOSE — PART 2</a:t>
-            </a:r>
-          </a:p>
-        </p:txBody>
-      </p:sp>
-      <p:sp>
-        <p:nvSpPr>
-          <p:cNvPr id="7" name="TextBox 6"/>
           <p:cNvSpPr txBox="1"/>
           <p:nvPr/>
         </p:nvSpPr>
@@ -32286,7 +30878,7 @@
       </p:sp>
       <p:sp>
         <p:nvSpPr>
-          <p:cNvPr id="8" name="Rectangle 7"/>
+          <p:cNvPr id="7" name="Rectangle 6"/>
           <p:cNvSpPr/>
           <p:nvPr/>
         </p:nvSpPr>
@@ -32330,7 +30922,7 @@
       </p:sp>
       <p:sp>
         <p:nvSpPr>
-          <p:cNvPr id="9" name="Rounded Rectangle 8"/>
+          <p:cNvPr id="8" name="Rounded Rectangle 7"/>
           <p:cNvSpPr/>
           <p:nvPr/>
         </p:nvSpPr>
@@ -32384,7 +30976,7 @@
       </p:sp>
       <p:sp>
         <p:nvSpPr>
-          <p:cNvPr id="10" name="Rectangle 9"/>
+          <p:cNvPr id="9" name="Rectangle 8"/>
           <p:cNvSpPr/>
           <p:nvPr/>
         </p:nvSpPr>
@@ -32428,7 +31020,7 @@
       </p:sp>
       <p:sp>
         <p:nvSpPr>
-          <p:cNvPr id="11" name="TextBox 10"/>
+          <p:cNvPr id="10" name="TextBox 9"/>
           <p:cNvSpPr txBox="1"/>
           <p:nvPr/>
         </p:nvSpPr>
@@ -32475,7 +31067,7 @@
       </p:sp>
       <p:sp>
         <p:nvSpPr>
-          <p:cNvPr id="12" name="TextBox 11"/>
+          <p:cNvPr id="11" name="TextBox 10"/>
           <p:cNvSpPr txBox="1"/>
           <p:nvPr/>
         </p:nvSpPr>
@@ -32546,7 +31138,7 @@
       </p:sp>
       <p:sp>
         <p:nvSpPr>
-          <p:cNvPr id="13" name="Rounded Rectangle 12"/>
+          <p:cNvPr id="12" name="Rounded Rectangle 11"/>
           <p:cNvSpPr/>
           <p:nvPr/>
         </p:nvSpPr>
@@ -32600,7 +31192,7 @@
       </p:sp>
       <p:sp>
         <p:nvSpPr>
-          <p:cNvPr id="14" name="Rectangle 13"/>
+          <p:cNvPr id="13" name="Rectangle 12"/>
           <p:cNvSpPr/>
           <p:nvPr/>
         </p:nvSpPr>
@@ -32644,7 +31236,7 @@
       </p:sp>
       <p:sp>
         <p:nvSpPr>
-          <p:cNvPr id="15" name="TextBox 14"/>
+          <p:cNvPr id="14" name="TextBox 13"/>
           <p:cNvSpPr txBox="1"/>
           <p:nvPr/>
         </p:nvSpPr>
@@ -32691,7 +31283,7 @@
       </p:sp>
       <p:sp>
         <p:nvSpPr>
-          <p:cNvPr id="16" name="TextBox 15"/>
+          <p:cNvPr id="15" name="TextBox 14"/>
           <p:cNvSpPr txBox="1"/>
           <p:nvPr/>
         </p:nvSpPr>
@@ -32762,7 +31354,7 @@
       </p:sp>
       <p:sp>
         <p:nvSpPr>
-          <p:cNvPr id="17" name="Rounded Rectangle 16"/>
+          <p:cNvPr id="16" name="Rounded Rectangle 15"/>
           <p:cNvSpPr/>
           <p:nvPr/>
         </p:nvSpPr>
@@ -32816,7 +31408,7 @@
       </p:sp>
       <p:sp>
         <p:nvSpPr>
-          <p:cNvPr id="18" name="Rectangle 17"/>
+          <p:cNvPr id="17" name="Rectangle 16"/>
           <p:cNvSpPr/>
           <p:nvPr/>
         </p:nvSpPr>
@@ -32860,7 +31452,7 @@
       </p:sp>
       <p:sp>
         <p:nvSpPr>
-          <p:cNvPr id="19" name="TextBox 18"/>
+          <p:cNvPr id="18" name="TextBox 17"/>
           <p:cNvSpPr txBox="1"/>
           <p:nvPr/>
         </p:nvSpPr>
@@ -32907,7 +31499,7 @@
       </p:sp>
       <p:sp>
         <p:nvSpPr>
-          <p:cNvPr id="20" name="TextBox 19"/>
+          <p:cNvPr id="19" name="TextBox 18"/>
           <p:cNvSpPr txBox="1"/>
           <p:nvPr/>
         </p:nvSpPr>
@@ -33070,8 +31662,77 @@
         </p:nvSpPr>
         <p:spPr>
           <a:xfrm>
-            <a:off x="713232" y="6272784"/>
-            <a:ext cx="5597920" cy="219456"/>
+            <a:off x="8240677" y="6272784"/>
+            <a:ext cx="2651760" cy="219456"/>
+          </a:xfrm>
+          <a:prstGeom prst="rect">
+            <a:avLst/>
+          </a:prstGeom>
+          <a:noFill/>
+        </p:spPr>
+        <p:txBody>
+          <a:bodyPr wrap="square" lIns="0" rIns="0" tIns="0" bIns="0" anchor="t">
+            <a:spAutoFit/>
+          </a:bodyPr>
+          <a:lstStyle/>
+          <a:p>
+            <a:pPr algn="r">
+              <a:lnSpc>
+                <a:spcPct val="122000"/>
+              </a:lnSpc>
+              <a:spcBef>
+                <a:spcPts val="0"/>
+              </a:spcBef>
+              <a:spcAft>
+                <a:spcPts val="0"/>
+              </a:spcAft>
+            </a:pPr>
+            <a:r>
+              <a:rPr sz="900" b="0" i="0">
+                <a:solidFill>
+                  <a:srgbClr val="636E85"/>
+                </a:solidFill>
+                <a:latin typeface="Segoe UI"/>
+                <a:ea typeface="Segoe UI"/>
+                <a:cs typeface="Segoe UI"/>
+              </a:rPr>
+              <a:t>Lingesh K  ·  OSI2509030</a:t>
+            </a:r>
+            <a:r>
+              <a:rPr sz="900" b="0" i="0">
+                <a:solidFill>
+                  <a:srgbClr val="141C2E"/>
+                </a:solidFill>
+                <a:latin typeface="Segoe UI"/>
+                <a:ea typeface="Segoe UI"/>
+                <a:cs typeface="Segoe UI"/>
+              </a:rPr>
+              <a:t>     </a:t>
+            </a:r>
+            <a:r>
+              <a:rPr sz="900" b="1" i="0">
+                <a:solidFill>
+                  <a:srgbClr val="0E1E3C"/>
+                </a:solidFill>
+                <a:latin typeface="Segoe UI"/>
+                <a:ea typeface="Segoe UI"/>
+                <a:cs typeface="Segoe UI"/>
+              </a:rPr>
+              <a:t>07</a:t>
+            </a:r>
+          </a:p>
+        </p:txBody>
+      </p:sp>
+      <p:sp>
+        <p:nvSpPr>
+          <p:cNvPr id="5" name="TextBox 4"/>
+          <p:cNvSpPr txBox="1"/>
+          <p:nvPr/>
+        </p:nvSpPr>
+        <p:spPr>
+          <a:xfrm>
+            <a:off x="713232" y="566928"/>
+            <a:ext cx="10765231" cy="219456"/>
           </a:xfrm>
           <a:prstGeom prst="rect">
             <a:avLst/>
@@ -33096,106 +31757,15 @@
               </a:spcAft>
             </a:pPr>
             <a:r>
-              <a:rPr sz="900" b="1" i="0">
-                <a:solidFill>
-                  <a:srgbClr val="0E1E3C"/>
-                </a:solidFill>
-                <a:latin typeface="Segoe UI"/>
-                <a:ea typeface="Segoe UI"/>
-                <a:cs typeface="Segoe UI"/>
-              </a:rPr>
-              <a:t>Unit 2</a:t>
-            </a:r>
-            <a:r>
-              <a:rPr sz="900" b="0" i="0">
-                <a:solidFill>
-                  <a:srgbClr val="939EB3"/>
-                </a:solidFill>
-                <a:latin typeface="Segoe UI"/>
-                <a:ea typeface="Segoe UI"/>
-                <a:cs typeface="Segoe UI"/>
-              </a:rPr>
-              <a:t>  ·  </a:t>
-            </a:r>
-            <a:r>
-              <a:rPr sz="900" b="0" i="0">
-                <a:solidFill>
-                  <a:srgbClr val="636E85"/>
-                </a:solidFill>
-                <a:latin typeface="Segoe UI"/>
-                <a:ea typeface="Segoe UI"/>
-                <a:cs typeface="Segoe UI"/>
-              </a:rPr>
-              <a:t>Tools and Technologies</a:t>
-            </a:r>
-          </a:p>
-        </p:txBody>
-      </p:sp>
-      <p:sp>
-        <p:nvSpPr>
-          <p:cNvPr id="5" name="TextBox 4"/>
-          <p:cNvSpPr txBox="1"/>
-          <p:nvPr/>
-        </p:nvSpPr>
-        <p:spPr>
-          <a:xfrm>
-            <a:off x="8240677" y="6272784"/>
-            <a:ext cx="2651760" cy="219456"/>
-          </a:xfrm>
-          <a:prstGeom prst="rect">
-            <a:avLst/>
-          </a:prstGeom>
-          <a:noFill/>
-        </p:spPr>
-        <p:txBody>
-          <a:bodyPr wrap="square" lIns="0" rIns="0" tIns="0" bIns="0" anchor="t">
-            <a:spAutoFit/>
-          </a:bodyPr>
-          <a:lstStyle/>
-          <a:p>
-            <a:pPr algn="r">
-              <a:lnSpc>
-                <a:spcPct val="122000"/>
-              </a:lnSpc>
-              <a:spcBef>
-                <a:spcPts val="0"/>
-              </a:spcBef>
-              <a:spcAft>
-                <a:spcPts val="0"/>
-              </a:spcAft>
-            </a:pPr>
-            <a:r>
-              <a:rPr sz="900" b="0" i="0">
-                <a:solidFill>
-                  <a:srgbClr val="636E85"/>
-                </a:solidFill>
-                <a:latin typeface="Segoe UI"/>
-                <a:ea typeface="Segoe UI"/>
-                <a:cs typeface="Segoe UI"/>
-              </a:rPr>
-              <a:t>Lingesh K  ·  OSI2509030</a:t>
-            </a:r>
-            <a:r>
-              <a:rPr sz="900" b="0" i="0">
-                <a:solidFill>
-                  <a:srgbClr val="141C2E"/>
-                </a:solidFill>
-                <a:latin typeface="Segoe UI"/>
-                <a:ea typeface="Segoe UI"/>
-                <a:cs typeface="Segoe UI"/>
-              </a:rPr>
-              <a:t>     </a:t>
-            </a:r>
-            <a:r>
-              <a:rPr sz="900" b="1" i="0">
-                <a:solidFill>
-                  <a:srgbClr val="0E1E3C"/>
-                </a:solidFill>
-                <a:latin typeface="Segoe UI"/>
-                <a:ea typeface="Segoe UI"/>
-                <a:cs typeface="Segoe UI"/>
-              </a:rPr>
-              <a:t>07</a:t>
+              <a:rPr sz="950" b="1" i="0" spc="160">
+                <a:solidFill>
+                  <a:srgbClr val="745CE0"/>
+                </a:solidFill>
+                <a:latin typeface="Segoe UI"/>
+                <a:ea typeface="Segoe UI"/>
+                <a:cs typeface="Segoe UI"/>
+              </a:rPr>
+              <a:t>ODOO IN DETAIL</a:t>
             </a:r>
           </a:p>
         </p:txBody>
@@ -33203,53 +31773,6 @@
       <p:sp>
         <p:nvSpPr>
           <p:cNvPr id="6" name="TextBox 5"/>
-          <p:cNvSpPr txBox="1"/>
-          <p:nvPr/>
-        </p:nvSpPr>
-        <p:spPr>
-          <a:xfrm>
-            <a:off x="713232" y="566928"/>
-            <a:ext cx="10765231" cy="219456"/>
-          </a:xfrm>
-          <a:prstGeom prst="rect">
-            <a:avLst/>
-          </a:prstGeom>
-          <a:noFill/>
-        </p:spPr>
-        <p:txBody>
-          <a:bodyPr wrap="square" lIns="0" rIns="0" tIns="0" bIns="0" anchor="t">
-            <a:spAutoFit/>
-          </a:bodyPr>
-          <a:lstStyle/>
-          <a:p>
-            <a:pPr algn="l">
-              <a:lnSpc>
-                <a:spcPct val="122000"/>
-              </a:lnSpc>
-              <a:spcBef>
-                <a:spcPts val="0"/>
-              </a:spcBef>
-              <a:spcAft>
-                <a:spcPts val="0"/>
-              </a:spcAft>
-            </a:pPr>
-            <a:r>
-              <a:rPr sz="950" b="1" i="0" spc="160">
-                <a:solidFill>
-                  <a:srgbClr val="745CE0"/>
-                </a:solidFill>
-                <a:latin typeface="Segoe UI"/>
-                <a:ea typeface="Segoe UI"/>
-                <a:cs typeface="Segoe UI"/>
-              </a:rPr>
-              <a:t>ODOO IN DETAIL</a:t>
-            </a:r>
-          </a:p>
-        </p:txBody>
-      </p:sp>
-      <p:sp>
-        <p:nvSpPr>
-          <p:cNvPr id="7" name="TextBox 6"/>
           <p:cNvSpPr txBox="1"/>
           <p:nvPr/>
         </p:nvSpPr>
@@ -33296,7 +31819,7 @@
       </p:sp>
       <p:sp>
         <p:nvSpPr>
-          <p:cNvPr id="8" name="Rectangle 7"/>
+          <p:cNvPr id="7" name="Rectangle 6"/>
           <p:cNvSpPr/>
           <p:nvPr/>
         </p:nvSpPr>
@@ -33340,7 +31863,7 @@
       </p:sp>
       <p:sp>
         <p:nvSpPr>
-          <p:cNvPr id="9" name="TextBox 8"/>
+          <p:cNvPr id="8" name="TextBox 7"/>
           <p:cNvSpPr txBox="1"/>
           <p:nvPr/>
         </p:nvSpPr>
@@ -33387,7 +31910,7 @@
       </p:sp>
       <p:sp>
         <p:nvSpPr>
-          <p:cNvPr id="10" name="Rectangle 9"/>
+          <p:cNvPr id="9" name="Rectangle 8"/>
           <p:cNvSpPr/>
           <p:nvPr/>
         </p:nvSpPr>
@@ -33431,7 +31954,7 @@
       </p:sp>
       <p:sp>
         <p:nvSpPr>
-          <p:cNvPr id="11" name="Rounded Rectangle 10"/>
+          <p:cNvPr id="10" name="Rounded Rectangle 9"/>
           <p:cNvSpPr/>
           <p:nvPr/>
         </p:nvSpPr>
@@ -33477,7 +32000,7 @@
       </p:sp>
       <p:sp>
         <p:nvSpPr>
-          <p:cNvPr id="12" name="TextBox 11"/>
+          <p:cNvPr id="11" name="TextBox 10"/>
           <p:cNvSpPr txBox="1"/>
           <p:nvPr/>
         </p:nvSpPr>
@@ -33524,7 +32047,7 @@
       </p:sp>
       <p:sp>
         <p:nvSpPr>
-          <p:cNvPr id="13" name="Rounded Rectangle 12"/>
+          <p:cNvPr id="12" name="Rounded Rectangle 11"/>
           <p:cNvSpPr/>
           <p:nvPr/>
         </p:nvSpPr>
@@ -33570,7 +32093,7 @@
       </p:sp>
       <p:sp>
         <p:nvSpPr>
-          <p:cNvPr id="14" name="TextBox 13"/>
+          <p:cNvPr id="13" name="TextBox 12"/>
           <p:cNvSpPr txBox="1"/>
           <p:nvPr/>
         </p:nvSpPr>
@@ -33617,7 +32140,7 @@
       </p:sp>
       <p:sp>
         <p:nvSpPr>
-          <p:cNvPr id="15" name="Rounded Rectangle 14"/>
+          <p:cNvPr id="14" name="Rounded Rectangle 13"/>
           <p:cNvSpPr/>
           <p:nvPr/>
         </p:nvSpPr>
@@ -33663,7 +32186,7 @@
       </p:sp>
       <p:sp>
         <p:nvSpPr>
-          <p:cNvPr id="16" name="TextBox 15"/>
+          <p:cNvPr id="15" name="TextBox 14"/>
           <p:cNvSpPr txBox="1"/>
           <p:nvPr/>
         </p:nvSpPr>
@@ -33710,7 +32233,7 @@
       </p:sp>
       <p:sp>
         <p:nvSpPr>
-          <p:cNvPr id="17" name="Rounded Rectangle 16"/>
+          <p:cNvPr id="16" name="Rounded Rectangle 15"/>
           <p:cNvSpPr/>
           <p:nvPr/>
         </p:nvSpPr>
@@ -33756,7 +32279,7 @@
       </p:sp>
       <p:sp>
         <p:nvSpPr>
-          <p:cNvPr id="18" name="TextBox 17"/>
+          <p:cNvPr id="17" name="TextBox 16"/>
           <p:cNvSpPr txBox="1"/>
           <p:nvPr/>
         </p:nvSpPr>
@@ -33803,7 +32326,7 @@
       </p:sp>
       <p:sp>
         <p:nvSpPr>
-          <p:cNvPr id="19" name="Rounded Rectangle 18"/>
+          <p:cNvPr id="18" name="Rounded Rectangle 17"/>
           <p:cNvSpPr/>
           <p:nvPr/>
         </p:nvSpPr>
@@ -33849,7 +32372,7 @@
       </p:sp>
       <p:sp>
         <p:nvSpPr>
-          <p:cNvPr id="20" name="TextBox 19"/>
+          <p:cNvPr id="19" name="TextBox 18"/>
           <p:cNvSpPr txBox="1"/>
           <p:nvPr/>
         </p:nvSpPr>
@@ -33896,7 +32419,7 @@
       </p:sp>
       <p:sp>
         <p:nvSpPr>
-          <p:cNvPr id="21" name="Rounded Rectangle 20"/>
+          <p:cNvPr id="20" name="Rounded Rectangle 19"/>
           <p:cNvSpPr/>
           <p:nvPr/>
         </p:nvSpPr>
@@ -33942,7 +32465,7 @@
       </p:sp>
       <p:sp>
         <p:nvSpPr>
-          <p:cNvPr id="22" name="TextBox 21"/>
+          <p:cNvPr id="21" name="TextBox 20"/>
           <p:cNvSpPr txBox="1"/>
           <p:nvPr/>
         </p:nvSpPr>
@@ -33989,7 +32512,7 @@
       </p:sp>
       <p:sp>
         <p:nvSpPr>
-          <p:cNvPr id="23" name="Rounded Rectangle 22"/>
+          <p:cNvPr id="22" name="Rounded Rectangle 21"/>
           <p:cNvSpPr/>
           <p:nvPr/>
         </p:nvSpPr>
@@ -34043,7 +32566,7 @@
       </p:sp>
       <p:sp>
         <p:nvSpPr>
-          <p:cNvPr id="24" name="Rectangle 23"/>
+          <p:cNvPr id="23" name="Rectangle 22"/>
           <p:cNvSpPr/>
           <p:nvPr/>
         </p:nvSpPr>
@@ -34087,7 +32610,7 @@
       </p:sp>
       <p:sp>
         <p:nvSpPr>
-          <p:cNvPr id="25" name="TextBox 24"/>
+          <p:cNvPr id="24" name="TextBox 23"/>
           <p:cNvSpPr txBox="1"/>
           <p:nvPr/>
         </p:nvSpPr>
@@ -34134,7 +32657,7 @@
       </p:sp>
       <p:sp>
         <p:nvSpPr>
-          <p:cNvPr id="26" name="TextBox 25"/>
+          <p:cNvPr id="25" name="TextBox 24"/>
           <p:cNvSpPr txBox="1"/>
           <p:nvPr/>
         </p:nvSpPr>
@@ -34181,7 +32704,7 @@
       </p:sp>
       <p:sp>
         <p:nvSpPr>
-          <p:cNvPr id="27" name="Rounded Rectangle 26"/>
+          <p:cNvPr id="26" name="Rounded Rectangle 25"/>
           <p:cNvSpPr/>
           <p:nvPr/>
         </p:nvSpPr>
@@ -34235,7 +32758,7 @@
       </p:sp>
       <p:sp>
         <p:nvSpPr>
-          <p:cNvPr id="28" name="Rectangle 27"/>
+          <p:cNvPr id="27" name="Rectangle 26"/>
           <p:cNvSpPr/>
           <p:nvPr/>
         </p:nvSpPr>
@@ -34279,7 +32802,7 @@
       </p:sp>
       <p:sp>
         <p:nvSpPr>
-          <p:cNvPr id="29" name="TextBox 28"/>
+          <p:cNvPr id="28" name="TextBox 27"/>
           <p:cNvSpPr txBox="1"/>
           <p:nvPr/>
         </p:nvSpPr>
@@ -34326,7 +32849,7 @@
       </p:sp>
       <p:sp>
         <p:nvSpPr>
-          <p:cNvPr id="30" name="TextBox 29"/>
+          <p:cNvPr id="29" name="TextBox 28"/>
           <p:cNvSpPr txBox="1"/>
           <p:nvPr/>
         </p:nvSpPr>
@@ -34373,7 +32896,7 @@
       </p:sp>
       <p:sp>
         <p:nvSpPr>
-          <p:cNvPr id="31" name="Rounded Rectangle 30"/>
+          <p:cNvPr id="30" name="Rounded Rectangle 29"/>
           <p:cNvSpPr/>
           <p:nvPr/>
         </p:nvSpPr>
@@ -34427,7 +32950,7 @@
       </p:sp>
       <p:sp>
         <p:nvSpPr>
-          <p:cNvPr id="32" name="Rectangle 31"/>
+          <p:cNvPr id="31" name="Rectangle 30"/>
           <p:cNvSpPr/>
           <p:nvPr/>
         </p:nvSpPr>
@@ -34471,7 +32994,7 @@
       </p:sp>
       <p:sp>
         <p:nvSpPr>
-          <p:cNvPr id="33" name="TextBox 32"/>
+          <p:cNvPr id="32" name="TextBox 31"/>
           <p:cNvSpPr txBox="1"/>
           <p:nvPr/>
         </p:nvSpPr>
@@ -34518,7 +33041,7 @@
       </p:sp>
       <p:sp>
         <p:nvSpPr>
-          <p:cNvPr id="34" name="TextBox 33"/>
+          <p:cNvPr id="33" name="TextBox 32"/>
           <p:cNvSpPr txBox="1"/>
           <p:nvPr/>
         </p:nvSpPr>
@@ -34657,8 +33180,77 @@
         </p:nvSpPr>
         <p:spPr>
           <a:xfrm>
-            <a:off x="713232" y="6272784"/>
-            <a:ext cx="5597920" cy="219456"/>
+            <a:off x="8240677" y="6272784"/>
+            <a:ext cx="2651760" cy="219456"/>
+          </a:xfrm>
+          <a:prstGeom prst="rect">
+            <a:avLst/>
+          </a:prstGeom>
+          <a:noFill/>
+        </p:spPr>
+        <p:txBody>
+          <a:bodyPr wrap="square" lIns="0" rIns="0" tIns="0" bIns="0" anchor="t">
+            <a:spAutoFit/>
+          </a:bodyPr>
+          <a:lstStyle/>
+          <a:p>
+            <a:pPr algn="r">
+              <a:lnSpc>
+                <a:spcPct val="122000"/>
+              </a:lnSpc>
+              <a:spcBef>
+                <a:spcPts val="0"/>
+              </a:spcBef>
+              <a:spcAft>
+                <a:spcPts val="0"/>
+              </a:spcAft>
+            </a:pPr>
+            <a:r>
+              <a:rPr sz="900" b="0" i="0">
+                <a:solidFill>
+                  <a:srgbClr val="636E85"/>
+                </a:solidFill>
+                <a:latin typeface="Segoe UI"/>
+                <a:ea typeface="Segoe UI"/>
+                <a:cs typeface="Segoe UI"/>
+              </a:rPr>
+              <a:t>Lingesh K  ·  OSI2509030</a:t>
+            </a:r>
+            <a:r>
+              <a:rPr sz="900" b="0" i="0">
+                <a:solidFill>
+                  <a:srgbClr val="141C2E"/>
+                </a:solidFill>
+                <a:latin typeface="Segoe UI"/>
+                <a:ea typeface="Segoe UI"/>
+                <a:cs typeface="Segoe UI"/>
+              </a:rPr>
+              <a:t>     </a:t>
+            </a:r>
+            <a:r>
+              <a:rPr sz="900" b="1" i="0">
+                <a:solidFill>
+                  <a:srgbClr val="0E1E3C"/>
+                </a:solidFill>
+                <a:latin typeface="Segoe UI"/>
+                <a:ea typeface="Segoe UI"/>
+                <a:cs typeface="Segoe UI"/>
+              </a:rPr>
+              <a:t>08</a:t>
+            </a:r>
+          </a:p>
+        </p:txBody>
+      </p:sp>
+      <p:sp>
+        <p:nvSpPr>
+          <p:cNvPr id="5" name="TextBox 4"/>
+          <p:cNvSpPr txBox="1"/>
+          <p:nvPr/>
+        </p:nvSpPr>
+        <p:spPr>
+          <a:xfrm>
+            <a:off x="713232" y="566928"/>
+            <a:ext cx="10765231" cy="219456"/>
           </a:xfrm>
           <a:prstGeom prst="rect">
             <a:avLst/>
@@ -34683,106 +33275,15 @@
               </a:spcAft>
             </a:pPr>
             <a:r>
-              <a:rPr sz="900" b="1" i="0">
-                <a:solidFill>
-                  <a:srgbClr val="0E1E3C"/>
-                </a:solidFill>
-                <a:latin typeface="Segoe UI"/>
-                <a:ea typeface="Segoe UI"/>
-                <a:cs typeface="Segoe UI"/>
-              </a:rPr>
-              <a:t>Unit 2</a:t>
-            </a:r>
-            <a:r>
-              <a:rPr sz="900" b="0" i="0">
-                <a:solidFill>
-                  <a:srgbClr val="939EB3"/>
-                </a:solidFill>
-                <a:latin typeface="Segoe UI"/>
-                <a:ea typeface="Segoe UI"/>
-                <a:cs typeface="Segoe UI"/>
-              </a:rPr>
-              <a:t>  ·  </a:t>
-            </a:r>
-            <a:r>
-              <a:rPr sz="900" b="0" i="0">
-                <a:solidFill>
-                  <a:srgbClr val="636E85"/>
-                </a:solidFill>
-                <a:latin typeface="Segoe UI"/>
-                <a:ea typeface="Segoe UI"/>
-                <a:cs typeface="Segoe UI"/>
-              </a:rPr>
-              <a:t>Tools and Technologies</a:t>
-            </a:r>
-          </a:p>
-        </p:txBody>
-      </p:sp>
-      <p:sp>
-        <p:nvSpPr>
-          <p:cNvPr id="5" name="TextBox 4"/>
-          <p:cNvSpPr txBox="1"/>
-          <p:nvPr/>
-        </p:nvSpPr>
-        <p:spPr>
-          <a:xfrm>
-            <a:off x="8240677" y="6272784"/>
-            <a:ext cx="2651760" cy="219456"/>
-          </a:xfrm>
-          <a:prstGeom prst="rect">
-            <a:avLst/>
-          </a:prstGeom>
-          <a:noFill/>
-        </p:spPr>
-        <p:txBody>
-          <a:bodyPr wrap="square" lIns="0" rIns="0" tIns="0" bIns="0" anchor="t">
-            <a:spAutoFit/>
-          </a:bodyPr>
-          <a:lstStyle/>
-          <a:p>
-            <a:pPr algn="r">
-              <a:lnSpc>
-                <a:spcPct val="122000"/>
-              </a:lnSpc>
-              <a:spcBef>
-                <a:spcPts val="0"/>
-              </a:spcBef>
-              <a:spcAft>
-                <a:spcPts val="0"/>
-              </a:spcAft>
-            </a:pPr>
-            <a:r>
-              <a:rPr sz="900" b="0" i="0">
-                <a:solidFill>
-                  <a:srgbClr val="636E85"/>
-                </a:solidFill>
-                <a:latin typeface="Segoe UI"/>
-                <a:ea typeface="Segoe UI"/>
-                <a:cs typeface="Segoe UI"/>
-              </a:rPr>
-              <a:t>Lingesh K  ·  OSI2509030</a:t>
-            </a:r>
-            <a:r>
-              <a:rPr sz="900" b="0" i="0">
-                <a:solidFill>
-                  <a:srgbClr val="141C2E"/>
-                </a:solidFill>
-                <a:latin typeface="Segoe UI"/>
-                <a:ea typeface="Segoe UI"/>
-                <a:cs typeface="Segoe UI"/>
-              </a:rPr>
-              <a:t>     </a:t>
-            </a:r>
-            <a:r>
-              <a:rPr sz="900" b="1" i="0">
-                <a:solidFill>
-                  <a:srgbClr val="0E1E3C"/>
-                </a:solidFill>
-                <a:latin typeface="Segoe UI"/>
-                <a:ea typeface="Segoe UI"/>
-                <a:cs typeface="Segoe UI"/>
-              </a:rPr>
-              <a:t>08</a:t>
+              <a:rPr sz="950" b="1" i="0" spc="160">
+                <a:solidFill>
+                  <a:srgbClr val="3B7AF7"/>
+                </a:solidFill>
+                <a:latin typeface="Segoe UI"/>
+                <a:ea typeface="Segoe UI"/>
+                <a:cs typeface="Segoe UI"/>
+              </a:rPr>
+              <a:t>QUICK REFERENCE</a:t>
             </a:r>
           </a:p>
         </p:txBody>
@@ -34790,53 +33291,6 @@
       <p:sp>
         <p:nvSpPr>
           <p:cNvPr id="6" name="TextBox 5"/>
-          <p:cNvSpPr txBox="1"/>
-          <p:nvPr/>
-        </p:nvSpPr>
-        <p:spPr>
-          <a:xfrm>
-            <a:off x="713232" y="566928"/>
-            <a:ext cx="10765231" cy="219456"/>
-          </a:xfrm>
-          <a:prstGeom prst="rect">
-            <a:avLst/>
-          </a:prstGeom>
-          <a:noFill/>
-        </p:spPr>
-        <p:txBody>
-          <a:bodyPr wrap="square" lIns="0" rIns="0" tIns="0" bIns="0" anchor="t">
-            <a:spAutoFit/>
-          </a:bodyPr>
-          <a:lstStyle/>
-          <a:p>
-            <a:pPr algn="l">
-              <a:lnSpc>
-                <a:spcPct val="122000"/>
-              </a:lnSpc>
-              <a:spcBef>
-                <a:spcPts val="0"/>
-              </a:spcBef>
-              <a:spcAft>
-                <a:spcPts val="0"/>
-              </a:spcAft>
-            </a:pPr>
-            <a:r>
-              <a:rPr sz="950" b="1" i="0" spc="160">
-                <a:solidFill>
-                  <a:srgbClr val="3B7AF7"/>
-                </a:solidFill>
-                <a:latin typeface="Segoe UI"/>
-                <a:ea typeface="Segoe UI"/>
-                <a:cs typeface="Segoe UI"/>
-              </a:rPr>
-              <a:t>QUICK REFERENCE</a:t>
-            </a:r>
-          </a:p>
-        </p:txBody>
-      </p:sp>
-      <p:sp>
-        <p:nvSpPr>
-          <p:cNvPr id="7" name="TextBox 6"/>
           <p:cNvSpPr txBox="1"/>
           <p:nvPr/>
         </p:nvSpPr>
@@ -34883,7 +33337,7 @@
       </p:sp>
       <p:sp>
         <p:nvSpPr>
-          <p:cNvPr id="8" name="Rectangle 7"/>
+          <p:cNvPr id="7" name="Rectangle 6"/>
           <p:cNvSpPr/>
           <p:nvPr/>
         </p:nvSpPr>
@@ -34927,7 +33381,7 @@
       </p:sp>
       <p:graphicFrame>
         <p:nvGraphicFramePr>
-          <p:cNvPr id="9" name="Table 8"/>
+          <p:cNvPr id="8" name="Table 7"/>
           <p:cNvGraphicFramePr>
             <a:graphicFrameLocks noGrp="1"/>
           </p:cNvGraphicFramePr>
@@ -35949,7 +34403,7 @@
       </p:graphicFrame>
       <p:sp>
         <p:nvSpPr>
-          <p:cNvPr id="10" name="Rounded Rectangle 9"/>
+          <p:cNvPr id="9" name="Rounded Rectangle 8"/>
           <p:cNvSpPr/>
           <p:nvPr/>
         </p:nvSpPr>
@@ -36016,7 +34470,7 @@
       </p:sp>
       <p:sp>
         <p:nvSpPr>
-          <p:cNvPr id="11" name="Rectangle 10"/>
+          <p:cNvPr id="10" name="Rectangle 9"/>
           <p:cNvSpPr/>
           <p:nvPr/>
         </p:nvSpPr>
@@ -36152,8 +34606,77 @@
         </p:nvSpPr>
         <p:spPr>
           <a:xfrm>
-            <a:off x="713232" y="6272784"/>
-            <a:ext cx="5597920" cy="219456"/>
+            <a:off x="8240677" y="6272784"/>
+            <a:ext cx="2651760" cy="219456"/>
+          </a:xfrm>
+          <a:prstGeom prst="rect">
+            <a:avLst/>
+          </a:prstGeom>
+          <a:noFill/>
+        </p:spPr>
+        <p:txBody>
+          <a:bodyPr wrap="square" lIns="0" rIns="0" tIns="0" bIns="0" anchor="t">
+            <a:spAutoFit/>
+          </a:bodyPr>
+          <a:lstStyle/>
+          <a:p>
+            <a:pPr algn="r">
+              <a:lnSpc>
+                <a:spcPct val="122000"/>
+              </a:lnSpc>
+              <a:spcBef>
+                <a:spcPts val="0"/>
+              </a:spcBef>
+              <a:spcAft>
+                <a:spcPts val="0"/>
+              </a:spcAft>
+            </a:pPr>
+            <a:r>
+              <a:rPr sz="900" b="0" i="0">
+                <a:solidFill>
+                  <a:srgbClr val="636E85"/>
+                </a:solidFill>
+                <a:latin typeface="Segoe UI"/>
+                <a:ea typeface="Segoe UI"/>
+                <a:cs typeface="Segoe UI"/>
+              </a:rPr>
+              <a:t>Lingesh K  ·  OSI2509030</a:t>
+            </a:r>
+            <a:r>
+              <a:rPr sz="900" b="0" i="0">
+                <a:solidFill>
+                  <a:srgbClr val="141C2E"/>
+                </a:solidFill>
+                <a:latin typeface="Segoe UI"/>
+                <a:ea typeface="Segoe UI"/>
+                <a:cs typeface="Segoe UI"/>
+              </a:rPr>
+              <a:t>     </a:t>
+            </a:r>
+            <a:r>
+              <a:rPr sz="900" b="1" i="0">
+                <a:solidFill>
+                  <a:srgbClr val="0E1E3C"/>
+                </a:solidFill>
+                <a:latin typeface="Segoe UI"/>
+                <a:ea typeface="Segoe UI"/>
+                <a:cs typeface="Segoe UI"/>
+              </a:rPr>
+              <a:t>09</a:t>
+            </a:r>
+          </a:p>
+        </p:txBody>
+      </p:sp>
+      <p:sp>
+        <p:nvSpPr>
+          <p:cNvPr id="5" name="TextBox 4"/>
+          <p:cNvSpPr txBox="1"/>
+          <p:nvPr/>
+        </p:nvSpPr>
+        <p:spPr>
+          <a:xfrm>
+            <a:off x="713232" y="566928"/>
+            <a:ext cx="10765231" cy="219456"/>
           </a:xfrm>
           <a:prstGeom prst="rect">
             <a:avLst/>
@@ -36178,106 +34701,15 @@
               </a:spcAft>
             </a:pPr>
             <a:r>
-              <a:rPr sz="900" b="1" i="0">
-                <a:solidFill>
-                  <a:srgbClr val="0E1E3C"/>
-                </a:solidFill>
-                <a:latin typeface="Segoe UI"/>
-                <a:ea typeface="Segoe UI"/>
-                <a:cs typeface="Segoe UI"/>
-              </a:rPr>
-              <a:t>Unit 2</a:t>
-            </a:r>
-            <a:r>
-              <a:rPr sz="900" b="0" i="0">
-                <a:solidFill>
-                  <a:srgbClr val="939EB3"/>
-                </a:solidFill>
-                <a:latin typeface="Segoe UI"/>
-                <a:ea typeface="Segoe UI"/>
-                <a:cs typeface="Segoe UI"/>
-              </a:rPr>
-              <a:t>  ·  </a:t>
-            </a:r>
-            <a:r>
-              <a:rPr sz="900" b="0" i="0">
-                <a:solidFill>
-                  <a:srgbClr val="636E85"/>
-                </a:solidFill>
-                <a:latin typeface="Segoe UI"/>
-                <a:ea typeface="Segoe UI"/>
-                <a:cs typeface="Segoe UI"/>
-              </a:rPr>
-              <a:t>Tools and Technologies</a:t>
-            </a:r>
-          </a:p>
-        </p:txBody>
-      </p:sp>
-      <p:sp>
-        <p:nvSpPr>
-          <p:cNvPr id="5" name="TextBox 4"/>
-          <p:cNvSpPr txBox="1"/>
-          <p:nvPr/>
-        </p:nvSpPr>
-        <p:spPr>
-          <a:xfrm>
-            <a:off x="8240677" y="6272784"/>
-            <a:ext cx="2651760" cy="219456"/>
-          </a:xfrm>
-          <a:prstGeom prst="rect">
-            <a:avLst/>
-          </a:prstGeom>
-          <a:noFill/>
-        </p:spPr>
-        <p:txBody>
-          <a:bodyPr wrap="square" lIns="0" rIns="0" tIns="0" bIns="0" anchor="t">
-            <a:spAutoFit/>
-          </a:bodyPr>
-          <a:lstStyle/>
-          <a:p>
-            <a:pPr algn="r">
-              <a:lnSpc>
-                <a:spcPct val="122000"/>
-              </a:lnSpc>
-              <a:spcBef>
-                <a:spcPts val="0"/>
-              </a:spcBef>
-              <a:spcAft>
-                <a:spcPts val="0"/>
-              </a:spcAft>
-            </a:pPr>
-            <a:r>
-              <a:rPr sz="900" b="0" i="0">
-                <a:solidFill>
-                  <a:srgbClr val="636E85"/>
-                </a:solidFill>
-                <a:latin typeface="Segoe UI"/>
-                <a:ea typeface="Segoe UI"/>
-                <a:cs typeface="Segoe UI"/>
-              </a:rPr>
-              <a:t>Lingesh K  ·  OSI2509030</a:t>
-            </a:r>
-            <a:r>
-              <a:rPr sz="900" b="0" i="0">
-                <a:solidFill>
-                  <a:srgbClr val="141C2E"/>
-                </a:solidFill>
-                <a:latin typeface="Segoe UI"/>
-                <a:ea typeface="Segoe UI"/>
-                <a:cs typeface="Segoe UI"/>
-              </a:rPr>
-              <a:t>     </a:t>
-            </a:r>
-            <a:r>
-              <a:rPr sz="900" b="1" i="0">
-                <a:solidFill>
-                  <a:srgbClr val="0E1E3C"/>
-                </a:solidFill>
-                <a:latin typeface="Segoe UI"/>
-                <a:ea typeface="Segoe UI"/>
-                <a:cs typeface="Segoe UI"/>
-              </a:rPr>
-              <a:t>09</a:t>
+              <a:rPr sz="950" b="1" i="0" spc="160">
+                <a:solidFill>
+                  <a:srgbClr val="3B7AF7"/>
+                </a:solidFill>
+                <a:latin typeface="Segoe UI"/>
+                <a:ea typeface="Segoe UI"/>
+                <a:cs typeface="Segoe UI"/>
+              </a:rPr>
+              <a:t>CHOOSING WELL</a:t>
             </a:r>
           </a:p>
         </p:txBody>
@@ -36285,53 +34717,6 @@
       <p:sp>
         <p:nvSpPr>
           <p:cNvPr id="6" name="TextBox 5"/>
-          <p:cNvSpPr txBox="1"/>
-          <p:nvPr/>
-        </p:nvSpPr>
-        <p:spPr>
-          <a:xfrm>
-            <a:off x="713232" y="566928"/>
-            <a:ext cx="10765231" cy="219456"/>
-          </a:xfrm>
-          <a:prstGeom prst="rect">
-            <a:avLst/>
-          </a:prstGeom>
-          <a:noFill/>
-        </p:spPr>
-        <p:txBody>
-          <a:bodyPr wrap="square" lIns="0" rIns="0" tIns="0" bIns="0" anchor="t">
-            <a:spAutoFit/>
-          </a:bodyPr>
-          <a:lstStyle/>
-          <a:p>
-            <a:pPr algn="l">
-              <a:lnSpc>
-                <a:spcPct val="122000"/>
-              </a:lnSpc>
-              <a:spcBef>
-                <a:spcPts val="0"/>
-              </a:spcBef>
-              <a:spcAft>
-                <a:spcPts val="0"/>
-              </a:spcAft>
-            </a:pPr>
-            <a:r>
-              <a:rPr sz="950" b="1" i="0" spc="160">
-                <a:solidFill>
-                  <a:srgbClr val="3B7AF7"/>
-                </a:solidFill>
-                <a:latin typeface="Segoe UI"/>
-                <a:ea typeface="Segoe UI"/>
-                <a:cs typeface="Segoe UI"/>
-              </a:rPr>
-              <a:t>CHOOSING WELL</a:t>
-            </a:r>
-          </a:p>
-        </p:txBody>
-      </p:sp>
-      <p:sp>
-        <p:nvSpPr>
-          <p:cNvPr id="7" name="TextBox 6"/>
           <p:cNvSpPr txBox="1"/>
           <p:nvPr/>
         </p:nvSpPr>
@@ -36378,7 +34763,7 @@
       </p:sp>
       <p:sp>
         <p:nvSpPr>
-          <p:cNvPr id="8" name="Rectangle 7"/>
+          <p:cNvPr id="7" name="Rectangle 6"/>
           <p:cNvSpPr/>
           <p:nvPr/>
         </p:nvSpPr>
@@ -36422,7 +34807,7 @@
       </p:sp>
       <p:sp>
         <p:nvSpPr>
-          <p:cNvPr id="9" name="Rectangle 8"/>
+          <p:cNvPr id="8" name="Rectangle 7"/>
           <p:cNvSpPr/>
           <p:nvPr/>
         </p:nvSpPr>
@@ -36466,7 +34851,7 @@
       </p:sp>
       <p:sp>
         <p:nvSpPr>
-          <p:cNvPr id="10" name="Oval 9"/>
+          <p:cNvPr id="9" name="Oval 8"/>
           <p:cNvSpPr/>
           <p:nvPr/>
         </p:nvSpPr>
@@ -36510,7 +34895,7 @@
       </p:sp>
       <p:sp>
         <p:nvSpPr>
-          <p:cNvPr id="11" name="TextBox 10"/>
+          <p:cNvPr id="10" name="TextBox 9"/>
           <p:cNvSpPr txBox="1"/>
           <p:nvPr/>
         </p:nvSpPr>
@@ -36557,7 +34942,7 @@
       </p:sp>
       <p:sp>
         <p:nvSpPr>
-          <p:cNvPr id="12" name="Rounded Rectangle 11"/>
+          <p:cNvPr id="11" name="Rounded Rectangle 10"/>
           <p:cNvSpPr/>
           <p:nvPr/>
         </p:nvSpPr>
@@ -36605,7 +34990,7 @@
       </p:sp>
       <p:sp>
         <p:nvSpPr>
-          <p:cNvPr id="13" name="TextBox 12"/>
+          <p:cNvPr id="12" name="TextBox 11"/>
           <p:cNvSpPr txBox="1"/>
           <p:nvPr/>
         </p:nvSpPr>
@@ -36652,7 +35037,7 @@
       </p:sp>
       <p:sp>
         <p:nvSpPr>
-          <p:cNvPr id="14" name="TextBox 13"/>
+          <p:cNvPr id="13" name="TextBox 12"/>
           <p:cNvSpPr txBox="1"/>
           <p:nvPr/>
         </p:nvSpPr>
@@ -36699,7 +35084,7 @@
       </p:sp>
       <p:sp>
         <p:nvSpPr>
-          <p:cNvPr id="15" name="Oval 14"/>
+          <p:cNvPr id="14" name="Oval 13"/>
           <p:cNvSpPr/>
           <p:nvPr/>
         </p:nvSpPr>
@@ -36743,7 +35128,7 @@
       </p:sp>
       <p:sp>
         <p:nvSpPr>
-          <p:cNvPr id="16" name="TextBox 15"/>
+          <p:cNvPr id="15" name="TextBox 14"/>
           <p:cNvSpPr txBox="1"/>
           <p:nvPr/>
         </p:nvSpPr>
@@ -36790,7 +35175,7 @@
       </p:sp>
       <p:sp>
         <p:nvSpPr>
-          <p:cNvPr id="17" name="Rounded Rectangle 16"/>
+          <p:cNvPr id="16" name="Rounded Rectangle 15"/>
           <p:cNvSpPr/>
           <p:nvPr/>
         </p:nvSpPr>
@@ -36838,7 +35223,7 @@
       </p:sp>
       <p:sp>
         <p:nvSpPr>
-          <p:cNvPr id="18" name="TextBox 17"/>
+          <p:cNvPr id="17" name="TextBox 16"/>
           <p:cNvSpPr txBox="1"/>
           <p:nvPr/>
         </p:nvSpPr>
@@ -36885,7 +35270,7 @@
       </p:sp>
       <p:sp>
         <p:nvSpPr>
-          <p:cNvPr id="19" name="TextBox 18"/>
+          <p:cNvPr id="18" name="TextBox 17"/>
           <p:cNvSpPr txBox="1"/>
           <p:nvPr/>
         </p:nvSpPr>
@@ -36932,7 +35317,7 @@
       </p:sp>
       <p:sp>
         <p:nvSpPr>
-          <p:cNvPr id="20" name="Oval 19"/>
+          <p:cNvPr id="19" name="Oval 18"/>
           <p:cNvSpPr/>
           <p:nvPr/>
         </p:nvSpPr>
@@ -36976,7 +35361,7 @@
       </p:sp>
       <p:sp>
         <p:nvSpPr>
-          <p:cNvPr id="21" name="TextBox 20"/>
+          <p:cNvPr id="20" name="TextBox 19"/>
           <p:cNvSpPr txBox="1"/>
           <p:nvPr/>
         </p:nvSpPr>
@@ -37023,7 +35408,7 @@
       </p:sp>
       <p:sp>
         <p:nvSpPr>
-          <p:cNvPr id="22" name="Rounded Rectangle 21"/>
+          <p:cNvPr id="21" name="Rounded Rectangle 20"/>
           <p:cNvSpPr/>
           <p:nvPr/>
         </p:nvSpPr>
@@ -37071,7 +35456,7 @@
       </p:sp>
       <p:sp>
         <p:nvSpPr>
-          <p:cNvPr id="23" name="TextBox 22"/>
+          <p:cNvPr id="22" name="TextBox 21"/>
           <p:cNvSpPr txBox="1"/>
           <p:nvPr/>
         </p:nvSpPr>
@@ -37118,7 +35503,7 @@
       </p:sp>
       <p:sp>
         <p:nvSpPr>
-          <p:cNvPr id="24" name="TextBox 23"/>
+          <p:cNvPr id="23" name="TextBox 22"/>
           <p:cNvSpPr txBox="1"/>
           <p:nvPr/>
         </p:nvSpPr>
@@ -37165,7 +35550,7 @@
       </p:sp>
       <p:sp>
         <p:nvSpPr>
-          <p:cNvPr id="25" name="Oval 24"/>
+          <p:cNvPr id="24" name="Oval 23"/>
           <p:cNvSpPr/>
           <p:nvPr/>
         </p:nvSpPr>
@@ -37209,7 +35594,7 @@
       </p:sp>
       <p:sp>
         <p:nvSpPr>
-          <p:cNvPr id="26" name="TextBox 25"/>
+          <p:cNvPr id="25" name="TextBox 24"/>
           <p:cNvSpPr txBox="1"/>
           <p:nvPr/>
         </p:nvSpPr>
@@ -37256,7 +35641,7 @@
       </p:sp>
       <p:sp>
         <p:nvSpPr>
-          <p:cNvPr id="27" name="Rounded Rectangle 26"/>
+          <p:cNvPr id="26" name="Rounded Rectangle 25"/>
           <p:cNvSpPr/>
           <p:nvPr/>
         </p:nvSpPr>
@@ -37304,7 +35689,7 @@
       </p:sp>
       <p:sp>
         <p:nvSpPr>
-          <p:cNvPr id="28" name="TextBox 27"/>
+          <p:cNvPr id="27" name="TextBox 26"/>
           <p:cNvSpPr txBox="1"/>
           <p:nvPr/>
         </p:nvSpPr>
@@ -37351,7 +35736,7 @@
       </p:sp>
       <p:sp>
         <p:nvSpPr>
-          <p:cNvPr id="29" name="TextBox 28"/>
+          <p:cNvPr id="28" name="TextBox 27"/>
           <p:cNvSpPr txBox="1"/>
           <p:nvPr/>
         </p:nvSpPr>
@@ -37398,7 +35783,7 @@
       </p:sp>
       <p:sp>
         <p:nvSpPr>
-          <p:cNvPr id="30" name="Rounded Rectangle 29"/>
+          <p:cNvPr id="29" name="Rounded Rectangle 28"/>
           <p:cNvSpPr/>
           <p:nvPr/>
         </p:nvSpPr>
@@ -37465,7 +35850,7 @@
       </p:sp>
       <p:sp>
         <p:nvSpPr>
-          <p:cNvPr id="31" name="Rectangle 30"/>
+          <p:cNvPr id="30" name="Rectangle 29"/>
           <p:cNvSpPr/>
           <p:nvPr/>
         </p:nvSpPr>

--- a/Unit 2 - Tools and Technologies.pptx
+++ b/Unit 2 - Tools and Technologies.pptx
@@ -4187,80 +4187,13 @@
       </p:pic>
       <p:sp>
         <p:nvSpPr>
-          <p:cNvPr id="9" name="Rounded Rectangle 8"/>
-          <p:cNvSpPr/>
-          <p:nvPr/>
-        </p:nvSpPr>
-        <p:spPr>
-          <a:xfrm>
-            <a:off x="932688" y="1572768"/>
-            <a:ext cx="1481328" cy="384048"/>
-          </a:xfrm>
-          <a:prstGeom prst="roundRect">
-            <a:avLst>
-              <a:gd name="adj" fmla="val 50000"/>
-            </a:avLst>
-          </a:prstGeom>
-          <a:noFill/>
-          <a:ln w="15875">
-            <a:solidFill>
-              <a:srgbClr val="3B7AF7"/>
-            </a:solidFill>
-          </a:ln>
-          <a:effectLst/>
-        </p:spPr>
-        <p:style>
-          <a:lnRef idx="1">
-            <a:schemeClr val="accent1"/>
-          </a:lnRef>
-          <a:fillRef idx="3">
-            <a:schemeClr val="accent1"/>
-          </a:fillRef>
-          <a:effectRef idx="2">
-            <a:schemeClr val="accent1"/>
-          </a:effectRef>
-          <a:fontRef idx="minor">
-            <a:schemeClr val="lt1"/>
-          </a:fontRef>
-        </p:style>
-        <p:txBody>
-          <a:bodyPr rtlCol="0" anchor="ctr" wrap="square"/>
-          <a:lstStyle/>
-          <a:p>
-            <a:pPr algn="ctr">
-              <a:lnSpc>
-                <a:spcPct val="122000"/>
-              </a:lnSpc>
-              <a:spcBef>
-                <a:spcPts val="0"/>
-              </a:spcBef>
-              <a:spcAft>
-                <a:spcPts val="0"/>
-              </a:spcAft>
-            </a:pPr>
-            <a:r>
-              <a:rPr sz="1050" b="1" i="0" spc="160">
-                <a:solidFill>
-                  <a:srgbClr val="FFFFFF"/>
-                </a:solidFill>
-                <a:latin typeface="Segoe UI"/>
-                <a:ea typeface="Segoe UI"/>
-                <a:cs typeface="Segoe UI"/>
-              </a:rPr>
-              <a:t>UNIT 02</a:t>
-            </a:r>
-          </a:p>
-        </p:txBody>
-      </p:sp>
-      <p:sp>
-        <p:nvSpPr>
-          <p:cNvPr id="10" name="TextBox 9"/>
+          <p:cNvPr id="9" name="TextBox 8"/>
           <p:cNvSpPr txBox="1"/>
           <p:nvPr/>
         </p:nvSpPr>
         <p:spPr>
           <a:xfrm>
-            <a:off x="932688" y="2304288"/>
+            <a:off x="932688" y="2065553"/>
             <a:ext cx="7406640" cy="1578807"/>
           </a:xfrm>
           <a:prstGeom prst="rect">
@@ -4301,13 +4234,13 @@
       </p:sp>
       <p:sp>
         <p:nvSpPr>
-          <p:cNvPr id="11" name="Rectangle 10"/>
+          <p:cNvPr id="10" name="Rectangle 9"/>
           <p:cNvSpPr/>
           <p:nvPr/>
         </p:nvSpPr>
         <p:spPr>
           <a:xfrm>
-            <a:off x="932688" y="3901383"/>
+            <a:off x="932688" y="3662648"/>
             <a:ext cx="658368" cy="45720"/>
           </a:xfrm>
           <a:prstGeom prst="rect">
@@ -4345,14 +4278,14 @@
       </p:sp>
       <p:sp>
         <p:nvSpPr>
-          <p:cNvPr id="12" name="TextBox 11"/>
+          <p:cNvPr id="11" name="TextBox 10"/>
           <p:cNvSpPr txBox="1"/>
           <p:nvPr/>
         </p:nvSpPr>
         <p:spPr>
           <a:xfrm>
-            <a:off x="932688" y="4212279"/>
-            <a:ext cx="6766560" cy="960120"/>
+            <a:off x="932688" y="3973544"/>
+            <a:ext cx="6766560" cy="745750"/>
           </a:xfrm>
           <a:prstGeom prst="rect">
             <a:avLst/>
@@ -4392,13 +4325,13 @@
       </p:sp>
       <p:sp>
         <p:nvSpPr>
-          <p:cNvPr id="13" name="Rounded Rectangle 12"/>
+          <p:cNvPr id="12" name="Rounded Rectangle 11"/>
           <p:cNvSpPr/>
           <p:nvPr/>
         </p:nvSpPr>
         <p:spPr>
           <a:xfrm>
-            <a:off x="932688" y="4992624"/>
+            <a:off x="932688" y="4993614"/>
             <a:ext cx="1410639" cy="329184"/>
           </a:xfrm>
           <a:prstGeom prst="roundRect">
@@ -4459,13 +4392,13 @@
       </p:sp>
       <p:sp>
         <p:nvSpPr>
-          <p:cNvPr id="14" name="Rounded Rectangle 13"/>
+          <p:cNvPr id="13" name="Rounded Rectangle 12"/>
           <p:cNvSpPr/>
           <p:nvPr/>
         </p:nvSpPr>
         <p:spPr>
           <a:xfrm>
-            <a:off x="2471343" y="4992624"/>
+            <a:off x="2471343" y="4993614"/>
             <a:ext cx="1525336" cy="329184"/>
           </a:xfrm>
           <a:prstGeom prst="roundRect">
@@ -4526,13 +4459,13 @@
       </p:sp>
       <p:sp>
         <p:nvSpPr>
-          <p:cNvPr id="15" name="Rounded Rectangle 14"/>
+          <p:cNvPr id="14" name="Rounded Rectangle 13"/>
           <p:cNvSpPr/>
           <p:nvPr/>
         </p:nvSpPr>
         <p:spPr>
           <a:xfrm>
-            <a:off x="4124696" y="4992624"/>
+            <a:off x="4124696" y="4993614"/>
             <a:ext cx="634302" cy="329184"/>
           </a:xfrm>
           <a:prstGeom prst="roundRect">
@@ -4593,13 +4526,13 @@
       </p:sp>
       <p:sp>
         <p:nvSpPr>
-          <p:cNvPr id="16" name="Rounded Rectangle 15"/>
+          <p:cNvPr id="15" name="Rounded Rectangle 14"/>
           <p:cNvSpPr/>
           <p:nvPr/>
         </p:nvSpPr>
         <p:spPr>
           <a:xfrm>
-            <a:off x="4887014" y="4992624"/>
+            <a:off x="4887014" y="4993614"/>
             <a:ext cx="890981" cy="329184"/>
           </a:xfrm>
           <a:prstGeom prst="roundRect">
@@ -4660,7 +4593,7 @@
       </p:sp>
       <p:sp>
         <p:nvSpPr>
-          <p:cNvPr id="17" name="Rectangle 16"/>
+          <p:cNvPr id="16" name="Rectangle 15"/>
           <p:cNvSpPr/>
           <p:nvPr/>
         </p:nvSpPr>
@@ -4704,7 +4637,7 @@
       </p:sp>
       <p:sp>
         <p:nvSpPr>
-          <p:cNvPr id="18" name="TextBox 17"/>
+          <p:cNvPr id="17" name="TextBox 16"/>
           <p:cNvSpPr txBox="1"/>
           <p:nvPr/>
         </p:nvSpPr>
